--- a/presentation/founsi-context-engineering.pptx
+++ b/presentation/founsi-context-engineering.pptx
@@ -24,9 +24,15 @@
     <p:sldId id="272" r:id="rId18"/>
     <p:sldId id="273" r:id="rId19"/>
     <p:sldId id="274" r:id="rId20"/>
+    <p:sldId id="275" r:id="rId21"/>
+    <p:sldId id="276" r:id="rId22"/>
+    <p:sldId id="277" r:id="rId23"/>
+    <p:sldId id="278" r:id="rId24"/>
+    <p:sldId id="279" r:id="rId25"/>
+    <p:sldId id="280" r:id="rId26"/>
   </p:sldIdLst>
   <p:notesMasterIdLst>
-    <p:notesMasterId r:id="rId21"/>
+    <p:notesMasterId r:id="rId27"/>
   </p:notesMasterIdLst>
   <p:sldSz cx="9144000" cy="5143500"/>
   <p:notesSz cx="5143500" cy="9144000"/>
@@ -1512,6 +1518,534 @@
             <a:fld id="{F7021451-1387-4CA6-816F-3879F97B5CBC}" type="slidenum">
               <a:rPr lang="en-US"/>
               <a:t>2</a:t>
+            </a:fld>
+            <a:endParaRPr lang="en-US"/>
+          </a:p>
+        </p:txBody>
+      </p:sp>
+    </p:spTree>
+    <p:extLst>
+      <p:ext uri="{BB962C8B-B14F-4D97-AF65-F5344CB8AC3E}">
+        <p14:creationId xmlns:p14="http://schemas.microsoft.com/office/powerpoint/2010/main" val="1024086991"/>
+      </p:ext>
+    </p:extLst>
+  </p:cSld>
+  <p:clrMapOvr>
+    <a:masterClrMapping/>
+  </p:clrMapOvr>
+</p:notes>
+</file>
+
+<file path=ppt/notesSlides/notesSlide20.xml><?xml version="1.0" encoding="utf-8"?>
+<p:notes xmlns:a="http://schemas.openxmlformats.org/drawingml/2006/main" xmlns:r="http://schemas.openxmlformats.org/officeDocument/2006/relationships" xmlns:p="http://schemas.openxmlformats.org/presentationml/2006/main">
+  <p:cSld>
+    <p:spTree>
+      <p:nvGrpSpPr>
+        <p:cNvPr id="1" name=""/>
+        <p:cNvGrpSpPr/>
+        <p:nvPr/>
+      </p:nvGrpSpPr>
+      <p:grpSpPr>
+        <a:xfrm>
+          <a:off x="0" y="0"/>
+          <a:ext cx="0" cy="0"/>
+          <a:chOff x="0" y="0"/>
+          <a:chExt cx="0" cy="0"/>
+        </a:xfrm>
+      </p:grpSpPr>
+      <p:sp>
+        <p:nvSpPr>
+          <p:cNvPr id="2" name="Slide Image Placeholder 1"/>
+          <p:cNvSpPr>
+            <a:spLocks noGrp="1" noRot="1" noChangeAspect="1"/>
+          </p:cNvSpPr>
+          <p:nvPr>
+            <p:ph type="sldImg"/>
+          </p:nvPr>
+        </p:nvSpPr>
+        <p:spPr/>
+      </p:sp>
+      <p:sp>
+        <p:nvSpPr>
+          <p:cNvPr id="3" name="Notes Placeholder 2"/>
+          <p:cNvSpPr>
+            <a:spLocks noGrp="1"/>
+          </p:cNvSpPr>
+          <p:nvPr>
+            <p:ph type="body" idx="1"/>
+          </p:nvPr>
+        </p:nvSpPr>
+        <p:spPr/>
+        <p:txBody>
+          <a:bodyPr/>
+          <a:lstStyle/>
+          <a:p>
+            <a:r>
+              <a:rPr lang="en-US" dirty="0"/>
+              <a:t/>
+            </a:r>
+            <a:endParaRPr lang="en-US" dirty="0"/>
+          </a:p>
+        </p:txBody>
+      </p:sp>
+      <p:sp>
+        <p:nvSpPr>
+          <p:cNvPr id="4" name="Slide Number Placeholder 3"/>
+          <p:cNvSpPr>
+            <a:spLocks noGrp="1"/>
+          </p:cNvSpPr>
+          <p:nvPr>
+            <p:ph type="sldNum" sz="quarter" idx="10"/>
+          </p:nvPr>
+        </p:nvSpPr>
+        <p:spPr/>
+        <p:txBody>
+          <a:bodyPr/>
+          <a:lstStyle/>
+          <a:p>
+            <a:fld id="{F7021451-1387-4CA6-816F-3879F97B5CBC}" type="slidenum">
+              <a:rPr lang="en-US"/>
+              <a:t>20</a:t>
+            </a:fld>
+            <a:endParaRPr lang="en-US"/>
+          </a:p>
+        </p:txBody>
+      </p:sp>
+    </p:spTree>
+    <p:extLst>
+      <p:ext uri="{BB962C8B-B14F-4D97-AF65-F5344CB8AC3E}">
+        <p14:creationId xmlns:p14="http://schemas.microsoft.com/office/powerpoint/2010/main" val="1024086991"/>
+      </p:ext>
+    </p:extLst>
+  </p:cSld>
+  <p:clrMapOvr>
+    <a:masterClrMapping/>
+  </p:clrMapOvr>
+</p:notes>
+</file>
+
+<file path=ppt/notesSlides/notesSlide21.xml><?xml version="1.0" encoding="utf-8"?>
+<p:notes xmlns:a="http://schemas.openxmlformats.org/drawingml/2006/main" xmlns:r="http://schemas.openxmlformats.org/officeDocument/2006/relationships" xmlns:p="http://schemas.openxmlformats.org/presentationml/2006/main">
+  <p:cSld>
+    <p:spTree>
+      <p:nvGrpSpPr>
+        <p:cNvPr id="1" name=""/>
+        <p:cNvGrpSpPr/>
+        <p:nvPr/>
+      </p:nvGrpSpPr>
+      <p:grpSpPr>
+        <a:xfrm>
+          <a:off x="0" y="0"/>
+          <a:ext cx="0" cy="0"/>
+          <a:chOff x="0" y="0"/>
+          <a:chExt cx="0" cy="0"/>
+        </a:xfrm>
+      </p:grpSpPr>
+      <p:sp>
+        <p:nvSpPr>
+          <p:cNvPr id="2" name="Slide Image Placeholder 1"/>
+          <p:cNvSpPr>
+            <a:spLocks noGrp="1" noRot="1" noChangeAspect="1"/>
+          </p:cNvSpPr>
+          <p:nvPr>
+            <p:ph type="sldImg"/>
+          </p:nvPr>
+        </p:nvSpPr>
+        <p:spPr/>
+      </p:sp>
+      <p:sp>
+        <p:nvSpPr>
+          <p:cNvPr id="3" name="Notes Placeholder 2"/>
+          <p:cNvSpPr>
+            <a:spLocks noGrp="1"/>
+          </p:cNvSpPr>
+          <p:nvPr>
+            <p:ph type="body" idx="1"/>
+          </p:nvPr>
+        </p:nvSpPr>
+        <p:spPr/>
+        <p:txBody>
+          <a:bodyPr/>
+          <a:lstStyle/>
+          <a:p>
+            <a:r>
+              <a:rPr lang="en-US" dirty="0"/>
+              <a:t/>
+            </a:r>
+            <a:endParaRPr lang="en-US" dirty="0"/>
+          </a:p>
+        </p:txBody>
+      </p:sp>
+      <p:sp>
+        <p:nvSpPr>
+          <p:cNvPr id="4" name="Slide Number Placeholder 3"/>
+          <p:cNvSpPr>
+            <a:spLocks noGrp="1"/>
+          </p:cNvSpPr>
+          <p:nvPr>
+            <p:ph type="sldNum" sz="quarter" idx="10"/>
+          </p:nvPr>
+        </p:nvSpPr>
+        <p:spPr/>
+        <p:txBody>
+          <a:bodyPr/>
+          <a:lstStyle/>
+          <a:p>
+            <a:fld id="{F7021451-1387-4CA6-816F-3879F97B5CBC}" type="slidenum">
+              <a:rPr lang="en-US"/>
+              <a:t>21</a:t>
+            </a:fld>
+            <a:endParaRPr lang="en-US"/>
+          </a:p>
+        </p:txBody>
+      </p:sp>
+    </p:spTree>
+    <p:extLst>
+      <p:ext uri="{BB962C8B-B14F-4D97-AF65-F5344CB8AC3E}">
+        <p14:creationId xmlns:p14="http://schemas.microsoft.com/office/powerpoint/2010/main" val="1024086991"/>
+      </p:ext>
+    </p:extLst>
+  </p:cSld>
+  <p:clrMapOvr>
+    <a:masterClrMapping/>
+  </p:clrMapOvr>
+</p:notes>
+</file>
+
+<file path=ppt/notesSlides/notesSlide22.xml><?xml version="1.0" encoding="utf-8"?>
+<p:notes xmlns:a="http://schemas.openxmlformats.org/drawingml/2006/main" xmlns:r="http://schemas.openxmlformats.org/officeDocument/2006/relationships" xmlns:p="http://schemas.openxmlformats.org/presentationml/2006/main">
+  <p:cSld>
+    <p:spTree>
+      <p:nvGrpSpPr>
+        <p:cNvPr id="1" name=""/>
+        <p:cNvGrpSpPr/>
+        <p:nvPr/>
+      </p:nvGrpSpPr>
+      <p:grpSpPr>
+        <a:xfrm>
+          <a:off x="0" y="0"/>
+          <a:ext cx="0" cy="0"/>
+          <a:chOff x="0" y="0"/>
+          <a:chExt cx="0" cy="0"/>
+        </a:xfrm>
+      </p:grpSpPr>
+      <p:sp>
+        <p:nvSpPr>
+          <p:cNvPr id="2" name="Slide Image Placeholder 1"/>
+          <p:cNvSpPr>
+            <a:spLocks noGrp="1" noRot="1" noChangeAspect="1"/>
+          </p:cNvSpPr>
+          <p:nvPr>
+            <p:ph type="sldImg"/>
+          </p:nvPr>
+        </p:nvSpPr>
+        <p:spPr/>
+      </p:sp>
+      <p:sp>
+        <p:nvSpPr>
+          <p:cNvPr id="3" name="Notes Placeholder 2"/>
+          <p:cNvSpPr>
+            <a:spLocks noGrp="1"/>
+          </p:cNvSpPr>
+          <p:nvPr>
+            <p:ph type="body" idx="1"/>
+          </p:nvPr>
+        </p:nvSpPr>
+        <p:spPr/>
+        <p:txBody>
+          <a:bodyPr/>
+          <a:lstStyle/>
+          <a:p>
+            <a:r>
+              <a:rPr lang="en-US" dirty="0"/>
+              <a:t/>
+            </a:r>
+            <a:endParaRPr lang="en-US" dirty="0"/>
+          </a:p>
+        </p:txBody>
+      </p:sp>
+      <p:sp>
+        <p:nvSpPr>
+          <p:cNvPr id="4" name="Slide Number Placeholder 3"/>
+          <p:cNvSpPr>
+            <a:spLocks noGrp="1"/>
+          </p:cNvSpPr>
+          <p:nvPr>
+            <p:ph type="sldNum" sz="quarter" idx="10"/>
+          </p:nvPr>
+        </p:nvSpPr>
+        <p:spPr/>
+        <p:txBody>
+          <a:bodyPr/>
+          <a:lstStyle/>
+          <a:p>
+            <a:fld id="{F7021451-1387-4CA6-816F-3879F97B5CBC}" type="slidenum">
+              <a:rPr lang="en-US"/>
+              <a:t>22</a:t>
+            </a:fld>
+            <a:endParaRPr lang="en-US"/>
+          </a:p>
+        </p:txBody>
+      </p:sp>
+    </p:spTree>
+    <p:extLst>
+      <p:ext uri="{BB962C8B-B14F-4D97-AF65-F5344CB8AC3E}">
+        <p14:creationId xmlns:p14="http://schemas.microsoft.com/office/powerpoint/2010/main" val="1024086991"/>
+      </p:ext>
+    </p:extLst>
+  </p:cSld>
+  <p:clrMapOvr>
+    <a:masterClrMapping/>
+  </p:clrMapOvr>
+</p:notes>
+</file>
+
+<file path=ppt/notesSlides/notesSlide23.xml><?xml version="1.0" encoding="utf-8"?>
+<p:notes xmlns:a="http://schemas.openxmlformats.org/drawingml/2006/main" xmlns:r="http://schemas.openxmlformats.org/officeDocument/2006/relationships" xmlns:p="http://schemas.openxmlformats.org/presentationml/2006/main">
+  <p:cSld>
+    <p:spTree>
+      <p:nvGrpSpPr>
+        <p:cNvPr id="1" name=""/>
+        <p:cNvGrpSpPr/>
+        <p:nvPr/>
+      </p:nvGrpSpPr>
+      <p:grpSpPr>
+        <a:xfrm>
+          <a:off x="0" y="0"/>
+          <a:ext cx="0" cy="0"/>
+          <a:chOff x="0" y="0"/>
+          <a:chExt cx="0" cy="0"/>
+        </a:xfrm>
+      </p:grpSpPr>
+      <p:sp>
+        <p:nvSpPr>
+          <p:cNvPr id="2" name="Slide Image Placeholder 1"/>
+          <p:cNvSpPr>
+            <a:spLocks noGrp="1" noRot="1" noChangeAspect="1"/>
+          </p:cNvSpPr>
+          <p:nvPr>
+            <p:ph type="sldImg"/>
+          </p:nvPr>
+        </p:nvSpPr>
+        <p:spPr/>
+      </p:sp>
+      <p:sp>
+        <p:nvSpPr>
+          <p:cNvPr id="3" name="Notes Placeholder 2"/>
+          <p:cNvSpPr>
+            <a:spLocks noGrp="1"/>
+          </p:cNvSpPr>
+          <p:nvPr>
+            <p:ph type="body" idx="1"/>
+          </p:nvPr>
+        </p:nvSpPr>
+        <p:spPr/>
+        <p:txBody>
+          <a:bodyPr/>
+          <a:lstStyle/>
+          <a:p>
+            <a:r>
+              <a:rPr lang="en-US" dirty="0"/>
+              <a:t/>
+            </a:r>
+            <a:endParaRPr lang="en-US" dirty="0"/>
+          </a:p>
+        </p:txBody>
+      </p:sp>
+      <p:sp>
+        <p:nvSpPr>
+          <p:cNvPr id="4" name="Slide Number Placeholder 3"/>
+          <p:cNvSpPr>
+            <a:spLocks noGrp="1"/>
+          </p:cNvSpPr>
+          <p:nvPr>
+            <p:ph type="sldNum" sz="quarter" idx="10"/>
+          </p:nvPr>
+        </p:nvSpPr>
+        <p:spPr/>
+        <p:txBody>
+          <a:bodyPr/>
+          <a:lstStyle/>
+          <a:p>
+            <a:fld id="{F7021451-1387-4CA6-816F-3879F97B5CBC}" type="slidenum">
+              <a:rPr lang="en-US"/>
+              <a:t>23</a:t>
+            </a:fld>
+            <a:endParaRPr lang="en-US"/>
+          </a:p>
+        </p:txBody>
+      </p:sp>
+    </p:spTree>
+    <p:extLst>
+      <p:ext uri="{BB962C8B-B14F-4D97-AF65-F5344CB8AC3E}">
+        <p14:creationId xmlns:p14="http://schemas.microsoft.com/office/powerpoint/2010/main" val="1024086991"/>
+      </p:ext>
+    </p:extLst>
+  </p:cSld>
+  <p:clrMapOvr>
+    <a:masterClrMapping/>
+  </p:clrMapOvr>
+</p:notes>
+</file>
+
+<file path=ppt/notesSlides/notesSlide24.xml><?xml version="1.0" encoding="utf-8"?>
+<p:notes xmlns:a="http://schemas.openxmlformats.org/drawingml/2006/main" xmlns:r="http://schemas.openxmlformats.org/officeDocument/2006/relationships" xmlns:p="http://schemas.openxmlformats.org/presentationml/2006/main">
+  <p:cSld>
+    <p:spTree>
+      <p:nvGrpSpPr>
+        <p:cNvPr id="1" name=""/>
+        <p:cNvGrpSpPr/>
+        <p:nvPr/>
+      </p:nvGrpSpPr>
+      <p:grpSpPr>
+        <a:xfrm>
+          <a:off x="0" y="0"/>
+          <a:ext cx="0" cy="0"/>
+          <a:chOff x="0" y="0"/>
+          <a:chExt cx="0" cy="0"/>
+        </a:xfrm>
+      </p:grpSpPr>
+      <p:sp>
+        <p:nvSpPr>
+          <p:cNvPr id="2" name="Slide Image Placeholder 1"/>
+          <p:cNvSpPr>
+            <a:spLocks noGrp="1" noRot="1" noChangeAspect="1"/>
+          </p:cNvSpPr>
+          <p:nvPr>
+            <p:ph type="sldImg"/>
+          </p:nvPr>
+        </p:nvSpPr>
+        <p:spPr/>
+      </p:sp>
+      <p:sp>
+        <p:nvSpPr>
+          <p:cNvPr id="3" name="Notes Placeholder 2"/>
+          <p:cNvSpPr>
+            <a:spLocks noGrp="1"/>
+          </p:cNvSpPr>
+          <p:nvPr>
+            <p:ph type="body" idx="1"/>
+          </p:nvPr>
+        </p:nvSpPr>
+        <p:spPr/>
+        <p:txBody>
+          <a:bodyPr/>
+          <a:lstStyle/>
+          <a:p>
+            <a:r>
+              <a:rPr lang="en-US" dirty="0"/>
+              <a:t/>
+            </a:r>
+            <a:endParaRPr lang="en-US" dirty="0"/>
+          </a:p>
+        </p:txBody>
+      </p:sp>
+      <p:sp>
+        <p:nvSpPr>
+          <p:cNvPr id="4" name="Slide Number Placeholder 3"/>
+          <p:cNvSpPr>
+            <a:spLocks noGrp="1"/>
+          </p:cNvSpPr>
+          <p:nvPr>
+            <p:ph type="sldNum" sz="quarter" idx="10"/>
+          </p:nvPr>
+        </p:nvSpPr>
+        <p:spPr/>
+        <p:txBody>
+          <a:bodyPr/>
+          <a:lstStyle/>
+          <a:p>
+            <a:fld id="{F7021451-1387-4CA6-816F-3879F97B5CBC}" type="slidenum">
+              <a:rPr lang="en-US"/>
+              <a:t>24</a:t>
+            </a:fld>
+            <a:endParaRPr lang="en-US"/>
+          </a:p>
+        </p:txBody>
+      </p:sp>
+    </p:spTree>
+    <p:extLst>
+      <p:ext uri="{BB962C8B-B14F-4D97-AF65-F5344CB8AC3E}">
+        <p14:creationId xmlns:p14="http://schemas.microsoft.com/office/powerpoint/2010/main" val="1024086991"/>
+      </p:ext>
+    </p:extLst>
+  </p:cSld>
+  <p:clrMapOvr>
+    <a:masterClrMapping/>
+  </p:clrMapOvr>
+</p:notes>
+</file>
+
+<file path=ppt/notesSlides/notesSlide25.xml><?xml version="1.0" encoding="utf-8"?>
+<p:notes xmlns:a="http://schemas.openxmlformats.org/drawingml/2006/main" xmlns:r="http://schemas.openxmlformats.org/officeDocument/2006/relationships" xmlns:p="http://schemas.openxmlformats.org/presentationml/2006/main">
+  <p:cSld>
+    <p:spTree>
+      <p:nvGrpSpPr>
+        <p:cNvPr id="1" name=""/>
+        <p:cNvGrpSpPr/>
+        <p:nvPr/>
+      </p:nvGrpSpPr>
+      <p:grpSpPr>
+        <a:xfrm>
+          <a:off x="0" y="0"/>
+          <a:ext cx="0" cy="0"/>
+          <a:chOff x="0" y="0"/>
+          <a:chExt cx="0" cy="0"/>
+        </a:xfrm>
+      </p:grpSpPr>
+      <p:sp>
+        <p:nvSpPr>
+          <p:cNvPr id="2" name="Slide Image Placeholder 1"/>
+          <p:cNvSpPr>
+            <a:spLocks noGrp="1" noRot="1" noChangeAspect="1"/>
+          </p:cNvSpPr>
+          <p:nvPr>
+            <p:ph type="sldImg"/>
+          </p:nvPr>
+        </p:nvSpPr>
+        <p:spPr/>
+      </p:sp>
+      <p:sp>
+        <p:nvSpPr>
+          <p:cNvPr id="3" name="Notes Placeholder 2"/>
+          <p:cNvSpPr>
+            <a:spLocks noGrp="1"/>
+          </p:cNvSpPr>
+          <p:nvPr>
+            <p:ph type="body" idx="1"/>
+          </p:nvPr>
+        </p:nvSpPr>
+        <p:spPr/>
+        <p:txBody>
+          <a:bodyPr/>
+          <a:lstStyle/>
+          <a:p>
+            <a:r>
+              <a:rPr lang="en-US" dirty="0"/>
+              <a:t/>
+            </a:r>
+            <a:endParaRPr lang="en-US" dirty="0"/>
+          </a:p>
+        </p:txBody>
+      </p:sp>
+      <p:sp>
+        <p:nvSpPr>
+          <p:cNvPr id="4" name="Slide Number Placeholder 3"/>
+          <p:cNvSpPr>
+            <a:spLocks noGrp="1"/>
+          </p:cNvSpPr>
+          <p:nvPr>
+            <p:ph type="sldNum" sz="quarter" idx="10"/>
+          </p:nvPr>
+        </p:nvSpPr>
+        <p:spPr/>
+        <p:txBody>
+          <a:bodyPr/>
+          <a:lstStyle/>
+          <a:p>
+            <a:fld id="{F7021451-1387-4CA6-816F-3879F97B5CBC}" type="slidenum">
+              <a:rPr lang="en-US"/>
+              <a:t>25</a:t>
             </a:fld>
             <a:endParaRPr lang="en-US"/>
           </a:p>
@@ -2493,8 +3027,8 @@
         </p:blipFill>
         <p:spPr>
           <a:xfrm>
-            <a:off x="548640" y="502920"/>
-            <a:ext cx="2286000" cy="363382"/>
+            <a:off x="548640" y="457200"/>
+            <a:ext cx="2194560" cy="348846"/>
           </a:xfrm>
           <a:prstGeom prst="rect">
             <a:avLst/>
@@ -2509,8 +3043,8 @@
         </p:nvSpPr>
         <p:spPr>
           <a:xfrm>
-            <a:off x="548640" y="1554480"/>
-            <a:ext cx="8229600" cy="868680"/>
+            <a:off x="548640" y="1417320"/>
+            <a:ext cx="8229600" cy="274320"/>
           </a:xfrm>
           <a:prstGeom prst="rect">
             <a:avLst/>
@@ -2526,17 +3060,17 @@
               <a:buNone/>
             </a:pPr>
             <a:r>
-              <a:rPr lang="en-US" sz="4300" b="1" dirty="0">
-                <a:solidFill>
-                  <a:srgbClr val="FFFFFF"/>
+              <a:rPr lang="en-US" sz="1100" b="1" spc="300" kern="0" dirty="0">
+                <a:solidFill>
+                  <a:srgbClr val="9378FF"/>
                 </a:solidFill>
                 <a:latin typeface="Syne" pitchFamily="34" charset="0"/>
                 <a:ea typeface="Syne" pitchFamily="34" charset="-122"/>
                 <a:cs typeface="Syne" pitchFamily="34" charset="-120"/>
               </a:rPr>
-              <a:t>Context Engineering</a:t>
-            </a:r>
-            <a:endParaRPr lang="en-US" sz="4300" dirty="0"/>
+              <a:t>AI TINKERERS · CALGARY · JUNE 23, 2026</a:t>
+            </a:r>
+            <a:endParaRPr lang="en-US" sz="1100" dirty="0"/>
           </a:p>
         </p:txBody>
       </p:sp>
@@ -2548,8 +3082,8 @@
         </p:nvSpPr>
         <p:spPr>
           <a:xfrm>
-            <a:off x="548640" y="2395728"/>
-            <a:ext cx="8229600" cy="868680"/>
+            <a:off x="548640" y="1783080"/>
+            <a:ext cx="8229600" cy="822960"/>
           </a:xfrm>
           <a:prstGeom prst="rect">
             <a:avLst/>
@@ -2565,29 +3099,68 @@
               <a:buNone/>
             </a:pPr>
             <a:r>
-              <a:rPr lang="en-US" sz="4300" b="1" dirty="0">
-                <a:solidFill>
-                  <a:srgbClr val="9378FF"/>
+              <a:rPr lang="en-US" sz="4200" b="1" dirty="0">
+                <a:solidFill>
+                  <a:srgbClr val="FFFFFF"/>
                 </a:solidFill>
                 <a:latin typeface="Syne" pitchFamily="34" charset="0"/>
                 <a:ea typeface="Syne" pitchFamily="34" charset="-122"/>
                 <a:cs typeface="Syne" pitchFamily="34" charset="-120"/>
               </a:rPr>
+              <a:t>Context Engineering</a:t>
+            </a:r>
+            <a:endParaRPr lang="en-US" sz="4200" dirty="0"/>
+          </a:p>
+        </p:txBody>
+      </p:sp>
+      <p:sp>
+        <p:nvSpPr>
+          <p:cNvPr id="5" name="Text 2"/>
+          <p:cNvSpPr/>
+          <p:nvPr/>
+        </p:nvSpPr>
+        <p:spPr>
+          <a:xfrm>
+            <a:off x="548640" y="2606040"/>
+            <a:ext cx="8229600" cy="822960"/>
+          </a:xfrm>
+          <a:prstGeom prst="rect">
+            <a:avLst/>
+          </a:prstGeom>
+          <a:noFill/>
+          <a:ln/>
+        </p:spPr>
+        <p:txBody>
+          <a:bodyPr wrap="square" lIns="0" tIns="0" rIns="0" bIns="0" rtlCol="0" anchor="ctr"/>
+          <a:lstStyle/>
+          <a:p>
+            <a:pPr indent="0" marL="0">
+              <a:buNone/>
+            </a:pPr>
+            <a:r>
+              <a:rPr lang="en-US" sz="4200" b="1" dirty="0">
+                <a:solidFill>
+                  <a:srgbClr val="9378FF"/>
+                </a:solidFill>
+                <a:latin typeface="Syne" pitchFamily="34" charset="0"/>
+                <a:ea typeface="Syne" pitchFamily="34" charset="-122"/>
+                <a:cs typeface="Syne" pitchFamily="34" charset="-120"/>
+              </a:rPr>
               <a:t>Inside the Harness</a:t>
             </a:r>
-            <a:endParaRPr lang="en-US" sz="4300" dirty="0"/>
-          </a:p>
-        </p:txBody>
-      </p:sp>
-      <p:sp>
-        <p:nvSpPr>
-          <p:cNvPr id="5" name="Text 2"/>
-          <p:cNvSpPr/>
-          <p:nvPr/>
-        </p:nvSpPr>
-        <p:spPr>
-          <a:xfrm>
-            <a:off x="548640" y="3383280"/>
+            <a:endParaRPr lang="en-US" sz="4200" dirty="0"/>
+          </a:p>
+        </p:txBody>
+      </p:sp>
+      <p:sp>
+        <p:nvSpPr>
+          <p:cNvPr id="6" name="Text 3"/>
+          <p:cNvSpPr/>
+          <p:nvPr/>
+        </p:nvSpPr>
+        <p:spPr>
+          <a:xfrm>
+            <a:off x="548640" y="3520440"/>
             <a:ext cx="8229600" cy="365760"/>
           </a:xfrm>
           <a:prstGeom prst="rect">
@@ -2620,13 +3193,13 @@
       </p:sp>
       <p:sp>
         <p:nvSpPr>
-          <p:cNvPr id="6" name="Text 3"/>
-          <p:cNvSpPr/>
-          <p:nvPr/>
-        </p:nvSpPr>
-        <p:spPr>
-          <a:xfrm>
-            <a:off x="548640" y="4343400"/>
+          <p:cNvPr id="7" name="Text 4"/>
+          <p:cNvSpPr/>
+          <p:nvPr/>
+        </p:nvSpPr>
+        <p:spPr>
+          <a:xfrm>
+            <a:off x="548640" y="4297680"/>
             <a:ext cx="8229600" cy="365760"/>
           </a:xfrm>
           <a:prstGeom prst="rect">
@@ -2665,7 +3238,7 @@
                 <a:ea typeface="Manrope" pitchFamily="34" charset="-122"/>
                 <a:cs typeface="Manrope" pitchFamily="34" charset="-120"/>
               </a:rPr>
-              <a:t>   ·   Founsi AI · Learn Agentic AI   ·   AI Tinkerers Calgary · June 22, 2026</a:t>
+              <a:t>   ·   Founsi AI   ·   Learn Agentic AI</a:t>
             </a:r>
             <a:endParaRPr lang="en-US" sz="1200" dirty="0"/>
           </a:p>
@@ -2736,7 +3309,7 @@
                 <a:ea typeface="Syne" pitchFamily="34" charset="-122"/>
                 <a:cs typeface="Syne" pitchFamily="34" charset="-120"/>
               </a:rPr>
-              <a:t>YOURS TO BUILD</a:t>
+              <a:t>ZERO TO ONE</a:t>
             </a:r>
             <a:endParaRPr lang="en-US" sz="1100" dirty="0"/>
           </a:p>
@@ -2767,7 +3340,7 @@
               <a:buNone/>
             </a:pPr>
             <a:r>
-              <a:rPr lang="en-US" sz="2500" b="1" dirty="0">
+              <a:rPr lang="en-US" sz="2600" b="1" dirty="0">
                 <a:solidFill>
                   <a:srgbClr val="2E2C32"/>
                 </a:solidFill>
@@ -2775,9 +3348,9 @@
                 <a:ea typeface="Syne" pitchFamily="34" charset="-122"/>
                 <a:cs typeface="Syne" pitchFamily="34" charset="-120"/>
               </a:rPr>
-              <a:t>Swap the brain. Clone the harness.</a:t>
-            </a:r>
-            <a:endParaRPr lang="en-US" sz="2500" dirty="0"/>
+              <a:t>The compaction bake-off.</a:t>
+            </a:r>
+            <a:endParaRPr lang="en-US" sz="2600" dirty="0"/>
           </a:p>
         </p:txBody>
       </p:sp>
@@ -2797,8 +3370,8 @@
         </p:blipFill>
         <p:spPr>
           <a:xfrm>
-            <a:off x="548640" y="4718304"/>
-            <a:ext cx="237744" cy="179122"/>
+            <a:off x="548640" y="4736592"/>
+            <a:ext cx="219456" cy="165344"/>
           </a:xfrm>
           <a:prstGeom prst="rect">
             <a:avLst/>
@@ -2813,7 +3386,7 @@
         </p:nvSpPr>
         <p:spPr>
           <a:xfrm>
-            <a:off x="841248" y="4681728"/>
+            <a:off x="822960" y="4690872"/>
             <a:ext cx="1280160" cy="292608"/>
           </a:xfrm>
           <a:prstGeom prst="rect">
@@ -2866,7 +3439,7 @@
         </p:nvSpPr>
         <p:spPr>
           <a:xfrm>
-            <a:off x="8229600" y="4681728"/>
+            <a:off x="8229600" y="4690872"/>
             <a:ext cx="365760" cy="292608"/>
           </a:xfrm>
           <a:prstGeom prst="rect">
@@ -2905,8 +3478,8 @@
         </p:nvSpPr>
         <p:spPr>
           <a:xfrm>
-            <a:off x="548640" y="1600200"/>
-            <a:ext cx="8046720" cy="2834640"/>
+            <a:off x="548640" y="1645920"/>
+            <a:ext cx="3657600" cy="2834640"/>
           </a:xfrm>
           <a:prstGeom prst="rect">
             <a:avLst/>
@@ -2920,7 +3493,7 @@
           <a:p>
             <a:pPr marL="203200" indent="-203200">
               <a:spcAft>
-                <a:spcPts val="900"/>
+                <a:spcPts val="800"/>
               </a:spcAft>
               <a:buSzPct val="100000"/>
               <a:buChar char="•"/>
@@ -2934,14 +3507,14 @@
                 <a:ea typeface="Manrope" pitchFamily="34" charset="-122"/>
                 <a:cs typeface="Manrope" pitchFamily="34" charset="-120"/>
               </a:rPr>
-              <a:t>Provider-agnostic via litellm — one flag swaps Claude / GPT / local Llama.</a:t>
+              <a:t>Four ways of forgetting: truncate · recency · importance · semantic.</a:t>
             </a:r>
             <a:endParaRPr lang="en-US" sz="1500" dirty="0"/>
           </a:p>
           <a:p>
             <a:pPr marL="203200" indent="-203200">
               <a:spcAft>
-                <a:spcPts val="900"/>
+                <a:spcPts val="800"/>
               </a:spcAft>
               <a:buSzPct val="100000"/>
               <a:buChar char="•"/>
@@ -2955,54 +3528,78 @@
                 <a:ea typeface="Manrope" pitchFamily="34" charset="-122"/>
                 <a:cs typeface="Manrope" pitchFamily="34" charset="-120"/>
               </a:rPr>
-              <a:t>Runs offline with no API key (FakeLLM).</a:t>
+              <a:t>Plant checkable “needle” facts in the sources; count how many survive each policy.</a:t>
             </a:r>
             <a:endParaRPr lang="en-US" sz="1500" dirty="0"/>
           </a:p>
           <a:p>
             <a:pPr marL="203200" indent="-203200">
               <a:spcAft>
-                <a:spcPts val="900"/>
+                <a:spcPts val="800"/>
               </a:spcAft>
               <a:buSzPct val="100000"/>
               <a:buChar char="•"/>
             </a:pPr>
             <a:r>
-              <a:rPr lang="en-US" sz="1500" dirty="0">
-                <a:solidFill>
-                  <a:srgbClr val="2E2C32"/>
-                </a:solidFill>
-                <a:latin typeface="Manrope" pitchFamily="34" charset="0"/>
-                <a:ea typeface="Manrope" pitchFamily="34" charset="-122"/>
-                <a:cs typeface="Manrope" pitchFamily="34" charset="-120"/>
-              </a:rPr>
-              <a:t>github.com/kanishkpatel1995/agent-harness</a:t>
+              <a:rPr lang="en-US" sz="1300" dirty="0">
+                <a:solidFill>
+                  <a:srgbClr val="655E74"/>
+                </a:solidFill>
+                <a:latin typeface="Manrope" pitchFamily="34" charset="0"/>
+                <a:ea typeface="Manrope" pitchFamily="34" charset="-122"/>
+                <a:cs typeface="Manrope" pitchFamily="34" charset="-120"/>
+              </a:rPr>
+              <a:t>Metric: needle recall per token — objective, no LLM-judge.</a:t>
             </a:r>
             <a:endParaRPr lang="en-US" sz="1500" dirty="0"/>
           </a:p>
           <a:p>
             <a:pPr marL="203200" indent="-203200">
               <a:spcAft>
-                <a:spcPts val="900"/>
+                <a:spcPts val="800"/>
               </a:spcAft>
               <a:buSzPct val="100000"/>
               <a:buChar char="•"/>
             </a:pPr>
             <a:r>
-              <a:rPr lang="en-US" sz="1300" dirty="0">
-                <a:solidFill>
-                  <a:srgbClr val="655E74"/>
-                </a:solidFill>
-                <a:latin typeface="Manrope" pitchFamily="34" charset="0"/>
-                <a:ea typeface="Manrope" pitchFamily="34" charset="-122"/>
-                <a:cs typeface="Manrope" pitchFamily="34" charset="-120"/>
-              </a:rPr>
-              <a:t>The model is rented. The harness is yours.</a:t>
+              <a:rPr lang="en-US" sz="1500" dirty="0">
+                <a:solidFill>
+                  <a:srgbClr val="2E2C32"/>
+                </a:solidFill>
+                <a:latin typeface="Manrope" pitchFamily="34" charset="0"/>
+                <a:ea typeface="Manrope" pitchFamily="34" charset="-122"/>
+                <a:cs typeface="Manrope" pitchFamily="34" charset="-120"/>
+              </a:rPr>
+              <a:t>Free NVIDIA models, every prompt + result saved. Reproducible.</a:t>
             </a:r>
             <a:endParaRPr lang="en-US" sz="1500" dirty="0"/>
           </a:p>
         </p:txBody>
       </p:sp>
+      <p:pic>
+        <p:nvPicPr>
+          <p:cNvPr id="8" name="Image 1" descr="/Users/kanishk/Desktop/agent-harness/.claude/worktrees/sleepy-sinoussi-00c73b/presentation/figures/EXP-001_pareto_v1.png">    </p:cNvPr>
+          <p:cNvPicPr>
+            <a:picLocks noChangeAspect="1"/>
+          </p:cNvPicPr>
+          <p:nvPr/>
+        </p:nvPicPr>
+        <p:blipFill>
+          <a:blip r:embed="rId2"/>
+          <a:stretch>
+            <a:fillRect/>
+          </a:stretch>
+        </p:blipFill>
+        <p:spPr>
+          <a:xfrm>
+            <a:off x="4297680" y="1371600"/>
+            <a:ext cx="4480560" cy="3035808"/>
+          </a:xfrm>
+          <a:prstGeom prst="rect">
+            <a:avLst/>
+          </a:prstGeom>
+        </p:spPr>
+      </p:pic>
     </p:spTree>
   </p:cSld>
   <p:clrMapOvr>
@@ -3014,6 +3611,362 @@
 <file path=ppt/slides/slide11.xml><?xml version="1.0" encoding="utf-8"?>
 <p:sld xmlns:a="http://schemas.openxmlformats.org/drawingml/2006/main" xmlns:r="http://schemas.openxmlformats.org/officeDocument/2006/relationships" xmlns:p="http://schemas.openxmlformats.org/presentationml/2006/main">
   <p:cSld name="Slide 11">
+    <p:bg>
+      <p:bgPr>
+        <a:solidFill>
+          <a:srgbClr val="FAFAFE"/>
+        </a:solidFill>
+      </p:bgPr>
+    </p:bg>
+    <p:spTree>
+      <p:nvGrpSpPr>
+        <p:cNvPr id="1" name=""/>
+        <p:cNvGrpSpPr/>
+        <p:nvPr/>
+      </p:nvGrpSpPr>
+      <p:grpSpPr>
+        <a:xfrm>
+          <a:off x="0" y="0"/>
+          <a:ext cx="0" cy="0"/>
+          <a:chOff x="0" y="0"/>
+          <a:chExt cx="0" cy="0"/>
+        </a:xfrm>
+      </p:grpSpPr>
+      <p:sp>
+        <p:nvSpPr>
+          <p:cNvPr id="2" name="Text 0"/>
+          <p:cNvSpPr/>
+          <p:nvPr/>
+        </p:nvSpPr>
+        <p:spPr>
+          <a:xfrm>
+            <a:off x="548640" y="365760"/>
+            <a:ext cx="8046720" cy="274320"/>
+          </a:xfrm>
+          <a:prstGeom prst="rect">
+            <a:avLst/>
+          </a:prstGeom>
+          <a:noFill/>
+          <a:ln/>
+        </p:spPr>
+        <p:txBody>
+          <a:bodyPr wrap="square" lIns="0" tIns="0" rIns="0" bIns="0" rtlCol="0" anchor="ctr"/>
+          <a:lstStyle/>
+          <a:p>
+            <a:pPr indent="0" marL="0">
+              <a:buNone/>
+            </a:pPr>
+            <a:r>
+              <a:rPr lang="en-US" sz="1100" b="1" spc="300" kern="0" dirty="0">
+                <a:solidFill>
+                  <a:srgbClr val="9378FF"/>
+                </a:solidFill>
+                <a:latin typeface="Syne" pitchFamily="34" charset="0"/>
+                <a:ea typeface="Syne" pitchFamily="34" charset="-122"/>
+                <a:cs typeface="Syne" pitchFamily="34" charset="-120"/>
+              </a:rPr>
+              <a:t>EARLY RESULT</a:t>
+            </a:r>
+            <a:endParaRPr lang="en-US" sz="1100" dirty="0"/>
+          </a:p>
+        </p:txBody>
+      </p:sp>
+      <p:sp>
+        <p:nvSpPr>
+          <p:cNvPr id="3" name="Text 1"/>
+          <p:cNvSpPr/>
+          <p:nvPr/>
+        </p:nvSpPr>
+        <p:spPr>
+          <a:xfrm>
+            <a:off x="548640" y="640080"/>
+            <a:ext cx="8046720" cy="868680"/>
+          </a:xfrm>
+          <a:prstGeom prst="rect">
+            <a:avLst/>
+          </a:prstGeom>
+          <a:noFill/>
+          <a:ln/>
+        </p:spPr>
+        <p:txBody>
+          <a:bodyPr wrap="square" lIns="0" tIns="0" rIns="0" bIns="0" rtlCol="0" anchor="t"/>
+          <a:lstStyle/>
+          <a:p>
+            <a:pPr indent="0" marL="0">
+              <a:buNone/>
+            </a:pPr>
+            <a:r>
+              <a:rPr lang="en-US" sz="2400" b="1" dirty="0">
+                <a:solidFill>
+                  <a:srgbClr val="2E2C32"/>
+                </a:solidFill>
+                <a:latin typeface="Syne" pitchFamily="34" charset="0"/>
+                <a:ea typeface="Syne" pitchFamily="34" charset="-122"/>
+                <a:cs typeface="Syne" pitchFamily="34" charset="-120"/>
+              </a:rPr>
+              <a:t>Truncation is the floor. Summaries win — at a cost.</a:t>
+            </a:r>
+            <a:endParaRPr lang="en-US" sz="2400" dirty="0"/>
+          </a:p>
+        </p:txBody>
+      </p:sp>
+      <p:pic>
+        <p:nvPicPr>
+          <p:cNvPr id="4" name="Image 0" descr="preencoded.png">    </p:cNvPr>
+          <p:cNvPicPr>
+            <a:picLocks noChangeAspect="1"/>
+          </p:cNvPicPr>
+          <p:nvPr/>
+        </p:nvPicPr>
+        <p:blipFill>
+          <a:blip r:embed="rId1"/>
+          <a:stretch>
+            <a:fillRect/>
+          </a:stretch>
+        </p:blipFill>
+        <p:spPr>
+          <a:xfrm>
+            <a:off x="548640" y="4736592"/>
+            <a:ext cx="219456" cy="165344"/>
+          </a:xfrm>
+          <a:prstGeom prst="rect">
+            <a:avLst/>
+          </a:prstGeom>
+        </p:spPr>
+      </p:pic>
+      <p:sp>
+        <p:nvSpPr>
+          <p:cNvPr id="5" name="Text 2"/>
+          <p:cNvSpPr/>
+          <p:nvPr/>
+        </p:nvSpPr>
+        <p:spPr>
+          <a:xfrm>
+            <a:off x="822960" y="4690872"/>
+            <a:ext cx="1280160" cy="292608"/>
+          </a:xfrm>
+          <a:prstGeom prst="rect">
+            <a:avLst/>
+          </a:prstGeom>
+          <a:noFill/>
+          <a:ln/>
+        </p:spPr>
+        <p:txBody>
+          <a:bodyPr wrap="square" lIns="0" tIns="0" rIns="0" bIns="0" rtlCol="0" anchor="ctr"/>
+          <a:lstStyle/>
+          <a:p>
+            <a:pPr indent="0" marL="0">
+              <a:buNone/>
+            </a:pPr>
+            <a:r>
+              <a:rPr lang="en-US" sz="1100" b="1" dirty="0">
+                <a:solidFill>
+                  <a:srgbClr val="2E2C32"/>
+                </a:solidFill>
+                <a:latin typeface="Syne" pitchFamily="34" charset="0"/>
+                <a:ea typeface="Syne" pitchFamily="34" charset="-122"/>
+                <a:cs typeface="Syne" pitchFamily="34" charset="-120"/>
+              </a:rPr>
+              <a:t>Founsi</a:t>
+            </a:r>
+            <a:pPr indent="0" marL="0">
+              <a:buNone/>
+            </a:pPr>
+            <a:r>
+              <a:rPr lang="en-US" sz="1100" b="1" dirty="0">
+                <a:solidFill>
+                  <a:srgbClr val="9378FF"/>
+                </a:solidFill>
+                <a:latin typeface="Syne" pitchFamily="34" charset="0"/>
+                <a:ea typeface="Syne" pitchFamily="34" charset="-122"/>
+                <a:cs typeface="Syne" pitchFamily="34" charset="-120"/>
+              </a:rPr>
+              <a:t>.</a:t>
+            </a:r>
+            <a:endParaRPr lang="en-US" sz="1100" dirty="0"/>
+          </a:p>
+        </p:txBody>
+      </p:sp>
+      <p:sp>
+        <p:nvSpPr>
+          <p:cNvPr id="6" name="Text 3"/>
+          <p:cNvSpPr/>
+          <p:nvPr/>
+        </p:nvSpPr>
+        <p:spPr>
+          <a:xfrm>
+            <a:off x="8229600" y="4690872"/>
+            <a:ext cx="365760" cy="292608"/>
+          </a:xfrm>
+          <a:prstGeom prst="rect">
+            <a:avLst/>
+          </a:prstGeom>
+          <a:noFill/>
+          <a:ln/>
+        </p:spPr>
+        <p:txBody>
+          <a:bodyPr wrap="square" lIns="0" tIns="0" rIns="0" bIns="0" rtlCol="0" anchor="ctr"/>
+          <a:lstStyle/>
+          <a:p>
+            <a:pPr algn="r" indent="0" marL="0">
+              <a:buNone/>
+            </a:pPr>
+            <a:r>
+              <a:rPr lang="en-US" sz="900" dirty="0">
+                <a:solidFill>
+                  <a:srgbClr val="7E7A8A"/>
+                </a:solidFill>
+                <a:latin typeface="Manrope" pitchFamily="34" charset="0"/>
+                <a:ea typeface="Manrope" pitchFamily="34" charset="-122"/>
+                <a:cs typeface="Manrope" pitchFamily="34" charset="-120"/>
+              </a:rPr>
+              <a:t>11</a:t>
+            </a:r>
+            <a:endParaRPr lang="en-US" sz="900" dirty="0"/>
+          </a:p>
+        </p:txBody>
+      </p:sp>
+      <p:pic>
+        <p:nvPicPr>
+          <p:cNvPr id="7" name="Image 1" descr="/Users/kanishk/Desktop/agent-harness/.claude/worktrees/sleepy-sinoussi-00c73b/presentation/figures/EXP-001_recall_by_policy_v1.png">    </p:cNvPr>
+          <p:cNvPicPr>
+            <a:picLocks noChangeAspect="1"/>
+          </p:cNvPicPr>
+          <p:nvPr/>
+        </p:nvPicPr>
+        <p:blipFill>
+          <a:blip r:embed="rId2"/>
+          <a:stretch>
+            <a:fillRect/>
+          </a:stretch>
+        </p:blipFill>
+        <p:spPr>
+          <a:xfrm>
+            <a:off x="640080" y="1371600"/>
+            <a:ext cx="4846320" cy="3282696"/>
+          </a:xfrm>
+          <a:prstGeom prst="rect">
+            <a:avLst/>
+          </a:prstGeom>
+        </p:spPr>
+      </p:pic>
+      <p:sp>
+        <p:nvSpPr>
+          <p:cNvPr id="8" name="Text 4"/>
+          <p:cNvSpPr/>
+          <p:nvPr/>
+        </p:nvSpPr>
+        <p:spPr>
+          <a:xfrm>
+            <a:off x="5669280" y="1554480"/>
+            <a:ext cx="3017520" cy="2834640"/>
+          </a:xfrm>
+          <a:prstGeom prst="rect">
+            <a:avLst/>
+          </a:prstGeom>
+          <a:noFill/>
+          <a:ln/>
+        </p:spPr>
+        <p:txBody>
+          <a:bodyPr wrap="square" rtlCol="0" anchor="ctr"/>
+          <a:lstStyle/>
+          <a:p>
+            <a:pPr marL="203200" indent="-203200">
+              <a:spcAft>
+                <a:spcPts val="800"/>
+              </a:spcAft>
+              <a:buSzPct val="100000"/>
+              <a:buChar char="•"/>
+            </a:pPr>
+            <a:r>
+              <a:rPr lang="en-US" sz="1300" dirty="0">
+                <a:solidFill>
+                  <a:srgbClr val="2E2C32"/>
+                </a:solidFill>
+                <a:latin typeface="Manrope" pitchFamily="34" charset="0"/>
+                <a:ea typeface="Manrope" pitchFamily="34" charset="-122"/>
+                <a:cs typeface="Manrope" pitchFamily="34" charset="-120"/>
+              </a:rPr>
+              <a:t>Truncate: cheapest, loses most.</a:t>
+            </a:r>
+            <a:endParaRPr lang="en-US" sz="1300" dirty="0"/>
+          </a:p>
+          <a:p>
+            <a:pPr marL="203200" indent="-203200">
+              <a:spcAft>
+                <a:spcPts val="800"/>
+              </a:spcAft>
+              <a:buSzPct val="100000"/>
+              <a:buChar char="•"/>
+            </a:pPr>
+            <a:r>
+              <a:rPr lang="en-US" sz="1300" dirty="0">
+                <a:solidFill>
+                  <a:srgbClr val="2E2C32"/>
+                </a:solidFill>
+                <a:latin typeface="Manrope" pitchFamily="34" charset="0"/>
+                <a:ea typeface="Manrope" pitchFamily="34" charset="-122"/>
+                <a:cs typeface="Manrope" pitchFamily="34" charset="-120"/>
+              </a:rPr>
+              <a:t>Summary policies preserve ~2-3x more facts.</a:t>
+            </a:r>
+            <a:endParaRPr lang="en-US" sz="1300" dirty="0"/>
+          </a:p>
+          <a:p>
+            <a:pPr marL="203200" indent="-203200">
+              <a:spcAft>
+                <a:spcPts val="800"/>
+              </a:spcAft>
+              <a:buSzPct val="100000"/>
+              <a:buChar char="•"/>
+            </a:pPr>
+            <a:r>
+              <a:rPr lang="en-US" sz="1100" dirty="0">
+                <a:solidFill>
+                  <a:srgbClr val="655E74"/>
+                </a:solidFill>
+                <a:latin typeface="Manrope" pitchFamily="34" charset="0"/>
+                <a:ea typeface="Manrope" pitchFamily="34" charset="-122"/>
+                <a:cs typeface="Manrope" pitchFamily="34" charset="-120"/>
+              </a:rPr>
+              <a:t>semantic edges it at B*=1000 (8b dev).</a:t>
+            </a:r>
+            <a:endParaRPr lang="en-US" sz="1300" dirty="0"/>
+          </a:p>
+          <a:p>
+            <a:pPr marL="203200" indent="-203200">
+              <a:spcAft>
+                <a:spcPts val="800"/>
+              </a:spcAft>
+              <a:buSzPct val="100000"/>
+              <a:buChar char="•"/>
+            </a:pPr>
+            <a:r>
+              <a:rPr lang="en-US" sz="1300" dirty="0">
+                <a:solidFill>
+                  <a:srgbClr val="2E2C32"/>
+                </a:solidFill>
+                <a:latin typeface="Manrope" pitchFamily="34" charset="0"/>
+                <a:ea typeface="Manrope" pitchFamily="34" charset="-122"/>
+                <a:cs typeface="Manrope" pitchFamily="34" charset="-120"/>
+              </a:rPr>
+              <a:t>70b confirmation is running next.</a:t>
+            </a:r>
+            <a:endParaRPr lang="en-US" sz="1300" dirty="0"/>
+          </a:p>
+        </p:txBody>
+      </p:sp>
+    </p:spTree>
+  </p:cSld>
+  <p:clrMapOvr>
+    <a:masterClrMapping/>
+  </p:clrMapOvr>
+</p:sld>
+</file>
+
+<file path=ppt/slides/slide12.xml><?xml version="1.0" encoding="utf-8"?>
+<p:sld xmlns:a="http://schemas.openxmlformats.org/drawingml/2006/main" xmlns:r="http://schemas.openxmlformats.org/officeDocument/2006/relationships" xmlns:p="http://schemas.openxmlformats.org/presentationml/2006/main">
+  <p:cSld name="Slide 12">
     <p:bg>
       <p:bgPr>
         <a:solidFill>
@@ -3043,8 +3996,8 @@
         </p:nvSpPr>
         <p:spPr>
           <a:xfrm>
-            <a:off x="548640" y="1737360"/>
-            <a:ext cx="8229600" cy="548640"/>
+            <a:off x="731520" y="1554480"/>
+            <a:ext cx="7680960" cy="731520"/>
           </a:xfrm>
           <a:prstGeom prst="rect">
             <a:avLst/>
@@ -3056,73 +4009,62 @@
           <a:bodyPr wrap="square" lIns="0" tIns="0" rIns="0" bIns="0" rtlCol="0" anchor="ctr"/>
           <a:lstStyle/>
           <a:p>
-            <a:pPr indent="0" marL="0">
-              <a:buNone/>
-            </a:pPr>
-            <a:r>
-              <a:rPr lang="en-US" sz="1300" b="1" spc="400" kern="0" dirty="0">
-                <a:solidFill>
-                  <a:srgbClr val="9378FF"/>
+            <a:pPr algn="ctr" indent="0" marL="0">
+              <a:buNone/>
+            </a:pPr>
+            <a:r>
+              <a:rPr lang="en-US" sz="3000" b="1" dirty="0">
+                <a:solidFill>
+                  <a:srgbClr val="FFFFFF"/>
                 </a:solidFill>
                 <a:latin typeface="Syne" pitchFamily="34" charset="0"/>
                 <a:ea typeface="Syne" pitchFamily="34" charset="-122"/>
                 <a:cs typeface="Syne" pitchFamily="34" charset="-120"/>
               </a:rPr>
-              <a:t>APPENDIX</a:t>
-            </a:r>
-            <a:endParaRPr lang="en-US" sz="1300" dirty="0"/>
-          </a:p>
-        </p:txBody>
-      </p:sp>
-      <p:sp>
-        <p:nvSpPr>
-          <p:cNvPr id="3" name="Text 1"/>
-          <p:cNvSpPr/>
-          <p:nvPr/>
-        </p:nvSpPr>
-        <p:spPr>
-          <a:xfrm>
-            <a:off x="548640" y="2194560"/>
-            <a:ext cx="8229600" cy="822960"/>
-          </a:xfrm>
-          <a:prstGeom prst="rect">
-            <a:avLst/>
-          </a:prstGeom>
-          <a:noFill/>
-          <a:ln/>
-        </p:spPr>
-        <p:txBody>
-          <a:bodyPr wrap="square" lIns="0" tIns="0" rIns="0" bIns="0" rtlCol="0" anchor="ctr"/>
-          <a:lstStyle/>
-          <a:p>
-            <a:pPr indent="0" marL="0">
-              <a:buNone/>
-            </a:pPr>
-            <a:r>
-              <a:rPr lang="en-US" sz="3800" b="1" dirty="0">
-                <a:solidFill>
-                  <a:srgbClr val="FFFFFF"/>
+              <a:t>The model is a commodity you </a:t>
+            </a:r>
+            <a:pPr algn="ctr" indent="0" marL="0">
+              <a:buNone/>
+            </a:pPr>
+            <a:r>
+              <a:rPr lang="en-US" sz="3000" b="1" i="1" dirty="0">
+                <a:solidFill>
+                  <a:srgbClr val="CADCFC"/>
                 </a:solidFill>
                 <a:latin typeface="Syne" pitchFamily="34" charset="0"/>
                 <a:ea typeface="Syne" pitchFamily="34" charset="-122"/>
                 <a:cs typeface="Syne" pitchFamily="34" charset="-120"/>
               </a:rPr>
-              <a:t>The full trace</a:t>
-            </a:r>
-            <a:endParaRPr lang="en-US" sz="3800" dirty="0"/>
-          </a:p>
-        </p:txBody>
-      </p:sp>
-      <p:sp>
-        <p:nvSpPr>
-          <p:cNvPr id="4" name="Text 2"/>
-          <p:cNvSpPr/>
-          <p:nvPr/>
-        </p:nvSpPr>
-        <p:spPr>
-          <a:xfrm>
-            <a:off x="548640" y="3108960"/>
-            <a:ext cx="8046720" cy="457200"/>
+              <a:t>rent</a:t>
+            </a:r>
+            <a:pPr algn="ctr" indent="0" marL="0">
+              <a:buNone/>
+            </a:pPr>
+            <a:r>
+              <a:rPr lang="en-US" sz="3000" b="1" dirty="0">
+                <a:solidFill>
+                  <a:srgbClr val="FFFFFF"/>
+                </a:solidFill>
+                <a:latin typeface="Syne" pitchFamily="34" charset="0"/>
+                <a:ea typeface="Syne" pitchFamily="34" charset="-122"/>
+                <a:cs typeface="Syne" pitchFamily="34" charset="-120"/>
+              </a:rPr>
+              <a:t>.</a:t>
+            </a:r>
+            <a:endParaRPr lang="en-US" sz="3000" dirty="0"/>
+          </a:p>
+        </p:txBody>
+      </p:sp>
+      <p:sp>
+        <p:nvSpPr>
+          <p:cNvPr id="3" name="Text 1"/>
+          <p:cNvSpPr/>
+          <p:nvPr/>
+        </p:nvSpPr>
+        <p:spPr>
+          <a:xfrm>
+            <a:off x="731520" y="2331720"/>
+            <a:ext cx="7680960" cy="731520"/>
           </a:xfrm>
           <a:prstGeom prst="rect">
             <a:avLst/>
@@ -3134,27 +4076,55 @@
           <a:bodyPr wrap="square" lIns="0" tIns="0" rIns="0" bIns="0" rtlCol="0" anchor="ctr"/>
           <a:lstStyle/>
           <a:p>
-            <a:pPr indent="0" marL="0">
-              <a:buNone/>
-            </a:pPr>
-            <a:r>
-              <a:rPr lang="en-US" sz="1400" dirty="0">
-                <a:solidFill>
-                  <a:srgbClr val="CADCFC"/>
-                </a:solidFill>
-                <a:latin typeface="Manrope" pitchFamily="34" charset="0"/>
-                <a:ea typeface="Manrope" pitchFamily="34" charset="-122"/>
-                <a:cs typeface="Manrope" pitchFamily="34" charset="-120"/>
-              </a:rPr>
-              <a:t>Every experiment: hypothesis · assumptions · method · figures · results · threats.</a:t>
-            </a:r>
-            <a:endParaRPr lang="en-US" sz="1400" dirty="0"/>
+            <a:pPr algn="ctr" indent="0" marL="0">
+              <a:buNone/>
+            </a:pPr>
+            <a:r>
+              <a:rPr lang="en-US" sz="3000" b="1" dirty="0">
+                <a:solidFill>
+                  <a:srgbClr val="FFFFFF"/>
+                </a:solidFill>
+                <a:latin typeface="Syne" pitchFamily="34" charset="0"/>
+                <a:ea typeface="Syne" pitchFamily="34" charset="-122"/>
+                <a:cs typeface="Syne" pitchFamily="34" charset="-120"/>
+              </a:rPr>
+              <a:t>The harness is the part you </a:t>
+            </a:r>
+            <a:pPr algn="ctr" indent="0" marL="0">
+              <a:buNone/>
+            </a:pPr>
+            <a:r>
+              <a:rPr lang="en-US" sz="3000" b="1" i="1" dirty="0">
+                <a:solidFill>
+                  <a:srgbClr val="9378FF"/>
+                </a:solidFill>
+                <a:latin typeface="Syne" pitchFamily="34" charset="0"/>
+                <a:ea typeface="Syne" pitchFamily="34" charset="-122"/>
+                <a:cs typeface="Syne" pitchFamily="34" charset="-120"/>
+              </a:rPr>
+              <a:t>build</a:t>
+            </a:r>
+            <a:pPr algn="ctr" indent="0" marL="0">
+              <a:buNone/>
+            </a:pPr>
+            <a:r>
+              <a:rPr lang="en-US" sz="3000" b="1" dirty="0">
+                <a:solidFill>
+                  <a:srgbClr val="FFFFFF"/>
+                </a:solidFill>
+                <a:latin typeface="Syne" pitchFamily="34" charset="0"/>
+                <a:ea typeface="Syne" pitchFamily="34" charset="-122"/>
+                <a:cs typeface="Syne" pitchFamily="34" charset="-120"/>
+              </a:rPr>
+              <a:t>.</a:t>
+            </a:r>
+            <a:endParaRPr lang="en-US" sz="3000" dirty="0"/>
           </a:p>
         </p:txBody>
       </p:sp>
       <p:pic>
         <p:nvPicPr>
-          <p:cNvPr id="5" name="Image 0" descr="preencoded.png">    </p:cNvPr>
+          <p:cNvPr id="4" name="Image 0" descr="/Users/kanishk/Desktop/agent-harness/.claude/worktrees/sleepy-sinoussi-00c73b/presentation/assets/qr/qr_repo.png">    </p:cNvPr>
           <p:cNvPicPr>
             <a:picLocks noChangeAspect="1"/>
           </p:cNvPicPr>
@@ -3168,8 +4138,8 @@
         </p:blipFill>
         <p:spPr>
           <a:xfrm>
-            <a:off x="548640" y="4718304"/>
-            <a:ext cx="237744" cy="179122"/>
+            <a:off x="3977640" y="3246120"/>
+            <a:ext cx="1005840" cy="1005840"/>
           </a:xfrm>
           <a:prstGeom prst="rect">
             <a:avLst/>
@@ -3178,13 +4148,115 @@
       </p:pic>
       <p:sp>
         <p:nvSpPr>
+          <p:cNvPr id="5" name="Text 2"/>
+          <p:cNvSpPr/>
+          <p:nvPr/>
+        </p:nvSpPr>
+        <p:spPr>
+          <a:xfrm>
+            <a:off x="3703320" y="4297680"/>
+            <a:ext cx="1554480" cy="274320"/>
+          </a:xfrm>
+          <a:prstGeom prst="rect">
+            <a:avLst/>
+          </a:prstGeom>
+          <a:noFill/>
+          <a:ln/>
+        </p:spPr>
+        <p:txBody>
+          <a:bodyPr wrap="square" lIns="0" tIns="0" rIns="0" bIns="0" rtlCol="0" anchor="ctr"/>
+          <a:lstStyle/>
+          <a:p>
+            <a:pPr algn="ctr" indent="0" marL="0">
+              <a:buNone/>
+            </a:pPr>
+            <a:r>
+              <a:rPr lang="en-US" sz="1100" b="1" dirty="0">
+                <a:solidFill>
+                  <a:srgbClr val="2E2C32"/>
+                </a:solidFill>
+                <a:latin typeface="Manrope" pitchFamily="34" charset="0"/>
+                <a:ea typeface="Manrope" pitchFamily="34" charset="-122"/>
+                <a:cs typeface="Manrope" pitchFamily="34" charset="-120"/>
+              </a:rPr>
+              <a:t>Clone the repo</a:t>
+            </a:r>
+            <a:endParaRPr lang="en-US" sz="1100" dirty="0"/>
+          </a:p>
+        </p:txBody>
+      </p:sp>
+      <p:sp>
+        <p:nvSpPr>
           <p:cNvPr id="6" name="Text 3"/>
           <p:cNvSpPr/>
           <p:nvPr/>
         </p:nvSpPr>
         <p:spPr>
           <a:xfrm>
-            <a:off x="841248" y="4681728"/>
+            <a:off x="2560320" y="4370832"/>
+            <a:ext cx="4023360" cy="274320"/>
+          </a:xfrm>
+          <a:prstGeom prst="rect">
+            <a:avLst/>
+          </a:prstGeom>
+          <a:noFill/>
+          <a:ln/>
+        </p:spPr>
+        <p:txBody>
+          <a:bodyPr wrap="square" lIns="0" tIns="0" rIns="0" bIns="0" rtlCol="0" anchor="ctr"/>
+          <a:lstStyle/>
+          <a:p>
+            <a:pPr algn="ctr" indent="0" marL="0">
+              <a:buNone/>
+            </a:pPr>
+            <a:r>
+              <a:rPr lang="en-US" sz="1000" dirty="0">
+                <a:solidFill>
+                  <a:srgbClr val="CADCFC"/>
+                </a:solidFill>
+                <a:latin typeface="Courier New" pitchFamily="34" charset="0"/>
+                <a:ea typeface="Courier New" pitchFamily="34" charset="-122"/>
+                <a:cs typeface="Courier New" pitchFamily="34" charset="-120"/>
+              </a:rPr>
+              <a:t>github.com/kanishkpatel1995/agent-harness</a:t>
+            </a:r>
+            <a:endParaRPr lang="en-US" sz="1000" dirty="0"/>
+          </a:p>
+        </p:txBody>
+      </p:sp>
+      <p:pic>
+        <p:nvPicPr>
+          <p:cNvPr id="7" name="Image 1" descr="preencoded.png">    </p:cNvPr>
+          <p:cNvPicPr>
+            <a:picLocks noChangeAspect="1"/>
+          </p:cNvPicPr>
+          <p:nvPr/>
+        </p:nvPicPr>
+        <p:blipFill>
+          <a:blip r:embed="rId2"/>
+          <a:stretch>
+            <a:fillRect/>
+          </a:stretch>
+        </p:blipFill>
+        <p:spPr>
+          <a:xfrm>
+            <a:off x="548640" y="4736592"/>
+            <a:ext cx="219456" cy="165344"/>
+          </a:xfrm>
+          <a:prstGeom prst="rect">
+            <a:avLst/>
+          </a:prstGeom>
+        </p:spPr>
+      </p:pic>
+      <p:sp>
+        <p:nvSpPr>
+          <p:cNvPr id="8" name="Text 4"/>
+          <p:cNvSpPr/>
+          <p:nvPr/>
+        </p:nvSpPr>
+        <p:spPr>
+          <a:xfrm>
+            <a:off x="822960" y="4690872"/>
             <a:ext cx="1280160" cy="292608"/>
           </a:xfrm>
           <a:prstGeom prst="rect">
@@ -3203,7 +4275,7 @@
             <a:r>
               <a:rPr lang="en-US" sz="1100" b="1" dirty="0">
                 <a:solidFill>
-                  <a:srgbClr val="2E2C32"/>
+                  <a:srgbClr val="FFFFFF"/>
                 </a:solidFill>
                 <a:latin typeface="Syne" pitchFamily="34" charset="0"/>
                 <a:ea typeface="Syne" pitchFamily="34" charset="-122"/>
@@ -3231,13 +4303,13 @@
       </p:sp>
       <p:sp>
         <p:nvSpPr>
-          <p:cNvPr id="7" name="Text 4"/>
-          <p:cNvSpPr/>
-          <p:nvPr/>
-        </p:nvSpPr>
-        <p:spPr>
-          <a:xfrm>
-            <a:off x="8229600" y="4681728"/>
+          <p:cNvPr id="9" name="Text 5"/>
+          <p:cNvSpPr/>
+          <p:nvPr/>
+        </p:nvSpPr>
+        <p:spPr>
+          <a:xfrm>
+            <a:off x="8229600" y="4690872"/>
             <a:ext cx="365760" cy="292608"/>
           </a:xfrm>
           <a:prstGeom prst="rect">
@@ -3262,7 +4334,7 @@
                 <a:ea typeface="Manrope" pitchFamily="34" charset="-122"/>
                 <a:cs typeface="Manrope" pitchFamily="34" charset="-120"/>
               </a:rPr>
-              <a:t>11</a:t>
+              <a:t>12</a:t>
             </a:r>
             <a:endParaRPr lang="en-US" sz="900" dirty="0"/>
           </a:p>
@@ -3276,13 +4348,13 @@
 </p:sld>
 </file>
 
-<file path=ppt/slides/slide12.xml><?xml version="1.0" encoding="utf-8"?>
+<file path=ppt/slides/slide13.xml><?xml version="1.0" encoding="utf-8"?>
 <p:sld xmlns:a="http://schemas.openxmlformats.org/drawingml/2006/main" xmlns:r="http://schemas.openxmlformats.org/officeDocument/2006/relationships" xmlns:p="http://schemas.openxmlformats.org/presentationml/2006/main">
-  <p:cSld name="Slide 12">
+  <p:cSld name="Slide 13">
     <p:bg>
       <p:bgPr>
         <a:solidFill>
-          <a:srgbClr val="FAFAFE"/>
+          <a:srgbClr val="2E2C32"/>
         </a:solidFill>
       </p:bgPr>
     </p:bg>
@@ -3308,8 +4380,8 @@
         </p:nvSpPr>
         <p:spPr>
           <a:xfrm>
-            <a:off x="548640" y="365760"/>
-            <a:ext cx="8046720" cy="274320"/>
+            <a:off x="548640" y="1737360"/>
+            <a:ext cx="8229600" cy="457200"/>
           </a:xfrm>
           <a:prstGeom prst="rect">
             <a:avLst/>
@@ -3325,7 +4397,7 @@
               <a:buNone/>
             </a:pPr>
             <a:r>
-              <a:rPr lang="en-US" sz="1100" b="1" spc="300" kern="0" dirty="0">
+              <a:rPr lang="en-US" sz="1300" b="1" spc="400" kern="0" dirty="0">
                 <a:solidFill>
                   <a:srgbClr val="9378FF"/>
                 </a:solidFill>
@@ -3333,9 +4405,9 @@
                 <a:ea typeface="Syne" pitchFamily="34" charset="-122"/>
                 <a:cs typeface="Syne" pitchFamily="34" charset="-120"/>
               </a:rPr>
-              <a:t>EXP-001 · COMPACTION-BAKEOFF</a:t>
-            </a:r>
-            <a:endParaRPr lang="en-US" sz="1100" dirty="0"/>
+              <a:t>APPENDIX</a:t>
+            </a:r>
+            <a:endParaRPr lang="en-US" sz="1300" dirty="0"/>
           </a:p>
         </p:txBody>
       </p:sp>
@@ -3347,40 +4419,79 @@
         </p:nvSpPr>
         <p:spPr>
           <a:xfrm>
-            <a:off x="548640" y="640080"/>
-            <a:ext cx="8046720" cy="868680"/>
-          </a:xfrm>
-          <a:prstGeom prst="rect">
-            <a:avLst/>
-          </a:prstGeom>
-          <a:noFill/>
-          <a:ln/>
-        </p:spPr>
-        <p:txBody>
-          <a:bodyPr wrap="square" lIns="0" tIns="0" rIns="0" bIns="0" rtlCol="0" anchor="t"/>
-          <a:lstStyle/>
-          <a:p>
-            <a:pPr indent="0" marL="0">
-              <a:buNone/>
-            </a:pPr>
-            <a:r>
-              <a:rPr lang="en-US" sz="2700" b="1" dirty="0">
-                <a:solidFill>
-                  <a:srgbClr val="2E2C32"/>
+            <a:off x="548640" y="2148840"/>
+            <a:ext cx="8229600" cy="822960"/>
+          </a:xfrm>
+          <a:prstGeom prst="rect">
+            <a:avLst/>
+          </a:prstGeom>
+          <a:noFill/>
+          <a:ln/>
+        </p:spPr>
+        <p:txBody>
+          <a:bodyPr wrap="square" lIns="0" tIns="0" rIns="0" bIns="0" rtlCol="0" anchor="ctr"/>
+          <a:lstStyle/>
+          <a:p>
+            <a:pPr indent="0" marL="0">
+              <a:buNone/>
+            </a:pPr>
+            <a:r>
+              <a:rPr lang="en-US" sz="3400" b="1" dirty="0">
+                <a:solidFill>
+                  <a:srgbClr val="FFFFFF"/>
                 </a:solidFill>
                 <a:latin typeface="Syne" pitchFamily="34" charset="0"/>
                 <a:ea typeface="Syne" pitchFamily="34" charset="-122"/>
                 <a:cs typeface="Syne" pitchFamily="34" charset="-120"/>
               </a:rPr>
-              <a:t>Hypothesis &amp; assumptions</a:t>
-            </a:r>
-            <a:endParaRPr lang="en-US" sz="2700" dirty="0"/>
+              <a:t>The whole project, and every experiment</a:t>
+            </a:r>
+            <a:endParaRPr lang="en-US" sz="3400" dirty="0"/>
+          </a:p>
+        </p:txBody>
+      </p:sp>
+      <p:sp>
+        <p:nvSpPr>
+          <p:cNvPr id="4" name="Text 2"/>
+          <p:cNvSpPr/>
+          <p:nvPr/>
+        </p:nvSpPr>
+        <p:spPr>
+          <a:xfrm>
+            <a:off x="548640" y="3108960"/>
+            <a:ext cx="8046720" cy="457200"/>
+          </a:xfrm>
+          <a:prstGeom prst="rect">
+            <a:avLst/>
+          </a:prstGeom>
+          <a:noFill/>
+          <a:ln/>
+        </p:spPr>
+        <p:txBody>
+          <a:bodyPr wrap="square" lIns="0" tIns="0" rIns="0" bIns="0" rtlCol="0" anchor="ctr"/>
+          <a:lstStyle/>
+          <a:p>
+            <a:pPr indent="0" marL="0">
+              <a:buNone/>
+            </a:pPr>
+            <a:r>
+              <a:rPr lang="en-US" sz="1400" dirty="0">
+                <a:solidFill>
+                  <a:srgbClr val="CADCFC"/>
+                </a:solidFill>
+                <a:latin typeface="Manrope" pitchFamily="34" charset="0"/>
+                <a:ea typeface="Manrope" pitchFamily="34" charset="-122"/>
+                <a:cs typeface="Manrope" pitchFamily="34" charset="-120"/>
+              </a:rPr>
+              <a:t>What's in the repo · the protocol · EXP-001 results · EXP-002 plan · roadmap.</a:t>
+            </a:r>
+            <a:endParaRPr lang="en-US" sz="1400" dirty="0"/>
           </a:p>
         </p:txBody>
       </p:sp>
       <p:pic>
         <p:nvPicPr>
-          <p:cNvPr id="4" name="Image 0" descr="preencoded.png">    </p:cNvPr>
+          <p:cNvPr id="5" name="Image 0" descr="preencoded.png">    </p:cNvPr>
           <p:cNvPicPr>
             <a:picLocks noChangeAspect="1"/>
           </p:cNvPicPr>
@@ -3394,8 +4505,8 @@
         </p:blipFill>
         <p:spPr>
           <a:xfrm>
-            <a:off x="548640" y="4718304"/>
-            <a:ext cx="237744" cy="179122"/>
+            <a:off x="548640" y="4736592"/>
+            <a:ext cx="219456" cy="165344"/>
           </a:xfrm>
           <a:prstGeom prst="rect">
             <a:avLst/>
@@ -3404,13 +4515,13 @@
       </p:pic>
       <p:sp>
         <p:nvSpPr>
-          <p:cNvPr id="5" name="Text 2"/>
-          <p:cNvSpPr/>
-          <p:nvPr/>
-        </p:nvSpPr>
-        <p:spPr>
-          <a:xfrm>
-            <a:off x="841248" y="4681728"/>
+          <p:cNvPr id="6" name="Text 3"/>
+          <p:cNvSpPr/>
+          <p:nvPr/>
+        </p:nvSpPr>
+        <p:spPr>
+          <a:xfrm>
+            <a:off x="822960" y="4690872"/>
             <a:ext cx="1280160" cy="292608"/>
           </a:xfrm>
           <a:prstGeom prst="rect">
@@ -3429,7 +4540,7 @@
             <a:r>
               <a:rPr lang="en-US" sz="1100" b="1" dirty="0">
                 <a:solidFill>
-                  <a:srgbClr val="2E2C32"/>
+                  <a:srgbClr val="FFFFFF"/>
                 </a:solidFill>
                 <a:latin typeface="Syne" pitchFamily="34" charset="0"/>
                 <a:ea typeface="Syne" pitchFamily="34" charset="-122"/>
@@ -3457,13 +4568,13 @@
       </p:sp>
       <p:sp>
         <p:nvSpPr>
-          <p:cNvPr id="6" name="Text 3"/>
-          <p:cNvSpPr/>
-          <p:nvPr/>
-        </p:nvSpPr>
-        <p:spPr>
-          <a:xfrm>
-            <a:off x="8229600" y="4681728"/>
+          <p:cNvPr id="7" name="Text 4"/>
+          <p:cNvSpPr/>
+          <p:nvPr/>
+        </p:nvSpPr>
+        <p:spPr>
+          <a:xfrm>
+            <a:off x="8229600" y="4690872"/>
             <a:ext cx="365760" cy="292608"/>
           </a:xfrm>
           <a:prstGeom prst="rect">
@@ -3488,606 +4599,9 @@
                 <a:ea typeface="Manrope" pitchFamily="34" charset="-122"/>
                 <a:cs typeface="Manrope" pitchFamily="34" charset="-120"/>
               </a:rPr>
-              <a:t>12</a:t>
+              <a:t>13</a:t>
             </a:r>
             <a:endParaRPr lang="en-US" sz="900" dirty="0"/>
-          </a:p>
-        </p:txBody>
-      </p:sp>
-      <p:sp>
-        <p:nvSpPr>
-          <p:cNvPr id="7" name="Text 4"/>
-          <p:cNvSpPr/>
-          <p:nvPr/>
-        </p:nvSpPr>
-        <p:spPr>
-          <a:xfrm>
-            <a:off x="548640" y="1417320"/>
-            <a:ext cx="8046720" cy="274320"/>
-          </a:xfrm>
-          <a:prstGeom prst="rect">
-            <a:avLst/>
-          </a:prstGeom>
-          <a:noFill/>
-          <a:ln/>
-        </p:spPr>
-        <p:txBody>
-          <a:bodyPr wrap="square" lIns="0" tIns="0" rIns="0" bIns="0" rtlCol="0" anchor="ctr"/>
-          <a:lstStyle/>
-          <a:p>
-            <a:pPr indent="0" marL="0">
-              <a:buNone/>
-            </a:pPr>
-            <a:r>
-              <a:rPr lang="en-US" sz="1300" b="1" dirty="0">
-                <a:solidFill>
-                  <a:srgbClr val="9378FF"/>
-                </a:solidFill>
-                <a:latin typeface="Manrope" pitchFamily="34" charset="0"/>
-                <a:ea typeface="Manrope" pitchFamily="34" charset="-122"/>
-                <a:cs typeface="Manrope" pitchFamily="34" charset="-120"/>
-              </a:rPr>
-              <a:t>Hypothesis</a:t>
-            </a:r>
-            <a:endParaRPr lang="en-US" sz="1300" dirty="0"/>
-          </a:p>
-        </p:txBody>
-      </p:sp>
-      <p:sp>
-        <p:nvSpPr>
-          <p:cNvPr id="8" name="Text 5"/>
-          <p:cNvSpPr/>
-          <p:nvPr/>
-        </p:nvSpPr>
-        <p:spPr>
-          <a:xfrm>
-            <a:off x="548640" y="1691640"/>
-            <a:ext cx="8046720" cy="731520"/>
-          </a:xfrm>
-          <a:prstGeom prst="rect">
-            <a:avLst/>
-          </a:prstGeom>
-          <a:noFill/>
-          <a:ln/>
-        </p:spPr>
-        <p:txBody>
-          <a:bodyPr wrap="square" lIns="0" tIns="0" rIns="0" bIns="0" rtlCol="0" anchor="ctr"/>
-          <a:lstStyle/>
-          <a:p>
-            <a:pPr indent="0" marL="0">
-              <a:buNone/>
-            </a:pPr>
-            <a:r>
-              <a:rPr lang="en-US" sz="1300" dirty="0">
-                <a:solidFill>
-                  <a:srgbClr val="2E2C32"/>
-                </a:solidFill>
-                <a:latin typeface="Manrope" pitchFamily="34" charset="0"/>
-                <a:ea typeface="Manrope" pitchFamily="34" charset="-122"/>
-                <a:cs typeface="Manrope" pitchFamily="34" charset="-120"/>
-              </a:rPr>
-              <a:t>Under a fixed token budget, summary-based compaction (recency / importance / semantic) preserves more needle-facts per token than truncation, and there is a budget B* trading compaction fact-loss against lost-in-the-middle.</a:t>
-            </a:r>
-            <a:endParaRPr lang="en-US" sz="1300" dirty="0"/>
-          </a:p>
-        </p:txBody>
-      </p:sp>
-      <p:sp>
-        <p:nvSpPr>
-          <p:cNvPr id="9" name="Text 6"/>
-          <p:cNvSpPr/>
-          <p:nvPr/>
-        </p:nvSpPr>
-        <p:spPr>
-          <a:xfrm>
-            <a:off x="548640" y="2514600"/>
-            <a:ext cx="8046720" cy="274320"/>
-          </a:xfrm>
-          <a:prstGeom prst="rect">
-            <a:avLst/>
-          </a:prstGeom>
-          <a:noFill/>
-          <a:ln/>
-        </p:spPr>
-        <p:txBody>
-          <a:bodyPr wrap="square" lIns="0" tIns="0" rIns="0" bIns="0" rtlCol="0" anchor="ctr"/>
-          <a:lstStyle/>
-          <a:p>
-            <a:pPr indent="0" marL="0">
-              <a:buNone/>
-            </a:pPr>
-            <a:r>
-              <a:rPr lang="en-US" sz="1300" b="1" dirty="0">
-                <a:solidFill>
-                  <a:srgbClr val="9378FF"/>
-                </a:solidFill>
-                <a:latin typeface="Manrope" pitchFamily="34" charset="0"/>
-                <a:ea typeface="Manrope" pitchFamily="34" charset="-122"/>
-                <a:cs typeface="Manrope" pitchFamily="34" charset="-120"/>
-              </a:rPr>
-              <a:t>Assumptions</a:t>
-            </a:r>
-            <a:endParaRPr lang="en-US" sz="1300" dirty="0"/>
-          </a:p>
-        </p:txBody>
-      </p:sp>
-      <p:sp>
-        <p:nvSpPr>
-          <p:cNvPr id="10" name="Text 7"/>
-          <p:cNvSpPr/>
-          <p:nvPr/>
-        </p:nvSpPr>
-        <p:spPr>
-          <a:xfrm>
-            <a:off x="548640" y="2788920"/>
-            <a:ext cx="8046720" cy="2834640"/>
-          </a:xfrm>
-          <a:prstGeom prst="rect">
-            <a:avLst/>
-          </a:prstGeom>
-          <a:noFill/>
-          <a:ln/>
-        </p:spPr>
-        <p:txBody>
-          <a:bodyPr wrap="square" rtlCol="0" anchor="ctr"/>
-          <a:lstStyle/>
-          <a:p>
-            <a:pPr marL="203200" indent="-203200">
-              <a:spcAft>
-                <a:spcPts val="900"/>
-              </a:spcAft>
-              <a:buSzPct val="100000"/>
-              <a:buChar char="•"/>
-            </a:pPr>
-            <a:r>
-              <a:rPr lang="en-US" sz="1250" dirty="0">
-                <a:solidFill>
-                  <a:srgbClr val="2E2C32"/>
-                </a:solidFill>
-                <a:latin typeface="Manrope" pitchFamily="34" charset="0"/>
-                <a:ea typeface="Manrope" pitchFamily="34" charset="-122"/>
-                <a:cs typeface="Manrope" pitchFamily="34" charset="-120"/>
-              </a:rPr>
-              <a:t>Needle-fact recall is a valid proxy for task-relevant information retention.</a:t>
-            </a:r>
-            <a:endParaRPr lang="en-US" sz="1250" dirty="0"/>
-          </a:p>
-          <a:p>
-            <a:pPr marL="203200" indent="-203200">
-              <a:spcAft>
-                <a:spcPts val="900"/>
-              </a:spcAft>
-              <a:buSzPct val="100000"/>
-              <a:buChar char="•"/>
-            </a:pPr>
-            <a:r>
-              <a:rPr lang="en-US" sz="1250" dirty="0">
-                <a:solidFill>
-                  <a:srgbClr val="2E2C32"/>
-                </a:solidFill>
-                <a:latin typeface="Manrope" pitchFamily="34" charset="0"/>
-                <a:ea typeface="Manrope" pitchFamily="34" charset="-122"/>
-                <a:cs typeface="Manrope" pitchFamily="34" charset="-120"/>
-              </a:rPr>
-              <a:t>approx_tokens (~4 chars/token) is acceptable for budget gating.</a:t>
-            </a:r>
-            <a:endParaRPr lang="en-US" sz="1250" dirty="0"/>
-          </a:p>
-          <a:p>
-            <a:pPr marL="203200" indent="-203200">
-              <a:spcAft>
-                <a:spcPts val="900"/>
-              </a:spcAft>
-              <a:buSzPct val="100000"/>
-              <a:buChar char="•"/>
-            </a:pPr>
-            <a:r>
-              <a:rPr lang="en-US" sz="1250" dirty="0">
-                <a:solidFill>
-                  <a:srgbClr val="2E2C32"/>
-                </a:solidFill>
-                <a:latin typeface="Manrope" pitchFamily="34" charset="0"/>
-                <a:ea typeface="Manrope" pitchFamily="34" charset="-122"/>
-                <a:cs typeface="Manrope" pitchFamily="34" charset="-120"/>
-              </a:rPr>
-              <a:t>The summarizer model is held fixed across policies within a run.</a:t>
-            </a:r>
-            <a:endParaRPr lang="en-US" sz="1250" dirty="0"/>
-          </a:p>
-          <a:p>
-            <a:pPr marL="203200" indent="-203200">
-              <a:spcAft>
-                <a:spcPts val="900"/>
-              </a:spcAft>
-              <a:buSzPct val="100000"/>
-              <a:buChar char="•"/>
-            </a:pPr>
-            <a:r>
-              <a:rPr lang="en-US" sz="1250" dirty="0">
-                <a:solidFill>
-                  <a:srgbClr val="2E2C32"/>
-                </a:solidFill>
-                <a:latin typeface="Manrope" pitchFamily="34" charset="0"/>
-                <a:ea typeface="Manrope" pitchFamily="34" charset="-122"/>
-                <a:cs typeface="Manrope" pitchFamily="34" charset="-120"/>
-              </a:rPr>
-              <a:t>Coined needle tokens are recoverable only from context, not model priors.</a:t>
-            </a:r>
-            <a:endParaRPr lang="en-US" sz="1250" dirty="0"/>
-          </a:p>
-          <a:p>
-            <a:pPr marL="203200" indent="-203200">
-              <a:spcAft>
-                <a:spcPts val="900"/>
-              </a:spcAft>
-              <a:buSzPct val="100000"/>
-              <a:buChar char="•"/>
-            </a:pPr>
-            <a:r>
-              <a:rPr lang="en-US" sz="1250" dirty="0">
-                <a:solidFill>
-                  <a:srgbClr val="2E2C32"/>
-                </a:solidFill>
-                <a:latin typeface="Manrope" pitchFamily="34" charset="0"/>
-                <a:ea typeface="Manrope" pitchFamily="34" charset="-122"/>
-                <a:cs typeface="Manrope" pitchFamily="34" charset="-120"/>
-              </a:rPr>
-              <a:t>Synthetic transcripts approximate real agent compaction dynamics.</a:t>
-            </a:r>
-            <a:endParaRPr lang="en-US" sz="1250" dirty="0"/>
-          </a:p>
-        </p:txBody>
-      </p:sp>
-    </p:spTree>
-  </p:cSld>
-  <p:clrMapOvr>
-    <a:masterClrMapping/>
-  </p:clrMapOvr>
-</p:sld>
-</file>
-
-<file path=ppt/slides/slide13.xml><?xml version="1.0" encoding="utf-8"?>
-<p:sld xmlns:a="http://schemas.openxmlformats.org/drawingml/2006/main" xmlns:r="http://schemas.openxmlformats.org/officeDocument/2006/relationships" xmlns:p="http://schemas.openxmlformats.org/presentationml/2006/main">
-  <p:cSld name="Slide 13">
-    <p:bg>
-      <p:bgPr>
-        <a:solidFill>
-          <a:srgbClr val="FAFAFE"/>
-        </a:solidFill>
-      </p:bgPr>
-    </p:bg>
-    <p:spTree>
-      <p:nvGrpSpPr>
-        <p:cNvPr id="1" name=""/>
-        <p:cNvGrpSpPr/>
-        <p:nvPr/>
-      </p:nvGrpSpPr>
-      <p:grpSpPr>
-        <a:xfrm>
-          <a:off x="0" y="0"/>
-          <a:ext cx="0" cy="0"/>
-          <a:chOff x="0" y="0"/>
-          <a:chExt cx="0" cy="0"/>
-        </a:xfrm>
-      </p:grpSpPr>
-      <p:sp>
-        <p:nvSpPr>
-          <p:cNvPr id="2" name="Text 0"/>
-          <p:cNvSpPr/>
-          <p:nvPr/>
-        </p:nvSpPr>
-        <p:spPr>
-          <a:xfrm>
-            <a:off x="548640" y="365760"/>
-            <a:ext cx="8046720" cy="274320"/>
-          </a:xfrm>
-          <a:prstGeom prst="rect">
-            <a:avLst/>
-          </a:prstGeom>
-          <a:noFill/>
-          <a:ln/>
-        </p:spPr>
-        <p:txBody>
-          <a:bodyPr wrap="square" lIns="0" tIns="0" rIns="0" bIns="0" rtlCol="0" anchor="ctr"/>
-          <a:lstStyle/>
-          <a:p>
-            <a:pPr indent="0" marL="0">
-              <a:buNone/>
-            </a:pPr>
-            <a:r>
-              <a:rPr lang="en-US" sz="1100" b="1" spc="300" kern="0" dirty="0">
-                <a:solidFill>
-                  <a:srgbClr val="9378FF"/>
-                </a:solidFill>
-                <a:latin typeface="Syne" pitchFamily="34" charset="0"/>
-                <a:ea typeface="Syne" pitchFamily="34" charset="-122"/>
-                <a:cs typeface="Syne" pitchFamily="34" charset="-120"/>
-              </a:rPr>
-              <a:t>EXP-001 · METHOD</a:t>
-            </a:r>
-            <a:endParaRPr lang="en-US" sz="1100" dirty="0"/>
-          </a:p>
-        </p:txBody>
-      </p:sp>
-      <p:sp>
-        <p:nvSpPr>
-          <p:cNvPr id="3" name="Text 1"/>
-          <p:cNvSpPr/>
-          <p:nvPr/>
-        </p:nvSpPr>
-        <p:spPr>
-          <a:xfrm>
-            <a:off x="548640" y="640080"/>
-            <a:ext cx="8046720" cy="868680"/>
-          </a:xfrm>
-          <a:prstGeom prst="rect">
-            <a:avLst/>
-          </a:prstGeom>
-          <a:noFill/>
-          <a:ln/>
-        </p:spPr>
-        <p:txBody>
-          <a:bodyPr wrap="square" lIns="0" tIns="0" rIns="0" bIns="0" rtlCol="0" anchor="t"/>
-          <a:lstStyle/>
-          <a:p>
-            <a:pPr indent="0" marL="0">
-              <a:buNone/>
-            </a:pPr>
-            <a:r>
-              <a:rPr lang="en-US" sz="2500" b="1" dirty="0">
-                <a:solidFill>
-                  <a:srgbClr val="2E2C32"/>
-                </a:solidFill>
-                <a:latin typeface="Syne" pitchFamily="34" charset="0"/>
-                <a:ea typeface="Syne" pitchFamily="34" charset="-122"/>
-                <a:cs typeface="Syne" pitchFamily="34" charset="-120"/>
-              </a:rPr>
-              <a:t>Mode A — the controlled probe</a:t>
-            </a:r>
-            <a:endParaRPr lang="en-US" sz="2500" dirty="0"/>
-          </a:p>
-        </p:txBody>
-      </p:sp>
-      <p:pic>
-        <p:nvPicPr>
-          <p:cNvPr id="4" name="Image 0" descr="preencoded.png">    </p:cNvPr>
-          <p:cNvPicPr>
-            <a:picLocks noChangeAspect="1"/>
-          </p:cNvPicPr>
-          <p:nvPr/>
-        </p:nvPicPr>
-        <p:blipFill>
-          <a:blip r:embed="rId1"/>
-          <a:stretch>
-            <a:fillRect/>
-          </a:stretch>
-        </p:blipFill>
-        <p:spPr>
-          <a:xfrm>
-            <a:off x="548640" y="4718304"/>
-            <a:ext cx="237744" cy="179122"/>
-          </a:xfrm>
-          <a:prstGeom prst="rect">
-            <a:avLst/>
-          </a:prstGeom>
-        </p:spPr>
-      </p:pic>
-      <p:sp>
-        <p:nvSpPr>
-          <p:cNvPr id="5" name="Text 2"/>
-          <p:cNvSpPr/>
-          <p:nvPr/>
-        </p:nvSpPr>
-        <p:spPr>
-          <a:xfrm>
-            <a:off x="841248" y="4681728"/>
-            <a:ext cx="1280160" cy="292608"/>
-          </a:xfrm>
-          <a:prstGeom prst="rect">
-            <a:avLst/>
-          </a:prstGeom>
-          <a:noFill/>
-          <a:ln/>
-        </p:spPr>
-        <p:txBody>
-          <a:bodyPr wrap="square" lIns="0" tIns="0" rIns="0" bIns="0" rtlCol="0" anchor="ctr"/>
-          <a:lstStyle/>
-          <a:p>
-            <a:pPr indent="0" marL="0">
-              <a:buNone/>
-            </a:pPr>
-            <a:r>
-              <a:rPr lang="en-US" sz="1100" b="1" dirty="0">
-                <a:solidFill>
-                  <a:srgbClr val="2E2C32"/>
-                </a:solidFill>
-                <a:latin typeface="Syne" pitchFamily="34" charset="0"/>
-                <a:ea typeface="Syne" pitchFamily="34" charset="-122"/>
-                <a:cs typeface="Syne" pitchFamily="34" charset="-120"/>
-              </a:rPr>
-              <a:t>Founsi</a:t>
-            </a:r>
-            <a:pPr indent="0" marL="0">
-              <a:buNone/>
-            </a:pPr>
-            <a:r>
-              <a:rPr lang="en-US" sz="1100" b="1" dirty="0">
-                <a:solidFill>
-                  <a:srgbClr val="9378FF"/>
-                </a:solidFill>
-                <a:latin typeface="Syne" pitchFamily="34" charset="0"/>
-                <a:ea typeface="Syne" pitchFamily="34" charset="-122"/>
-                <a:cs typeface="Syne" pitchFamily="34" charset="-120"/>
-              </a:rPr>
-              <a:t>.</a:t>
-            </a:r>
-            <a:endParaRPr lang="en-US" sz="1100" dirty="0"/>
-          </a:p>
-        </p:txBody>
-      </p:sp>
-      <p:sp>
-        <p:nvSpPr>
-          <p:cNvPr id="6" name="Text 3"/>
-          <p:cNvSpPr/>
-          <p:nvPr/>
-        </p:nvSpPr>
-        <p:spPr>
-          <a:xfrm>
-            <a:off x="8229600" y="4681728"/>
-            <a:ext cx="365760" cy="292608"/>
-          </a:xfrm>
-          <a:prstGeom prst="rect">
-            <a:avLst/>
-          </a:prstGeom>
-          <a:noFill/>
-          <a:ln/>
-        </p:spPr>
-        <p:txBody>
-          <a:bodyPr wrap="square" lIns="0" tIns="0" rIns="0" bIns="0" rtlCol="0" anchor="ctr"/>
-          <a:lstStyle/>
-          <a:p>
-            <a:pPr algn="r" indent="0" marL="0">
-              <a:buNone/>
-            </a:pPr>
-            <a:r>
-              <a:rPr lang="en-US" sz="900" dirty="0">
-                <a:solidFill>
-                  <a:srgbClr val="7E7A8A"/>
-                </a:solidFill>
-                <a:latin typeface="Manrope" pitchFamily="34" charset="0"/>
-                <a:ea typeface="Manrope" pitchFamily="34" charset="-122"/>
-                <a:cs typeface="Manrope" pitchFamily="34" charset="-120"/>
-              </a:rPr>
-              <a:t>12</a:t>
-            </a:r>
-            <a:endParaRPr lang="en-US" sz="900" dirty="0"/>
-          </a:p>
-        </p:txBody>
-      </p:sp>
-      <p:sp>
-        <p:nvSpPr>
-          <p:cNvPr id="7" name="Text 4"/>
-          <p:cNvSpPr/>
-          <p:nvPr/>
-        </p:nvSpPr>
-        <p:spPr>
-          <a:xfrm>
-            <a:off x="548640" y="1600200"/>
-            <a:ext cx="8046720" cy="2834640"/>
-          </a:xfrm>
-          <a:prstGeom prst="rect">
-            <a:avLst/>
-          </a:prstGeom>
-          <a:noFill/>
-          <a:ln/>
-        </p:spPr>
-        <p:txBody>
-          <a:bodyPr wrap="square" rtlCol="0" anchor="ctr"/>
-          <a:lstStyle/>
-          <a:p>
-            <a:pPr marL="203200" indent="-203200">
-              <a:spcAft>
-                <a:spcPts val="900"/>
-              </a:spcAft>
-              <a:buSzPct val="100000"/>
-              <a:buChar char="•"/>
-            </a:pPr>
-            <a:r>
-              <a:rPr lang="en-US" sz="1350" dirty="0">
-                <a:solidFill>
-                  <a:srgbClr val="2E2C32"/>
-                </a:solidFill>
-                <a:latin typeface="Manrope" pitchFamily="34" charset="0"/>
-                <a:ea typeface="Manrope" pitchFamily="34" charset="-122"/>
-                <a:cs typeface="Manrope" pitchFamily="34" charset="-120"/>
-              </a:rPr>
-              <a:t>Build a needle-bearing transcript (deterministic, seeded) up to run-length L.</a:t>
-            </a:r>
-            <a:endParaRPr lang="en-US" sz="1350" dirty="0"/>
-          </a:p>
-          <a:p>
-            <a:pPr marL="203200" indent="-203200">
-              <a:spcAft>
-                <a:spcPts val="900"/>
-              </a:spcAft>
-              <a:buSzPct val="100000"/>
-              <a:buChar char="•"/>
-            </a:pPr>
-            <a:r>
-              <a:rPr lang="en-US" sz="1350" dirty="0">
-                <a:solidFill>
-                  <a:srgbClr val="2E2C32"/>
-                </a:solidFill>
-                <a:latin typeface="Manrope" pitchFamily="34" charset="0"/>
-                <a:ea typeface="Manrope" pitchFamily="34" charset="-122"/>
-                <a:cs typeface="Manrope" pitchFamily="34" charset="-120"/>
-              </a:rPr>
-              <a:t>Compact it under budget B with each policy — real model writes the summaries.</a:t>
-            </a:r>
-            <a:endParaRPr lang="en-US" sz="1350" dirty="0"/>
-          </a:p>
-          <a:p>
-            <a:pPr marL="203200" indent="-203200">
-              <a:spcAft>
-                <a:spcPts val="900"/>
-              </a:spcAft>
-              <a:buSzPct val="100000"/>
-              <a:buChar char="•"/>
-            </a:pPr>
-            <a:r>
-              <a:rPr lang="en-US" sz="1350" dirty="0">
-                <a:solidFill>
-                  <a:srgbClr val="2E2C32"/>
-                </a:solidFill>
-                <a:latin typeface="Manrope" pitchFamily="34" charset="0"/>
-                <a:ea typeface="Manrope" pitchFamily="34" charset="-122"/>
-                <a:cs typeface="Manrope" pitchFamily="34" charset="-120"/>
-              </a:rPr>
-              <a:t>Probe: ask the model to recover the planted facts from the compacted window.</a:t>
-            </a:r>
-            <a:endParaRPr lang="en-US" sz="1350" dirty="0"/>
-          </a:p>
-          <a:p>
-            <a:pPr marL="203200" indent="-203200">
-              <a:spcAft>
-                <a:spcPts val="900"/>
-              </a:spcAft>
-              <a:buSzPct val="100000"/>
-              <a:buChar char="•"/>
-            </a:pPr>
-            <a:r>
-              <a:rPr lang="en-US" sz="1350" dirty="0">
-                <a:solidFill>
-                  <a:srgbClr val="2E2C32"/>
-                </a:solidFill>
-                <a:latin typeface="Manrope" pitchFamily="34" charset="0"/>
-                <a:ea typeface="Manrope" pitchFamily="34" charset="-122"/>
-                <a:cs typeface="Manrope" pitchFamily="34" charset="-120"/>
-              </a:rPr>
-              <a:t>Metrics — fidelity (literal survival, scores the policy) vs probe (model recall@length); cost in tokens billed.</a:t>
-            </a:r>
-            <a:endParaRPr lang="en-US" sz="1350" dirty="0"/>
-          </a:p>
-          <a:p>
-            <a:pPr marL="203200" indent="-203200">
-              <a:spcAft>
-                <a:spcPts val="900"/>
-              </a:spcAft>
-              <a:buSzPct val="100000"/>
-              <a:buChar char="•"/>
-            </a:pPr>
-            <a:r>
-              <a:rPr lang="en-US" sz="1350" dirty="0">
-                <a:solidFill>
-                  <a:srgbClr val="2E2C32"/>
-                </a:solidFill>
-                <a:latin typeface="Manrope" pitchFamily="34" charset="0"/>
-                <a:ea typeface="Manrope" pitchFamily="34" charset="-122"/>
-                <a:cs typeface="Manrope" pitchFamily="34" charset="-120"/>
-              </a:rPr>
-              <a:t>Free NVIDIA NIM (llama-3.1-8b dev); paced + backed-off + cached; every prompt saved to prompts.jsonl.</a:t>
-            </a:r>
-            <a:endParaRPr lang="en-US" sz="1350" dirty="0"/>
           </a:p>
         </p:txBody>
       </p:sp>
@@ -4156,7 +4670,7 @@
                 <a:ea typeface="Syne" pitchFamily="34" charset="-122"/>
                 <a:cs typeface="Syne" pitchFamily="34" charset="-120"/>
               </a:rPr>
-              <a:t>EXP-001 · RESULTS</a:t>
+              <a:t>HOW TO READ THIS REPO</a:t>
             </a:r>
             <a:endParaRPr lang="en-US" sz="1100" dirty="0"/>
           </a:p>
@@ -4195,7 +4709,7 @@
                 <a:ea typeface="Syne" pitchFamily="34" charset="-122"/>
                 <a:cs typeface="Syne" pitchFamily="34" charset="-120"/>
               </a:rPr>
-              <a:t>Quality vs cost by policy</a:t>
+              <a:t>What's in the project</a:t>
             </a:r>
             <a:endParaRPr lang="en-US" sz="2500" dirty="0"/>
           </a:p>
@@ -4217,8 +4731,8 @@
         </p:blipFill>
         <p:spPr>
           <a:xfrm>
-            <a:off x="548640" y="4718304"/>
-            <a:ext cx="237744" cy="179122"/>
+            <a:off x="548640" y="4736592"/>
+            <a:ext cx="219456" cy="165344"/>
           </a:xfrm>
           <a:prstGeom prst="rect">
             <a:avLst/>
@@ -4233,7 +4747,7 @@
         </p:nvSpPr>
         <p:spPr>
           <a:xfrm>
-            <a:off x="841248" y="4681728"/>
+            <a:off x="822960" y="4690872"/>
             <a:ext cx="1280160" cy="292608"/>
           </a:xfrm>
           <a:prstGeom prst="rect">
@@ -4286,7 +4800,7 @@
         </p:nvSpPr>
         <p:spPr>
           <a:xfrm>
-            <a:off x="8229600" y="4681728"/>
+            <a:off x="8229600" y="4690872"/>
             <a:ext cx="365760" cy="292608"/>
           </a:xfrm>
           <a:prstGeom prst="rect">
@@ -4311,108 +4825,245 @@
                 <a:ea typeface="Manrope" pitchFamily="34" charset="-122"/>
                 <a:cs typeface="Manrope" pitchFamily="34" charset="-120"/>
               </a:rPr>
-              <a:t>12</a:t>
+              <a:t>14</a:t>
             </a:r>
             <a:endParaRPr lang="en-US" sz="900" dirty="0"/>
           </a:p>
         </p:txBody>
       </p:sp>
-      <p:pic>
-        <p:nvPicPr>
-          <p:cNvPr id="7" name="Image 1" descr="/Users/kanishk/Desktop/agent-harness/.claude/worktrees/sleepy-sinoussi-00c73b/presentation/figures/EXP-001_pareto_v1.png">    </p:cNvPr>
-          <p:cNvPicPr>
-            <a:picLocks noChangeAspect="1"/>
-          </p:cNvPicPr>
-          <p:nvPr/>
-        </p:nvPicPr>
-        <p:blipFill>
-          <a:blip r:embed="rId2"/>
-          <a:stretch>
-            <a:fillRect/>
-          </a:stretch>
-        </p:blipFill>
-        <p:spPr>
-          <a:xfrm>
-            <a:off x="640080" y="1371600"/>
-            <a:ext cx="4937760" cy="3346704"/>
-          </a:xfrm>
-          <a:prstGeom prst="rect">
-            <a:avLst/>
-          </a:prstGeom>
-        </p:spPr>
-      </p:pic>
-      <p:sp>
-        <p:nvSpPr>
-          <p:cNvPr id="8" name="Text 4"/>
-          <p:cNvSpPr/>
-          <p:nvPr/>
-        </p:nvSpPr>
-        <p:spPr>
-          <a:xfrm>
-            <a:off x="5760720" y="1554480"/>
-            <a:ext cx="2926080" cy="2834640"/>
-          </a:xfrm>
-          <a:prstGeom prst="rect">
-            <a:avLst/>
-          </a:prstGeom>
-          <a:noFill/>
-          <a:ln/>
-        </p:spPr>
-        <p:txBody>
-          <a:bodyPr wrap="square" rtlCol="0" anchor="ctr"/>
-          <a:lstStyle/>
-          <a:p>
-            <a:pPr marL="203200" indent="-203200">
-              <a:spcAft>
-                <a:spcPts val="900"/>
-              </a:spcAft>
-              <a:buSzPct val="100000"/>
-              <a:buChar char="•"/>
-            </a:pPr>
-            <a:r>
-              <a:rPr lang="en-US" sz="1300" dirty="0">
+      <p:sp>
+        <p:nvSpPr>
+          <p:cNvPr id="7" name="Shape 4"/>
+          <p:cNvSpPr/>
+          <p:nvPr/>
+        </p:nvSpPr>
+        <p:spPr>
+          <a:xfrm>
+            <a:off x="548640" y="1508760"/>
+            <a:ext cx="8046720" cy="2468880"/>
+          </a:xfrm>
+          <a:prstGeom prst="rect">
+            <a:avLst/>
+          </a:prstGeom>
+          <a:solidFill>
+            <a:srgbClr val="F4F2F8"/>
+          </a:solidFill>
+          <a:ln w="12700">
+            <a:solidFill>
+              <a:srgbClr val="D4C9FF"/>
+            </a:solidFill>
+            <a:prstDash val="solid"/>
+          </a:ln>
+        </p:spPr>
+      </p:sp>
+      <p:sp>
+        <p:nvSpPr>
+          <p:cNvPr id="8" name="Text 5"/>
+          <p:cNvSpPr/>
+          <p:nvPr/>
+        </p:nvSpPr>
+        <p:spPr>
+          <a:xfrm>
+            <a:off x="731520" y="1645920"/>
+            <a:ext cx="7772400" cy="2194560"/>
+          </a:xfrm>
+          <a:prstGeom prst="rect">
+            <a:avLst/>
+          </a:prstGeom>
+          <a:noFill/>
+          <a:ln/>
+        </p:spPr>
+        <p:txBody>
+          <a:bodyPr wrap="square" lIns="0" tIns="0" rIns="0" bIns="0" rtlCol="0" anchor="ctr"/>
+          <a:lstStyle/>
+          <a:p>
+            <a:pPr indent="0" marL="0">
+              <a:lnSpc>
+                <a:spcPct val="118000"/>
+              </a:lnSpc>
+              <a:buNone/>
+            </a:pPr>
+            <a:r>
+              <a:rPr lang="en-US" sz="1250" dirty="0">
                 <a:solidFill>
                   <a:srgbClr val="2E2C32"/>
                 </a:solidFill>
-                <a:latin typeface="Manrope" pitchFamily="34" charset="0"/>
-                <a:ea typeface="Manrope" pitchFamily="34" charset="-122"/>
-                <a:cs typeface="Manrope" pitchFamily="34" charset="-120"/>
-              </a:rPr>
-              <a:t>Truncate is the floor: cheapest, ~0.2 recall.</a:t>
-            </a:r>
-            <a:endParaRPr lang="en-US" sz="1300" dirty="0"/>
-          </a:p>
-          <a:p>
-            <a:pPr marL="203200" indent="-203200">
-              <a:spcAft>
-                <a:spcPts val="900"/>
-              </a:spcAft>
-              <a:buSzPct val="100000"/>
-              <a:buChar char="•"/>
-            </a:pPr>
-            <a:r>
-              <a:rPr lang="en-US" sz="1300" dirty="0">
+                <a:latin typeface="Courier New" pitchFamily="34" charset="0"/>
+                <a:ea typeface="Courier New" pitchFamily="34" charset="-122"/>
+                <a:cs typeface="Courier New" pitchFamily="34" charset="-120"/>
+              </a:rPr>
+              <a:t>agent-harness/</a:t>
+            </a:r>
+            <a:endParaRPr lang="en-US" sz="1250" dirty="0"/>
+          </a:p>
+          <a:p>
+            <a:pPr indent="0" marL="0">
+              <a:lnSpc>
+                <a:spcPct val="118000"/>
+              </a:lnSpc>
+              <a:buNone/>
+            </a:pPr>
+            <a:r>
+              <a:rPr lang="en-US" sz="1250" dirty="0">
                 <a:solidFill>
                   <a:srgbClr val="2E2C32"/>
                 </a:solidFill>
-                <a:latin typeface="Manrope" pitchFamily="34" charset="0"/>
-                <a:ea typeface="Manrope" pitchFamily="34" charset="-122"/>
-                <a:cs typeface="Manrope" pitchFamily="34" charset="-120"/>
-              </a:rPr>
-              <a:t>Summary policies cluster higher (~0.4–0.5).</a:t>
-            </a:r>
-            <a:endParaRPr lang="en-US" sz="1300" dirty="0"/>
-          </a:p>
-          <a:p>
-            <a:pPr marL="203200" indent="-203200">
-              <a:spcAft>
-                <a:spcPts val="900"/>
-              </a:spcAft>
-              <a:buSzPct val="100000"/>
-              <a:buChar char="•"/>
-            </a:pPr>
-            <a:r>
-              <a:rPr lang="en-US" sz="1100" dirty="0">
+                <a:latin typeface="Courier New" pitchFamily="34" charset="0"/>
+                <a:ea typeface="Courier New" pitchFamily="34" charset="-122"/>
+                <a:cs typeface="Courier New" pitchFamily="34" charset="-120"/>
+              </a:rPr>
+              <a:t>├─ harness/        the teaching harness: the loop + ContextManager</a:t>
+            </a:r>
+            <a:endParaRPr lang="en-US" sz="1250" dirty="0"/>
+          </a:p>
+          <a:p>
+            <a:pPr indent="0" marL="0">
+              <a:lnSpc>
+                <a:spcPct val="118000"/>
+              </a:lnSpc>
+              <a:buNone/>
+            </a:pPr>
+            <a:r>
+              <a:rPr lang="en-US" sz="1250" dirty="0">
+                <a:solidFill>
+                  <a:srgbClr val="2E2C32"/>
+                </a:solidFill>
+                <a:latin typeface="Courier New" pitchFamily="34" charset="0"/>
+                <a:ea typeface="Courier New" pitchFamily="34" charset="-122"/>
+                <a:cs typeface="Courier New" pitchFamily="34" charset="-120"/>
+              </a:rPr>
+              <a:t>├─ experiments/    the research: compaction bake-off (bench/ pkg)</a:t>
+            </a:r>
+            <a:endParaRPr lang="en-US" sz="1250" dirty="0"/>
+          </a:p>
+          <a:p>
+            <a:pPr indent="0" marL="0">
+              <a:lnSpc>
+                <a:spcPct val="118000"/>
+              </a:lnSpc>
+              <a:buNone/>
+            </a:pPr>
+            <a:r>
+              <a:rPr lang="en-US" sz="1250" dirty="0">
+                <a:solidFill>
+                  <a:srgbClr val="2E2C32"/>
+                </a:solidFill>
+                <a:latin typeface="Courier New" pitchFamily="34" charset="0"/>
+                <a:ea typeface="Courier New" pitchFamily="34" charset="-122"/>
+                <a:cs typeface="Courier New" pitchFamily="34" charset="-120"/>
+              </a:rPr>
+              <a:t>│   ├─ bench/       config · policies · window · runner · analyze</a:t>
+            </a:r>
+            <a:endParaRPr lang="en-US" sz="1250" dirty="0"/>
+          </a:p>
+          <a:p>
+            <a:pPr indent="0" marL="0">
+              <a:lnSpc>
+                <a:spcPct val="118000"/>
+              </a:lnSpc>
+              <a:buNone/>
+            </a:pPr>
+            <a:r>
+              <a:rPr lang="en-US" sz="1250" dirty="0">
+                <a:solidFill>
+                  <a:srgbClr val="2E2C32"/>
+                </a:solidFill>
+                <a:latin typeface="Courier New" pitchFamily="34" charset="0"/>
+                <a:ea typeface="Courier New" pitchFamily="34" charset="-122"/>
+                <a:cs typeface="Courier New" pitchFamily="34" charset="-120"/>
+              </a:rPr>
+              <a:t>│   └─ runs/        one folder per run: manifest + prompts + results</a:t>
+            </a:r>
+            <a:endParaRPr lang="en-US" sz="1250" dirty="0"/>
+          </a:p>
+          <a:p>
+            <a:pPr indent="0" marL="0">
+              <a:lnSpc>
+                <a:spcPct val="118000"/>
+              </a:lnSpc>
+              <a:buNone/>
+            </a:pPr>
+            <a:r>
+              <a:rPr lang="en-US" sz="1250" dirty="0">
+                <a:solidFill>
+                  <a:srgbClr val="2E2C32"/>
+                </a:solidFill>
+                <a:latin typeface="Courier New" pitchFamily="34" charset="0"/>
+                <a:ea typeface="Courier New" pitchFamily="34" charset="-122"/>
+                <a:cs typeface="Courier New" pitchFamily="34" charset="-120"/>
+              </a:rPr>
+              <a:t>├─ docs/research-track/   curriculum · paper · literature · protocol</a:t>
+            </a:r>
+            <a:endParaRPr lang="en-US" sz="1250" dirty="0"/>
+          </a:p>
+          <a:p>
+            <a:pPr indent="0" marL="0">
+              <a:lnSpc>
+                <a:spcPct val="118000"/>
+              </a:lnSpc>
+              <a:buNone/>
+            </a:pPr>
+            <a:r>
+              <a:rPr lang="en-US" sz="1250" dirty="0">
+                <a:solidFill>
+                  <a:srgbClr val="2E2C32"/>
+                </a:solidFill>
+                <a:latin typeface="Courier New" pitchFamily="34" charset="0"/>
+                <a:ea typeface="Courier New" pitchFamily="34" charset="-122"/>
+                <a:cs typeface="Courier New" pitchFamily="34" charset="-120"/>
+              </a:rPr>
+              <a:t>├─ presentation/   this deck + Founsi brand + figures</a:t>
+            </a:r>
+            <a:endParaRPr lang="en-US" sz="1250" dirty="0"/>
+          </a:p>
+          <a:p>
+            <a:pPr indent="0" marL="0">
+              <a:lnSpc>
+                <a:spcPct val="118000"/>
+              </a:lnSpc>
+              <a:buNone/>
+            </a:pPr>
+            <a:r>
+              <a:rPr lang="en-US" sz="1250" dirty="0">
+                <a:solidFill>
+                  <a:srgbClr val="2E2C32"/>
+                </a:solidFill>
+                <a:latin typeface="Courier New" pitchFamily="34" charset="0"/>
+                <a:ea typeface="Courier New" pitchFamily="34" charset="-122"/>
+                <a:cs typeface="Courier New" pitchFamily="34" charset="-120"/>
+              </a:rPr>
+              <a:t>└─ tests/          11 offline tests (no API key needed)</a:t>
+            </a:r>
+            <a:endParaRPr lang="en-US" sz="1250" dirty="0"/>
+          </a:p>
+        </p:txBody>
+      </p:sp>
+      <p:sp>
+        <p:nvSpPr>
+          <p:cNvPr id="9" name="Text 6"/>
+          <p:cNvSpPr/>
+          <p:nvPr/>
+        </p:nvSpPr>
+        <p:spPr>
+          <a:xfrm>
+            <a:off x="548640" y="4114800"/>
+            <a:ext cx="8046720" cy="365760"/>
+          </a:xfrm>
+          <a:prstGeom prst="rect">
+            <a:avLst/>
+          </a:prstGeom>
+          <a:noFill/>
+          <a:ln/>
+        </p:spPr>
+        <p:txBody>
+          <a:bodyPr wrap="square" lIns="0" tIns="0" rIns="0" bIns="0" rtlCol="0" anchor="ctr"/>
+          <a:lstStyle/>
+          <a:p>
+            <a:pPr indent="0" marL="0">
+              <a:buNone/>
+            </a:pPr>
+            <a:r>
+              <a:rPr lang="en-US" sz="1200" i="1" dirty="0">
                 <a:solidFill>
                   <a:srgbClr val="655E74"/>
                 </a:solidFill>
@@ -4420,30 +5071,9 @@
                 <a:ea typeface="Manrope" pitchFamily="34" charset="-122"/>
                 <a:cs typeface="Manrope" pitchFamily="34" charset="-120"/>
               </a:rPr>
-              <a:t>semantic edges it at B*=1000 (8b dev).</a:t>
-            </a:r>
-            <a:endParaRPr lang="en-US" sz="1300" dirty="0"/>
-          </a:p>
-          <a:p>
-            <a:pPr marL="203200" indent="-203200">
-              <a:spcAft>
-                <a:spcPts val="900"/>
-              </a:spcAft>
-              <a:buSzPct val="100000"/>
-              <a:buChar char="•"/>
-            </a:pPr>
-            <a:r>
-              <a:rPr lang="en-US" sz="1300" dirty="0">
-                <a:solidFill>
-                  <a:srgbClr val="2E2C32"/>
-                </a:solidFill>
-                <a:latin typeface="Manrope" pitchFamily="34" charset="0"/>
-                <a:ea typeface="Manrope" pitchFamily="34" charset="-122"/>
-                <a:cs typeface="Manrope" pitchFamily="34" charset="-120"/>
-              </a:rPr>
-              <a:t>Note: 8b under-reads — 70b run is next.</a:t>
-            </a:r>
-            <a:endParaRPr lang="en-US" sz="1300" dirty="0"/>
+              <a:t>Start at harness/loop.py (the agent loop), then harness/context.py (the heart).</a:t>
+            </a:r>
+            <a:endParaRPr lang="en-US" sz="1200" dirty="0"/>
           </a:p>
         </p:txBody>
       </p:sp>
@@ -4512,7 +5142,7 @@
                 <a:ea typeface="Syne" pitchFamily="34" charset="-122"/>
                 <a:cs typeface="Syne" pitchFamily="34" charset="-120"/>
               </a:rPr>
-              <a:t>EXP-001 · RESULTS</a:t>
+              <a:t>HOW WE KEEP IT HONEST</a:t>
             </a:r>
             <a:endParaRPr lang="en-US" sz="1100" dirty="0"/>
           </a:p>
@@ -4543,7 +5173,7 @@
               <a:buNone/>
             </a:pPr>
             <a:r>
-              <a:rPr lang="en-US" sz="2500" b="1" dirty="0">
+              <a:rPr lang="en-US" sz="2400" b="1" dirty="0">
                 <a:solidFill>
                   <a:srgbClr val="2E2C32"/>
                 </a:solidFill>
@@ -4551,9 +5181,9 @@
                 <a:ea typeface="Syne" pitchFamily="34" charset="-122"/>
                 <a:cs typeface="Syne" pitchFamily="34" charset="-120"/>
               </a:rPr>
-              <a:t>Needle recall by policy &amp; budget</a:t>
-            </a:r>
-            <a:endParaRPr lang="en-US" sz="2500" dirty="0"/>
+              <a:t>Every experiment is a traceable run</a:t>
+            </a:r>
+            <a:endParaRPr lang="en-US" sz="2400" dirty="0"/>
           </a:p>
         </p:txBody>
       </p:sp>
@@ -4573,8 +5203,8 @@
         </p:blipFill>
         <p:spPr>
           <a:xfrm>
-            <a:off x="548640" y="4718304"/>
-            <a:ext cx="237744" cy="179122"/>
+            <a:off x="548640" y="4736592"/>
+            <a:ext cx="219456" cy="165344"/>
           </a:xfrm>
           <a:prstGeom prst="rect">
             <a:avLst/>
@@ -4589,7 +5219,7 @@
         </p:nvSpPr>
         <p:spPr>
           <a:xfrm>
-            <a:off x="841248" y="4681728"/>
+            <a:off x="822960" y="4690872"/>
             <a:ext cx="1280160" cy="292608"/>
           </a:xfrm>
           <a:prstGeom prst="rect">
@@ -4642,7 +5272,7 @@
         </p:nvSpPr>
         <p:spPr>
           <a:xfrm>
-            <a:off x="8229600" y="4681728"/>
+            <a:off x="8229600" y="4690872"/>
             <a:ext cx="365760" cy="292608"/>
           </a:xfrm>
           <a:prstGeom prst="rect">
@@ -4667,46 +5297,22 @@
                 <a:ea typeface="Manrope" pitchFamily="34" charset="-122"/>
                 <a:cs typeface="Manrope" pitchFamily="34" charset="-120"/>
               </a:rPr>
-              <a:t>12</a:t>
+              <a:t>15</a:t>
             </a:r>
             <a:endParaRPr lang="en-US" sz="900" dirty="0"/>
           </a:p>
         </p:txBody>
       </p:sp>
-      <p:pic>
-        <p:nvPicPr>
-          <p:cNvPr id="7" name="Image 1" descr="/Users/kanishk/Desktop/agent-harness/.claude/worktrees/sleepy-sinoussi-00c73b/presentation/figures/EXP-001_recall_by_policy_v1.png">    </p:cNvPr>
-          <p:cNvPicPr>
-            <a:picLocks noChangeAspect="1"/>
-          </p:cNvPicPr>
-          <p:nvPr/>
-        </p:nvPicPr>
-        <p:blipFill>
-          <a:blip r:embed="rId2"/>
-          <a:stretch>
-            <a:fillRect/>
-          </a:stretch>
-        </p:blipFill>
-        <p:spPr>
-          <a:xfrm>
-            <a:off x="640080" y="1371600"/>
-            <a:ext cx="4937760" cy="3346704"/>
-          </a:xfrm>
-          <a:prstGeom prst="rect">
-            <a:avLst/>
-          </a:prstGeom>
-        </p:spPr>
-      </p:pic>
-      <p:sp>
-        <p:nvSpPr>
-          <p:cNvPr id="8" name="Text 4"/>
-          <p:cNvSpPr/>
-          <p:nvPr/>
-        </p:nvSpPr>
-        <p:spPr>
-          <a:xfrm>
-            <a:off x="5760720" y="1554480"/>
-            <a:ext cx="2926080" cy="2834640"/>
+      <p:sp>
+        <p:nvSpPr>
+          <p:cNvPr id="7" name="Text 4"/>
+          <p:cNvSpPr/>
+          <p:nvPr/>
+        </p:nvSpPr>
+        <p:spPr>
+          <a:xfrm>
+            <a:off x="548640" y="1645920"/>
+            <a:ext cx="8046720" cy="2834640"/>
           </a:xfrm>
           <a:prstGeom prst="rect">
             <a:avLst/>
@@ -4720,13 +5326,13 @@
           <a:p>
             <a:pPr marL="203200" indent="-203200">
               <a:spcAft>
-                <a:spcPts val="900"/>
+                <a:spcPts val="800"/>
               </a:spcAft>
               <a:buSzPct val="100000"/>
               <a:buChar char="•"/>
             </a:pPr>
             <a:r>
-              <a:rPr lang="en-US" sz="1300" dirty="0">
+              <a:rPr lang="en-US" sz="1400" dirty="0">
                 <a:solidFill>
                   <a:srgbClr val="2E2C32"/>
                 </a:solidFill>
@@ -4734,20 +5340,20 @@
                 <a:ea typeface="Manrope" pitchFamily="34" charset="-122"/>
                 <a:cs typeface="Manrope" pitchFamily="34" charset="-120"/>
               </a:rPr>
-              <a:t>Recall reported as a fraction (poolable across needle counts).</a:t>
-            </a:r>
-            <a:endParaRPr lang="en-US" sz="1300" dirty="0"/>
+              <a:t>Hypothesis + assumptions first — stated before any code is written.</a:t>
+            </a:r>
+            <a:endParaRPr lang="en-US" sz="1400" dirty="0"/>
           </a:p>
           <a:p>
             <a:pPr marL="203200" indent="-203200">
               <a:spcAft>
-                <a:spcPts val="900"/>
+                <a:spcPts val="800"/>
               </a:spcAft>
               <a:buSzPct val="100000"/>
               <a:buChar char="•"/>
             </a:pPr>
             <a:r>
-              <a:rPr lang="en-US" sz="1300" dirty="0">
+              <a:rPr lang="en-US" sz="1400" dirty="0">
                 <a:solidFill>
                   <a:srgbClr val="2E2C32"/>
                 </a:solidFill>
@@ -4755,20 +5361,20 @@
                 <a:ea typeface="Manrope" pitchFamily="34" charset="-122"/>
                 <a:cs typeface="Manrope" pitchFamily="34" charset="-120"/>
               </a:rPr>
-              <a:t>Error bars = sd across seeds (now honest — seeds vary layout).</a:t>
-            </a:r>
-            <a:endParaRPr lang="en-US" sz="1300" dirty="0"/>
+              <a:t>Each run writes experiments/runs/EXP-NNN__slug__&lt;UTC&gt;/ with:</a:t>
+            </a:r>
+            <a:endParaRPr lang="en-US" sz="1400" dirty="0"/>
           </a:p>
           <a:p>
             <a:pPr marL="203200" indent="-203200">
               <a:spcAft>
-                <a:spcPts val="900"/>
+                <a:spcPts val="800"/>
               </a:spcAft>
               <a:buSzPct val="100000"/>
               <a:buChar char="•"/>
             </a:pPr>
             <a:r>
-              <a:rPr lang="en-US" sz="1100" dirty="0">
+              <a:rPr lang="en-US" sz="1200" dirty="0">
                 <a:solidFill>
                   <a:srgbClr val="655E74"/>
                 </a:solidFill>
@@ -4776,9 +5382,51 @@
                 <a:ea typeface="Manrope" pitchFamily="34" charset="-122"/>
                 <a:cs typeface="Manrope" pitchFamily="34" charset="-120"/>
               </a:rPr>
-              <a:t>importance is tail-bound: can't reach small budgets with keep=2.</a:t>
-            </a:r>
-            <a:endParaRPr lang="en-US" sz="1300" dirty="0"/>
+              <a:t>manifest.yaml (config + git sha + deps) · prompts.jsonl (every LLM call) · results.csv · figures/ · README.</a:t>
+            </a:r>
+            <a:endParaRPr lang="en-US" sz="1400" dirty="0"/>
+          </a:p>
+          <a:p>
+            <a:pPr marL="203200" indent="-203200">
+              <a:spcAft>
+                <a:spcPts val="800"/>
+              </a:spcAft>
+              <a:buSzPct val="100000"/>
+              <a:buChar char="•"/>
+            </a:pPr>
+            <a:r>
+              <a:rPr lang="en-US" sz="1400" dirty="0">
+                <a:solidFill>
+                  <a:srgbClr val="2E2C32"/>
+                </a:solidFill>
+                <a:latin typeface="Manrope" pitchFamily="34" charset="0"/>
+                <a:ea typeface="Manrope" pitchFamily="34" charset="-122"/>
+                <a:cs typeface="Manrope" pitchFamily="34" charset="-120"/>
+              </a:rPr>
+              <a:t>Figures in publication style (figstyle.py); rate-limited + cached so reruns are free.</a:t>
+            </a:r>
+            <a:endParaRPr lang="en-US" sz="1400" dirty="0"/>
+          </a:p>
+          <a:p>
+            <a:pPr marL="203200" indent="-203200">
+              <a:spcAft>
+                <a:spcPts val="800"/>
+              </a:spcAft>
+              <a:buSzPct val="100000"/>
+              <a:buChar char="•"/>
+            </a:pPr>
+            <a:r>
+              <a:rPr lang="en-US" sz="1400" dirty="0">
+                <a:solidFill>
+                  <a:srgbClr val="2E2C32"/>
+                </a:solidFill>
+                <a:latin typeface="Manrope" pitchFamily="34" charset="0"/>
+                <a:ea typeface="Manrope" pitchFamily="34" charset="-122"/>
+                <a:cs typeface="Manrope" pitchFamily="34" charset="-120"/>
+              </a:rPr>
+              <a:t>The bar: a stranger can clone the repo and reproduce the figure.</a:t>
+            </a:r>
+            <a:endParaRPr lang="en-US" sz="1400" dirty="0"/>
           </a:p>
         </p:txBody>
       </p:sp>
@@ -4847,7 +5495,7 @@
                 <a:ea typeface="Syne" pitchFamily="34" charset="-122"/>
                 <a:cs typeface="Syne" pitchFamily="34" charset="-120"/>
               </a:rPr>
-              <a:t>EXP-001 · RESULTS</a:t>
+              <a:t>EXP-001 · COMPACTION-BAKEOFF</a:t>
             </a:r>
             <a:endParaRPr lang="en-US" sz="1100" dirty="0"/>
           </a:p>
@@ -4878,7 +5526,7 @@
               <a:buNone/>
             </a:pPr>
             <a:r>
-              <a:rPr lang="en-US" sz="2400" b="1" dirty="0">
+              <a:rPr lang="en-US" sz="2500" b="1" dirty="0">
                 <a:solidFill>
                   <a:srgbClr val="2E2C32"/>
                 </a:solidFill>
@@ -4886,9 +5534,9 @@
                 <a:ea typeface="Syne" pitchFamily="34" charset="-122"/>
                 <a:cs typeface="Syne" pitchFamily="34" charset="-120"/>
               </a:rPr>
-              <a:t>No-compaction baseline &amp; the wall</a:t>
-            </a:r>
-            <a:endParaRPr lang="en-US" sz="2400" dirty="0"/>
+              <a:t>Hypothesis &amp; assumptions</a:t>
+            </a:r>
+            <a:endParaRPr lang="en-US" sz="2500" dirty="0"/>
           </a:p>
         </p:txBody>
       </p:sp>
@@ -4908,8 +5556,8 @@
         </p:blipFill>
         <p:spPr>
           <a:xfrm>
-            <a:off x="548640" y="4718304"/>
-            <a:ext cx="237744" cy="179122"/>
+            <a:off x="548640" y="4736592"/>
+            <a:ext cx="219456" cy="165344"/>
           </a:xfrm>
           <a:prstGeom prst="rect">
             <a:avLst/>
@@ -4924,7 +5572,7 @@
         </p:nvSpPr>
         <p:spPr>
           <a:xfrm>
-            <a:off x="841248" y="4681728"/>
+            <a:off x="822960" y="4690872"/>
             <a:ext cx="1280160" cy="292608"/>
           </a:xfrm>
           <a:prstGeom prst="rect">
@@ -4977,7 +5625,7 @@
         </p:nvSpPr>
         <p:spPr>
           <a:xfrm>
-            <a:off x="8229600" y="4681728"/>
+            <a:off x="8229600" y="4690872"/>
             <a:ext cx="365760" cy="292608"/>
           </a:xfrm>
           <a:prstGeom prst="rect">
@@ -5002,46 +5650,139 @@
                 <a:ea typeface="Manrope" pitchFamily="34" charset="-122"/>
                 <a:cs typeface="Manrope" pitchFamily="34" charset="-120"/>
               </a:rPr>
-              <a:t>12</a:t>
+              <a:t>16</a:t>
             </a:r>
             <a:endParaRPr lang="en-US" sz="900" dirty="0"/>
           </a:p>
         </p:txBody>
       </p:sp>
-      <p:pic>
-        <p:nvPicPr>
-          <p:cNvPr id="7" name="Image 1" descr="/Users/kanishk/Desktop/agent-harness/.claude/worktrees/sleepy-sinoussi-00c73b/presentation/figures/EXP-001_baseline_recall_v1.png">    </p:cNvPr>
-          <p:cNvPicPr>
-            <a:picLocks noChangeAspect="1"/>
-          </p:cNvPicPr>
-          <p:nvPr/>
-        </p:nvPicPr>
-        <p:blipFill>
-          <a:blip r:embed="rId2"/>
-          <a:stretch>
-            <a:fillRect/>
-          </a:stretch>
-        </p:blipFill>
-        <p:spPr>
-          <a:xfrm>
-            <a:off x="640080" y="1371600"/>
-            <a:ext cx="4937760" cy="3346704"/>
-          </a:xfrm>
-          <a:prstGeom prst="rect">
-            <a:avLst/>
-          </a:prstGeom>
-        </p:spPr>
-      </p:pic>
-      <p:sp>
-        <p:nvSpPr>
-          <p:cNvPr id="8" name="Text 4"/>
-          <p:cNvSpPr/>
-          <p:nvPr/>
-        </p:nvSpPr>
-        <p:spPr>
-          <a:xfrm>
-            <a:off x="5760720" y="1554480"/>
-            <a:ext cx="2926080" cy="2834640"/>
+      <p:sp>
+        <p:nvSpPr>
+          <p:cNvPr id="7" name="Text 4"/>
+          <p:cNvSpPr/>
+          <p:nvPr/>
+        </p:nvSpPr>
+        <p:spPr>
+          <a:xfrm>
+            <a:off x="548640" y="1371600"/>
+            <a:ext cx="8046720" cy="274320"/>
+          </a:xfrm>
+          <a:prstGeom prst="rect">
+            <a:avLst/>
+          </a:prstGeom>
+          <a:noFill/>
+          <a:ln/>
+        </p:spPr>
+        <p:txBody>
+          <a:bodyPr wrap="square" lIns="0" tIns="0" rIns="0" bIns="0" rtlCol="0" anchor="ctr"/>
+          <a:lstStyle/>
+          <a:p>
+            <a:pPr indent="0" marL="0">
+              <a:buNone/>
+            </a:pPr>
+            <a:r>
+              <a:rPr lang="en-US" sz="1300" b="1" dirty="0">
+                <a:solidFill>
+                  <a:srgbClr val="9378FF"/>
+                </a:solidFill>
+                <a:latin typeface="Manrope" pitchFamily="34" charset="0"/>
+                <a:ea typeface="Manrope" pitchFamily="34" charset="-122"/>
+                <a:cs typeface="Manrope" pitchFamily="34" charset="-120"/>
+              </a:rPr>
+              <a:t>Hypothesis</a:t>
+            </a:r>
+            <a:endParaRPr lang="en-US" sz="1300" dirty="0"/>
+          </a:p>
+        </p:txBody>
+      </p:sp>
+      <p:sp>
+        <p:nvSpPr>
+          <p:cNvPr id="8" name="Text 5"/>
+          <p:cNvSpPr/>
+          <p:nvPr/>
+        </p:nvSpPr>
+        <p:spPr>
+          <a:xfrm>
+            <a:off x="548640" y="1645920"/>
+            <a:ext cx="8046720" cy="685800"/>
+          </a:xfrm>
+          <a:prstGeom prst="rect">
+            <a:avLst/>
+          </a:prstGeom>
+          <a:noFill/>
+          <a:ln/>
+        </p:spPr>
+        <p:txBody>
+          <a:bodyPr wrap="square" lIns="0" tIns="0" rIns="0" bIns="0" rtlCol="0" anchor="ctr"/>
+          <a:lstStyle/>
+          <a:p>
+            <a:pPr indent="0" marL="0">
+              <a:buNone/>
+            </a:pPr>
+            <a:r>
+              <a:rPr lang="en-US" sz="1300" dirty="0">
+                <a:solidFill>
+                  <a:srgbClr val="2E2C32"/>
+                </a:solidFill>
+                <a:latin typeface="Manrope" pitchFamily="34" charset="0"/>
+                <a:ea typeface="Manrope" pitchFamily="34" charset="-122"/>
+                <a:cs typeface="Manrope" pitchFamily="34" charset="-120"/>
+              </a:rPr>
+              <a:t>Under a fixed token budget, summary-based compaction (recency / importance / semantic) preserves more needle-facts per token than truncation, and a budget B* trades fact-loss against lost-in-the-middle.</a:t>
+            </a:r>
+            <a:endParaRPr lang="en-US" sz="1300" dirty="0"/>
+          </a:p>
+        </p:txBody>
+      </p:sp>
+      <p:sp>
+        <p:nvSpPr>
+          <p:cNvPr id="9" name="Text 6"/>
+          <p:cNvSpPr/>
+          <p:nvPr/>
+        </p:nvSpPr>
+        <p:spPr>
+          <a:xfrm>
+            <a:off x="548640" y="2468880"/>
+            <a:ext cx="8046720" cy="274320"/>
+          </a:xfrm>
+          <a:prstGeom prst="rect">
+            <a:avLst/>
+          </a:prstGeom>
+          <a:noFill/>
+          <a:ln/>
+        </p:spPr>
+        <p:txBody>
+          <a:bodyPr wrap="square" lIns="0" tIns="0" rIns="0" bIns="0" rtlCol="0" anchor="ctr"/>
+          <a:lstStyle/>
+          <a:p>
+            <a:pPr indent="0" marL="0">
+              <a:buNone/>
+            </a:pPr>
+            <a:r>
+              <a:rPr lang="en-US" sz="1300" b="1" dirty="0">
+                <a:solidFill>
+                  <a:srgbClr val="9378FF"/>
+                </a:solidFill>
+                <a:latin typeface="Manrope" pitchFamily="34" charset="0"/>
+                <a:ea typeface="Manrope" pitchFamily="34" charset="-122"/>
+                <a:cs typeface="Manrope" pitchFamily="34" charset="-120"/>
+              </a:rPr>
+              <a:t>Assumptions</a:t>
+            </a:r>
+            <a:endParaRPr lang="en-US" sz="1300" dirty="0"/>
+          </a:p>
+        </p:txBody>
+      </p:sp>
+      <p:sp>
+        <p:nvSpPr>
+          <p:cNvPr id="10" name="Text 7"/>
+          <p:cNvSpPr/>
+          <p:nvPr/>
+        </p:nvSpPr>
+        <p:spPr>
+          <a:xfrm>
+            <a:off x="548640" y="2743200"/>
+            <a:ext cx="8046720" cy="2834640"/>
           </a:xfrm>
           <a:prstGeom prst="rect">
             <a:avLst/>
@@ -5055,13 +5796,13 @@
           <a:p>
             <a:pPr marL="203200" indent="-203200">
               <a:spcAft>
-                <a:spcPts val="900"/>
+                <a:spcPts val="800"/>
               </a:spcAft>
               <a:buSzPct val="100000"/>
               <a:buChar char="•"/>
             </a:pPr>
             <a:r>
-              <a:rPr lang="en-US" sz="1300" dirty="0">
+              <a:rPr lang="en-US" sz="1200" dirty="0">
                 <a:solidFill>
                   <a:srgbClr val="2E2C32"/>
                 </a:solidFill>
@@ -5069,20 +5810,20 @@
                 <a:ea typeface="Manrope" pitchFamily="34" charset="-122"/>
                 <a:cs typeface="Manrope" pitchFamily="34" charset="-120"/>
               </a:rPr>
-              <a:t>Baseline grows the raw context and measures recall vs length.</a:t>
-            </a:r>
-            <a:endParaRPr lang="en-US" sz="1300" dirty="0"/>
+              <a:t>Needle-fact recall is a valid proxy for task-relevant information retention.</a:t>
+            </a:r>
+            <a:endParaRPr lang="en-US" sz="1200" dirty="0"/>
           </a:p>
           <a:p>
             <a:pPr marL="203200" indent="-203200">
               <a:spcAft>
-                <a:spcPts val="900"/>
+                <a:spcPts val="800"/>
               </a:spcAft>
               <a:buSzPct val="100000"/>
               <a:buChar char="•"/>
             </a:pPr>
             <a:r>
-              <a:rPr lang="en-US" sz="1300" dirty="0">
+              <a:rPr lang="en-US" sz="1200" dirty="0">
                 <a:solidFill>
                   <a:srgbClr val="2E2C32"/>
                 </a:solidFill>
@@ -5090,30 +5831,72 @@
                 <a:ea typeface="Manrope" pitchFamily="34" charset="-122"/>
                 <a:cs typeface="Manrope" pitchFamily="34" charset="-120"/>
               </a:rPr>
-              <a:t>When raw tokens exceed the model's max window → context_overflow:</a:t>
-            </a:r>
-            <a:endParaRPr lang="en-US" sz="1300" dirty="0"/>
+              <a:t>approx_tokens (~4 chars/token) is acceptable for budget gating.</a:t>
+            </a:r>
+            <a:endParaRPr lang="en-US" sz="1200" dirty="0"/>
           </a:p>
           <a:p>
             <a:pPr marL="203200" indent="-203200">
               <a:spcAft>
-                <a:spcPts val="900"/>
+                <a:spcPts val="800"/>
               </a:spcAft>
               <a:buSzPct val="100000"/>
               <a:buChar char="•"/>
             </a:pPr>
             <a:r>
-              <a:rPr lang="en-US" sz="1100" dirty="0">
-                <a:solidFill>
-                  <a:srgbClr val="655E74"/>
-                </a:solidFill>
-                <a:latin typeface="Manrope" pitchFamily="34" charset="0"/>
-                <a:ea typeface="Manrope" pitchFamily="34" charset="-122"/>
-                <a:cs typeface="Manrope" pitchFamily="34" charset="-120"/>
-              </a:rPr>
-              <a:t>the agent dies. Compaction is the fix; we measure the deaths it prevents.</a:t>
-            </a:r>
-            <a:endParaRPr lang="en-US" sz="1300" dirty="0"/>
+              <a:rPr lang="en-US" sz="1200" dirty="0">
+                <a:solidFill>
+                  <a:srgbClr val="2E2C32"/>
+                </a:solidFill>
+                <a:latin typeface="Manrope" pitchFamily="34" charset="0"/>
+                <a:ea typeface="Manrope" pitchFamily="34" charset="-122"/>
+                <a:cs typeface="Manrope" pitchFamily="34" charset="-120"/>
+              </a:rPr>
+              <a:t>The summarizer model is held fixed across policies within a run.</a:t>
+            </a:r>
+            <a:endParaRPr lang="en-US" sz="1200" dirty="0"/>
+          </a:p>
+          <a:p>
+            <a:pPr marL="203200" indent="-203200">
+              <a:spcAft>
+                <a:spcPts val="800"/>
+              </a:spcAft>
+              <a:buSzPct val="100000"/>
+              <a:buChar char="•"/>
+            </a:pPr>
+            <a:r>
+              <a:rPr lang="en-US" sz="1200" dirty="0">
+                <a:solidFill>
+                  <a:srgbClr val="2E2C32"/>
+                </a:solidFill>
+                <a:latin typeface="Manrope" pitchFamily="34" charset="0"/>
+                <a:ea typeface="Manrope" pitchFamily="34" charset="-122"/>
+                <a:cs typeface="Manrope" pitchFamily="34" charset="-120"/>
+              </a:rPr>
+              <a:t>Coined needle tokens are recoverable only from context, not model priors.</a:t>
+            </a:r>
+            <a:endParaRPr lang="en-US" sz="1200" dirty="0"/>
+          </a:p>
+          <a:p>
+            <a:pPr marL="203200" indent="-203200">
+              <a:spcAft>
+                <a:spcPts val="800"/>
+              </a:spcAft>
+              <a:buSzPct val="100000"/>
+              <a:buChar char="•"/>
+            </a:pPr>
+            <a:r>
+              <a:rPr lang="en-US" sz="1200" dirty="0">
+                <a:solidFill>
+                  <a:srgbClr val="2E2C32"/>
+                </a:solidFill>
+                <a:latin typeface="Manrope" pitchFamily="34" charset="0"/>
+                <a:ea typeface="Manrope" pitchFamily="34" charset="-122"/>
+                <a:cs typeface="Manrope" pitchFamily="34" charset="-120"/>
+              </a:rPr>
+              <a:t>Synthetic transcripts approximate real agent compaction dynamics.</a:t>
+            </a:r>
+            <a:endParaRPr lang="en-US" sz="1200" dirty="0"/>
           </a:p>
         </p:txBody>
       </p:sp>
@@ -5182,7 +5965,7 @@
                 <a:ea typeface="Syne" pitchFamily="34" charset="-122"/>
                 <a:cs typeface="Syne" pitchFamily="34" charset="-120"/>
               </a:rPr>
-              <a:t>EXP-001 · THREATS TO VALIDITY</a:t>
+              <a:t>EXP-001 · METHOD</a:t>
             </a:r>
             <a:endParaRPr lang="en-US" sz="1100" dirty="0"/>
           </a:p>
@@ -5221,7 +6004,7 @@
                 <a:ea typeface="Syne" pitchFamily="34" charset="-122"/>
                 <a:cs typeface="Syne" pitchFamily="34" charset="-120"/>
               </a:rPr>
-              <a:t>What could make this wrong</a:t>
+              <a:t>Mode A — the controlled probe</a:t>
             </a:r>
             <a:endParaRPr lang="en-US" sz="2500" dirty="0"/>
           </a:p>
@@ -5243,8 +6026,8 @@
         </p:blipFill>
         <p:spPr>
           <a:xfrm>
-            <a:off x="548640" y="4718304"/>
-            <a:ext cx="237744" cy="179122"/>
+            <a:off x="548640" y="4736592"/>
+            <a:ext cx="219456" cy="165344"/>
           </a:xfrm>
           <a:prstGeom prst="rect">
             <a:avLst/>
@@ -5259,7 +6042,7 @@
         </p:nvSpPr>
         <p:spPr>
           <a:xfrm>
-            <a:off x="841248" y="4681728"/>
+            <a:off x="822960" y="4690872"/>
             <a:ext cx="1280160" cy="292608"/>
           </a:xfrm>
           <a:prstGeom prst="rect">
@@ -5312,7 +6095,7 @@
         </p:nvSpPr>
         <p:spPr>
           <a:xfrm>
-            <a:off x="8229600" y="4681728"/>
+            <a:off x="8229600" y="4690872"/>
             <a:ext cx="365760" cy="292608"/>
           </a:xfrm>
           <a:prstGeom prst="rect">
@@ -5337,7 +6120,7 @@
                 <a:ea typeface="Manrope" pitchFamily="34" charset="-122"/>
                 <a:cs typeface="Manrope" pitchFamily="34" charset="-120"/>
               </a:rPr>
-              <a:t>12</a:t>
+              <a:t>17</a:t>
             </a:r>
             <a:endParaRPr lang="en-US" sz="900" dirty="0"/>
           </a:p>
@@ -5351,7 +6134,7 @@
         </p:nvSpPr>
         <p:spPr>
           <a:xfrm>
-            <a:off x="548640" y="1600200"/>
+            <a:off x="548640" y="1645920"/>
             <a:ext cx="8046720" cy="2834640"/>
           </a:xfrm>
           <a:prstGeom prst="rect">
@@ -5366,7 +6149,7 @@
           <a:p>
             <a:pPr marL="203200" indent="-203200">
               <a:spcAft>
-                <a:spcPts val="900"/>
+                <a:spcPts val="800"/>
               </a:spcAft>
               <a:buSzPct val="100000"/>
               <a:buChar char="•"/>
@@ -5380,14 +6163,14 @@
                 <a:ea typeface="Manrope" pitchFamily="34" charset="-122"/>
                 <a:cs typeface="Manrope" pitchFamily="34" charset="-120"/>
               </a:rPr>
-              <a:t>Synthetic data + simulated agent — not a live decision-making run (Mode B is next).</a:t>
+              <a:t>Build a needle-bearing transcript (deterministic, seeded) up to run-length L.</a:t>
             </a:r>
             <a:endParaRPr lang="en-US" sz="1350" dirty="0"/>
           </a:p>
           <a:p>
             <a:pPr marL="203200" indent="-203200">
               <a:spcAft>
-                <a:spcPts val="900"/>
+                <a:spcPts val="800"/>
               </a:spcAft>
               <a:buSzPct val="100000"/>
               <a:buChar char="•"/>
@@ -5401,14 +6184,14 @@
                 <a:ea typeface="Manrope" pitchFamily="34" charset="-122"/>
                 <a:cs typeface="Manrope" pitchFamily="34" charset="-120"/>
               </a:rPr>
-              <a:t>Needle recall is a proxy for diffuse understanding; score normalization is a choice.</a:t>
+              <a:t>Compact it under budget B with each policy — the real model writes the summaries.</a:t>
             </a:r>
             <a:endParaRPr lang="en-US" sz="1350" dirty="0"/>
           </a:p>
           <a:p>
             <a:pPr marL="203200" indent="-203200">
               <a:spcAft>
-                <a:spcPts val="900"/>
+                <a:spcPts val="800"/>
               </a:spcAft>
               <a:buSzPct val="100000"/>
               <a:buChar char="•"/>
@@ -5422,14 +6205,14 @@
                 <a:ea typeface="Manrope" pitchFamily="34" charset="-122"/>
                 <a:cs typeface="Manrope" pitchFamily="34" charset="-120"/>
               </a:rPr>
-              <a:t>8b under-reads (weak instruction-following) — final numbers need 70b.</a:t>
+              <a:t>Probe: ask the model to recover the planted facts from the compacted window.</a:t>
             </a:r>
             <a:endParaRPr lang="en-US" sz="1350" dirty="0"/>
           </a:p>
           <a:p>
             <a:pPr marL="203200" indent="-203200">
               <a:spcAft>
-                <a:spcPts val="900"/>
+                <a:spcPts val="800"/>
               </a:spcAft>
               <a:buSzPct val="100000"/>
               <a:buChar char="•"/>
@@ -5443,7 +6226,28 @@
                 <a:ea typeface="Manrope" pitchFamily="34" charset="-122"/>
                 <a:cs typeface="Manrope" pitchFamily="34" charset="-120"/>
               </a:rPr>
-              <a:t>Single task domain; importance/semantic are crude heuristics, not embeddings.</a:t>
+              <a:t>Two metrics — fidelity (literal survival, scores the policy) vs probe (model recall@length).</a:t>
+            </a:r>
+            <a:endParaRPr lang="en-US" sz="1350" dirty="0"/>
+          </a:p>
+          <a:p>
+            <a:pPr marL="203200" indent="-203200">
+              <a:spcAft>
+                <a:spcPts val="800"/>
+              </a:spcAft>
+              <a:buSzPct val="100000"/>
+              <a:buChar char="•"/>
+            </a:pPr>
+            <a:r>
+              <a:rPr lang="en-US" sz="1350" dirty="0">
+                <a:solidFill>
+                  <a:srgbClr val="2E2C32"/>
+                </a:solidFill>
+                <a:latin typeface="Manrope" pitchFamily="34" charset="0"/>
+                <a:ea typeface="Manrope" pitchFamily="34" charset="-122"/>
+                <a:cs typeface="Manrope" pitchFamily="34" charset="-120"/>
+              </a:rPr>
+              <a:t>8b dev model on free NVIDIA NIM; paced + backed-off + cached; every prompt saved.</a:t>
             </a:r>
             <a:endParaRPr lang="en-US" sz="1350" dirty="0"/>
           </a:p>
@@ -5514,7 +6318,7 @@
                 <a:ea typeface="Syne" pitchFamily="34" charset="-122"/>
                 <a:cs typeface="Syne" pitchFamily="34" charset="-120"/>
               </a:rPr>
-              <a:t>WHERE THIS GOES</a:t>
+              <a:t>EXP-001 · RESULTS</a:t>
             </a:r>
             <a:endParaRPr lang="en-US" sz="1100" dirty="0"/>
           </a:p>
@@ -5545,7 +6349,7 @@
               <a:buNone/>
             </a:pPr>
             <a:r>
-              <a:rPr lang="en-US" sz="2700" b="1" dirty="0">
+              <a:rPr lang="en-US" sz="2500" b="1" dirty="0">
                 <a:solidFill>
                   <a:srgbClr val="2E2C32"/>
                 </a:solidFill>
@@ -5553,9 +6357,9 @@
                 <a:ea typeface="Syne" pitchFamily="34" charset="-122"/>
                 <a:cs typeface="Syne" pitchFamily="34" charset="-120"/>
               </a:rPr>
-              <a:t>Roadmap</a:t>
-            </a:r>
-            <a:endParaRPr lang="en-US" sz="2700" dirty="0"/>
+              <a:t>Quality vs cost by policy</a:t>
+            </a:r>
+            <a:endParaRPr lang="en-US" sz="2500" dirty="0"/>
           </a:p>
         </p:txBody>
       </p:sp>
@@ -5575,8 +6379,8 @@
         </p:blipFill>
         <p:spPr>
           <a:xfrm>
-            <a:off x="548640" y="4718304"/>
-            <a:ext cx="237744" cy="179122"/>
+            <a:off x="548640" y="4736592"/>
+            <a:ext cx="219456" cy="165344"/>
           </a:xfrm>
           <a:prstGeom prst="rect">
             <a:avLst/>
@@ -5591,7 +6395,7 @@
         </p:nvSpPr>
         <p:spPr>
           <a:xfrm>
-            <a:off x="841248" y="4681728"/>
+            <a:off x="822960" y="4690872"/>
             <a:ext cx="1280160" cy="292608"/>
           </a:xfrm>
           <a:prstGeom prst="rect">
@@ -5644,7 +6448,7 @@
         </p:nvSpPr>
         <p:spPr>
           <a:xfrm>
-            <a:off x="8229600" y="4681728"/>
+            <a:off x="8229600" y="4690872"/>
             <a:ext cx="365760" cy="292608"/>
           </a:xfrm>
           <a:prstGeom prst="rect">
@@ -5669,22 +6473,46 @@
                 <a:ea typeface="Manrope" pitchFamily="34" charset="-122"/>
                 <a:cs typeface="Manrope" pitchFamily="34" charset="-120"/>
               </a:rPr>
-              <a:t>12</a:t>
+              <a:t>18</a:t>
             </a:r>
             <a:endParaRPr lang="en-US" sz="900" dirty="0"/>
           </a:p>
         </p:txBody>
       </p:sp>
-      <p:sp>
-        <p:nvSpPr>
-          <p:cNvPr id="7" name="Text 4"/>
-          <p:cNvSpPr/>
-          <p:nvPr/>
-        </p:nvSpPr>
-        <p:spPr>
-          <a:xfrm>
-            <a:off x="548640" y="1600200"/>
-            <a:ext cx="8046720" cy="2834640"/>
+      <p:pic>
+        <p:nvPicPr>
+          <p:cNvPr id="7" name="Image 1" descr="/Users/kanishk/Desktop/agent-harness/.claude/worktrees/sleepy-sinoussi-00c73b/presentation/figures/EXP-001_pareto_v1.png">    </p:cNvPr>
+          <p:cNvPicPr>
+            <a:picLocks noChangeAspect="1"/>
+          </p:cNvPicPr>
+          <p:nvPr/>
+        </p:nvPicPr>
+        <p:blipFill>
+          <a:blip r:embed="rId2"/>
+          <a:stretch>
+            <a:fillRect/>
+          </a:stretch>
+        </p:blipFill>
+        <p:spPr>
+          <a:xfrm>
+            <a:off x="640080" y="1371600"/>
+            <a:ext cx="4846320" cy="3282696"/>
+          </a:xfrm>
+          <a:prstGeom prst="rect">
+            <a:avLst/>
+          </a:prstGeom>
+        </p:spPr>
+      </p:pic>
+      <p:sp>
+        <p:nvSpPr>
+          <p:cNvPr id="8" name="Text 4"/>
+          <p:cNvSpPr/>
+          <p:nvPr/>
+        </p:nvSpPr>
+        <p:spPr>
+          <a:xfrm>
+            <a:off x="5669280" y="1554480"/>
+            <a:ext cx="3017520" cy="2834640"/>
           </a:xfrm>
           <a:prstGeom prst="rect">
             <a:avLst/>
@@ -5698,34 +6526,34 @@
           <a:p>
             <a:pPr marL="203200" indent="-203200">
               <a:spcAft>
-                <a:spcPts val="900"/>
+                <a:spcPts val="800"/>
               </a:spcAft>
               <a:buSzPct val="100000"/>
               <a:buChar char="•"/>
             </a:pPr>
             <a:r>
-              <a:rPr lang="en-US" sz="1350" dirty="0">
-                <a:solidFill>
-                  <a:srgbClr val="2E2C32"/>
-                </a:solidFill>
-                <a:latin typeface="Manrope" pitchFamily="34" charset="0"/>
-                <a:ea typeface="Manrope" pitchFamily="34" charset="-122"/>
-                <a:cs typeface="Manrope" pitchFamily="34" charset="-120"/>
-              </a:rPr>
-              <a:t>EXP-002 — the 70b run: real numbers, the 128k ceiling, find B*.</a:t>
-            </a:r>
-            <a:endParaRPr lang="en-US" sz="1350" dirty="0"/>
+              <a:rPr lang="en-US" sz="1100" dirty="0">
+                <a:solidFill>
+                  <a:srgbClr val="655E74"/>
+                </a:solidFill>
+                <a:latin typeface="Manrope" pitchFamily="34" charset="0"/>
+                <a:ea typeface="Manrope" pitchFamily="34" charset="-122"/>
+                <a:cs typeface="Manrope" pitchFamily="34" charset="-120"/>
+              </a:rPr>
+              <a:t>Upper-left wins: more recall per token.</a:t>
+            </a:r>
+            <a:endParaRPr lang="en-US" sz="1300" dirty="0"/>
           </a:p>
           <a:p>
             <a:pPr marL="203200" indent="-203200">
               <a:spcAft>
-                <a:spcPts val="900"/>
+                <a:spcPts val="800"/>
               </a:spcAft>
               <a:buSzPct val="100000"/>
               <a:buChar char="•"/>
             </a:pPr>
             <a:r>
-              <a:rPr lang="en-US" sz="1350" dirty="0">
+              <a:rPr lang="en-US" sz="1300" dirty="0">
                 <a:solidFill>
                   <a:srgbClr val="2E2C32"/>
                 </a:solidFill>
@@ -5733,20 +6561,20 @@
                 <a:ea typeface="Manrope" pitchFamily="34" charset="-122"/>
                 <a:cs typeface="Manrope" pitchFamily="34" charset="-120"/>
               </a:rPr>
-              <a:t>EXP-003 — lost-in-the-middle: recall by needle depth (data already logged).</a:t>
-            </a:r>
-            <a:endParaRPr lang="en-US" sz="1350" dirty="0"/>
+              <a:t>Truncate is the floor.</a:t>
+            </a:r>
+            <a:endParaRPr lang="en-US" sz="1300" dirty="0"/>
           </a:p>
           <a:p>
             <a:pPr marL="203200" indent="-203200">
               <a:spcAft>
-                <a:spcPts val="900"/>
+                <a:spcPts val="800"/>
               </a:spcAft>
               <a:buSzPct val="100000"/>
               <a:buChar char="•"/>
             </a:pPr>
             <a:r>
-              <a:rPr lang="en-US" sz="1350" dirty="0">
+              <a:rPr lang="en-US" sz="1300" dirty="0">
                 <a:solidFill>
                   <a:srgbClr val="2E2C32"/>
                 </a:solidFill>
@@ -5754,20 +6582,20 @@
                 <a:ea typeface="Manrope" pitchFamily="34" charset="-122"/>
                 <a:cs typeface="Manrope" pitchFamily="34" charset="-120"/>
               </a:rPr>
-              <a:t>Real eval datasets (RULER / LongBench / BABILong) via HF datasets.</a:t>
-            </a:r>
-            <a:endParaRPr lang="en-US" sz="1350" dirty="0"/>
+              <a:t>Summary policies cluster higher.</a:t>
+            </a:r>
+            <a:endParaRPr lang="en-US" sz="1300" dirty="0"/>
           </a:p>
           <a:p>
             <a:pPr marL="203200" indent="-203200">
               <a:spcAft>
-                <a:spcPts val="900"/>
+                <a:spcPts val="800"/>
               </a:spcAft>
               <a:buSzPct val="100000"/>
               <a:buChar char="•"/>
             </a:pPr>
             <a:r>
-              <a:rPr lang="en-US" sz="1350" dirty="0">
+              <a:rPr lang="en-US" sz="1300" dirty="0">
                 <a:solidFill>
                   <a:srgbClr val="2E2C32"/>
                 </a:solidFill>
@@ -5775,30 +6603,9 @@
                 <a:ea typeface="Manrope" pitchFamily="34" charset="-122"/>
                 <a:cs typeface="Manrope" pitchFamily="34" charset="-120"/>
               </a:rPr>
-              <a:t>LangChain summary-memory as a baseline arm to beat.</a:t>
-            </a:r>
-            <a:endParaRPr lang="en-US" sz="1350" dirty="0"/>
-          </a:p>
-          <a:p>
-            <a:pPr marL="203200" indent="-203200">
-              <a:spcAft>
-                <a:spcPts val="900"/>
-              </a:spcAft>
-              <a:buSzPct val="100000"/>
-              <a:buChar char="•"/>
-            </a:pPr>
-            <a:r>
-              <a:rPr lang="en-US" sz="1350" dirty="0">
-                <a:solidFill>
-                  <a:srgbClr val="2E2C32"/>
-                </a:solidFill>
-                <a:latin typeface="Manrope" pitchFamily="34" charset="0"/>
-                <a:ea typeface="Manrope" pitchFamily="34" charset="-122"/>
-                <a:cs typeface="Manrope" pitchFamily="34" charset="-120"/>
-              </a:rPr>
-              <a:t>Mode B — the live agent loop for ecological validity. Then the paper.</a:t>
-            </a:r>
-            <a:endParaRPr lang="en-US" sz="1350" dirty="0"/>
+              <a:t>semantic best at B*=1000 (8b).</a:t>
+            </a:r>
+            <a:endParaRPr lang="en-US" sz="1300" dirty="0"/>
           </a:p>
         </p:txBody>
       </p:sp>
@@ -5867,7 +6674,7 @@
                 <a:ea typeface="Syne" pitchFamily="34" charset="-122"/>
                 <a:cs typeface="Syne" pitchFamily="34" charset="-120"/>
               </a:rPr>
-              <a:t>REFERENCES</a:t>
+              <a:t>EXP-001 · RESULTS</a:t>
             </a:r>
             <a:endParaRPr lang="en-US" sz="1100" dirty="0"/>
           </a:p>
@@ -5898,7 +6705,7 @@
               <a:buNone/>
             </a:pPr>
             <a:r>
-              <a:rPr lang="en-US" sz="2600" b="1" dirty="0">
+              <a:rPr lang="en-US" sz="2400" b="1" dirty="0">
                 <a:solidFill>
                   <a:srgbClr val="2E2C32"/>
                 </a:solidFill>
@@ -5906,9 +6713,9 @@
                 <a:ea typeface="Syne" pitchFamily="34" charset="-122"/>
                 <a:cs typeface="Syne" pitchFamily="34" charset="-120"/>
               </a:rPr>
-              <a:t>The literature this stands on</a:t>
-            </a:r>
-            <a:endParaRPr lang="en-US" sz="2600" dirty="0"/>
+              <a:t>Needle recall by policy &amp; budget</a:t>
+            </a:r>
+            <a:endParaRPr lang="en-US" sz="2400" dirty="0"/>
           </a:p>
         </p:txBody>
       </p:sp>
@@ -5928,8 +6735,8 @@
         </p:blipFill>
         <p:spPr>
           <a:xfrm>
-            <a:off x="548640" y="4718304"/>
-            <a:ext cx="237744" cy="179122"/>
+            <a:off x="548640" y="4736592"/>
+            <a:ext cx="219456" cy="165344"/>
           </a:xfrm>
           <a:prstGeom prst="rect">
             <a:avLst/>
@@ -5944,7 +6751,7 @@
         </p:nvSpPr>
         <p:spPr>
           <a:xfrm>
-            <a:off x="841248" y="4681728"/>
+            <a:off x="822960" y="4690872"/>
             <a:ext cx="1280160" cy="292608"/>
           </a:xfrm>
           <a:prstGeom prst="rect">
@@ -5997,7 +6804,7 @@
         </p:nvSpPr>
         <p:spPr>
           <a:xfrm>
-            <a:off x="8229600" y="4681728"/>
+            <a:off x="8229600" y="4690872"/>
             <a:ext cx="365760" cy="292608"/>
           </a:xfrm>
           <a:prstGeom prst="rect">
@@ -6022,22 +6829,46 @@
                 <a:ea typeface="Manrope" pitchFamily="34" charset="-122"/>
                 <a:cs typeface="Manrope" pitchFamily="34" charset="-120"/>
               </a:rPr>
-              <a:t>12</a:t>
+              <a:t>19</a:t>
             </a:r>
             <a:endParaRPr lang="en-US" sz="900" dirty="0"/>
           </a:p>
         </p:txBody>
       </p:sp>
-      <p:sp>
-        <p:nvSpPr>
-          <p:cNvPr id="7" name="Text 4"/>
-          <p:cNvSpPr/>
-          <p:nvPr/>
-        </p:nvSpPr>
-        <p:spPr>
-          <a:xfrm>
-            <a:off x="548640" y="1600200"/>
-            <a:ext cx="8046720" cy="2834640"/>
+      <p:pic>
+        <p:nvPicPr>
+          <p:cNvPr id="7" name="Image 1" descr="/Users/kanishk/Desktop/agent-harness/.claude/worktrees/sleepy-sinoussi-00c73b/presentation/figures/EXP-001_recall_by_policy_v1.png">    </p:cNvPr>
+          <p:cNvPicPr>
+            <a:picLocks noChangeAspect="1"/>
+          </p:cNvPicPr>
+          <p:nvPr/>
+        </p:nvPicPr>
+        <p:blipFill>
+          <a:blip r:embed="rId2"/>
+          <a:stretch>
+            <a:fillRect/>
+          </a:stretch>
+        </p:blipFill>
+        <p:spPr>
+          <a:xfrm>
+            <a:off x="640080" y="1371600"/>
+            <a:ext cx="4846320" cy="3282696"/>
+          </a:xfrm>
+          <a:prstGeom prst="rect">
+            <a:avLst/>
+          </a:prstGeom>
+        </p:spPr>
+      </p:pic>
+      <p:sp>
+        <p:nvSpPr>
+          <p:cNvPr id="8" name="Text 4"/>
+          <p:cNvSpPr/>
+          <p:nvPr/>
+        </p:nvSpPr>
+        <p:spPr>
+          <a:xfrm>
+            <a:off x="5669280" y="1554480"/>
+            <a:ext cx="3017520" cy="2834640"/>
           </a:xfrm>
           <a:prstGeom prst="rect">
             <a:avLst/>
@@ -6051,7 +6882,7 @@
           <a:p>
             <a:pPr marL="203200" indent="-203200">
               <a:spcAft>
-                <a:spcPts val="900"/>
+                <a:spcPts val="800"/>
               </a:spcAft>
               <a:buSzPct val="100000"/>
               <a:buChar char="•"/>
@@ -6059,26 +6890,26 @@
             <a:r>
               <a:rPr lang="en-US" sz="1300" dirty="0">
                 <a:solidFill>
-                  <a:srgbClr val="655E74"/>
-                </a:solidFill>
-                <a:latin typeface="Manrope" pitchFamily="34" charset="0"/>
-                <a:ea typeface="Manrope" pitchFamily="34" charset="-122"/>
-                <a:cs typeface="Manrope" pitchFamily="34" charset="-120"/>
-              </a:rPr>
-              <a:t>Lost in the Middle — Liu et al., arXiv:2307.03172.</a:t>
+                  <a:srgbClr val="2E2C32"/>
+                </a:solidFill>
+                <a:latin typeface="Manrope" pitchFamily="34" charset="0"/>
+                <a:ea typeface="Manrope" pitchFamily="34" charset="-122"/>
+                <a:cs typeface="Manrope" pitchFamily="34" charset="-120"/>
+              </a:rPr>
+              <a:t>Recall as a fraction (poolable across needle counts).</a:t>
             </a:r>
             <a:endParaRPr lang="en-US" sz="1300" dirty="0"/>
           </a:p>
           <a:p>
             <a:pPr marL="203200" indent="-203200">
               <a:spcAft>
-                <a:spcPts val="900"/>
+                <a:spcPts val="800"/>
               </a:spcAft>
               <a:buSzPct val="100000"/>
               <a:buChar char="•"/>
             </a:pPr>
             <a:r>
-              <a:rPr lang="en-US" sz="1300" dirty="0">
+              <a:rPr lang="en-US" sz="1100" dirty="0">
                 <a:solidFill>
                   <a:srgbClr val="655E74"/>
                 </a:solidFill>
@@ -6086,14 +6917,14 @@
                 <a:ea typeface="Manrope" pitchFamily="34" charset="-122"/>
                 <a:cs typeface="Manrope" pitchFamily="34" charset="-120"/>
               </a:rPr>
-              <a:t>RULER — Hsieh et al., 2404.06654 · HELMET — Yen et al., 2410.02694.</a:t>
+              <a:t>Error bars = sd across seeds (honest now).</a:t>
             </a:r>
             <a:endParaRPr lang="en-US" sz="1300" dirty="0"/>
           </a:p>
           <a:p>
             <a:pPr marL="203200" indent="-203200">
               <a:spcAft>
-                <a:spcPts val="900"/>
+                <a:spcPts val="800"/>
               </a:spcAft>
               <a:buSzPct val="100000"/>
               <a:buChar char="•"/>
@@ -6101,55 +6932,13 @@
             <a:r>
               <a:rPr lang="en-US" sz="1300" dirty="0">
                 <a:solidFill>
-                  <a:srgbClr val="655E74"/>
-                </a:solidFill>
-                <a:latin typeface="Manrope" pitchFamily="34" charset="0"/>
-                <a:ea typeface="Manrope" pitchFamily="34" charset="-122"/>
-                <a:cs typeface="Manrope" pitchFamily="34" charset="-120"/>
-              </a:rPr>
-              <a:t>MemGPT — Packer et al., 2310.08560 · LLMLingua — Jiang et al., 2310.05736.</a:t>
-            </a:r>
-            <a:endParaRPr lang="en-US" sz="1300" dirty="0"/>
-          </a:p>
-          <a:p>
-            <a:pPr marL="203200" indent="-203200">
-              <a:spcAft>
-                <a:spcPts val="900"/>
-              </a:spcAft>
-              <a:buSzPct val="100000"/>
-              <a:buChar char="•"/>
-            </a:pPr>
-            <a:r>
-              <a:rPr lang="en-US" sz="1300" dirty="0">
-                <a:solidFill>
-                  <a:srgbClr val="655E74"/>
-                </a:solidFill>
-                <a:latin typeface="Manrope" pitchFamily="34" charset="0"/>
-                <a:ea typeface="Manrope" pitchFamily="34" charset="-122"/>
-                <a:cs typeface="Manrope" pitchFamily="34" charset="-120"/>
-              </a:rPr>
-              <a:t>Judging LLM-as-a-Judge — Zheng et al., 2306.05685.</a:t>
-            </a:r>
-            <a:endParaRPr lang="en-US" sz="1300" dirty="0"/>
-          </a:p>
-          <a:p>
-            <a:pPr marL="203200" indent="-203200">
-              <a:spcAft>
-                <a:spcPts val="900"/>
-              </a:spcAft>
-              <a:buSzPct val="100000"/>
-              <a:buChar char="•"/>
-            </a:pPr>
-            <a:r>
-              <a:rPr lang="en-US" sz="1300" dirty="0">
-                <a:solidFill>
-                  <a:srgbClr val="655E74"/>
-                </a:solidFill>
-                <a:latin typeface="Manrope" pitchFamily="34" charset="0"/>
-                <a:ea typeface="Manrope" pitchFamily="34" charset="-122"/>
-                <a:cs typeface="Manrope" pitchFamily="34" charset="-120"/>
-              </a:rPr>
-              <a:t>Effective context engineering for AI agents — Anthropic, 2025.</a:t>
+                  <a:srgbClr val="2E2C32"/>
+                </a:solidFill>
+                <a:latin typeface="Manrope" pitchFamily="34" charset="0"/>
+                <a:ea typeface="Manrope" pitchFamily="34" charset="-122"/>
+                <a:cs typeface="Manrope" pitchFamily="34" charset="-120"/>
+              </a:rPr>
+              <a:t>importance is tail-bound at small budgets.</a:t>
             </a:r>
             <a:endParaRPr lang="en-US" sz="1300" dirty="0"/>
           </a:p>
@@ -6220,7 +7009,7 @@
                 <a:ea typeface="Syne" pitchFamily="34" charset="-122"/>
                 <a:cs typeface="Syne" pitchFamily="34" charset="-120"/>
               </a:rPr>
-              <a:t>THE PROBLEM</a:t>
+              <a:t>WHAT IT IS</a:t>
             </a:r>
             <a:endParaRPr lang="en-US" sz="1100" dirty="0"/>
           </a:p>
@@ -6251,7 +7040,7 @@
               <a:buNone/>
             </a:pPr>
             <a:r>
-              <a:rPr lang="en-US" sz="2700" b="1" dirty="0">
+              <a:rPr lang="en-US" sz="2600" b="1" dirty="0">
                 <a:solidFill>
                   <a:srgbClr val="2E2C32"/>
                 </a:solidFill>
@@ -6259,9 +7048,9 @@
                 <a:ea typeface="Syne" pitchFamily="34" charset="-122"/>
                 <a:cs typeface="Syne" pitchFamily="34" charset="-120"/>
               </a:rPr>
-              <a:t>Brilliant at 5 steps. Dead at 50.</a:t>
-            </a:r>
-            <a:endParaRPr lang="en-US" sz="2700" dirty="0"/>
+              <a:t>Context engineering, defined.</a:t>
+            </a:r>
+            <a:endParaRPr lang="en-US" sz="2600" dirty="0"/>
           </a:p>
         </p:txBody>
       </p:sp>
@@ -6281,8 +7070,8 @@
         </p:blipFill>
         <p:spPr>
           <a:xfrm>
-            <a:off x="548640" y="4718304"/>
-            <a:ext cx="237744" cy="179122"/>
+            <a:off x="548640" y="4736592"/>
+            <a:ext cx="219456" cy="165344"/>
           </a:xfrm>
           <a:prstGeom prst="rect">
             <a:avLst/>
@@ -6297,7 +7086,7 @@
         </p:nvSpPr>
         <p:spPr>
           <a:xfrm>
-            <a:off x="841248" y="4681728"/>
+            <a:off x="822960" y="4690872"/>
             <a:ext cx="1280160" cy="292608"/>
           </a:xfrm>
           <a:prstGeom prst="rect">
@@ -6350,7 +7139,7 @@
         </p:nvSpPr>
         <p:spPr>
           <a:xfrm>
-            <a:off x="8229600" y="4681728"/>
+            <a:off x="8229600" y="4690872"/>
             <a:ext cx="365760" cy="292608"/>
           </a:xfrm>
           <a:prstGeom prst="rect">
@@ -6389,8 +7178,47 @@
         </p:nvSpPr>
         <p:spPr>
           <a:xfrm>
-            <a:off x="548640" y="1645920"/>
-            <a:ext cx="4572000" cy="2834640"/>
+            <a:off x="548640" y="1508760"/>
+            <a:ext cx="8046720" cy="457200"/>
+          </a:xfrm>
+          <a:prstGeom prst="rect">
+            <a:avLst/>
+          </a:prstGeom>
+          <a:noFill/>
+          <a:ln/>
+        </p:spPr>
+        <p:txBody>
+          <a:bodyPr wrap="square" lIns="0" tIns="0" rIns="0" bIns="0" rtlCol="0" anchor="ctr"/>
+          <a:lstStyle/>
+          <a:p>
+            <a:pPr indent="0" marL="0">
+              <a:buNone/>
+            </a:pPr>
+            <a:r>
+              <a:rPr lang="en-US" sz="1900" b="1" dirty="0">
+                <a:solidFill>
+                  <a:srgbClr val="2E2C32"/>
+                </a:solidFill>
+                <a:latin typeface="Manrope" pitchFamily="34" charset="0"/>
+                <a:ea typeface="Manrope" pitchFamily="34" charset="-122"/>
+                <a:cs typeface="Manrope" pitchFamily="34" charset="-120"/>
+              </a:rPr>
+              <a:t>Deciding what the model sees on every turn.</a:t>
+            </a:r>
+            <a:endParaRPr lang="en-US" sz="1900" dirty="0"/>
+          </a:p>
+        </p:txBody>
+      </p:sp>
+      <p:sp>
+        <p:nvSpPr>
+          <p:cNvPr id="8" name="Text 5"/>
+          <p:cNvSpPr/>
+          <p:nvPr/>
+        </p:nvSpPr>
+        <p:spPr>
+          <a:xfrm>
+            <a:off x="548640" y="2148840"/>
+            <a:ext cx="8046720" cy="2834640"/>
           </a:xfrm>
           <a:prstGeom prst="rect">
             <a:avLst/>
@@ -6404,7 +7232,7 @@
           <a:p>
             <a:pPr marL="203200" indent="-203200">
               <a:spcAft>
-                <a:spcPts val="900"/>
+                <a:spcPts val="800"/>
               </a:spcAft>
               <a:buSzPct val="100000"/>
               <a:buChar char="•"/>
@@ -6418,14 +7246,14 @@
                 <a:ea typeface="Manrope" pitchFamily="34" charset="-122"/>
                 <a:cs typeface="Manrope" pitchFamily="34" charset="-120"/>
               </a:rPr>
-              <a:t>Same model. Same 40-line loop. It drifts, repeats itself, forgets its goal —</a:t>
+              <a:t>The model is stateless. Each turn, the harness hands it one list of messages — and that list IS the agent's entire mind for that turn.</a:t>
             </a:r>
             <a:endParaRPr lang="en-US" sz="1500" dirty="0"/>
           </a:p>
           <a:p>
             <a:pPr marL="203200" indent="-203200">
               <a:spcAft>
-                <a:spcPts val="900"/>
+                <a:spcPts val="800"/>
               </a:spcAft>
               <a:buSzPct val="100000"/>
               <a:buChar char="•"/>
@@ -6439,14 +7267,14 @@
                 <a:ea typeface="Manrope" pitchFamily="34" charset="-122"/>
                 <a:cs typeface="Manrope" pitchFamily="34" charset="-120"/>
               </a:rPr>
-              <a:t>then hits the hard context limit and the run just dies.</a:t>
+              <a:t>Prompt engineering writes the instruction. Context engineering manages the whole working set: what to keep, summarize, externalize, and drop.</a:t>
             </a:r>
             <a:endParaRPr lang="en-US" sz="1500" dirty="0"/>
           </a:p>
           <a:p>
             <a:pPr marL="203200" indent="-203200">
               <a:spcAft>
-                <a:spcPts val="900"/>
+                <a:spcPts val="800"/>
               </a:spcAft>
               <a:buSzPct val="100000"/>
               <a:buChar char="•"/>
@@ -6460,31 +7288,982 @@
                 <a:ea typeface="Manrope" pitchFamily="34" charset="-122"/>
                 <a:cs typeface="Manrope" pitchFamily="34" charset="-120"/>
               </a:rPr>
-              <a:t>Nothing changed in the model. Something filled up.</a:t>
+              <a:t>It's the difference between an agent that runs for 5 steps and one that runs for 50.</a:t>
             </a:r>
             <a:endParaRPr lang="en-US" sz="1500" dirty="0"/>
           </a:p>
         </p:txBody>
       </p:sp>
-      <p:sp>
-        <p:nvSpPr>
-          <p:cNvPr id="8" name="Shape 5"/>
-          <p:cNvSpPr/>
-          <p:nvPr/>
-        </p:nvSpPr>
-        <p:spPr>
-          <a:xfrm>
-            <a:off x="5669280" y="1737360"/>
-            <a:ext cx="2743200" cy="457200"/>
-          </a:xfrm>
-          <a:prstGeom prst="rect">
-            <a:avLst/>
-          </a:prstGeom>
-          <a:solidFill>
-            <a:srgbClr val="F7C1C1"/>
-          </a:solidFill>
-          <a:ln/>
-        </p:spPr>
+    </p:spTree>
+  </p:cSld>
+  <p:clrMapOvr>
+    <a:masterClrMapping/>
+  </p:clrMapOvr>
+</p:sld>
+</file>
+
+<file path=ppt/slides/slide20.xml><?xml version="1.0" encoding="utf-8"?>
+<p:sld xmlns:a="http://schemas.openxmlformats.org/drawingml/2006/main" xmlns:r="http://schemas.openxmlformats.org/officeDocument/2006/relationships" xmlns:p="http://schemas.openxmlformats.org/presentationml/2006/main">
+  <p:cSld name="Slide 20">
+    <p:bg>
+      <p:bgPr>
+        <a:solidFill>
+          <a:srgbClr val="FAFAFE"/>
+        </a:solidFill>
+      </p:bgPr>
+    </p:bg>
+    <p:spTree>
+      <p:nvGrpSpPr>
+        <p:cNvPr id="1" name=""/>
+        <p:cNvGrpSpPr/>
+        <p:nvPr/>
+      </p:nvGrpSpPr>
+      <p:grpSpPr>
+        <a:xfrm>
+          <a:off x="0" y="0"/>
+          <a:ext cx="0" cy="0"/>
+          <a:chOff x="0" y="0"/>
+          <a:chExt cx="0" cy="0"/>
+        </a:xfrm>
+      </p:grpSpPr>
+      <p:sp>
+        <p:nvSpPr>
+          <p:cNvPr id="2" name="Text 0"/>
+          <p:cNvSpPr/>
+          <p:nvPr/>
+        </p:nvSpPr>
+        <p:spPr>
+          <a:xfrm>
+            <a:off x="548640" y="365760"/>
+            <a:ext cx="8046720" cy="274320"/>
+          </a:xfrm>
+          <a:prstGeom prst="rect">
+            <a:avLst/>
+          </a:prstGeom>
+          <a:noFill/>
+          <a:ln/>
+        </p:spPr>
+        <p:txBody>
+          <a:bodyPr wrap="square" lIns="0" tIns="0" rIns="0" bIns="0" rtlCol="0" anchor="ctr"/>
+          <a:lstStyle/>
+          <a:p>
+            <a:pPr indent="0" marL="0">
+              <a:buNone/>
+            </a:pPr>
+            <a:r>
+              <a:rPr lang="en-US" sz="1100" b="1" spc="300" kern="0" dirty="0">
+                <a:solidFill>
+                  <a:srgbClr val="9378FF"/>
+                </a:solidFill>
+                <a:latin typeface="Syne" pitchFamily="34" charset="0"/>
+                <a:ea typeface="Syne" pitchFamily="34" charset="-122"/>
+                <a:cs typeface="Syne" pitchFamily="34" charset="-120"/>
+              </a:rPr>
+              <a:t>EXP-001 · RESULTS</a:t>
+            </a:r>
+            <a:endParaRPr lang="en-US" sz="1100" dirty="0"/>
+          </a:p>
+        </p:txBody>
+      </p:sp>
+      <p:sp>
+        <p:nvSpPr>
+          <p:cNvPr id="3" name="Text 1"/>
+          <p:cNvSpPr/>
+          <p:nvPr/>
+        </p:nvSpPr>
+        <p:spPr>
+          <a:xfrm>
+            <a:off x="548640" y="640080"/>
+            <a:ext cx="8046720" cy="868680"/>
+          </a:xfrm>
+          <a:prstGeom prst="rect">
+            <a:avLst/>
+          </a:prstGeom>
+          <a:noFill/>
+          <a:ln/>
+        </p:spPr>
+        <p:txBody>
+          <a:bodyPr wrap="square" lIns="0" tIns="0" rIns="0" bIns="0" rtlCol="0" anchor="t"/>
+          <a:lstStyle/>
+          <a:p>
+            <a:pPr indent="0" marL="0">
+              <a:buNone/>
+            </a:pPr>
+            <a:r>
+              <a:rPr lang="en-US" sz="2300" b="1" dirty="0">
+                <a:solidFill>
+                  <a:srgbClr val="2E2C32"/>
+                </a:solidFill>
+                <a:latin typeface="Syne" pitchFamily="34" charset="0"/>
+                <a:ea typeface="Syne" pitchFamily="34" charset="-122"/>
+                <a:cs typeface="Syne" pitchFamily="34" charset="-120"/>
+              </a:rPr>
+              <a:t>No-compaction baseline &amp; the wall</a:t>
+            </a:r>
+            <a:endParaRPr lang="en-US" sz="2300" dirty="0"/>
+          </a:p>
+        </p:txBody>
+      </p:sp>
+      <p:pic>
+        <p:nvPicPr>
+          <p:cNvPr id="4" name="Image 0" descr="preencoded.png">    </p:cNvPr>
+          <p:cNvPicPr>
+            <a:picLocks noChangeAspect="1"/>
+          </p:cNvPicPr>
+          <p:nvPr/>
+        </p:nvPicPr>
+        <p:blipFill>
+          <a:blip r:embed="rId1"/>
+          <a:stretch>
+            <a:fillRect/>
+          </a:stretch>
+        </p:blipFill>
+        <p:spPr>
+          <a:xfrm>
+            <a:off x="548640" y="4736592"/>
+            <a:ext cx="219456" cy="165344"/>
+          </a:xfrm>
+          <a:prstGeom prst="rect">
+            <a:avLst/>
+          </a:prstGeom>
+        </p:spPr>
+      </p:pic>
+      <p:sp>
+        <p:nvSpPr>
+          <p:cNvPr id="5" name="Text 2"/>
+          <p:cNvSpPr/>
+          <p:nvPr/>
+        </p:nvSpPr>
+        <p:spPr>
+          <a:xfrm>
+            <a:off x="822960" y="4690872"/>
+            <a:ext cx="1280160" cy="292608"/>
+          </a:xfrm>
+          <a:prstGeom prst="rect">
+            <a:avLst/>
+          </a:prstGeom>
+          <a:noFill/>
+          <a:ln/>
+        </p:spPr>
+        <p:txBody>
+          <a:bodyPr wrap="square" lIns="0" tIns="0" rIns="0" bIns="0" rtlCol="0" anchor="ctr"/>
+          <a:lstStyle/>
+          <a:p>
+            <a:pPr indent="0" marL="0">
+              <a:buNone/>
+            </a:pPr>
+            <a:r>
+              <a:rPr lang="en-US" sz="1100" b="1" dirty="0">
+                <a:solidFill>
+                  <a:srgbClr val="2E2C32"/>
+                </a:solidFill>
+                <a:latin typeface="Syne" pitchFamily="34" charset="0"/>
+                <a:ea typeface="Syne" pitchFamily="34" charset="-122"/>
+                <a:cs typeface="Syne" pitchFamily="34" charset="-120"/>
+              </a:rPr>
+              <a:t>Founsi</a:t>
+            </a:r>
+            <a:pPr indent="0" marL="0">
+              <a:buNone/>
+            </a:pPr>
+            <a:r>
+              <a:rPr lang="en-US" sz="1100" b="1" dirty="0">
+                <a:solidFill>
+                  <a:srgbClr val="9378FF"/>
+                </a:solidFill>
+                <a:latin typeface="Syne" pitchFamily="34" charset="0"/>
+                <a:ea typeface="Syne" pitchFamily="34" charset="-122"/>
+                <a:cs typeface="Syne" pitchFamily="34" charset="-120"/>
+              </a:rPr>
+              <a:t>.</a:t>
+            </a:r>
+            <a:endParaRPr lang="en-US" sz="1100" dirty="0"/>
+          </a:p>
+        </p:txBody>
+      </p:sp>
+      <p:sp>
+        <p:nvSpPr>
+          <p:cNvPr id="6" name="Text 3"/>
+          <p:cNvSpPr/>
+          <p:nvPr/>
+        </p:nvSpPr>
+        <p:spPr>
+          <a:xfrm>
+            <a:off x="8229600" y="4690872"/>
+            <a:ext cx="365760" cy="292608"/>
+          </a:xfrm>
+          <a:prstGeom prst="rect">
+            <a:avLst/>
+          </a:prstGeom>
+          <a:noFill/>
+          <a:ln/>
+        </p:spPr>
+        <p:txBody>
+          <a:bodyPr wrap="square" lIns="0" tIns="0" rIns="0" bIns="0" rtlCol="0" anchor="ctr"/>
+          <a:lstStyle/>
+          <a:p>
+            <a:pPr algn="r" indent="0" marL="0">
+              <a:buNone/>
+            </a:pPr>
+            <a:r>
+              <a:rPr lang="en-US" sz="900" dirty="0">
+                <a:solidFill>
+                  <a:srgbClr val="7E7A8A"/>
+                </a:solidFill>
+                <a:latin typeface="Manrope" pitchFamily="34" charset="0"/>
+                <a:ea typeface="Manrope" pitchFamily="34" charset="-122"/>
+                <a:cs typeface="Manrope" pitchFamily="34" charset="-120"/>
+              </a:rPr>
+              <a:t>20</a:t>
+            </a:r>
+            <a:endParaRPr lang="en-US" sz="900" dirty="0"/>
+          </a:p>
+        </p:txBody>
+      </p:sp>
+      <p:pic>
+        <p:nvPicPr>
+          <p:cNvPr id="7" name="Image 1" descr="/Users/kanishk/Desktop/agent-harness/.claude/worktrees/sleepy-sinoussi-00c73b/presentation/figures/EXP-001_baseline_recall_v1.png">    </p:cNvPr>
+          <p:cNvPicPr>
+            <a:picLocks noChangeAspect="1"/>
+          </p:cNvPicPr>
+          <p:nvPr/>
+        </p:nvPicPr>
+        <p:blipFill>
+          <a:blip r:embed="rId2"/>
+          <a:stretch>
+            <a:fillRect/>
+          </a:stretch>
+        </p:blipFill>
+        <p:spPr>
+          <a:xfrm>
+            <a:off x="640080" y="1371600"/>
+            <a:ext cx="4846320" cy="3282696"/>
+          </a:xfrm>
+          <a:prstGeom prst="rect">
+            <a:avLst/>
+          </a:prstGeom>
+        </p:spPr>
+      </p:pic>
+      <p:sp>
+        <p:nvSpPr>
+          <p:cNvPr id="8" name="Text 4"/>
+          <p:cNvSpPr/>
+          <p:nvPr/>
+        </p:nvSpPr>
+        <p:spPr>
+          <a:xfrm>
+            <a:off x="5669280" y="1554480"/>
+            <a:ext cx="3017520" cy="2834640"/>
+          </a:xfrm>
+          <a:prstGeom prst="rect">
+            <a:avLst/>
+          </a:prstGeom>
+          <a:noFill/>
+          <a:ln/>
+        </p:spPr>
+        <p:txBody>
+          <a:bodyPr wrap="square" rtlCol="0" anchor="ctr"/>
+          <a:lstStyle/>
+          <a:p>
+            <a:pPr marL="203200" indent="-203200">
+              <a:spcAft>
+                <a:spcPts val="800"/>
+              </a:spcAft>
+              <a:buSzPct val="100000"/>
+              <a:buChar char="•"/>
+            </a:pPr>
+            <a:r>
+              <a:rPr lang="en-US" sz="1300" dirty="0">
+                <a:solidFill>
+                  <a:srgbClr val="2E2C32"/>
+                </a:solidFill>
+                <a:latin typeface="Manrope" pitchFamily="34" charset="0"/>
+                <a:ea typeface="Manrope" pitchFamily="34" charset="-122"/>
+                <a:cs typeface="Manrope" pitchFamily="34" charset="-120"/>
+              </a:rPr>
+              <a:t>Baseline grows raw context, measures recall vs length.</a:t>
+            </a:r>
+            <a:endParaRPr lang="en-US" sz="1300" dirty="0"/>
+          </a:p>
+          <a:p>
+            <a:pPr marL="203200" indent="-203200">
+              <a:spcAft>
+                <a:spcPts val="800"/>
+              </a:spcAft>
+              <a:buSzPct val="100000"/>
+              <a:buChar char="•"/>
+            </a:pPr>
+            <a:r>
+              <a:rPr lang="en-US" sz="1100" dirty="0">
+                <a:solidFill>
+                  <a:srgbClr val="655E74"/>
+                </a:solidFill>
+                <a:latin typeface="Manrope" pitchFamily="34" charset="0"/>
+                <a:ea typeface="Manrope" pitchFamily="34" charset="-122"/>
+                <a:cs typeface="Manrope" pitchFamily="34" charset="-120"/>
+              </a:rPr>
+              <a:t>Exceed the model's max window -&gt; context_overflow: the agent dies.</a:t>
+            </a:r>
+            <a:endParaRPr lang="en-US" sz="1300" dirty="0"/>
+          </a:p>
+          <a:p>
+            <a:pPr marL="203200" indent="-203200">
+              <a:spcAft>
+                <a:spcPts val="800"/>
+              </a:spcAft>
+              <a:buSzPct val="100000"/>
+              <a:buChar char="•"/>
+            </a:pPr>
+            <a:r>
+              <a:rPr lang="en-US" sz="1300" dirty="0">
+                <a:solidFill>
+                  <a:srgbClr val="2E2C32"/>
+                </a:solidFill>
+                <a:latin typeface="Manrope" pitchFamily="34" charset="0"/>
+                <a:ea typeface="Manrope" pitchFamily="34" charset="-122"/>
+                <a:cs typeface="Manrope" pitchFamily="34" charset="-120"/>
+              </a:rPr>
+              <a:t>Compaction is the fix; we measure the deaths it prevents.</a:t>
+            </a:r>
+            <a:endParaRPr lang="en-US" sz="1300" dirty="0"/>
+          </a:p>
+        </p:txBody>
+      </p:sp>
+    </p:spTree>
+  </p:cSld>
+  <p:clrMapOvr>
+    <a:masterClrMapping/>
+  </p:clrMapOvr>
+</p:sld>
+</file>
+
+<file path=ppt/slides/slide21.xml><?xml version="1.0" encoding="utf-8"?>
+<p:sld xmlns:a="http://schemas.openxmlformats.org/drawingml/2006/main" xmlns:r="http://schemas.openxmlformats.org/officeDocument/2006/relationships" xmlns:p="http://schemas.openxmlformats.org/presentationml/2006/main">
+  <p:cSld name="Slide 21">
+    <p:bg>
+      <p:bgPr>
+        <a:solidFill>
+          <a:srgbClr val="FAFAFE"/>
+        </a:solidFill>
+      </p:bgPr>
+    </p:bg>
+    <p:spTree>
+      <p:nvGrpSpPr>
+        <p:cNvPr id="1" name=""/>
+        <p:cNvGrpSpPr/>
+        <p:nvPr/>
+      </p:nvGrpSpPr>
+      <p:grpSpPr>
+        <a:xfrm>
+          <a:off x="0" y="0"/>
+          <a:ext cx="0" cy="0"/>
+          <a:chOff x="0" y="0"/>
+          <a:chExt cx="0" cy="0"/>
+        </a:xfrm>
+      </p:grpSpPr>
+      <p:sp>
+        <p:nvSpPr>
+          <p:cNvPr id="2" name="Text 0"/>
+          <p:cNvSpPr/>
+          <p:nvPr/>
+        </p:nvSpPr>
+        <p:spPr>
+          <a:xfrm>
+            <a:off x="548640" y="365760"/>
+            <a:ext cx="8046720" cy="274320"/>
+          </a:xfrm>
+          <a:prstGeom prst="rect">
+            <a:avLst/>
+          </a:prstGeom>
+          <a:noFill/>
+          <a:ln/>
+        </p:spPr>
+        <p:txBody>
+          <a:bodyPr wrap="square" lIns="0" tIns="0" rIns="0" bIns="0" rtlCol="0" anchor="ctr"/>
+          <a:lstStyle/>
+          <a:p>
+            <a:pPr indent="0" marL="0">
+              <a:buNone/>
+            </a:pPr>
+            <a:r>
+              <a:rPr lang="en-US" sz="1100" b="1" spc="300" kern="0" dirty="0">
+                <a:solidFill>
+                  <a:srgbClr val="9378FF"/>
+                </a:solidFill>
+                <a:latin typeface="Syne" pitchFamily="34" charset="0"/>
+                <a:ea typeface="Syne" pitchFamily="34" charset="-122"/>
+                <a:cs typeface="Syne" pitchFamily="34" charset="-120"/>
+              </a:rPr>
+              <a:t>EXP-001 · THREATS TO VALIDITY</a:t>
+            </a:r>
+            <a:endParaRPr lang="en-US" sz="1100" dirty="0"/>
+          </a:p>
+        </p:txBody>
+      </p:sp>
+      <p:sp>
+        <p:nvSpPr>
+          <p:cNvPr id="3" name="Text 1"/>
+          <p:cNvSpPr/>
+          <p:nvPr/>
+        </p:nvSpPr>
+        <p:spPr>
+          <a:xfrm>
+            <a:off x="548640" y="640080"/>
+            <a:ext cx="8046720" cy="868680"/>
+          </a:xfrm>
+          <a:prstGeom prst="rect">
+            <a:avLst/>
+          </a:prstGeom>
+          <a:noFill/>
+          <a:ln/>
+        </p:spPr>
+        <p:txBody>
+          <a:bodyPr wrap="square" lIns="0" tIns="0" rIns="0" bIns="0" rtlCol="0" anchor="t"/>
+          <a:lstStyle/>
+          <a:p>
+            <a:pPr indent="0" marL="0">
+              <a:buNone/>
+            </a:pPr>
+            <a:r>
+              <a:rPr lang="en-US" sz="2500" b="1" dirty="0">
+                <a:solidFill>
+                  <a:srgbClr val="2E2C32"/>
+                </a:solidFill>
+                <a:latin typeface="Syne" pitchFamily="34" charset="0"/>
+                <a:ea typeface="Syne" pitchFamily="34" charset="-122"/>
+                <a:cs typeface="Syne" pitchFamily="34" charset="-120"/>
+              </a:rPr>
+              <a:t>What could make this wrong</a:t>
+            </a:r>
+            <a:endParaRPr lang="en-US" sz="2500" dirty="0"/>
+          </a:p>
+        </p:txBody>
+      </p:sp>
+      <p:pic>
+        <p:nvPicPr>
+          <p:cNvPr id="4" name="Image 0" descr="preencoded.png">    </p:cNvPr>
+          <p:cNvPicPr>
+            <a:picLocks noChangeAspect="1"/>
+          </p:cNvPicPr>
+          <p:nvPr/>
+        </p:nvPicPr>
+        <p:blipFill>
+          <a:blip r:embed="rId1"/>
+          <a:stretch>
+            <a:fillRect/>
+          </a:stretch>
+        </p:blipFill>
+        <p:spPr>
+          <a:xfrm>
+            <a:off x="548640" y="4736592"/>
+            <a:ext cx="219456" cy="165344"/>
+          </a:xfrm>
+          <a:prstGeom prst="rect">
+            <a:avLst/>
+          </a:prstGeom>
+        </p:spPr>
+      </p:pic>
+      <p:sp>
+        <p:nvSpPr>
+          <p:cNvPr id="5" name="Text 2"/>
+          <p:cNvSpPr/>
+          <p:nvPr/>
+        </p:nvSpPr>
+        <p:spPr>
+          <a:xfrm>
+            <a:off x="822960" y="4690872"/>
+            <a:ext cx="1280160" cy="292608"/>
+          </a:xfrm>
+          <a:prstGeom prst="rect">
+            <a:avLst/>
+          </a:prstGeom>
+          <a:noFill/>
+          <a:ln/>
+        </p:spPr>
+        <p:txBody>
+          <a:bodyPr wrap="square" lIns="0" tIns="0" rIns="0" bIns="0" rtlCol="0" anchor="ctr"/>
+          <a:lstStyle/>
+          <a:p>
+            <a:pPr indent="0" marL="0">
+              <a:buNone/>
+            </a:pPr>
+            <a:r>
+              <a:rPr lang="en-US" sz="1100" b="1" dirty="0">
+                <a:solidFill>
+                  <a:srgbClr val="2E2C32"/>
+                </a:solidFill>
+                <a:latin typeface="Syne" pitchFamily="34" charset="0"/>
+                <a:ea typeface="Syne" pitchFamily="34" charset="-122"/>
+                <a:cs typeface="Syne" pitchFamily="34" charset="-120"/>
+              </a:rPr>
+              <a:t>Founsi</a:t>
+            </a:r>
+            <a:pPr indent="0" marL="0">
+              <a:buNone/>
+            </a:pPr>
+            <a:r>
+              <a:rPr lang="en-US" sz="1100" b="1" dirty="0">
+                <a:solidFill>
+                  <a:srgbClr val="9378FF"/>
+                </a:solidFill>
+                <a:latin typeface="Syne" pitchFamily="34" charset="0"/>
+                <a:ea typeface="Syne" pitchFamily="34" charset="-122"/>
+                <a:cs typeface="Syne" pitchFamily="34" charset="-120"/>
+              </a:rPr>
+              <a:t>.</a:t>
+            </a:r>
+            <a:endParaRPr lang="en-US" sz="1100" dirty="0"/>
+          </a:p>
+        </p:txBody>
+      </p:sp>
+      <p:sp>
+        <p:nvSpPr>
+          <p:cNvPr id="6" name="Text 3"/>
+          <p:cNvSpPr/>
+          <p:nvPr/>
+        </p:nvSpPr>
+        <p:spPr>
+          <a:xfrm>
+            <a:off x="8229600" y="4690872"/>
+            <a:ext cx="365760" cy="292608"/>
+          </a:xfrm>
+          <a:prstGeom prst="rect">
+            <a:avLst/>
+          </a:prstGeom>
+          <a:noFill/>
+          <a:ln/>
+        </p:spPr>
+        <p:txBody>
+          <a:bodyPr wrap="square" lIns="0" tIns="0" rIns="0" bIns="0" rtlCol="0" anchor="ctr"/>
+          <a:lstStyle/>
+          <a:p>
+            <a:pPr algn="r" indent="0" marL="0">
+              <a:buNone/>
+            </a:pPr>
+            <a:r>
+              <a:rPr lang="en-US" sz="900" dirty="0">
+                <a:solidFill>
+                  <a:srgbClr val="7E7A8A"/>
+                </a:solidFill>
+                <a:latin typeface="Manrope" pitchFamily="34" charset="0"/>
+                <a:ea typeface="Manrope" pitchFamily="34" charset="-122"/>
+                <a:cs typeface="Manrope" pitchFamily="34" charset="-120"/>
+              </a:rPr>
+              <a:t>21</a:t>
+            </a:r>
+            <a:endParaRPr lang="en-US" sz="900" dirty="0"/>
+          </a:p>
+        </p:txBody>
+      </p:sp>
+      <p:sp>
+        <p:nvSpPr>
+          <p:cNvPr id="7" name="Text 4"/>
+          <p:cNvSpPr/>
+          <p:nvPr/>
+        </p:nvSpPr>
+        <p:spPr>
+          <a:xfrm>
+            <a:off x="548640" y="1645920"/>
+            <a:ext cx="8046720" cy="2834640"/>
+          </a:xfrm>
+          <a:prstGeom prst="rect">
+            <a:avLst/>
+          </a:prstGeom>
+          <a:noFill/>
+          <a:ln/>
+        </p:spPr>
+        <p:txBody>
+          <a:bodyPr wrap="square" rtlCol="0" anchor="ctr"/>
+          <a:lstStyle/>
+          <a:p>
+            <a:pPr marL="203200" indent="-203200">
+              <a:spcAft>
+                <a:spcPts val="800"/>
+              </a:spcAft>
+              <a:buSzPct val="100000"/>
+              <a:buChar char="•"/>
+            </a:pPr>
+            <a:r>
+              <a:rPr lang="en-US" sz="1350" dirty="0">
+                <a:solidFill>
+                  <a:srgbClr val="2E2C32"/>
+                </a:solidFill>
+                <a:latin typeface="Manrope" pitchFamily="34" charset="0"/>
+                <a:ea typeface="Manrope" pitchFamily="34" charset="-122"/>
+                <a:cs typeface="Manrope" pitchFamily="34" charset="-120"/>
+              </a:rPr>
+              <a:t>Synthetic data + simulated agent — not a live decision-making run (Mode B is next).</a:t>
+            </a:r>
+            <a:endParaRPr lang="en-US" sz="1350" dirty="0"/>
+          </a:p>
+          <a:p>
+            <a:pPr marL="203200" indent="-203200">
+              <a:spcAft>
+                <a:spcPts val="800"/>
+              </a:spcAft>
+              <a:buSzPct val="100000"/>
+              <a:buChar char="•"/>
+            </a:pPr>
+            <a:r>
+              <a:rPr lang="en-US" sz="1350" dirty="0">
+                <a:solidFill>
+                  <a:srgbClr val="2E2C32"/>
+                </a:solidFill>
+                <a:latin typeface="Manrope" pitchFamily="34" charset="0"/>
+                <a:ea typeface="Manrope" pitchFamily="34" charset="-122"/>
+                <a:cs typeface="Manrope" pitchFamily="34" charset="-120"/>
+              </a:rPr>
+              <a:t>Needle recall is a proxy for diffuse understanding; score normalization is a choice.</a:t>
+            </a:r>
+            <a:endParaRPr lang="en-US" sz="1350" dirty="0"/>
+          </a:p>
+          <a:p>
+            <a:pPr marL="203200" indent="-203200">
+              <a:spcAft>
+                <a:spcPts val="800"/>
+              </a:spcAft>
+              <a:buSzPct val="100000"/>
+              <a:buChar char="•"/>
+            </a:pPr>
+            <a:r>
+              <a:rPr lang="en-US" sz="1350" dirty="0">
+                <a:solidFill>
+                  <a:srgbClr val="2E2C32"/>
+                </a:solidFill>
+                <a:latin typeface="Manrope" pitchFamily="34" charset="0"/>
+                <a:ea typeface="Manrope" pitchFamily="34" charset="-122"/>
+                <a:cs typeface="Manrope" pitchFamily="34" charset="-120"/>
+              </a:rPr>
+              <a:t>8b under-reads (weak instruction-following) — final numbers need 70b.</a:t>
+            </a:r>
+            <a:endParaRPr lang="en-US" sz="1350" dirty="0"/>
+          </a:p>
+          <a:p>
+            <a:pPr marL="203200" indent="-203200">
+              <a:spcAft>
+                <a:spcPts val="800"/>
+              </a:spcAft>
+              <a:buSzPct val="100000"/>
+              <a:buChar char="•"/>
+            </a:pPr>
+            <a:r>
+              <a:rPr lang="en-US" sz="1350" dirty="0">
+                <a:solidFill>
+                  <a:srgbClr val="2E2C32"/>
+                </a:solidFill>
+                <a:latin typeface="Manrope" pitchFamily="34" charset="0"/>
+                <a:ea typeface="Manrope" pitchFamily="34" charset="-122"/>
+                <a:cs typeface="Manrope" pitchFamily="34" charset="-120"/>
+              </a:rPr>
+              <a:t>Single task domain; importance/semantic are crude heuristics, not embeddings.</a:t>
+            </a:r>
+            <a:endParaRPr lang="en-US" sz="1350" dirty="0"/>
+          </a:p>
+        </p:txBody>
+      </p:sp>
+    </p:spTree>
+  </p:cSld>
+  <p:clrMapOvr>
+    <a:masterClrMapping/>
+  </p:clrMapOvr>
+</p:sld>
+</file>
+
+<file path=ppt/slides/slide22.xml><?xml version="1.0" encoding="utf-8"?>
+<p:sld xmlns:a="http://schemas.openxmlformats.org/drawingml/2006/main" xmlns:r="http://schemas.openxmlformats.org/officeDocument/2006/relationships" xmlns:p="http://schemas.openxmlformats.org/presentationml/2006/main">
+  <p:cSld name="Slide 22">
+    <p:bg>
+      <p:bgPr>
+        <a:solidFill>
+          <a:srgbClr val="FAFAFE"/>
+        </a:solidFill>
+      </p:bgPr>
+    </p:bg>
+    <p:spTree>
+      <p:nvGrpSpPr>
+        <p:cNvPr id="1" name=""/>
+        <p:cNvGrpSpPr/>
+        <p:nvPr/>
+      </p:nvGrpSpPr>
+      <p:grpSpPr>
+        <a:xfrm>
+          <a:off x="0" y="0"/>
+          <a:ext cx="0" cy="0"/>
+          <a:chOff x="0" y="0"/>
+          <a:chExt cx="0" cy="0"/>
+        </a:xfrm>
+      </p:grpSpPr>
+      <p:sp>
+        <p:nvSpPr>
+          <p:cNvPr id="2" name="Text 0"/>
+          <p:cNvSpPr/>
+          <p:nvPr/>
+        </p:nvSpPr>
+        <p:spPr>
+          <a:xfrm>
+            <a:off x="548640" y="365760"/>
+            <a:ext cx="8046720" cy="274320"/>
+          </a:xfrm>
+          <a:prstGeom prst="rect">
+            <a:avLst/>
+          </a:prstGeom>
+          <a:noFill/>
+          <a:ln/>
+        </p:spPr>
+        <p:txBody>
+          <a:bodyPr wrap="square" lIns="0" tIns="0" rIns="0" bIns="0" rtlCol="0" anchor="ctr"/>
+          <a:lstStyle/>
+          <a:p>
+            <a:pPr indent="0" marL="0">
+              <a:buNone/>
+            </a:pPr>
+            <a:r>
+              <a:rPr lang="en-US" sz="1100" b="1" spc="300" kern="0" dirty="0">
+                <a:solidFill>
+                  <a:srgbClr val="9378FF"/>
+                </a:solidFill>
+                <a:latin typeface="Syne" pitchFamily="34" charset="0"/>
+                <a:ea typeface="Syne" pitchFamily="34" charset="-122"/>
+                <a:cs typeface="Syne" pitchFamily="34" charset="-120"/>
+              </a:rPr>
+              <a:t>EXP-002 · LENGTH-DEGRADATION (IN PROGRESS)</a:t>
+            </a:r>
+            <a:endParaRPr lang="en-US" sz="1100" dirty="0"/>
+          </a:p>
+        </p:txBody>
+      </p:sp>
+      <p:sp>
+        <p:nvSpPr>
+          <p:cNvPr id="3" name="Text 1"/>
+          <p:cNvSpPr/>
+          <p:nvPr/>
+        </p:nvSpPr>
+        <p:spPr>
+          <a:xfrm>
+            <a:off x="548640" y="640080"/>
+            <a:ext cx="8046720" cy="868680"/>
+          </a:xfrm>
+          <a:prstGeom prst="rect">
+            <a:avLst/>
+          </a:prstGeom>
+          <a:noFill/>
+          <a:ln/>
+        </p:spPr>
+        <p:txBody>
+          <a:bodyPr wrap="square" lIns="0" tIns="0" rIns="0" bIns="0" rtlCol="0" anchor="t"/>
+          <a:lstStyle/>
+          <a:p>
+            <a:pPr indent="0" marL="0">
+              <a:buNone/>
+            </a:pPr>
+            <a:r>
+              <a:rPr lang="en-US" sz="2400" b="1" dirty="0">
+                <a:solidFill>
+                  <a:srgbClr val="2E2C32"/>
+                </a:solidFill>
+                <a:latin typeface="Syne" pitchFamily="34" charset="0"/>
+                <a:ea typeface="Syne" pitchFamily="34" charset="-122"/>
+                <a:cs typeface="Syne" pitchFamily="34" charset="-120"/>
+              </a:rPr>
+              <a:t>Does compaction beat raw context?</a:t>
+            </a:r>
+            <a:endParaRPr lang="en-US" sz="2400" dirty="0"/>
+          </a:p>
+        </p:txBody>
+      </p:sp>
+      <p:pic>
+        <p:nvPicPr>
+          <p:cNvPr id="4" name="Image 0" descr="preencoded.png">    </p:cNvPr>
+          <p:cNvPicPr>
+            <a:picLocks noChangeAspect="1"/>
+          </p:cNvPicPr>
+          <p:nvPr/>
+        </p:nvPicPr>
+        <p:blipFill>
+          <a:blip r:embed="rId1"/>
+          <a:stretch>
+            <a:fillRect/>
+          </a:stretch>
+        </p:blipFill>
+        <p:spPr>
+          <a:xfrm>
+            <a:off x="548640" y="4736592"/>
+            <a:ext cx="219456" cy="165344"/>
+          </a:xfrm>
+          <a:prstGeom prst="rect">
+            <a:avLst/>
+          </a:prstGeom>
+        </p:spPr>
+      </p:pic>
+      <p:sp>
+        <p:nvSpPr>
+          <p:cNvPr id="5" name="Text 2"/>
+          <p:cNvSpPr/>
+          <p:nvPr/>
+        </p:nvSpPr>
+        <p:spPr>
+          <a:xfrm>
+            <a:off x="822960" y="4690872"/>
+            <a:ext cx="1280160" cy="292608"/>
+          </a:xfrm>
+          <a:prstGeom prst="rect">
+            <a:avLst/>
+          </a:prstGeom>
+          <a:noFill/>
+          <a:ln/>
+        </p:spPr>
+        <p:txBody>
+          <a:bodyPr wrap="square" lIns="0" tIns="0" rIns="0" bIns="0" rtlCol="0" anchor="ctr"/>
+          <a:lstStyle/>
+          <a:p>
+            <a:pPr indent="0" marL="0">
+              <a:buNone/>
+            </a:pPr>
+            <a:r>
+              <a:rPr lang="en-US" sz="1100" b="1" dirty="0">
+                <a:solidFill>
+                  <a:srgbClr val="2E2C32"/>
+                </a:solidFill>
+                <a:latin typeface="Syne" pitchFamily="34" charset="0"/>
+                <a:ea typeface="Syne" pitchFamily="34" charset="-122"/>
+                <a:cs typeface="Syne" pitchFamily="34" charset="-120"/>
+              </a:rPr>
+              <a:t>Founsi</a:t>
+            </a:r>
+            <a:pPr indent="0" marL="0">
+              <a:buNone/>
+            </a:pPr>
+            <a:r>
+              <a:rPr lang="en-US" sz="1100" b="1" dirty="0">
+                <a:solidFill>
+                  <a:srgbClr val="9378FF"/>
+                </a:solidFill>
+                <a:latin typeface="Syne" pitchFamily="34" charset="0"/>
+                <a:ea typeface="Syne" pitchFamily="34" charset="-122"/>
+                <a:cs typeface="Syne" pitchFamily="34" charset="-120"/>
+              </a:rPr>
+              <a:t>.</a:t>
+            </a:r>
+            <a:endParaRPr lang="en-US" sz="1100" dirty="0"/>
+          </a:p>
+        </p:txBody>
+      </p:sp>
+      <p:sp>
+        <p:nvSpPr>
+          <p:cNvPr id="6" name="Text 3"/>
+          <p:cNvSpPr/>
+          <p:nvPr/>
+        </p:nvSpPr>
+        <p:spPr>
+          <a:xfrm>
+            <a:off x="8229600" y="4690872"/>
+            <a:ext cx="365760" cy="292608"/>
+          </a:xfrm>
+          <a:prstGeom prst="rect">
+            <a:avLst/>
+          </a:prstGeom>
+          <a:noFill/>
+          <a:ln/>
+        </p:spPr>
+        <p:txBody>
+          <a:bodyPr wrap="square" lIns="0" tIns="0" rIns="0" bIns="0" rtlCol="0" anchor="ctr"/>
+          <a:lstStyle/>
+          <a:p>
+            <a:pPr algn="r" indent="0" marL="0">
+              <a:buNone/>
+            </a:pPr>
+            <a:r>
+              <a:rPr lang="en-US" sz="900" dirty="0">
+                <a:solidFill>
+                  <a:srgbClr val="7E7A8A"/>
+                </a:solidFill>
+                <a:latin typeface="Manrope" pitchFamily="34" charset="0"/>
+                <a:ea typeface="Manrope" pitchFamily="34" charset="-122"/>
+                <a:cs typeface="Manrope" pitchFamily="34" charset="-120"/>
+              </a:rPr>
+              <a:t>22</a:t>
+            </a:r>
+            <a:endParaRPr lang="en-US" sz="900" dirty="0"/>
+          </a:p>
+        </p:txBody>
+      </p:sp>
+      <p:sp>
+        <p:nvSpPr>
+          <p:cNvPr id="7" name="Text 4"/>
+          <p:cNvSpPr/>
+          <p:nvPr/>
+        </p:nvSpPr>
+        <p:spPr>
+          <a:xfrm>
+            <a:off x="548640" y="1371600"/>
+            <a:ext cx="8046720" cy="274320"/>
+          </a:xfrm>
+          <a:prstGeom prst="rect">
+            <a:avLst/>
+          </a:prstGeom>
+          <a:noFill/>
+          <a:ln/>
+        </p:spPr>
+        <p:txBody>
+          <a:bodyPr wrap="square" lIns="0" tIns="0" rIns="0" bIns="0" rtlCol="0" anchor="ctr"/>
+          <a:lstStyle/>
+          <a:p>
+            <a:pPr indent="0" marL="0">
+              <a:buNone/>
+            </a:pPr>
+            <a:r>
+              <a:rPr lang="en-US" sz="1300" b="1" dirty="0">
+                <a:solidFill>
+                  <a:srgbClr val="9378FF"/>
+                </a:solidFill>
+                <a:latin typeface="Manrope" pitchFamily="34" charset="0"/>
+                <a:ea typeface="Manrope" pitchFamily="34" charset="-122"/>
+                <a:cs typeface="Manrope" pitchFamily="34" charset="-120"/>
+              </a:rPr>
+              <a:t>Hypothesis</a:t>
+            </a:r>
+            <a:endParaRPr lang="en-US" sz="1300" dirty="0"/>
+          </a:p>
+        </p:txBody>
+      </p:sp>
+      <p:sp>
+        <p:nvSpPr>
+          <p:cNvPr id="8" name="Text 5"/>
+          <p:cNvSpPr/>
+          <p:nvPr/>
+        </p:nvSpPr>
+        <p:spPr>
+          <a:xfrm>
+            <a:off x="548640" y="1645920"/>
+            <a:ext cx="8046720" cy="685800"/>
+          </a:xfrm>
+          <a:prstGeom prst="rect">
+            <a:avLst/>
+          </a:prstGeom>
+          <a:noFill/>
+          <a:ln/>
+        </p:spPr>
+        <p:txBody>
+          <a:bodyPr wrap="square" lIns="0" tIns="0" rIns="0" bIns="0" rtlCol="0" anchor="ctr"/>
+          <a:lstStyle/>
+          <a:p>
+            <a:pPr indent="0" marL="0">
+              <a:buNone/>
+            </a:pPr>
+            <a:r>
+              <a:rPr lang="en-US" sz="1300" dirty="0">
+                <a:solidFill>
+                  <a:srgbClr val="2E2C32"/>
+                </a:solidFill>
+                <a:latin typeface="Manrope" pitchFamily="34" charset="0"/>
+                <a:ea typeface="Manrope" pitchFamily="34" charset="-122"/>
+                <a:cs typeface="Manrope" pitchFamily="34" charset="-120"/>
+              </a:rPr>
+              <a:t>As raw context grows, the no-compaction baseline's recall degrades (lost-in-the-middle); fixed-budget compaction holds recall higher at long lengths — the crossover is where compaction becomes net-positive.</a:t>
+            </a:r>
+            <a:endParaRPr lang="en-US" sz="1300" dirty="0"/>
+          </a:p>
+        </p:txBody>
       </p:sp>
       <p:sp>
         <p:nvSpPr>
@@ -6494,8 +8273,125 @@
         </p:nvSpPr>
         <p:spPr>
           <a:xfrm>
-            <a:off x="5669280" y="1737360"/>
-            <a:ext cx="2743200" cy="457200"/>
+            <a:off x="548640" y="2468880"/>
+            <a:ext cx="8046720" cy="2834640"/>
+          </a:xfrm>
+          <a:prstGeom prst="rect">
+            <a:avLst/>
+          </a:prstGeom>
+          <a:noFill/>
+          <a:ln/>
+        </p:spPr>
+        <p:txBody>
+          <a:bodyPr wrap="square" rtlCol="0" anchor="ctr"/>
+          <a:lstStyle/>
+          <a:p>
+            <a:pPr marL="203200" indent="-203200">
+              <a:spcAft>
+                <a:spcPts val="800"/>
+              </a:spcAft>
+              <a:buSzPct val="100000"/>
+              <a:buChar char="•"/>
+            </a:pPr>
+            <a:r>
+              <a:rPr lang="en-US" sz="1300" dirty="0">
+                <a:solidFill>
+                  <a:srgbClr val="2E2C32"/>
+                </a:solidFill>
+                <a:latin typeface="Manrope" pitchFamily="34" charset="0"/>
+                <a:ea typeface="Manrope" pitchFamily="34" charset="-122"/>
+                <a:cs typeface="Manrope" pitchFamily="34" charset="-120"/>
+              </a:rPr>
+              <a:t>Design: fast 8b, fixed budget (2000), run-lengths {8, 16, 32, 48} (~3k-21k tokens), 3 seeds.</a:t>
+            </a:r>
+            <a:endParaRPr lang="en-US" sz="1300" dirty="0"/>
+          </a:p>
+          <a:p>
+            <a:pPr marL="203200" indent="-203200">
+              <a:spcAft>
+                <a:spcPts val="800"/>
+              </a:spcAft>
+              <a:buSzPct val="100000"/>
+              <a:buChar char="•"/>
+            </a:pPr>
+            <a:r>
+              <a:rPr lang="en-US" sz="1300" dirty="0">
+                <a:solidFill>
+                  <a:srgbClr val="2E2C32"/>
+                </a:solidFill>
+                <a:latin typeface="Manrope" pitchFamily="34" charset="0"/>
+                <a:ea typeface="Manrope" pitchFamily="34" charset="-122"/>
+                <a:cs typeface="Manrope" pitchFamily="34" charset="-120"/>
+              </a:rPr>
+              <a:t>Expectation: baseline recall drops with length; recency stays flatter; they cross.</a:t>
+            </a:r>
+            <a:endParaRPr lang="en-US" sz="1300" dirty="0"/>
+          </a:p>
+          <a:p>
+            <a:pPr marL="203200" indent="-203200">
+              <a:spcAft>
+                <a:spcPts val="800"/>
+              </a:spcAft>
+              <a:buSzPct val="100000"/>
+              <a:buChar char="•"/>
+            </a:pPr>
+            <a:r>
+              <a:rPr lang="en-US" sz="1100" dirty="0">
+                <a:solidFill>
+                  <a:srgbClr val="655E74"/>
+                </a:solidFill>
+                <a:latin typeface="Manrope" pitchFamily="34" charset="0"/>
+                <a:ea typeface="Manrope" pitchFamily="34" charset="-122"/>
+                <a:cs typeface="Manrope" pitchFamily="34" charset="-120"/>
+              </a:rPr>
+              <a:t>Success = a measured crossover point — compaction as recall-positive, not just survival.</a:t>
+            </a:r>
+            <a:endParaRPr lang="en-US" sz="1300" dirty="0"/>
+          </a:p>
+        </p:txBody>
+      </p:sp>
+    </p:spTree>
+  </p:cSld>
+  <p:clrMapOvr>
+    <a:masterClrMapping/>
+  </p:clrMapOvr>
+</p:sld>
+</file>
+
+<file path=ppt/slides/slide23.xml><?xml version="1.0" encoding="utf-8"?>
+<p:sld xmlns:a="http://schemas.openxmlformats.org/drawingml/2006/main" xmlns:r="http://schemas.openxmlformats.org/officeDocument/2006/relationships" xmlns:p="http://schemas.openxmlformats.org/presentationml/2006/main">
+  <p:cSld name="Slide 23">
+    <p:bg>
+      <p:bgPr>
+        <a:solidFill>
+          <a:srgbClr val="FAFAFE"/>
+        </a:solidFill>
+      </p:bgPr>
+    </p:bg>
+    <p:spTree>
+      <p:nvGrpSpPr>
+        <p:cNvPr id="1" name=""/>
+        <p:cNvGrpSpPr/>
+        <p:nvPr/>
+      </p:nvGrpSpPr>
+      <p:grpSpPr>
+        <a:xfrm>
+          <a:off x="0" y="0"/>
+          <a:ext cx="0" cy="0"/>
+          <a:chOff x="0" y="0"/>
+          <a:chExt cx="0" cy="0"/>
+        </a:xfrm>
+      </p:grpSpPr>
+      <p:sp>
+        <p:nvSpPr>
+          <p:cNvPr id="2" name="Text 0"/>
+          <p:cNvSpPr/>
+          <p:nvPr/>
+        </p:nvSpPr>
+        <p:spPr>
+          <a:xfrm>
+            <a:off x="548640" y="365760"/>
+            <a:ext cx="8046720" cy="274320"/>
           </a:xfrm>
           <a:prstGeom prst="rect">
             <a:avLst/>
@@ -6507,34 +8403,866 @@
           <a:bodyPr wrap="square" lIns="0" tIns="0" rIns="0" bIns="0" rtlCol="0" anchor="ctr"/>
           <a:lstStyle/>
           <a:p>
+            <a:pPr indent="0" marL="0">
+              <a:buNone/>
+            </a:pPr>
+            <a:r>
+              <a:rPr lang="en-US" sz="1100" b="1" spc="300" kern="0" dirty="0">
+                <a:solidFill>
+                  <a:srgbClr val="9378FF"/>
+                </a:solidFill>
+                <a:latin typeface="Syne" pitchFamily="34" charset="0"/>
+                <a:ea typeface="Syne" pitchFamily="34" charset="-122"/>
+                <a:cs typeface="Syne" pitchFamily="34" charset="-120"/>
+              </a:rPr>
+              <a:t>WHERE THIS GOES</a:t>
+            </a:r>
+            <a:endParaRPr lang="en-US" sz="1100" dirty="0"/>
+          </a:p>
+        </p:txBody>
+      </p:sp>
+      <p:sp>
+        <p:nvSpPr>
+          <p:cNvPr id="3" name="Text 1"/>
+          <p:cNvSpPr/>
+          <p:nvPr/>
+        </p:nvSpPr>
+        <p:spPr>
+          <a:xfrm>
+            <a:off x="548640" y="640080"/>
+            <a:ext cx="8046720" cy="868680"/>
+          </a:xfrm>
+          <a:prstGeom prst="rect">
+            <a:avLst/>
+          </a:prstGeom>
+          <a:noFill/>
+          <a:ln/>
+        </p:spPr>
+        <p:txBody>
+          <a:bodyPr wrap="square" lIns="0" tIns="0" rIns="0" bIns="0" rtlCol="0" anchor="t"/>
+          <a:lstStyle/>
+          <a:p>
+            <a:pPr indent="0" marL="0">
+              <a:buNone/>
+            </a:pPr>
+            <a:r>
+              <a:rPr lang="en-US" sz="2700" b="1" dirty="0">
+                <a:solidFill>
+                  <a:srgbClr val="2E2C32"/>
+                </a:solidFill>
+                <a:latin typeface="Syne" pitchFamily="34" charset="0"/>
+                <a:ea typeface="Syne" pitchFamily="34" charset="-122"/>
+                <a:cs typeface="Syne" pitchFamily="34" charset="-120"/>
+              </a:rPr>
+              <a:t>Roadmap</a:t>
+            </a:r>
+            <a:endParaRPr lang="en-US" sz="2700" dirty="0"/>
+          </a:p>
+        </p:txBody>
+      </p:sp>
+      <p:pic>
+        <p:nvPicPr>
+          <p:cNvPr id="4" name="Image 0" descr="preencoded.png">    </p:cNvPr>
+          <p:cNvPicPr>
+            <a:picLocks noChangeAspect="1"/>
+          </p:cNvPicPr>
+          <p:nvPr/>
+        </p:nvPicPr>
+        <p:blipFill>
+          <a:blip r:embed="rId1"/>
+          <a:stretch>
+            <a:fillRect/>
+          </a:stretch>
+        </p:blipFill>
+        <p:spPr>
+          <a:xfrm>
+            <a:off x="548640" y="4736592"/>
+            <a:ext cx="219456" cy="165344"/>
+          </a:xfrm>
+          <a:prstGeom prst="rect">
+            <a:avLst/>
+          </a:prstGeom>
+        </p:spPr>
+      </p:pic>
+      <p:sp>
+        <p:nvSpPr>
+          <p:cNvPr id="5" name="Text 2"/>
+          <p:cNvSpPr/>
+          <p:nvPr/>
+        </p:nvSpPr>
+        <p:spPr>
+          <a:xfrm>
+            <a:off x="822960" y="4690872"/>
+            <a:ext cx="1280160" cy="292608"/>
+          </a:xfrm>
+          <a:prstGeom prst="rect">
+            <a:avLst/>
+          </a:prstGeom>
+          <a:noFill/>
+          <a:ln/>
+        </p:spPr>
+        <p:txBody>
+          <a:bodyPr wrap="square" lIns="0" tIns="0" rIns="0" bIns="0" rtlCol="0" anchor="ctr"/>
+          <a:lstStyle/>
+          <a:p>
+            <a:pPr indent="0" marL="0">
+              <a:buNone/>
+            </a:pPr>
+            <a:r>
+              <a:rPr lang="en-US" sz="1100" b="1" dirty="0">
+                <a:solidFill>
+                  <a:srgbClr val="2E2C32"/>
+                </a:solidFill>
+                <a:latin typeface="Syne" pitchFamily="34" charset="0"/>
+                <a:ea typeface="Syne" pitchFamily="34" charset="-122"/>
+                <a:cs typeface="Syne" pitchFamily="34" charset="-120"/>
+              </a:rPr>
+              <a:t>Founsi</a:t>
+            </a:r>
+            <a:pPr indent="0" marL="0">
+              <a:buNone/>
+            </a:pPr>
+            <a:r>
+              <a:rPr lang="en-US" sz="1100" b="1" dirty="0">
+                <a:solidFill>
+                  <a:srgbClr val="9378FF"/>
+                </a:solidFill>
+                <a:latin typeface="Syne" pitchFamily="34" charset="0"/>
+                <a:ea typeface="Syne" pitchFamily="34" charset="-122"/>
+                <a:cs typeface="Syne" pitchFamily="34" charset="-120"/>
+              </a:rPr>
+              <a:t>.</a:t>
+            </a:r>
+            <a:endParaRPr lang="en-US" sz="1100" dirty="0"/>
+          </a:p>
+        </p:txBody>
+      </p:sp>
+      <p:sp>
+        <p:nvSpPr>
+          <p:cNvPr id="6" name="Text 3"/>
+          <p:cNvSpPr/>
+          <p:nvPr/>
+        </p:nvSpPr>
+        <p:spPr>
+          <a:xfrm>
+            <a:off x="8229600" y="4690872"/>
+            <a:ext cx="365760" cy="292608"/>
+          </a:xfrm>
+          <a:prstGeom prst="rect">
+            <a:avLst/>
+          </a:prstGeom>
+          <a:noFill/>
+          <a:ln/>
+        </p:spPr>
+        <p:txBody>
+          <a:bodyPr wrap="square" lIns="0" tIns="0" rIns="0" bIns="0" rtlCol="0" anchor="ctr"/>
+          <a:lstStyle/>
+          <a:p>
+            <a:pPr algn="r" indent="0" marL="0">
+              <a:buNone/>
+            </a:pPr>
+            <a:r>
+              <a:rPr lang="en-US" sz="900" dirty="0">
+                <a:solidFill>
+                  <a:srgbClr val="7E7A8A"/>
+                </a:solidFill>
+                <a:latin typeface="Manrope" pitchFamily="34" charset="0"/>
+                <a:ea typeface="Manrope" pitchFamily="34" charset="-122"/>
+                <a:cs typeface="Manrope" pitchFamily="34" charset="-120"/>
+              </a:rPr>
+              <a:t>23</a:t>
+            </a:r>
+            <a:endParaRPr lang="en-US" sz="900" dirty="0"/>
+          </a:p>
+        </p:txBody>
+      </p:sp>
+      <p:sp>
+        <p:nvSpPr>
+          <p:cNvPr id="7" name="Text 4"/>
+          <p:cNvSpPr/>
+          <p:nvPr/>
+        </p:nvSpPr>
+        <p:spPr>
+          <a:xfrm>
+            <a:off x="548640" y="1645920"/>
+            <a:ext cx="8046720" cy="2834640"/>
+          </a:xfrm>
+          <a:prstGeom prst="rect">
+            <a:avLst/>
+          </a:prstGeom>
+          <a:noFill/>
+          <a:ln/>
+        </p:spPr>
+        <p:txBody>
+          <a:bodyPr wrap="square" rtlCol="0" anchor="ctr"/>
+          <a:lstStyle/>
+          <a:p>
+            <a:pPr marL="203200" indent="-203200">
+              <a:spcAft>
+                <a:spcPts val="800"/>
+              </a:spcAft>
+              <a:buSzPct val="100000"/>
+              <a:buChar char="•"/>
+            </a:pPr>
+            <a:r>
+              <a:rPr lang="en-US" sz="1350" dirty="0">
+                <a:solidFill>
+                  <a:srgbClr val="2E2C32"/>
+                </a:solidFill>
+                <a:latin typeface="Manrope" pitchFamily="34" charset="0"/>
+                <a:ea typeface="Manrope" pitchFamily="34" charset="-122"/>
+                <a:cs typeface="Manrope" pitchFamily="34" charset="-120"/>
+              </a:rPr>
+              <a:t>EXP-002 — length degradation (running) · EXP-003 — 70b confirmation, the 128k ceiling.</a:t>
+            </a:r>
+            <a:endParaRPr lang="en-US" sz="1350" dirty="0"/>
+          </a:p>
+          <a:p>
+            <a:pPr marL="203200" indent="-203200">
+              <a:spcAft>
+                <a:spcPts val="800"/>
+              </a:spcAft>
+              <a:buSzPct val="100000"/>
+              <a:buChar char="•"/>
+            </a:pPr>
+            <a:r>
+              <a:rPr lang="en-US" sz="1350" dirty="0">
+                <a:solidFill>
+                  <a:srgbClr val="2E2C32"/>
+                </a:solidFill>
+                <a:latin typeface="Manrope" pitchFamily="34" charset="0"/>
+                <a:ea typeface="Manrope" pitchFamily="34" charset="-122"/>
+                <a:cs typeface="Manrope" pitchFamily="34" charset="-120"/>
+              </a:rPr>
+              <a:t>Lost-in-the-middle: recall by needle depth (data already logged).</a:t>
+            </a:r>
+            <a:endParaRPr lang="en-US" sz="1350" dirty="0"/>
+          </a:p>
+          <a:p>
+            <a:pPr marL="203200" indent="-203200">
+              <a:spcAft>
+                <a:spcPts val="800"/>
+              </a:spcAft>
+              <a:buSzPct val="100000"/>
+              <a:buChar char="•"/>
+            </a:pPr>
+            <a:r>
+              <a:rPr lang="en-US" sz="1350" dirty="0">
+                <a:solidFill>
+                  <a:srgbClr val="2E2C32"/>
+                </a:solidFill>
+                <a:latin typeface="Manrope" pitchFamily="34" charset="0"/>
+                <a:ea typeface="Manrope" pitchFamily="34" charset="-122"/>
+                <a:cs typeface="Manrope" pitchFamily="34" charset="-120"/>
+              </a:rPr>
+              <a:t>Real eval datasets (RULER / LongBench / BABILong) via HF datasets.</a:t>
+            </a:r>
+            <a:endParaRPr lang="en-US" sz="1350" dirty="0"/>
+          </a:p>
+          <a:p>
+            <a:pPr marL="203200" indent="-203200">
+              <a:spcAft>
+                <a:spcPts val="800"/>
+              </a:spcAft>
+              <a:buSzPct val="100000"/>
+              <a:buChar char="•"/>
+            </a:pPr>
+            <a:r>
+              <a:rPr lang="en-US" sz="1350" dirty="0">
+                <a:solidFill>
+                  <a:srgbClr val="2E2C32"/>
+                </a:solidFill>
+                <a:latin typeface="Manrope" pitchFamily="34" charset="0"/>
+                <a:ea typeface="Manrope" pitchFamily="34" charset="-122"/>
+                <a:cs typeface="Manrope" pitchFamily="34" charset="-120"/>
+              </a:rPr>
+              <a:t>LangChain summary-memory as a baseline arm to beat.</a:t>
+            </a:r>
+            <a:endParaRPr lang="en-US" sz="1350" dirty="0"/>
+          </a:p>
+          <a:p>
+            <a:pPr marL="203200" indent="-203200">
+              <a:spcAft>
+                <a:spcPts val="800"/>
+              </a:spcAft>
+              <a:buSzPct val="100000"/>
+              <a:buChar char="•"/>
+            </a:pPr>
+            <a:r>
+              <a:rPr lang="en-US" sz="1350" dirty="0">
+                <a:solidFill>
+                  <a:srgbClr val="2E2C32"/>
+                </a:solidFill>
+                <a:latin typeface="Manrope" pitchFamily="34" charset="0"/>
+                <a:ea typeface="Manrope" pitchFamily="34" charset="-122"/>
+                <a:cs typeface="Manrope" pitchFamily="34" charset="-120"/>
+              </a:rPr>
+              <a:t>Mode B — the live agent loop. Then the paper.</a:t>
+            </a:r>
+            <a:endParaRPr lang="en-US" sz="1350" dirty="0"/>
+          </a:p>
+        </p:txBody>
+      </p:sp>
+    </p:spTree>
+  </p:cSld>
+  <p:clrMapOvr>
+    <a:masterClrMapping/>
+  </p:clrMapOvr>
+</p:sld>
+</file>
+
+<file path=ppt/slides/slide24.xml><?xml version="1.0" encoding="utf-8"?>
+<p:sld xmlns:a="http://schemas.openxmlformats.org/drawingml/2006/main" xmlns:r="http://schemas.openxmlformats.org/officeDocument/2006/relationships" xmlns:p="http://schemas.openxmlformats.org/presentationml/2006/main">
+  <p:cSld name="Slide 24">
+    <p:bg>
+      <p:bgPr>
+        <a:solidFill>
+          <a:srgbClr val="FAFAFE"/>
+        </a:solidFill>
+      </p:bgPr>
+    </p:bg>
+    <p:spTree>
+      <p:nvGrpSpPr>
+        <p:cNvPr id="1" name=""/>
+        <p:cNvGrpSpPr/>
+        <p:nvPr/>
+      </p:nvGrpSpPr>
+      <p:grpSpPr>
+        <a:xfrm>
+          <a:off x="0" y="0"/>
+          <a:ext cx="0" cy="0"/>
+          <a:chOff x="0" y="0"/>
+          <a:chExt cx="0" cy="0"/>
+        </a:xfrm>
+      </p:grpSpPr>
+      <p:sp>
+        <p:nvSpPr>
+          <p:cNvPr id="2" name="Text 0"/>
+          <p:cNvSpPr/>
+          <p:nvPr/>
+        </p:nvSpPr>
+        <p:spPr>
+          <a:xfrm>
+            <a:off x="548640" y="365760"/>
+            <a:ext cx="8046720" cy="274320"/>
+          </a:xfrm>
+          <a:prstGeom prst="rect">
+            <a:avLst/>
+          </a:prstGeom>
+          <a:noFill/>
+          <a:ln/>
+        </p:spPr>
+        <p:txBody>
+          <a:bodyPr wrap="square" lIns="0" tIns="0" rIns="0" bIns="0" rtlCol="0" anchor="ctr"/>
+          <a:lstStyle/>
+          <a:p>
+            <a:pPr indent="0" marL="0">
+              <a:buNone/>
+            </a:pPr>
+            <a:r>
+              <a:rPr lang="en-US" sz="1100" b="1" spc="300" kern="0" dirty="0">
+                <a:solidFill>
+                  <a:srgbClr val="9378FF"/>
+                </a:solidFill>
+                <a:latin typeface="Syne" pitchFamily="34" charset="0"/>
+                <a:ea typeface="Syne" pitchFamily="34" charset="-122"/>
+                <a:cs typeface="Syne" pitchFamily="34" charset="-120"/>
+              </a:rPr>
+              <a:t>REFERENCES</a:t>
+            </a:r>
+            <a:endParaRPr lang="en-US" sz="1100" dirty="0"/>
+          </a:p>
+        </p:txBody>
+      </p:sp>
+      <p:sp>
+        <p:nvSpPr>
+          <p:cNvPr id="3" name="Text 1"/>
+          <p:cNvSpPr/>
+          <p:nvPr/>
+        </p:nvSpPr>
+        <p:spPr>
+          <a:xfrm>
+            <a:off x="548640" y="640080"/>
+            <a:ext cx="8046720" cy="868680"/>
+          </a:xfrm>
+          <a:prstGeom prst="rect">
+            <a:avLst/>
+          </a:prstGeom>
+          <a:noFill/>
+          <a:ln/>
+        </p:spPr>
+        <p:txBody>
+          <a:bodyPr wrap="square" lIns="0" tIns="0" rIns="0" bIns="0" rtlCol="0" anchor="t"/>
+          <a:lstStyle/>
+          <a:p>
+            <a:pPr indent="0" marL="0">
+              <a:buNone/>
+            </a:pPr>
+            <a:r>
+              <a:rPr lang="en-US" sz="2600" b="1" dirty="0">
+                <a:solidFill>
+                  <a:srgbClr val="2E2C32"/>
+                </a:solidFill>
+                <a:latin typeface="Syne" pitchFamily="34" charset="0"/>
+                <a:ea typeface="Syne" pitchFamily="34" charset="-122"/>
+                <a:cs typeface="Syne" pitchFamily="34" charset="-120"/>
+              </a:rPr>
+              <a:t>The literature this stands on</a:t>
+            </a:r>
+            <a:endParaRPr lang="en-US" sz="2600" dirty="0"/>
+          </a:p>
+        </p:txBody>
+      </p:sp>
+      <p:pic>
+        <p:nvPicPr>
+          <p:cNvPr id="4" name="Image 0" descr="preencoded.png">    </p:cNvPr>
+          <p:cNvPicPr>
+            <a:picLocks noChangeAspect="1"/>
+          </p:cNvPicPr>
+          <p:nvPr/>
+        </p:nvPicPr>
+        <p:blipFill>
+          <a:blip r:embed="rId1"/>
+          <a:stretch>
+            <a:fillRect/>
+          </a:stretch>
+        </p:blipFill>
+        <p:spPr>
+          <a:xfrm>
+            <a:off x="548640" y="4736592"/>
+            <a:ext cx="219456" cy="165344"/>
+          </a:xfrm>
+          <a:prstGeom prst="rect">
+            <a:avLst/>
+          </a:prstGeom>
+        </p:spPr>
+      </p:pic>
+      <p:sp>
+        <p:nvSpPr>
+          <p:cNvPr id="5" name="Text 2"/>
+          <p:cNvSpPr/>
+          <p:nvPr/>
+        </p:nvSpPr>
+        <p:spPr>
+          <a:xfrm>
+            <a:off x="822960" y="4690872"/>
+            <a:ext cx="1280160" cy="292608"/>
+          </a:xfrm>
+          <a:prstGeom prst="rect">
+            <a:avLst/>
+          </a:prstGeom>
+          <a:noFill/>
+          <a:ln/>
+        </p:spPr>
+        <p:txBody>
+          <a:bodyPr wrap="square" lIns="0" tIns="0" rIns="0" bIns="0" rtlCol="0" anchor="ctr"/>
+          <a:lstStyle/>
+          <a:p>
+            <a:pPr indent="0" marL="0">
+              <a:buNone/>
+            </a:pPr>
+            <a:r>
+              <a:rPr lang="en-US" sz="1100" b="1" dirty="0">
+                <a:solidFill>
+                  <a:srgbClr val="2E2C32"/>
+                </a:solidFill>
+                <a:latin typeface="Syne" pitchFamily="34" charset="0"/>
+                <a:ea typeface="Syne" pitchFamily="34" charset="-122"/>
+                <a:cs typeface="Syne" pitchFamily="34" charset="-120"/>
+              </a:rPr>
+              <a:t>Founsi</a:t>
+            </a:r>
+            <a:pPr indent="0" marL="0">
+              <a:buNone/>
+            </a:pPr>
+            <a:r>
+              <a:rPr lang="en-US" sz="1100" b="1" dirty="0">
+                <a:solidFill>
+                  <a:srgbClr val="9378FF"/>
+                </a:solidFill>
+                <a:latin typeface="Syne" pitchFamily="34" charset="0"/>
+                <a:ea typeface="Syne" pitchFamily="34" charset="-122"/>
+                <a:cs typeface="Syne" pitchFamily="34" charset="-120"/>
+              </a:rPr>
+              <a:t>.</a:t>
+            </a:r>
+            <a:endParaRPr lang="en-US" sz="1100" dirty="0"/>
+          </a:p>
+        </p:txBody>
+      </p:sp>
+      <p:sp>
+        <p:nvSpPr>
+          <p:cNvPr id="6" name="Text 3"/>
+          <p:cNvSpPr/>
+          <p:nvPr/>
+        </p:nvSpPr>
+        <p:spPr>
+          <a:xfrm>
+            <a:off x="8229600" y="4690872"/>
+            <a:ext cx="365760" cy="292608"/>
+          </a:xfrm>
+          <a:prstGeom prst="rect">
+            <a:avLst/>
+          </a:prstGeom>
+          <a:noFill/>
+          <a:ln/>
+        </p:spPr>
+        <p:txBody>
+          <a:bodyPr wrap="square" lIns="0" tIns="0" rIns="0" bIns="0" rtlCol="0" anchor="ctr"/>
+          <a:lstStyle/>
+          <a:p>
+            <a:pPr algn="r" indent="0" marL="0">
+              <a:buNone/>
+            </a:pPr>
+            <a:r>
+              <a:rPr lang="en-US" sz="900" dirty="0">
+                <a:solidFill>
+                  <a:srgbClr val="7E7A8A"/>
+                </a:solidFill>
+                <a:latin typeface="Manrope" pitchFamily="34" charset="0"/>
+                <a:ea typeface="Manrope" pitchFamily="34" charset="-122"/>
+                <a:cs typeface="Manrope" pitchFamily="34" charset="-120"/>
+              </a:rPr>
+              <a:t>24</a:t>
+            </a:r>
+            <a:endParaRPr lang="en-US" sz="900" dirty="0"/>
+          </a:p>
+        </p:txBody>
+      </p:sp>
+      <p:sp>
+        <p:nvSpPr>
+          <p:cNvPr id="7" name="Text 4"/>
+          <p:cNvSpPr/>
+          <p:nvPr/>
+        </p:nvSpPr>
+        <p:spPr>
+          <a:xfrm>
+            <a:off x="548640" y="1645920"/>
+            <a:ext cx="8046720" cy="2834640"/>
+          </a:xfrm>
+          <a:prstGeom prst="rect">
+            <a:avLst/>
+          </a:prstGeom>
+          <a:noFill/>
+          <a:ln/>
+        </p:spPr>
+        <p:txBody>
+          <a:bodyPr wrap="square" rtlCol="0" anchor="ctr"/>
+          <a:lstStyle/>
+          <a:p>
+            <a:pPr marL="203200" indent="-203200">
+              <a:spcAft>
+                <a:spcPts val="800"/>
+              </a:spcAft>
+              <a:buSzPct val="100000"/>
+              <a:buChar char="•"/>
+            </a:pPr>
+            <a:r>
+              <a:rPr lang="en-US" sz="1300" dirty="0">
+                <a:solidFill>
+                  <a:srgbClr val="655E74"/>
+                </a:solidFill>
+                <a:latin typeface="Manrope" pitchFamily="34" charset="0"/>
+                <a:ea typeface="Manrope" pitchFamily="34" charset="-122"/>
+                <a:cs typeface="Manrope" pitchFamily="34" charset="-120"/>
+              </a:rPr>
+              <a:t>Lost in the Middle — Liu et al., arXiv:2307.03172.</a:t>
+            </a:r>
+            <a:endParaRPr lang="en-US" sz="1300" dirty="0"/>
+          </a:p>
+          <a:p>
+            <a:pPr marL="203200" indent="-203200">
+              <a:spcAft>
+                <a:spcPts val="800"/>
+              </a:spcAft>
+              <a:buSzPct val="100000"/>
+              <a:buChar char="•"/>
+            </a:pPr>
+            <a:r>
+              <a:rPr lang="en-US" sz="1300" dirty="0">
+                <a:solidFill>
+                  <a:srgbClr val="655E74"/>
+                </a:solidFill>
+                <a:latin typeface="Manrope" pitchFamily="34" charset="0"/>
+                <a:ea typeface="Manrope" pitchFamily="34" charset="-122"/>
+                <a:cs typeface="Manrope" pitchFamily="34" charset="-120"/>
+              </a:rPr>
+              <a:t>RULER — Hsieh et al., 2404.06654 · HELMET — Yen et al., 2410.02694.</a:t>
+            </a:r>
+            <a:endParaRPr lang="en-US" sz="1300" dirty="0"/>
+          </a:p>
+          <a:p>
+            <a:pPr marL="203200" indent="-203200">
+              <a:spcAft>
+                <a:spcPts val="800"/>
+              </a:spcAft>
+              <a:buSzPct val="100000"/>
+              <a:buChar char="•"/>
+            </a:pPr>
+            <a:r>
+              <a:rPr lang="en-US" sz="1300" dirty="0">
+                <a:solidFill>
+                  <a:srgbClr val="655E74"/>
+                </a:solidFill>
+                <a:latin typeface="Manrope" pitchFamily="34" charset="0"/>
+                <a:ea typeface="Manrope" pitchFamily="34" charset="-122"/>
+                <a:cs typeface="Manrope" pitchFamily="34" charset="-120"/>
+              </a:rPr>
+              <a:t>MemGPT — Packer et al., 2310.08560 · LLMLingua — Jiang et al., 2310.05736.</a:t>
+            </a:r>
+            <a:endParaRPr lang="en-US" sz="1300" dirty="0"/>
+          </a:p>
+          <a:p>
+            <a:pPr marL="203200" indent="-203200">
+              <a:spcAft>
+                <a:spcPts val="800"/>
+              </a:spcAft>
+              <a:buSzPct val="100000"/>
+              <a:buChar char="•"/>
+            </a:pPr>
+            <a:r>
+              <a:rPr lang="en-US" sz="1300" dirty="0">
+                <a:solidFill>
+                  <a:srgbClr val="655E74"/>
+                </a:solidFill>
+                <a:latin typeface="Manrope" pitchFamily="34" charset="0"/>
+                <a:ea typeface="Manrope" pitchFamily="34" charset="-122"/>
+                <a:cs typeface="Manrope" pitchFamily="34" charset="-120"/>
+              </a:rPr>
+              <a:t>Judging LLM-as-a-Judge — Zheng et al., 2306.05685.</a:t>
+            </a:r>
+            <a:endParaRPr lang="en-US" sz="1300" dirty="0"/>
+          </a:p>
+          <a:p>
+            <a:pPr marL="203200" indent="-203200">
+              <a:spcAft>
+                <a:spcPts val="800"/>
+              </a:spcAft>
+              <a:buSzPct val="100000"/>
+              <a:buChar char="•"/>
+            </a:pPr>
+            <a:r>
+              <a:rPr lang="en-US" sz="1300" dirty="0">
+                <a:solidFill>
+                  <a:srgbClr val="655E74"/>
+                </a:solidFill>
+                <a:latin typeface="Manrope" pitchFamily="34" charset="0"/>
+                <a:ea typeface="Manrope" pitchFamily="34" charset="-122"/>
+                <a:cs typeface="Manrope" pitchFamily="34" charset="-120"/>
+              </a:rPr>
+              <a:t>Effective context engineering for AI agents — Anthropic, 2025.</a:t>
+            </a:r>
+            <a:endParaRPr lang="en-US" sz="1300" dirty="0"/>
+          </a:p>
+        </p:txBody>
+      </p:sp>
+    </p:spTree>
+  </p:cSld>
+  <p:clrMapOvr>
+    <a:masterClrMapping/>
+  </p:clrMapOvr>
+</p:sld>
+</file>
+
+<file path=ppt/slides/slide25.xml><?xml version="1.0" encoding="utf-8"?>
+<p:sld xmlns:a="http://schemas.openxmlformats.org/drawingml/2006/main" xmlns:r="http://schemas.openxmlformats.org/officeDocument/2006/relationships" xmlns:p="http://schemas.openxmlformats.org/presentationml/2006/main">
+  <p:cSld name="Slide 25">
+    <p:bg>
+      <p:bgPr>
+        <a:solidFill>
+          <a:srgbClr val="2E2C32"/>
+        </a:solidFill>
+      </p:bgPr>
+    </p:bg>
+    <p:spTree>
+      <p:nvGrpSpPr>
+        <p:cNvPr id="1" name=""/>
+        <p:cNvGrpSpPr/>
+        <p:nvPr/>
+      </p:nvGrpSpPr>
+      <p:grpSpPr>
+        <a:xfrm>
+          <a:off x="0" y="0"/>
+          <a:ext cx="0" cy="0"/>
+          <a:chOff x="0" y="0"/>
+          <a:chExt cx="0" cy="0"/>
+        </a:xfrm>
+      </p:grpSpPr>
+      <p:sp>
+        <p:nvSpPr>
+          <p:cNvPr id="2" name="Text 0"/>
+          <p:cNvSpPr/>
+          <p:nvPr/>
+        </p:nvSpPr>
+        <p:spPr>
+          <a:xfrm>
+            <a:off x="548640" y="548640"/>
+            <a:ext cx="8229600" cy="365760"/>
+          </a:xfrm>
+          <a:prstGeom prst="rect">
+            <a:avLst/>
+          </a:prstGeom>
+          <a:noFill/>
+          <a:ln/>
+        </p:spPr>
+        <p:txBody>
+          <a:bodyPr wrap="square" lIns="0" tIns="0" rIns="0" bIns="0" rtlCol="0" anchor="ctr"/>
+          <a:lstStyle/>
+          <a:p>
+            <a:pPr indent="0" marL="0">
+              <a:buNone/>
+            </a:pPr>
+            <a:r>
+              <a:rPr lang="en-US" sz="1200" b="1" spc="400" kern="0" dirty="0">
+                <a:solidFill>
+                  <a:srgbClr val="9378FF"/>
+                </a:solidFill>
+                <a:latin typeface="Syne" pitchFamily="34" charset="0"/>
+                <a:ea typeface="Syne" pitchFamily="34" charset="-122"/>
+                <a:cs typeface="Syne" pitchFamily="34" charset="-120"/>
+              </a:rPr>
+              <a:t>FIND ME</a:t>
+            </a:r>
+            <a:endParaRPr lang="en-US" sz="1200" dirty="0"/>
+          </a:p>
+        </p:txBody>
+      </p:sp>
+      <p:sp>
+        <p:nvSpPr>
+          <p:cNvPr id="3" name="Text 1"/>
+          <p:cNvSpPr/>
+          <p:nvPr/>
+        </p:nvSpPr>
+        <p:spPr>
+          <a:xfrm>
+            <a:off x="548640" y="914400"/>
+            <a:ext cx="8229600" cy="640080"/>
+          </a:xfrm>
+          <a:prstGeom prst="rect">
+            <a:avLst/>
+          </a:prstGeom>
+          <a:noFill/>
+          <a:ln/>
+        </p:spPr>
+        <p:txBody>
+          <a:bodyPr wrap="square" lIns="0" tIns="0" rIns="0" bIns="0" rtlCol="0" anchor="ctr"/>
+          <a:lstStyle/>
+          <a:p>
+            <a:pPr indent="0" marL="0">
+              <a:buNone/>
+            </a:pPr>
+            <a:r>
+              <a:rPr lang="en-US" sz="3000" b="1" dirty="0">
+                <a:solidFill>
+                  <a:srgbClr val="FFFFFF"/>
+                </a:solidFill>
+                <a:latin typeface="Syne" pitchFamily="34" charset="0"/>
+                <a:ea typeface="Syne" pitchFamily="34" charset="-122"/>
+                <a:cs typeface="Syne" pitchFamily="34" charset="-120"/>
+              </a:rPr>
+              <a:t>Clone it. Read the write-ups. Say hi.</a:t>
+            </a:r>
+            <a:endParaRPr lang="en-US" sz="3000" dirty="0"/>
+          </a:p>
+        </p:txBody>
+      </p:sp>
+      <p:pic>
+        <p:nvPicPr>
+          <p:cNvPr id="4" name="Image 0" descr="/Users/kanishk/Desktop/agent-harness/.claude/worktrees/sleepy-sinoussi-00c73b/presentation/assets/qr/qr_repo.png">    </p:cNvPr>
+          <p:cNvPicPr>
+            <a:picLocks noChangeAspect="1"/>
+          </p:cNvPicPr>
+          <p:nvPr/>
+        </p:nvPicPr>
+        <p:blipFill>
+          <a:blip r:embed="rId1"/>
+          <a:stretch>
+            <a:fillRect/>
+          </a:stretch>
+        </p:blipFill>
+        <p:spPr>
+          <a:xfrm>
+            <a:off x="1097280" y="2011680"/>
+            <a:ext cx="1371600" cy="1371600"/>
+          </a:xfrm>
+          <a:prstGeom prst="rect">
+            <a:avLst/>
+          </a:prstGeom>
+        </p:spPr>
+      </p:pic>
+      <p:sp>
+        <p:nvSpPr>
+          <p:cNvPr id="5" name="Text 2"/>
+          <p:cNvSpPr/>
+          <p:nvPr/>
+        </p:nvSpPr>
+        <p:spPr>
+          <a:xfrm>
+            <a:off x="822960" y="3429000"/>
+            <a:ext cx="1920240" cy="274320"/>
+          </a:xfrm>
+          <a:prstGeom prst="rect">
+            <a:avLst/>
+          </a:prstGeom>
+          <a:noFill/>
+          <a:ln/>
+        </p:spPr>
+        <p:txBody>
+          <a:bodyPr wrap="square" lIns="0" tIns="0" rIns="0" bIns="0" rtlCol="0" anchor="ctr"/>
+          <a:lstStyle/>
+          <a:p>
             <a:pPr algn="ctr" indent="0" marL="0">
               <a:buNone/>
             </a:pPr>
             <a:r>
-              <a:rPr lang="en-US" sz="1200" b="1" dirty="0">
-                <a:solidFill>
-                  <a:srgbClr val="A32D2D"/>
-                </a:solidFill>
-                <a:latin typeface="Courier New" pitchFamily="34" charset="0"/>
-                <a:ea typeface="Courier New" pitchFamily="34" charset="-122"/>
-                <a:cs typeface="Courier New" pitchFamily="34" charset="-120"/>
-              </a:rPr>
-              <a:t>context_length_exceeded</a:t>
-            </a:r>
-            <a:endParaRPr lang="en-US" sz="1200" dirty="0"/>
-          </a:p>
-        </p:txBody>
-      </p:sp>
-      <p:sp>
-        <p:nvSpPr>
-          <p:cNvPr id="10" name="Text 7"/>
-          <p:cNvSpPr/>
-          <p:nvPr/>
-        </p:nvSpPr>
-        <p:spPr>
-          <a:xfrm>
-            <a:off x="5669280" y="2286000"/>
-            <a:ext cx="2743200" cy="274320"/>
+              <a:rPr lang="en-US" sz="1100" b="1" dirty="0">
+                <a:solidFill>
+                  <a:srgbClr val="2E2C32"/>
+                </a:solidFill>
+                <a:latin typeface="Manrope" pitchFamily="34" charset="0"/>
+                <a:ea typeface="Manrope" pitchFamily="34" charset="-122"/>
+                <a:cs typeface="Manrope" pitchFamily="34" charset="-120"/>
+              </a:rPr>
+              <a:t>Repo</a:t>
+            </a:r>
+            <a:endParaRPr lang="en-US" sz="1100" dirty="0"/>
+          </a:p>
+        </p:txBody>
+      </p:sp>
+      <p:pic>
+        <p:nvPicPr>
+          <p:cNvPr id="6" name="Image 1" descr="/Users/kanishk/Desktop/agent-harness/.claude/worktrees/sleepy-sinoussi-00c73b/presentation/assets/qr/qr_newsletter.png">    </p:cNvPr>
+          <p:cNvPicPr>
+            <a:picLocks noChangeAspect="1"/>
+          </p:cNvPicPr>
+          <p:nvPr/>
+        </p:nvPicPr>
+        <p:blipFill>
+          <a:blip r:embed="rId2"/>
+          <a:stretch>
+            <a:fillRect/>
+          </a:stretch>
+        </p:blipFill>
+        <p:spPr>
+          <a:xfrm>
+            <a:off x="3886200" y="2011680"/>
+            <a:ext cx="1371600" cy="1371600"/>
+          </a:xfrm>
+          <a:prstGeom prst="rect">
+            <a:avLst/>
+          </a:prstGeom>
+        </p:spPr>
+      </p:pic>
+      <p:sp>
+        <p:nvSpPr>
+          <p:cNvPr id="7" name="Text 3"/>
+          <p:cNvSpPr/>
+          <p:nvPr/>
+        </p:nvSpPr>
+        <p:spPr>
+          <a:xfrm>
+            <a:off x="3611880" y="3429000"/>
+            <a:ext cx="1920240" cy="274320"/>
           </a:xfrm>
           <a:prstGeom prst="rect">
             <a:avLst/>
@@ -6550,17 +9278,235 @@
               <a:buNone/>
             </a:pPr>
             <a:r>
+              <a:rPr lang="en-US" sz="1100" b="1" dirty="0">
+                <a:solidFill>
+                  <a:srgbClr val="2E2C32"/>
+                </a:solidFill>
+                <a:latin typeface="Manrope" pitchFamily="34" charset="0"/>
+                <a:ea typeface="Manrope" pitchFamily="34" charset="-122"/>
+                <a:cs typeface="Manrope" pitchFamily="34" charset="-120"/>
+              </a:rPr>
+              <a:t>Learn Agentic AI</a:t>
+            </a:r>
+            <a:endParaRPr lang="en-US" sz="1100" dirty="0"/>
+          </a:p>
+        </p:txBody>
+      </p:sp>
+      <p:pic>
+        <p:nvPicPr>
+          <p:cNvPr id="8" name="Image 2" descr="/Users/kanishk/Desktop/agent-harness/.claude/worktrees/sleepy-sinoussi-00c73b/presentation/assets/qr/qr_x.png">    </p:cNvPr>
+          <p:cNvPicPr>
+            <a:picLocks noChangeAspect="1"/>
+          </p:cNvPicPr>
+          <p:nvPr/>
+        </p:nvPicPr>
+        <p:blipFill>
+          <a:blip r:embed="rId3"/>
+          <a:stretch>
+            <a:fillRect/>
+          </a:stretch>
+        </p:blipFill>
+        <p:spPr>
+          <a:xfrm>
+            <a:off x="6675120" y="2011680"/>
+            <a:ext cx="1371600" cy="1371600"/>
+          </a:xfrm>
+          <a:prstGeom prst="rect">
+            <a:avLst/>
+          </a:prstGeom>
+        </p:spPr>
+      </p:pic>
+      <p:sp>
+        <p:nvSpPr>
+          <p:cNvPr id="9" name="Text 4"/>
+          <p:cNvSpPr/>
+          <p:nvPr/>
+        </p:nvSpPr>
+        <p:spPr>
+          <a:xfrm>
+            <a:off x="6400800" y="3429000"/>
+            <a:ext cx="1920240" cy="274320"/>
+          </a:xfrm>
+          <a:prstGeom prst="rect">
+            <a:avLst/>
+          </a:prstGeom>
+          <a:noFill/>
+          <a:ln/>
+        </p:spPr>
+        <p:txBody>
+          <a:bodyPr wrap="square" lIns="0" tIns="0" rIns="0" bIns="0" rtlCol="0" anchor="ctr"/>
+          <a:lstStyle/>
+          <a:p>
+            <a:pPr algn="ctr" indent="0" marL="0">
+              <a:buNone/>
+            </a:pPr>
+            <a:r>
+              <a:rPr lang="en-US" sz="1100" b="1" dirty="0">
+                <a:solidFill>
+                  <a:srgbClr val="2E2C32"/>
+                </a:solidFill>
+                <a:latin typeface="Manrope" pitchFamily="34" charset="0"/>
+                <a:ea typeface="Manrope" pitchFamily="34" charset="-122"/>
+                <a:cs typeface="Manrope" pitchFamily="34" charset="-120"/>
+              </a:rPr>
+              <a:t>X · @above_almighty</a:t>
+            </a:r>
+            <a:endParaRPr lang="en-US" sz="1100" dirty="0"/>
+          </a:p>
+        </p:txBody>
+      </p:sp>
+      <p:sp>
+        <p:nvSpPr>
+          <p:cNvPr id="10" name="Text 5"/>
+          <p:cNvSpPr/>
+          <p:nvPr/>
+        </p:nvSpPr>
+        <p:spPr>
+          <a:xfrm>
+            <a:off x="548640" y="4160520"/>
+            <a:ext cx="8229600" cy="274320"/>
+          </a:xfrm>
+          <a:prstGeom prst="rect">
+            <a:avLst/>
+          </a:prstGeom>
+          <a:noFill/>
+          <a:ln/>
+        </p:spPr>
+        <p:txBody>
+          <a:bodyPr wrap="square" lIns="0" tIns="0" rIns="0" bIns="0" rtlCol="0" anchor="ctr"/>
+          <a:lstStyle/>
+          <a:p>
+            <a:pPr algn="ctr" indent="0" marL="0">
+              <a:buNone/>
+            </a:pPr>
+            <a:r>
               <a:rPr lang="en-US" sz="1100" i="1" dirty="0">
                 <a:solidFill>
-                  <a:srgbClr val="655E74"/>
-                </a:solidFill>
-                <a:latin typeface="Manrope" pitchFamily="34" charset="0"/>
-                <a:ea typeface="Manrope" pitchFamily="34" charset="-122"/>
-                <a:cs typeface="Manrope" pitchFamily="34" charset="-120"/>
-              </a:rPr>
-              <a:t>step 51 →</a:t>
+                  <a:srgbClr val="7E7A8A"/>
+                </a:solidFill>
+                <a:latin typeface="Manrope" pitchFamily="34" charset="0"/>
+                <a:ea typeface="Manrope" pitchFamily="34" charset="-122"/>
+                <a:cs typeface="Manrope" pitchFamily="34" charset="-120"/>
+              </a:rPr>
+              <a:t>LinkedIn QR — add your URL (placeholder)</a:t>
             </a:r>
             <a:endParaRPr lang="en-US" sz="1100" dirty="0"/>
+          </a:p>
+        </p:txBody>
+      </p:sp>
+      <p:pic>
+        <p:nvPicPr>
+          <p:cNvPr id="11" name="Image 3" descr="preencoded.png">    </p:cNvPr>
+          <p:cNvPicPr>
+            <a:picLocks noChangeAspect="1"/>
+          </p:cNvPicPr>
+          <p:nvPr/>
+        </p:nvPicPr>
+        <p:blipFill>
+          <a:blip r:embed="rId4"/>
+          <a:stretch>
+            <a:fillRect/>
+          </a:stretch>
+        </p:blipFill>
+        <p:spPr>
+          <a:xfrm>
+            <a:off x="548640" y="4736592"/>
+            <a:ext cx="219456" cy="165344"/>
+          </a:xfrm>
+          <a:prstGeom prst="rect">
+            <a:avLst/>
+          </a:prstGeom>
+        </p:spPr>
+      </p:pic>
+      <p:sp>
+        <p:nvSpPr>
+          <p:cNvPr id="12" name="Text 6"/>
+          <p:cNvSpPr/>
+          <p:nvPr/>
+        </p:nvSpPr>
+        <p:spPr>
+          <a:xfrm>
+            <a:off x="822960" y="4690872"/>
+            <a:ext cx="1280160" cy="292608"/>
+          </a:xfrm>
+          <a:prstGeom prst="rect">
+            <a:avLst/>
+          </a:prstGeom>
+          <a:noFill/>
+          <a:ln/>
+        </p:spPr>
+        <p:txBody>
+          <a:bodyPr wrap="square" lIns="0" tIns="0" rIns="0" bIns="0" rtlCol="0" anchor="ctr"/>
+          <a:lstStyle/>
+          <a:p>
+            <a:pPr indent="0" marL="0">
+              <a:buNone/>
+            </a:pPr>
+            <a:r>
+              <a:rPr lang="en-US" sz="1100" b="1" dirty="0">
+                <a:solidFill>
+                  <a:srgbClr val="FFFFFF"/>
+                </a:solidFill>
+                <a:latin typeface="Syne" pitchFamily="34" charset="0"/>
+                <a:ea typeface="Syne" pitchFamily="34" charset="-122"/>
+                <a:cs typeface="Syne" pitchFamily="34" charset="-120"/>
+              </a:rPr>
+              <a:t>Founsi</a:t>
+            </a:r>
+            <a:pPr indent="0" marL="0">
+              <a:buNone/>
+            </a:pPr>
+            <a:r>
+              <a:rPr lang="en-US" sz="1100" b="1" dirty="0">
+                <a:solidFill>
+                  <a:srgbClr val="9378FF"/>
+                </a:solidFill>
+                <a:latin typeface="Syne" pitchFamily="34" charset="0"/>
+                <a:ea typeface="Syne" pitchFamily="34" charset="-122"/>
+                <a:cs typeface="Syne" pitchFamily="34" charset="-120"/>
+              </a:rPr>
+              <a:t>.</a:t>
+            </a:r>
+            <a:endParaRPr lang="en-US" sz="1100" dirty="0"/>
+          </a:p>
+        </p:txBody>
+      </p:sp>
+      <p:sp>
+        <p:nvSpPr>
+          <p:cNvPr id="13" name="Text 7"/>
+          <p:cNvSpPr/>
+          <p:nvPr/>
+        </p:nvSpPr>
+        <p:spPr>
+          <a:xfrm>
+            <a:off x="8229600" y="4690872"/>
+            <a:ext cx="365760" cy="292608"/>
+          </a:xfrm>
+          <a:prstGeom prst="rect">
+            <a:avLst/>
+          </a:prstGeom>
+          <a:noFill/>
+          <a:ln/>
+        </p:spPr>
+        <p:txBody>
+          <a:bodyPr wrap="square" lIns="0" tIns="0" rIns="0" bIns="0" rtlCol="0" anchor="ctr"/>
+          <a:lstStyle/>
+          <a:p>
+            <a:pPr algn="r" indent="0" marL="0">
+              <a:buNone/>
+            </a:pPr>
+            <a:r>
+              <a:rPr lang="en-US" sz="900" dirty="0">
+                <a:solidFill>
+                  <a:srgbClr val="7E7A8A"/>
+                </a:solidFill>
+                <a:latin typeface="Manrope" pitchFamily="34" charset="0"/>
+                <a:ea typeface="Manrope" pitchFamily="34" charset="-122"/>
+                <a:cs typeface="Manrope" pitchFamily="34" charset="-120"/>
+              </a:rPr>
+              <a:t>25</a:t>
+            </a:r>
+            <a:endParaRPr lang="en-US" sz="900" dirty="0"/>
           </a:p>
         </p:txBody>
       </p:sp>
@@ -6629,7 +9575,7 @@
                 <a:ea typeface="Syne" pitchFamily="34" charset="-122"/>
                 <a:cs typeface="Syne" pitchFamily="34" charset="-120"/>
               </a:rPr>
-              <a:t>THE REFRAME</a:t>
+              <a:t>WHY IT MATTERS</a:t>
             </a:r>
             <a:endParaRPr lang="en-US" sz="1100" dirty="0"/>
           </a:p>
@@ -6668,7 +9614,7 @@
                 <a:ea typeface="Syne" pitchFamily="34" charset="-122"/>
                 <a:cs typeface="Syne" pitchFamily="34" charset="-120"/>
               </a:rPr>
-              <a:t>The context window isn't storage. It's a budget.</a:t>
+              <a:t>Brilliant at 5 steps. Dead at 50.</a:t>
             </a:r>
             <a:endParaRPr lang="en-US" sz="2600" dirty="0"/>
           </a:p>
@@ -6690,8 +9636,8 @@
         </p:blipFill>
         <p:spPr>
           <a:xfrm>
-            <a:off x="548640" y="4718304"/>
-            <a:ext cx="237744" cy="179122"/>
+            <a:off x="548640" y="4736592"/>
+            <a:ext cx="219456" cy="165344"/>
           </a:xfrm>
           <a:prstGeom prst="rect">
             <a:avLst/>
@@ -6706,7 +9652,7 @@
         </p:nvSpPr>
         <p:spPr>
           <a:xfrm>
-            <a:off x="841248" y="4681728"/>
+            <a:off x="822960" y="4690872"/>
             <a:ext cx="1280160" cy="292608"/>
           </a:xfrm>
           <a:prstGeom prst="rect">
@@ -6759,7 +9705,7 @@
         </p:nvSpPr>
         <p:spPr>
           <a:xfrm>
-            <a:off x="8229600" y="4681728"/>
+            <a:off x="8229600" y="4690872"/>
             <a:ext cx="365760" cy="292608"/>
           </a:xfrm>
           <a:prstGeom prst="rect">
@@ -6798,8 +9744,8 @@
         </p:nvSpPr>
         <p:spPr>
           <a:xfrm>
-            <a:off x="548640" y="1645920"/>
-            <a:ext cx="8046720" cy="2834640"/>
+            <a:off x="548640" y="1691640"/>
+            <a:ext cx="4663440" cy="2834640"/>
           </a:xfrm>
           <a:prstGeom prst="rect">
             <a:avLst/>
@@ -6813,7 +9759,7 @@
           <a:p>
             <a:pPr marL="203200" indent="-203200">
               <a:spcAft>
-                <a:spcPts val="900"/>
+                <a:spcPts val="800"/>
               </a:spcAft>
               <a:buSzPct val="100000"/>
               <a:buChar char="•"/>
@@ -6827,14 +9773,14 @@
                 <a:ea typeface="Manrope" pitchFamily="34" charset="-122"/>
                 <a:cs typeface="Manrope" pitchFamily="34" charset="-120"/>
               </a:rPr>
-              <a:t>The model is stateless — every turn you re-send the entire history.</a:t>
+              <a:t>Cost scales — you re-send the whole history every single turn.</a:t>
             </a:r>
             <a:endParaRPr lang="en-US" sz="1500" dirty="0"/>
           </a:p>
           <a:p>
             <a:pPr marL="203200" indent="-203200">
               <a:spcAft>
-                <a:spcPts val="900"/>
+                <a:spcPts val="800"/>
               </a:spcAft>
               <a:buSzPct val="100000"/>
               <a:buChar char="•"/>
@@ -6848,51 +9794,149 @@
                 <a:ea typeface="Manrope" pitchFamily="34" charset="-122"/>
                 <a:cs typeface="Manrope" pitchFamily="34" charset="-120"/>
               </a:rPr>
-              <a:t>A 50-step run pays for its history ~50 times: cost climbs, latency climbs,</a:t>
+              <a:t>Latency scales — time-to-first-token grows with prompt length.</a:t>
             </a:r>
             <a:endParaRPr lang="en-US" sz="1500" dirty="0"/>
           </a:p>
           <a:p>
             <a:pPr marL="203200" indent="-203200">
               <a:spcAft>
-                <a:spcPts val="900"/>
+                <a:spcPts val="800"/>
               </a:spcAft>
               <a:buSzPct val="100000"/>
               <a:buChar char="•"/>
             </a:pPr>
             <a:r>
-              <a:rPr lang="en-US" sz="1300" dirty="0">
-                <a:solidFill>
-                  <a:srgbClr val="655E74"/>
-                </a:solidFill>
-                <a:latin typeface="Manrope" pitchFamily="34" charset="0"/>
-                <a:ea typeface="Manrope" pitchFamily="34" charset="-122"/>
-                <a:cs typeface="Manrope" pitchFamily="34" charset="-120"/>
-              </a:rPr>
-              <a:t>and recall drops — models read the middle of a long context worst.</a:t>
+              <a:rPr lang="en-US" sz="1500" dirty="0">
+                <a:solidFill>
+                  <a:srgbClr val="2E2C32"/>
+                </a:solidFill>
+                <a:latin typeface="Manrope" pitchFamily="34" charset="0"/>
+                <a:ea typeface="Manrope" pitchFamily="34" charset="-122"/>
+                <a:cs typeface="Manrope" pitchFamily="34" charset="-120"/>
+              </a:rPr>
+              <a:t>Attention dilutes — the model gets lost in the middle.</a:t>
             </a:r>
             <a:endParaRPr lang="en-US" sz="1500" dirty="0"/>
           </a:p>
           <a:p>
             <a:pPr marL="203200" indent="-203200">
               <a:spcAft>
-                <a:spcPts val="900"/>
+                <a:spcPts val="800"/>
               </a:spcAft>
               <a:buSzPct val="100000"/>
               <a:buChar char="•"/>
             </a:pPr>
             <a:r>
-              <a:rPr lang="en-US" sz="1500" dirty="0">
-                <a:solidFill>
-                  <a:srgbClr val="2E2C32"/>
-                </a:solidFill>
-                <a:latin typeface="Manrope" pitchFamily="34" charset="0"/>
-                <a:ea typeface="Manrope" pitchFamily="34" charset="-122"/>
-                <a:cs typeface="Manrope" pitchFamily="34" charset="-120"/>
-              </a:rPr>
-              <a:t>A bigger window raises the ceiling. It doesn't bend the curve.</a:t>
+              <a:rPr lang="en-US" sz="1300" dirty="0">
+                <a:solidFill>
+                  <a:srgbClr val="655E74"/>
+                </a:solidFill>
+                <a:latin typeface="Manrope" pitchFamily="34" charset="0"/>
+                <a:ea typeface="Manrope" pitchFamily="34" charset="-122"/>
+                <a:cs typeface="Manrope" pitchFamily="34" charset="-120"/>
+              </a:rPr>
+              <a:t>Then it dies — drifts, repeats, forgets the goal, hits the hard limit.</a:t>
             </a:r>
             <a:endParaRPr lang="en-US" sz="1500" dirty="0"/>
+          </a:p>
+        </p:txBody>
+      </p:sp>
+      <p:sp>
+        <p:nvSpPr>
+          <p:cNvPr id="8" name="Shape 5"/>
+          <p:cNvSpPr/>
+          <p:nvPr/>
+        </p:nvSpPr>
+        <p:spPr>
+          <a:xfrm>
+            <a:off x="5760720" y="2011680"/>
+            <a:ext cx="2743200" cy="502920"/>
+          </a:xfrm>
+          <a:prstGeom prst="rect">
+            <a:avLst/>
+          </a:prstGeom>
+          <a:solidFill>
+            <a:srgbClr val="F7C1C1"/>
+          </a:solidFill>
+          <a:ln/>
+        </p:spPr>
+      </p:sp>
+      <p:sp>
+        <p:nvSpPr>
+          <p:cNvPr id="9" name="Text 6"/>
+          <p:cNvSpPr/>
+          <p:nvPr/>
+        </p:nvSpPr>
+        <p:spPr>
+          <a:xfrm>
+            <a:off x="5760720" y="2011680"/>
+            <a:ext cx="2743200" cy="502920"/>
+          </a:xfrm>
+          <a:prstGeom prst="rect">
+            <a:avLst/>
+          </a:prstGeom>
+          <a:noFill/>
+          <a:ln/>
+        </p:spPr>
+        <p:txBody>
+          <a:bodyPr wrap="square" lIns="0" tIns="0" rIns="0" bIns="0" rtlCol="0" anchor="ctr"/>
+          <a:lstStyle/>
+          <a:p>
+            <a:pPr algn="ctr" indent="0" marL="0">
+              <a:buNone/>
+            </a:pPr>
+            <a:r>
+              <a:rPr lang="en-US" sz="1200" b="1" dirty="0">
+                <a:solidFill>
+                  <a:srgbClr val="A32D2D"/>
+                </a:solidFill>
+                <a:latin typeface="Courier New" pitchFamily="34" charset="0"/>
+                <a:ea typeface="Courier New" pitchFamily="34" charset="-122"/>
+                <a:cs typeface="Courier New" pitchFamily="34" charset="-120"/>
+              </a:rPr>
+              <a:t>context_length_exceeded</a:t>
+            </a:r>
+            <a:endParaRPr lang="en-US" sz="1200" dirty="0"/>
+          </a:p>
+        </p:txBody>
+      </p:sp>
+      <p:sp>
+        <p:nvSpPr>
+          <p:cNvPr id="10" name="Text 7"/>
+          <p:cNvSpPr/>
+          <p:nvPr/>
+        </p:nvSpPr>
+        <p:spPr>
+          <a:xfrm>
+            <a:off x="5760720" y="2606040"/>
+            <a:ext cx="2743200" cy="274320"/>
+          </a:xfrm>
+          <a:prstGeom prst="rect">
+            <a:avLst/>
+          </a:prstGeom>
+          <a:noFill/>
+          <a:ln/>
+        </p:spPr>
+        <p:txBody>
+          <a:bodyPr wrap="square" lIns="0" tIns="0" rIns="0" bIns="0" rtlCol="0" anchor="ctr"/>
+          <a:lstStyle/>
+          <a:p>
+            <a:pPr algn="ctr" indent="0" marL="0">
+              <a:buNone/>
+            </a:pPr>
+            <a:r>
+              <a:rPr lang="en-US" sz="1100" i="1" dirty="0">
+                <a:solidFill>
+                  <a:srgbClr val="655E74"/>
+                </a:solidFill>
+                <a:latin typeface="Manrope" pitchFamily="34" charset="0"/>
+                <a:ea typeface="Manrope" pitchFamily="34" charset="-122"/>
+                <a:cs typeface="Manrope" pitchFamily="34" charset="-120"/>
+              </a:rPr>
+              <a:t>step 51 →</a:t>
+            </a:r>
+            <a:endParaRPr lang="en-US" sz="1100" dirty="0"/>
           </a:p>
         </p:txBody>
       </p:sp>
@@ -6936,8 +9980,8 @@
         </p:nvSpPr>
         <p:spPr>
           <a:xfrm>
-            <a:off x="731520" y="1554480"/>
-            <a:ext cx="7680960" cy="822960"/>
+            <a:off x="548640" y="365760"/>
+            <a:ext cx="8046720" cy="274320"/>
           </a:xfrm>
           <a:prstGeom prst="rect">
             <a:avLst/>
@@ -6949,78 +9993,78 @@
           <a:bodyPr wrap="square" lIns="0" tIns="0" rIns="0" bIns="0" rtlCol="0" anchor="ctr"/>
           <a:lstStyle/>
           <a:p>
-            <a:pPr algn="ctr" indent="0" marL="0">
-              <a:buNone/>
-            </a:pPr>
-            <a:r>
-              <a:rPr lang="en-US" sz="3400" b="1" dirty="0">
-                <a:solidFill>
-                  <a:srgbClr val="2E2C32"/>
+            <a:pPr indent="0" marL="0">
+              <a:buNone/>
+            </a:pPr>
+            <a:r>
+              <a:rPr lang="en-US" sz="1100" b="1" spc="300" kern="0" dirty="0">
+                <a:solidFill>
+                  <a:srgbClr val="9378FF"/>
                 </a:solidFill>
                 <a:latin typeface="Syne" pitchFamily="34" charset="0"/>
                 <a:ea typeface="Syne" pitchFamily="34" charset="-122"/>
                 <a:cs typeface="Syne" pitchFamily="34" charset="-120"/>
               </a:rPr>
-              <a:t>The model is a commodity you </a:t>
-            </a:r>
+              <a:t>THE REFRAME</a:t>
+            </a:r>
+            <a:endParaRPr lang="en-US" sz="1100" dirty="0"/>
+          </a:p>
+        </p:txBody>
+      </p:sp>
+      <p:sp>
+        <p:nvSpPr>
+          <p:cNvPr id="3" name="Text 1"/>
+          <p:cNvSpPr/>
+          <p:nvPr/>
+        </p:nvSpPr>
+        <p:spPr>
+          <a:xfrm>
+            <a:off x="731520" y="1691640"/>
+            <a:ext cx="7680960" cy="777240"/>
+          </a:xfrm>
+          <a:prstGeom prst="rect">
+            <a:avLst/>
+          </a:prstGeom>
+          <a:noFill/>
+          <a:ln/>
+        </p:spPr>
+        <p:txBody>
+          <a:bodyPr wrap="square" lIns="0" tIns="0" rIns="0" bIns="0" rtlCol="0" anchor="ctr"/>
+          <a:lstStyle/>
+          <a:p>
             <a:pPr algn="ctr" indent="0" marL="0">
               <a:buNone/>
             </a:pPr>
             <a:r>
-              <a:rPr lang="en-US" sz="3400" b="1" i="1" dirty="0">
-                <a:solidFill>
-                  <a:srgbClr val="7B5EF0"/>
+              <a:rPr lang="en-US" sz="3300" b="1" dirty="0">
+                <a:solidFill>
+                  <a:srgbClr val="2E2C32"/>
                 </a:solidFill>
                 <a:latin typeface="Syne" pitchFamily="34" charset="0"/>
                 <a:ea typeface="Syne" pitchFamily="34" charset="-122"/>
                 <a:cs typeface="Syne" pitchFamily="34" charset="-120"/>
               </a:rPr>
-              <a:t>rent</a:t>
+              <a:t>The context window is a </a:t>
             </a:r>
             <a:pPr algn="ctr" indent="0" marL="0">
               <a:buNone/>
             </a:pPr>
             <a:r>
-              <a:rPr lang="en-US" sz="3400" b="1" dirty="0">
-                <a:solidFill>
-                  <a:srgbClr val="2E2C32"/>
+              <a:rPr lang="en-US" sz="3300" b="1" i="1" dirty="0">
+                <a:solidFill>
+                  <a:srgbClr val="9378FF"/>
                 </a:solidFill>
                 <a:latin typeface="Syne" pitchFamily="34" charset="0"/>
                 <a:ea typeface="Syne" pitchFamily="34" charset="-122"/>
                 <a:cs typeface="Syne" pitchFamily="34" charset="-120"/>
               </a:rPr>
-              <a:t>.</a:t>
-            </a:r>
-            <a:endParaRPr lang="en-US" sz="3400" dirty="0"/>
-          </a:p>
-        </p:txBody>
-      </p:sp>
-      <p:sp>
-        <p:nvSpPr>
-          <p:cNvPr id="3" name="Text 1"/>
-          <p:cNvSpPr/>
-          <p:nvPr/>
-        </p:nvSpPr>
-        <p:spPr>
-          <a:xfrm>
-            <a:off x="731520" y="2468880"/>
-            <a:ext cx="7680960" cy="822960"/>
-          </a:xfrm>
-          <a:prstGeom prst="rect">
-            <a:avLst/>
-          </a:prstGeom>
-          <a:noFill/>
-          <a:ln/>
-        </p:spPr>
-        <p:txBody>
-          <a:bodyPr wrap="square" lIns="0" tIns="0" rIns="0" bIns="0" rtlCol="0" anchor="ctr"/>
-          <a:lstStyle/>
-          <a:p>
+              <a:t>budget</a:t>
+            </a:r>
             <a:pPr algn="ctr" indent="0" marL="0">
               <a:buNone/>
             </a:pPr>
             <a:r>
-              <a:rPr lang="en-US" sz="3400" b="1" dirty="0">
+              <a:rPr lang="en-US" sz="3300" b="1" dirty="0">
                 <a:solidFill>
                   <a:srgbClr val="2E2C32"/>
                 </a:solidFill>
@@ -7028,43 +10072,121 @@
                 <a:ea typeface="Syne" pitchFamily="34" charset="-122"/>
                 <a:cs typeface="Syne" pitchFamily="34" charset="-120"/>
               </a:rPr>
-              <a:t>The harness is the part you </a:t>
-            </a:r>
+              <a:t>,</a:t>
+            </a:r>
+            <a:endParaRPr lang="en-US" sz="3300" dirty="0"/>
+          </a:p>
+        </p:txBody>
+      </p:sp>
+      <p:sp>
+        <p:nvSpPr>
+          <p:cNvPr id="4" name="Text 2"/>
+          <p:cNvSpPr/>
+          <p:nvPr/>
+        </p:nvSpPr>
+        <p:spPr>
+          <a:xfrm>
+            <a:off x="731520" y="2468880"/>
+            <a:ext cx="7680960" cy="777240"/>
+          </a:xfrm>
+          <a:prstGeom prst="rect">
+            <a:avLst/>
+          </a:prstGeom>
+          <a:noFill/>
+          <a:ln/>
+        </p:spPr>
+        <p:txBody>
+          <a:bodyPr wrap="square" lIns="0" tIns="0" rIns="0" bIns="0" rtlCol="0" anchor="ctr"/>
+          <a:lstStyle/>
+          <a:p>
             <a:pPr algn="ctr" indent="0" marL="0">
               <a:buNone/>
             </a:pPr>
             <a:r>
-              <a:rPr lang="en-US" sz="3400" b="1" i="1" dirty="0">
-                <a:solidFill>
-                  <a:srgbClr val="9378FF"/>
+              <a:rPr lang="en-US" sz="3300" b="1" dirty="0">
+                <a:solidFill>
+                  <a:srgbClr val="2E2C32"/>
                 </a:solidFill>
                 <a:latin typeface="Syne" pitchFamily="34" charset="0"/>
                 <a:ea typeface="Syne" pitchFamily="34" charset="-122"/>
                 <a:cs typeface="Syne" pitchFamily="34" charset="-120"/>
               </a:rPr>
-              <a:t>build</a:t>
+              <a:t>not a </a:t>
             </a:r>
             <a:pPr algn="ctr" indent="0" marL="0">
               <a:buNone/>
             </a:pPr>
             <a:r>
-              <a:rPr lang="en-US" sz="3400" b="1" dirty="0">
-                <a:solidFill>
-                  <a:srgbClr val="2E2C32"/>
+              <a:rPr lang="en-US" sz="3300" b="1" i="1" dirty="0">
+                <a:solidFill>
+                  <a:srgbClr val="655E74"/>
                 </a:solidFill>
                 <a:latin typeface="Syne" pitchFamily="34" charset="0"/>
                 <a:ea typeface="Syne" pitchFamily="34" charset="-122"/>
                 <a:cs typeface="Syne" pitchFamily="34" charset="-120"/>
               </a:rPr>
+              <a:t>backpack</a:t>
+            </a:r>
+            <a:pPr algn="ctr" indent="0" marL="0">
+              <a:buNone/>
+            </a:pPr>
+            <a:r>
+              <a:rPr lang="en-US" sz="3300" b="1" dirty="0">
+                <a:solidFill>
+                  <a:srgbClr val="2E2C32"/>
+                </a:solidFill>
+                <a:latin typeface="Syne" pitchFamily="34" charset="0"/>
+                <a:ea typeface="Syne" pitchFamily="34" charset="-122"/>
+                <a:cs typeface="Syne" pitchFamily="34" charset="-120"/>
+              </a:rPr>
               <a:t>.</a:t>
             </a:r>
-            <a:endParaRPr lang="en-US" sz="3400" dirty="0"/>
+            <a:endParaRPr lang="en-US" sz="3300" dirty="0"/>
+          </a:p>
+        </p:txBody>
+      </p:sp>
+      <p:sp>
+        <p:nvSpPr>
+          <p:cNvPr id="5" name="Text 3"/>
+          <p:cNvSpPr/>
+          <p:nvPr/>
+        </p:nvSpPr>
+        <p:spPr>
+          <a:xfrm>
+            <a:off x="1280160" y="3429000"/>
+            <a:ext cx="6583680" cy="640080"/>
+          </a:xfrm>
+          <a:prstGeom prst="rect">
+            <a:avLst/>
+          </a:prstGeom>
+          <a:noFill/>
+          <a:ln/>
+        </p:spPr>
+        <p:txBody>
+          <a:bodyPr wrap="square" lIns="0" tIns="0" rIns="0" bIns="0" rtlCol="0" anchor="ctr"/>
+          <a:lstStyle/>
+          <a:p>
+            <a:pPr algn="ctr" indent="0" marL="0">
+              <a:buNone/>
+            </a:pPr>
+            <a:r>
+              <a:rPr lang="en-US" sz="1400" dirty="0">
+                <a:solidFill>
+                  <a:srgbClr val="655E74"/>
+                </a:solidFill>
+                <a:latin typeface="Manrope" pitchFamily="34" charset="0"/>
+                <a:ea typeface="Manrope" pitchFamily="34" charset="-122"/>
+                <a:cs typeface="Manrope" pitchFamily="34" charset="-120"/>
+              </a:rPr>
+              <a:t>A bigger window raises the ceiling, not the curve. Engineer the working set and keep it roughly constant — no matter how long the run.</a:t>
+            </a:r>
+            <a:endParaRPr lang="en-US" sz="1400" dirty="0"/>
           </a:p>
         </p:txBody>
       </p:sp>
       <p:pic>
         <p:nvPicPr>
-          <p:cNvPr id="4" name="Image 0" descr="preencoded.png">    </p:cNvPr>
+          <p:cNvPr id="6" name="Image 0" descr="preencoded.png">    </p:cNvPr>
           <p:cNvPicPr>
             <a:picLocks noChangeAspect="1"/>
           </p:cNvPicPr>
@@ -7078,8 +10200,8 @@
         </p:blipFill>
         <p:spPr>
           <a:xfrm>
-            <a:off x="548640" y="4718304"/>
-            <a:ext cx="237744" cy="179122"/>
+            <a:off x="548640" y="4736592"/>
+            <a:ext cx="219456" cy="165344"/>
           </a:xfrm>
           <a:prstGeom prst="rect">
             <a:avLst/>
@@ -7088,13 +10210,13 @@
       </p:pic>
       <p:sp>
         <p:nvSpPr>
-          <p:cNvPr id="5" name="Text 2"/>
-          <p:cNvSpPr/>
-          <p:nvPr/>
-        </p:nvSpPr>
-        <p:spPr>
-          <a:xfrm>
-            <a:off x="841248" y="4681728"/>
+          <p:cNvPr id="7" name="Text 4"/>
+          <p:cNvSpPr/>
+          <p:nvPr/>
+        </p:nvSpPr>
+        <p:spPr>
+          <a:xfrm>
+            <a:off x="822960" y="4690872"/>
             <a:ext cx="1280160" cy="292608"/>
           </a:xfrm>
           <a:prstGeom prst="rect">
@@ -7141,13 +10263,13 @@
       </p:sp>
       <p:sp>
         <p:nvSpPr>
-          <p:cNvPr id="6" name="Text 3"/>
-          <p:cNvSpPr/>
-          <p:nvPr/>
-        </p:nvSpPr>
-        <p:spPr>
-          <a:xfrm>
-            <a:off x="8229600" y="4681728"/>
+          <p:cNvPr id="8" name="Text 5"/>
+          <p:cNvSpPr/>
+          <p:nvPr/>
+        </p:nvSpPr>
+        <p:spPr>
+          <a:xfrm>
+            <a:off x="8229600" y="4690872"/>
             <a:ext cx="365760" cy="292608"/>
           </a:xfrm>
           <a:prstGeom prst="rect">
@@ -7243,7 +10365,7 @@
                 <a:ea typeface="Syne" pitchFamily="34" charset="-122"/>
                 <a:cs typeface="Syne" pitchFamily="34" charset="-120"/>
               </a:rPr>
-              <a:t>MENTAL MODEL</a:t>
+              <a:t>WHAT EXISTS · THE LANDSCAPE</a:t>
             </a:r>
             <a:endParaRPr lang="en-US" sz="1100" dirty="0"/>
           </a:p>
@@ -7274,7 +10396,7 @@
               <a:buNone/>
             </a:pPr>
             <a:r>
-              <a:rPr lang="en-US" sz="2700" b="1" dirty="0">
+              <a:rPr lang="en-US" sz="2500" b="1" dirty="0">
                 <a:solidFill>
                   <a:srgbClr val="2E2C32"/>
                 </a:solidFill>
@@ -7282,9 +10404,9 @@
                 <a:ea typeface="Syne" pitchFamily="34" charset="-122"/>
                 <a:cs typeface="Syne" pitchFamily="34" charset="-120"/>
               </a:rPr>
-              <a:t>The list is the mind.</a:t>
-            </a:r>
-            <a:endParaRPr lang="en-US" sz="2700" dirty="0"/>
+              <a:t>Everyone is fighting the window.</a:t>
+            </a:r>
+            <a:endParaRPr lang="en-US" sz="2500" dirty="0"/>
           </a:p>
         </p:txBody>
       </p:sp>
@@ -7304,8 +10426,8 @@
         </p:blipFill>
         <p:spPr>
           <a:xfrm>
-            <a:off x="548640" y="4718304"/>
-            <a:ext cx="237744" cy="179122"/>
+            <a:off x="548640" y="4736592"/>
+            <a:ext cx="219456" cy="165344"/>
           </a:xfrm>
           <a:prstGeom prst="rect">
             <a:avLst/>
@@ -7320,7 +10442,7 @@
         </p:nvSpPr>
         <p:spPr>
           <a:xfrm>
-            <a:off x="841248" y="4681728"/>
+            <a:off x="822960" y="4690872"/>
             <a:ext cx="1280160" cy="292608"/>
           </a:xfrm>
           <a:prstGeom prst="rect">
@@ -7373,7 +10495,7 @@
         </p:nvSpPr>
         <p:spPr>
           <a:xfrm>
-            <a:off x="8229600" y="4681728"/>
+            <a:off x="8229600" y="4690872"/>
             <a:ext cx="365760" cy="292608"/>
           </a:xfrm>
           <a:prstGeom prst="rect">
@@ -7406,34 +10528,50 @@
       </p:sp>
       <p:sp>
         <p:nvSpPr>
-          <p:cNvPr id="7" name="Text 4"/>
+          <p:cNvPr id="7" name="Shape 4"/>
           <p:cNvSpPr/>
           <p:nvPr/>
         </p:nvSpPr>
         <p:spPr>
           <a:xfrm>
             <a:off x="548640" y="1600200"/>
-            <a:ext cx="8046720" cy="2834640"/>
-          </a:xfrm>
-          <a:prstGeom prst="rect">
-            <a:avLst/>
-          </a:prstGeom>
-          <a:noFill/>
-          <a:ln/>
-        </p:spPr>
-        <p:txBody>
-          <a:bodyPr wrap="square" rtlCol="0" anchor="ctr"/>
-          <a:lstStyle/>
-          <a:p>
-            <a:pPr marL="203200" indent="-203200">
-              <a:spcAft>
-                <a:spcPts val="900"/>
-              </a:spcAft>
-              <a:buSzPct val="100000"/>
-              <a:buChar char="•"/>
-            </a:pPr>
-            <a:r>
-              <a:rPr lang="en-US" sz="1500" dirty="0">
+            <a:ext cx="91440" cy="475488"/>
+          </a:xfrm>
+          <a:prstGeom prst="rect">
+            <a:avLst/>
+          </a:prstGeom>
+          <a:solidFill>
+            <a:srgbClr val="D4C9FF"/>
+          </a:solidFill>
+          <a:ln/>
+        </p:spPr>
+      </p:sp>
+      <p:sp>
+        <p:nvSpPr>
+          <p:cNvPr id="8" name="Text 5"/>
+          <p:cNvSpPr/>
+          <p:nvPr/>
+        </p:nvSpPr>
+        <p:spPr>
+          <a:xfrm>
+            <a:off x="768096" y="1600200"/>
+            <a:ext cx="7955280" cy="475488"/>
+          </a:xfrm>
+          <a:prstGeom prst="rect">
+            <a:avLst/>
+          </a:prstGeom>
+          <a:noFill/>
+          <a:ln/>
+        </p:spPr>
+        <p:txBody>
+          <a:bodyPr wrap="square" lIns="0" tIns="0" rIns="0" bIns="0" rtlCol="0" anchor="ctr"/>
+          <a:lstStyle/>
+          <a:p>
+            <a:pPr indent="0" marL="0">
+              <a:buNone/>
+            </a:pPr>
+            <a:r>
+              <a:rPr lang="en-US" sz="1500" b="1" dirty="0">
                 <a:solidFill>
                   <a:srgbClr val="2E2C32"/>
                 </a:solidFill>
@@ -7441,20 +10579,72 @@
                 <a:ea typeface="Manrope" pitchFamily="34" charset="-122"/>
                 <a:cs typeface="Manrope" pitchFamily="34" charset="-120"/>
               </a:rPr>
-              <a:t>The model remembers nothing between calls.</a:t>
+              <a:t>Anthropic  </a:t>
+            </a:r>
+            <a:pPr indent="0" marL="0">
+              <a:buNone/>
+            </a:pPr>
+            <a:r>
+              <a:rPr lang="en-US" sz="1250" dirty="0">
+                <a:solidFill>
+                  <a:srgbClr val="655E74"/>
+                </a:solidFill>
+                <a:latin typeface="Manrope" pitchFamily="34" charset="0"/>
+                <a:ea typeface="Manrope" pitchFamily="34" charset="-122"/>
+                <a:cs typeface="Manrope" pitchFamily="34" charset="-120"/>
+              </a:rPr>
+              <a:t>names the moves — compaction, structured note-taking, “context rot.”</a:t>
             </a:r>
             <a:endParaRPr lang="en-US" sz="1500" dirty="0"/>
           </a:p>
-          <a:p>
-            <a:pPr marL="203200" indent="-203200">
-              <a:spcAft>
-                <a:spcPts val="900"/>
-              </a:spcAft>
-              <a:buSzPct val="100000"/>
-              <a:buChar char="•"/>
-            </a:pPr>
-            <a:r>
-              <a:rPr lang="en-US" sz="1500" dirty="0">
+        </p:txBody>
+      </p:sp>
+      <p:sp>
+        <p:nvSpPr>
+          <p:cNvPr id="9" name="Shape 6"/>
+          <p:cNvSpPr/>
+          <p:nvPr/>
+        </p:nvSpPr>
+        <p:spPr>
+          <a:xfrm>
+            <a:off x="548640" y="2203704"/>
+            <a:ext cx="91440" cy="475488"/>
+          </a:xfrm>
+          <a:prstGeom prst="rect">
+            <a:avLst/>
+          </a:prstGeom>
+          <a:solidFill>
+            <a:srgbClr val="D4C9FF"/>
+          </a:solidFill>
+          <a:ln/>
+        </p:spPr>
+      </p:sp>
+      <p:sp>
+        <p:nvSpPr>
+          <p:cNvPr id="10" name="Text 7"/>
+          <p:cNvSpPr/>
+          <p:nvPr/>
+        </p:nvSpPr>
+        <p:spPr>
+          <a:xfrm>
+            <a:off x="768096" y="2203704"/>
+            <a:ext cx="7955280" cy="475488"/>
+          </a:xfrm>
+          <a:prstGeom prst="rect">
+            <a:avLst/>
+          </a:prstGeom>
+          <a:noFill/>
+          <a:ln/>
+        </p:spPr>
+        <p:txBody>
+          <a:bodyPr wrap="square" lIns="0" tIns="0" rIns="0" bIns="0" rtlCol="0" anchor="ctr"/>
+          <a:lstStyle/>
+          <a:p>
+            <a:pPr indent="0" marL="0">
+              <a:buNone/>
+            </a:pPr>
+            <a:r>
+              <a:rPr lang="en-US" sz="1500" b="1" dirty="0">
                 <a:solidFill>
                   <a:srgbClr val="2E2C32"/>
                 </a:solidFill>
@@ -7462,20 +10652,86 @@
                 <a:ea typeface="Manrope" pitchFamily="34" charset="-122"/>
                 <a:cs typeface="Manrope" pitchFamily="34" charset="-120"/>
               </a:rPr>
-              <a:t>Every turn, the harness rebuilds one list of messages — and that list IS the agent's entire mind for that turn.</a:t>
+              <a:t>Cognition (Devin)  </a:t>
+            </a:r>
+            <a:pPr indent="0" marL="0">
+              <a:buNone/>
+            </a:pPr>
+            <a:r>
+              <a:rPr lang="en-US" sz="1250" dirty="0">
+                <a:solidFill>
+                  <a:srgbClr val="655E74"/>
+                </a:solidFill>
+                <a:latin typeface="Manrope" pitchFamily="34" charset="0"/>
+                <a:ea typeface="Manrope" pitchFamily="34" charset="-122"/>
+                <a:cs typeface="Manrope" pitchFamily="34" charset="-120"/>
+              </a:rPr>
+              <a:t>“context engineering is the #1 job”; don't fragment it across agents.</a:t>
             </a:r>
             <a:endParaRPr lang="en-US" sz="1500" dirty="0"/>
           </a:p>
-          <a:p>
-            <a:pPr marL="203200" indent="-203200">
-              <a:spcAft>
-                <a:spcPts val="900"/>
-              </a:spcAft>
-              <a:buSzPct val="100000"/>
-              <a:buChar char="•"/>
-            </a:pPr>
-            <a:r>
-              <a:rPr lang="en-US" sz="1300" dirty="0">
+        </p:txBody>
+      </p:sp>
+      <p:sp>
+        <p:nvSpPr>
+          <p:cNvPr id="11" name="Shape 8"/>
+          <p:cNvSpPr/>
+          <p:nvPr/>
+        </p:nvSpPr>
+        <p:spPr>
+          <a:xfrm>
+            <a:off x="548640" y="2807208"/>
+            <a:ext cx="91440" cy="475488"/>
+          </a:xfrm>
+          <a:prstGeom prst="rect">
+            <a:avLst/>
+          </a:prstGeom>
+          <a:solidFill>
+            <a:srgbClr val="D4C9FF"/>
+          </a:solidFill>
+          <a:ln/>
+        </p:spPr>
+      </p:sp>
+      <p:sp>
+        <p:nvSpPr>
+          <p:cNvPr id="12" name="Text 9"/>
+          <p:cNvSpPr/>
+          <p:nvPr/>
+        </p:nvSpPr>
+        <p:spPr>
+          <a:xfrm>
+            <a:off x="768096" y="2807208"/>
+            <a:ext cx="7955280" cy="475488"/>
+          </a:xfrm>
+          <a:prstGeom prst="rect">
+            <a:avLst/>
+          </a:prstGeom>
+          <a:noFill/>
+          <a:ln/>
+        </p:spPr>
+        <p:txBody>
+          <a:bodyPr wrap="square" lIns="0" tIns="0" rIns="0" bIns="0" rtlCol="0" anchor="ctr"/>
+          <a:lstStyle/>
+          <a:p>
+            <a:pPr indent="0" marL="0">
+              <a:buNone/>
+            </a:pPr>
+            <a:r>
+              <a:rPr lang="en-US" sz="1500" b="1" dirty="0">
+                <a:solidFill>
+                  <a:srgbClr val="2E2C32"/>
+                </a:solidFill>
+                <a:latin typeface="Manrope" pitchFamily="34" charset="0"/>
+                <a:ea typeface="Manrope" pitchFamily="34" charset="-122"/>
+                <a:cs typeface="Manrope" pitchFamily="34" charset="-120"/>
+              </a:rPr>
+              <a:t>LangChain · LlamaIndex  </a:t>
+            </a:r>
+            <a:pPr indent="0" marL="0">
+              <a:buNone/>
+            </a:pPr>
+            <a:r>
+              <a:rPr lang="en-US" sz="1250" dirty="0">
                 <a:solidFill>
                   <a:srgbClr val="655E74"/>
                 </a:solidFill>
@@ -7483,20 +10739,58 @@
                 <a:ea typeface="Manrope" pitchFamily="34" charset="-122"/>
                 <a:cs typeface="Manrope" pitchFamily="34" charset="-120"/>
               </a:rPr>
-              <a:t>If the agent forgot its goal, the goal wasn't in the list. There's no magic.</a:t>
+              <a:t>memory abstractions — summary buffers, vector memory.</a:t>
             </a:r>
             <a:endParaRPr lang="en-US" sz="1500" dirty="0"/>
           </a:p>
-          <a:p>
-            <a:pPr marL="203200" indent="-203200">
-              <a:spcAft>
-                <a:spcPts val="900"/>
-              </a:spcAft>
-              <a:buSzPct val="100000"/>
-              <a:buChar char="•"/>
-            </a:pPr>
-            <a:r>
-              <a:rPr lang="en-US" sz="1500" dirty="0">
+        </p:txBody>
+      </p:sp>
+      <p:sp>
+        <p:nvSpPr>
+          <p:cNvPr id="13" name="Shape 10"/>
+          <p:cNvSpPr/>
+          <p:nvPr/>
+        </p:nvSpPr>
+        <p:spPr>
+          <a:xfrm>
+            <a:off x="548640" y="3410712"/>
+            <a:ext cx="91440" cy="475488"/>
+          </a:xfrm>
+          <a:prstGeom prst="rect">
+            <a:avLst/>
+          </a:prstGeom>
+          <a:solidFill>
+            <a:srgbClr val="D4C9FF"/>
+          </a:solidFill>
+          <a:ln/>
+        </p:spPr>
+      </p:sp>
+      <p:sp>
+        <p:nvSpPr>
+          <p:cNvPr id="14" name="Text 11"/>
+          <p:cNvSpPr/>
+          <p:nvPr/>
+        </p:nvSpPr>
+        <p:spPr>
+          <a:xfrm>
+            <a:off x="768096" y="3410712"/>
+            <a:ext cx="7955280" cy="475488"/>
+          </a:xfrm>
+          <a:prstGeom prst="rect">
+            <a:avLst/>
+          </a:prstGeom>
+          <a:noFill/>
+          <a:ln/>
+        </p:spPr>
+        <p:txBody>
+          <a:bodyPr wrap="square" lIns="0" tIns="0" rIns="0" bIns="0" rtlCol="0" anchor="ctr"/>
+          <a:lstStyle/>
+          <a:p>
+            <a:pPr indent="0" marL="0">
+              <a:buNone/>
+            </a:pPr>
+            <a:r>
+              <a:rPr lang="en-US" sz="1500" b="1" dirty="0">
                 <a:solidFill>
                   <a:srgbClr val="2E2C32"/>
                 </a:solidFill>
@@ -7504,7 +10798,94 @@
                 <a:ea typeface="Manrope" pitchFamily="34" charset="-122"/>
                 <a:cs typeface="Manrope" pitchFamily="34" charset="-120"/>
               </a:rPr>
-              <a:t>messages() = pinned + body. The whole game is what goes in those two lists.</a:t>
+              <a:t>MemGPT · Letta  </a:t>
+            </a:r>
+            <a:pPr indent="0" marL="0">
+              <a:buNone/>
+            </a:pPr>
+            <a:r>
+              <a:rPr lang="en-US" sz="1250" dirty="0">
+                <a:solidFill>
+                  <a:srgbClr val="655E74"/>
+                </a:solidFill>
+                <a:latin typeface="Manrope" pitchFamily="34" charset="0"/>
+                <a:ea typeface="Manrope" pitchFamily="34" charset="-122"/>
+                <a:cs typeface="Manrope" pitchFamily="34" charset="-120"/>
+              </a:rPr>
+              <a:t>treat the window like RAM; page facts to an external store.</a:t>
+            </a:r>
+            <a:endParaRPr lang="en-US" sz="1500" dirty="0"/>
+          </a:p>
+        </p:txBody>
+      </p:sp>
+      <p:sp>
+        <p:nvSpPr>
+          <p:cNvPr id="15" name="Shape 12"/>
+          <p:cNvSpPr/>
+          <p:nvPr/>
+        </p:nvSpPr>
+        <p:spPr>
+          <a:xfrm>
+            <a:off x="548640" y="4014216"/>
+            <a:ext cx="91440" cy="475488"/>
+          </a:xfrm>
+          <a:prstGeom prst="rect">
+            <a:avLst/>
+          </a:prstGeom>
+          <a:solidFill>
+            <a:srgbClr val="D4C9FF"/>
+          </a:solidFill>
+          <a:ln/>
+        </p:spPr>
+      </p:sp>
+      <p:sp>
+        <p:nvSpPr>
+          <p:cNvPr id="16" name="Text 13"/>
+          <p:cNvSpPr/>
+          <p:nvPr/>
+        </p:nvSpPr>
+        <p:spPr>
+          <a:xfrm>
+            <a:off x="768096" y="4014216"/>
+            <a:ext cx="7955280" cy="475488"/>
+          </a:xfrm>
+          <a:prstGeom prst="rect">
+            <a:avLst/>
+          </a:prstGeom>
+          <a:noFill/>
+          <a:ln/>
+        </p:spPr>
+        <p:txBody>
+          <a:bodyPr wrap="square" lIns="0" tIns="0" rIns="0" bIns="0" rtlCol="0" anchor="ctr"/>
+          <a:lstStyle/>
+          <a:p>
+            <a:pPr indent="0" marL="0">
+              <a:buNone/>
+            </a:pPr>
+            <a:r>
+              <a:rPr lang="en-US" sz="1500" b="1" dirty="0">
+                <a:solidFill>
+                  <a:srgbClr val="2E2C32"/>
+                </a:solidFill>
+                <a:latin typeface="Manrope" pitchFamily="34" charset="0"/>
+                <a:ea typeface="Manrope" pitchFamily="34" charset="-122"/>
+                <a:cs typeface="Manrope" pitchFamily="34" charset="-120"/>
+              </a:rPr>
+              <a:t>RAG (Lewis, 2020)  </a:t>
+            </a:r>
+            <a:pPr indent="0" marL="0">
+              <a:buNone/>
+            </a:pPr>
+            <a:r>
+              <a:rPr lang="en-US" sz="1250" dirty="0">
+                <a:solidFill>
+                  <a:srgbClr val="655E74"/>
+                </a:solidFill>
+                <a:latin typeface="Manrope" pitchFamily="34" charset="0"/>
+                <a:ea typeface="Manrope" pitchFamily="34" charset="-122"/>
+                <a:cs typeface="Manrope" pitchFamily="34" charset="-120"/>
+              </a:rPr>
+              <a:t>retrieve from a store instead of stuffing the prompt.</a:t>
             </a:r>
             <a:endParaRPr lang="en-US" sz="1500" dirty="0"/>
           </a:p>
@@ -7575,7 +10956,7 @@
                 <a:ea typeface="Syne" pitchFamily="34" charset="-122"/>
                 <a:cs typeface="Syne" pitchFamily="34" charset="-120"/>
               </a:rPr>
-              <a:t>THE MAP</a:t>
+              <a:t>THE GAP</a:t>
             </a:r>
             <a:endParaRPr lang="en-US" sz="1100" dirty="0"/>
           </a:p>
@@ -7606,7 +10987,7 @@
               <a:buNone/>
             </a:pPr>
             <a:r>
-              <a:rPr lang="en-US" sz="2700" b="1" dirty="0">
+              <a:rPr lang="en-US" sz="2300" b="1" dirty="0">
                 <a:solidFill>
                   <a:srgbClr val="2E2C32"/>
                 </a:solidFill>
@@ -7614,9 +10995,9 @@
                 <a:ea typeface="Syne" pitchFamily="34" charset="-122"/>
                 <a:cs typeface="Syne" pitchFamily="34" charset="-120"/>
               </a:rPr>
-              <a:t>Five moves. One matters tonight.</a:t>
-            </a:r>
-            <a:endParaRPr lang="en-US" sz="2700" dirty="0"/>
+              <a:t>Everyone compacts. Nobody measured which way is best.</a:t>
+            </a:r>
+            <a:endParaRPr lang="en-US" sz="2300" dirty="0"/>
           </a:p>
         </p:txBody>
       </p:sp>
@@ -7636,8 +11017,8 @@
         </p:blipFill>
         <p:spPr>
           <a:xfrm>
-            <a:off x="548640" y="4718304"/>
-            <a:ext cx="237744" cy="179122"/>
+            <a:off x="548640" y="4736592"/>
+            <a:ext cx="219456" cy="165344"/>
           </a:xfrm>
           <a:prstGeom prst="rect">
             <a:avLst/>
@@ -7652,7 +11033,7 @@
         </p:nvSpPr>
         <p:spPr>
           <a:xfrm>
-            <a:off x="841248" y="4681728"/>
+            <a:off x="822960" y="4690872"/>
             <a:ext cx="1280160" cy="292608"/>
           </a:xfrm>
           <a:prstGeom prst="rect">
@@ -7705,7 +11086,7 @@
         </p:nvSpPr>
         <p:spPr>
           <a:xfrm>
-            <a:off x="8229600" y="4681728"/>
+            <a:off x="8229600" y="4690872"/>
             <a:ext cx="365760" cy="292608"/>
           </a:xfrm>
           <a:prstGeom prst="rect">
@@ -7738,50 +11119,34 @@
       </p:sp>
       <p:sp>
         <p:nvSpPr>
-          <p:cNvPr id="7" name="Shape 4"/>
+          <p:cNvPr id="7" name="Text 4"/>
           <p:cNvSpPr/>
           <p:nvPr/>
         </p:nvSpPr>
         <p:spPr>
           <a:xfrm>
             <a:off x="548640" y="1645920"/>
-            <a:ext cx="109728" cy="457200"/>
-          </a:xfrm>
-          <a:prstGeom prst="rect">
-            <a:avLst/>
-          </a:prstGeom>
-          <a:solidFill>
-            <a:srgbClr val="D4C9FF"/>
-          </a:solidFill>
-          <a:ln/>
-        </p:spPr>
-      </p:sp>
-      <p:sp>
-        <p:nvSpPr>
-          <p:cNvPr id="8" name="Text 5"/>
-          <p:cNvSpPr/>
-          <p:nvPr/>
-        </p:nvSpPr>
-        <p:spPr>
-          <a:xfrm>
-            <a:off x="777240" y="1645920"/>
-            <a:ext cx="7772400" cy="457200"/>
-          </a:xfrm>
-          <a:prstGeom prst="rect">
-            <a:avLst/>
-          </a:prstGeom>
-          <a:noFill/>
-          <a:ln/>
-        </p:spPr>
-        <p:txBody>
-          <a:bodyPr wrap="square" lIns="0" tIns="0" rIns="0" bIns="0" rtlCol="0" anchor="ctr"/>
-          <a:lstStyle/>
-          <a:p>
-            <a:pPr indent="0" marL="0">
-              <a:buNone/>
-            </a:pPr>
-            <a:r>
-              <a:rPr lang="en-US" sz="1600" b="1" dirty="0">
+            <a:ext cx="8046720" cy="2834640"/>
+          </a:xfrm>
+          <a:prstGeom prst="rect">
+            <a:avLst/>
+          </a:prstGeom>
+          <a:noFill/>
+          <a:ln/>
+        </p:spPr>
+        <p:txBody>
+          <a:bodyPr wrap="square" rtlCol="0" anchor="ctr"/>
+          <a:lstStyle/>
+          <a:p>
+            <a:pPr marL="203200" indent="-203200">
+              <a:spcAft>
+                <a:spcPts val="800"/>
+              </a:spcAft>
+              <a:buSzPct val="100000"/>
+              <a:buChar char="•"/>
+            </a:pPr>
+            <a:r>
+              <a:rPr lang="en-US" sz="1500" dirty="0">
                 <a:solidFill>
                   <a:srgbClr val="2E2C32"/>
                 </a:solidFill>
@@ -7789,10 +11154,38 @@
                 <a:ea typeface="Manrope" pitchFamily="34" charset="-122"/>
                 <a:cs typeface="Manrope" pitchFamily="34" charset="-120"/>
               </a:rPr>
-              <a:t>Pin   </a:t>
-            </a:r>
-            <a:pPr indent="0" marL="0">
-              <a:buNone/>
+              <a:t>Prior work compresses a static prompt or RAG passages — to cut latency.</a:t>
+            </a:r>
+            <a:endParaRPr lang="en-US" sz="1500" dirty="0"/>
+          </a:p>
+          <a:p>
+            <a:pPr marL="203200" indent="-203200">
+              <a:spcAft>
+                <a:spcPts val="800"/>
+              </a:spcAft>
+              <a:buSzPct val="100000"/>
+              <a:buChar char="•"/>
+            </a:pPr>
+            <a:r>
+              <a:rPr lang="en-US" sz="1500" dirty="0">
+                <a:solidFill>
+                  <a:srgbClr val="2E2C32"/>
+                </a:solidFill>
+                <a:latin typeface="Manrope" pitchFamily="34" charset="0"/>
+                <a:ea typeface="Manrope" pitchFamily="34" charset="-122"/>
+                <a:cs typeface="Manrope" pitchFamily="34" charset="-120"/>
+              </a:rPr>
+              <a:t>The policy that ships in real agents — “summarize the stale middle” — is applied to an evolving transcript, and is essentially unmeasured against its alternatives.</a:t>
+            </a:r>
+            <a:endParaRPr lang="en-US" sz="1500" dirty="0"/>
+          </a:p>
+          <a:p>
+            <a:pPr marL="203200" indent="-203200">
+              <a:spcAft>
+                <a:spcPts val="800"/>
+              </a:spcAft>
+              <a:buSzPct val="100000"/>
+              <a:buChar char="•"/>
             </a:pPr>
             <a:r>
               <a:rPr lang="en-US" sz="1300" dirty="0">
@@ -7803,58 +11196,20 @@
                 <a:ea typeface="Manrope" pitchFamily="34" charset="-122"/>
                 <a:cs typeface="Manrope" pitchFamily="34" charset="-120"/>
               </a:rPr>
-              <a:t>goal + system prompt, never dropped</a:t>
-            </a:r>
-            <a:endParaRPr lang="en-US" sz="1600" dirty="0"/>
-          </a:p>
-        </p:txBody>
-      </p:sp>
-      <p:sp>
-        <p:nvSpPr>
-          <p:cNvPr id="9" name="Shape 6"/>
-          <p:cNvSpPr/>
-          <p:nvPr/>
-        </p:nvSpPr>
-        <p:spPr>
-          <a:xfrm>
-            <a:off x="548640" y="2212848"/>
-            <a:ext cx="109728" cy="457200"/>
-          </a:xfrm>
-          <a:prstGeom prst="rect">
-            <a:avLst/>
-          </a:prstGeom>
-          <a:solidFill>
-            <a:srgbClr val="D4C9FF"/>
-          </a:solidFill>
-          <a:ln/>
-        </p:spPr>
-      </p:sp>
-      <p:sp>
-        <p:nvSpPr>
-          <p:cNvPr id="10" name="Text 7"/>
-          <p:cNvSpPr/>
-          <p:nvPr/>
-        </p:nvSpPr>
-        <p:spPr>
-          <a:xfrm>
-            <a:off x="777240" y="2212848"/>
-            <a:ext cx="7772400" cy="457200"/>
-          </a:xfrm>
-          <a:prstGeom prst="rect">
-            <a:avLst/>
-          </a:prstGeom>
-          <a:noFill/>
-          <a:ln/>
-        </p:spPr>
-        <p:txBody>
-          <a:bodyPr wrap="square" lIns="0" tIns="0" rIns="0" bIns="0" rtlCol="0" anchor="ctr"/>
-          <a:lstStyle/>
-          <a:p>
-            <a:pPr indent="0" marL="0">
-              <a:buNone/>
-            </a:pPr>
-            <a:r>
-              <a:rPr lang="en-US" sz="1600" b="1" dirty="0">
+              <a:t>Which way of forgetting preserves the most facts per token? That's the open question.</a:t>
+            </a:r>
+            <a:endParaRPr lang="en-US" sz="1500" dirty="0"/>
+          </a:p>
+          <a:p>
+            <a:pPr marL="203200" indent="-203200">
+              <a:spcAft>
+                <a:spcPts val="800"/>
+              </a:spcAft>
+              <a:buSzPct val="100000"/>
+              <a:buChar char="•"/>
+            </a:pPr>
+            <a:r>
+              <a:rPr lang="en-US" sz="1500" dirty="0">
                 <a:solidFill>
                   <a:srgbClr val="2E2C32"/>
                 </a:solidFill>
@@ -7862,242 +11217,9 @@
                 <a:ea typeface="Manrope" pitchFamily="34" charset="-122"/>
                 <a:cs typeface="Manrope" pitchFamily="34" charset="-120"/>
               </a:rPr>
-              <a:t>Truncate   </a:t>
-            </a:r>
-            <a:pPr indent="0" marL="0">
-              <a:buNone/>
-            </a:pPr>
-            <a:r>
-              <a:rPr lang="en-US" sz="1300" dirty="0">
-                <a:solidFill>
-                  <a:srgbClr val="655E74"/>
-                </a:solidFill>
-                <a:latin typeface="Manrope" pitchFamily="34" charset="0"/>
-                <a:ea typeface="Manrope" pitchFamily="34" charset="-122"/>
-                <a:cs typeface="Manrope" pitchFamily="34" charset="-120"/>
-              </a:rPr>
-              <a:t>cap oversized tool outputs</a:t>
-            </a:r>
-            <a:endParaRPr lang="en-US" sz="1600" dirty="0"/>
-          </a:p>
-        </p:txBody>
-      </p:sp>
-      <p:sp>
-        <p:nvSpPr>
-          <p:cNvPr id="11" name="Shape 8"/>
-          <p:cNvSpPr/>
-          <p:nvPr/>
-        </p:nvSpPr>
-        <p:spPr>
-          <a:xfrm>
-            <a:off x="548640" y="2779776"/>
-            <a:ext cx="109728" cy="457200"/>
-          </a:xfrm>
-          <a:prstGeom prst="rect">
-            <a:avLst/>
-          </a:prstGeom>
-          <a:solidFill>
-            <a:srgbClr val="9378FF"/>
-          </a:solidFill>
-          <a:ln/>
-        </p:spPr>
-      </p:sp>
-      <p:sp>
-        <p:nvSpPr>
-          <p:cNvPr id="12" name="Text 9"/>
-          <p:cNvSpPr/>
-          <p:nvPr/>
-        </p:nvSpPr>
-        <p:spPr>
-          <a:xfrm>
-            <a:off x="777240" y="2779776"/>
-            <a:ext cx="7772400" cy="457200"/>
-          </a:xfrm>
-          <a:prstGeom prst="rect">
-            <a:avLst/>
-          </a:prstGeom>
-          <a:noFill/>
-          <a:ln/>
-        </p:spPr>
-        <p:txBody>
-          <a:bodyPr wrap="square" lIns="0" tIns="0" rIns="0" bIns="0" rtlCol="0" anchor="ctr"/>
-          <a:lstStyle/>
-          <a:p>
-            <a:pPr indent="0" marL="0">
-              <a:buNone/>
-            </a:pPr>
-            <a:r>
-              <a:rPr lang="en-US" sz="1600" b="1" dirty="0">
-                <a:solidFill>
-                  <a:srgbClr val="9378FF"/>
-                </a:solidFill>
-                <a:latin typeface="Manrope" pitchFamily="34" charset="0"/>
-                <a:ea typeface="Manrope" pitchFamily="34" charset="-122"/>
-                <a:cs typeface="Manrope" pitchFamily="34" charset="-120"/>
-              </a:rPr>
-              <a:t>Compact   </a:t>
-            </a:r>
-            <a:pPr indent="0" marL="0">
-              <a:buNone/>
-            </a:pPr>
-            <a:r>
-              <a:rPr lang="en-US" sz="1300" dirty="0">
-                <a:solidFill>
-                  <a:srgbClr val="655E74"/>
-                </a:solidFill>
-                <a:latin typeface="Manrope" pitchFamily="34" charset="0"/>
-                <a:ea typeface="Manrope" pitchFamily="34" charset="-122"/>
-                <a:cs typeface="Manrope" pitchFamily="34" charset="-120"/>
-              </a:rPr>
-              <a:t>summarize the stale middle, drop raw turns</a:t>
-            </a:r>
-            <a:endParaRPr lang="en-US" sz="1600" dirty="0"/>
-          </a:p>
-        </p:txBody>
-      </p:sp>
-      <p:sp>
-        <p:nvSpPr>
-          <p:cNvPr id="13" name="Shape 10"/>
-          <p:cNvSpPr/>
-          <p:nvPr/>
-        </p:nvSpPr>
-        <p:spPr>
-          <a:xfrm>
-            <a:off x="548640" y="3346704"/>
-            <a:ext cx="109728" cy="457200"/>
-          </a:xfrm>
-          <a:prstGeom prst="rect">
-            <a:avLst/>
-          </a:prstGeom>
-          <a:solidFill>
-            <a:srgbClr val="D4C9FF"/>
-          </a:solidFill>
-          <a:ln/>
-        </p:spPr>
-      </p:sp>
-      <p:sp>
-        <p:nvSpPr>
-          <p:cNvPr id="14" name="Text 11"/>
-          <p:cNvSpPr/>
-          <p:nvPr/>
-        </p:nvSpPr>
-        <p:spPr>
-          <a:xfrm>
-            <a:off x="777240" y="3346704"/>
-            <a:ext cx="7772400" cy="457200"/>
-          </a:xfrm>
-          <a:prstGeom prst="rect">
-            <a:avLst/>
-          </a:prstGeom>
-          <a:noFill/>
-          <a:ln/>
-        </p:spPr>
-        <p:txBody>
-          <a:bodyPr wrap="square" lIns="0" tIns="0" rIns="0" bIns="0" rtlCol="0" anchor="ctr"/>
-          <a:lstStyle/>
-          <a:p>
-            <a:pPr indent="0" marL="0">
-              <a:buNone/>
-            </a:pPr>
-            <a:r>
-              <a:rPr lang="en-US" sz="1600" b="1" dirty="0">
-                <a:solidFill>
-                  <a:srgbClr val="2E2C32"/>
-                </a:solidFill>
-                <a:latin typeface="Manrope" pitchFamily="34" charset="0"/>
-                <a:ea typeface="Manrope" pitchFamily="34" charset="-122"/>
-                <a:cs typeface="Manrope" pitchFamily="34" charset="-120"/>
-              </a:rPr>
-              <a:t>Externalize   </a:t>
-            </a:r>
-            <a:pPr indent="0" marL="0">
-              <a:buNone/>
-            </a:pPr>
-            <a:r>
-              <a:rPr lang="en-US" sz="1300" dirty="0">
-                <a:solidFill>
-                  <a:srgbClr val="655E74"/>
-                </a:solidFill>
-                <a:latin typeface="Manrope" pitchFamily="34" charset="0"/>
-                <a:ea typeface="Manrope" pitchFamily="34" charset="-122"/>
-                <a:cs typeface="Manrope" pitchFamily="34" charset="-120"/>
-              </a:rPr>
-              <a:t>findings live in a file, not the window</a:t>
-            </a:r>
-            <a:endParaRPr lang="en-US" sz="1600" dirty="0"/>
-          </a:p>
-        </p:txBody>
-      </p:sp>
-      <p:sp>
-        <p:nvSpPr>
-          <p:cNvPr id="15" name="Shape 12"/>
-          <p:cNvSpPr/>
-          <p:nvPr/>
-        </p:nvSpPr>
-        <p:spPr>
-          <a:xfrm>
-            <a:off x="548640" y="3913632"/>
-            <a:ext cx="109728" cy="457200"/>
-          </a:xfrm>
-          <a:prstGeom prst="rect">
-            <a:avLst/>
-          </a:prstGeom>
-          <a:solidFill>
-            <a:srgbClr val="D4C9FF"/>
-          </a:solidFill>
-          <a:ln/>
-        </p:spPr>
-      </p:sp>
-      <p:sp>
-        <p:nvSpPr>
-          <p:cNvPr id="16" name="Text 13"/>
-          <p:cNvSpPr/>
-          <p:nvPr/>
-        </p:nvSpPr>
-        <p:spPr>
-          <a:xfrm>
-            <a:off x="777240" y="3913632"/>
-            <a:ext cx="7772400" cy="457200"/>
-          </a:xfrm>
-          <a:prstGeom prst="rect">
-            <a:avLst/>
-          </a:prstGeom>
-          <a:noFill/>
-          <a:ln/>
-        </p:spPr>
-        <p:txBody>
-          <a:bodyPr wrap="square" lIns="0" tIns="0" rIns="0" bIns="0" rtlCol="0" anchor="ctr"/>
-          <a:lstStyle/>
-          <a:p>
-            <a:pPr indent="0" marL="0">
-              <a:buNone/>
-            </a:pPr>
-            <a:r>
-              <a:rPr lang="en-US" sz="1600" b="1" dirty="0">
-                <a:solidFill>
-                  <a:srgbClr val="2E2C32"/>
-                </a:solidFill>
-                <a:latin typeface="Manrope" pitchFamily="34" charset="0"/>
-                <a:ea typeface="Manrope" pitchFamily="34" charset="-122"/>
-                <a:cs typeface="Manrope" pitchFamily="34" charset="-120"/>
-              </a:rPr>
-              <a:t>Cap   </a:t>
-            </a:r>
-            <a:pPr indent="0" marL="0">
-              <a:buNone/>
-            </a:pPr>
-            <a:r>
-              <a:rPr lang="en-US" sz="1300" dirty="0">
-                <a:solidFill>
-                  <a:srgbClr val="655E74"/>
-                </a:solidFill>
-                <a:latin typeface="Manrope" pitchFamily="34" charset="0"/>
-                <a:ea typeface="Manrope" pitchFamily="34" charset="-122"/>
-                <a:cs typeface="Manrope" pitchFamily="34" charset="-120"/>
-              </a:rPr>
-              <a:t>hard limits on steps / tokens / dollars</a:t>
-            </a:r>
-            <a:endParaRPr lang="en-US" sz="1600" dirty="0"/>
+              <a:t>So I built a harness to measure it.</a:t>
+            </a:r>
+            <a:endParaRPr lang="en-US" sz="1500" dirty="0"/>
           </a:p>
         </p:txBody>
       </p:sp>
@@ -8166,7 +11288,7 @@
                 <a:ea typeface="Syne" pitchFamily="34" charset="-122"/>
                 <a:cs typeface="Syne" pitchFamily="34" charset="-120"/>
               </a:rPr>
-              <a:t>THE HEART</a:t>
+              <a:t>WHAT I'M BUILDING</a:t>
             </a:r>
             <a:endParaRPr lang="en-US" sz="1100" dirty="0"/>
           </a:p>
@@ -8197,7 +11319,7 @@
               <a:buNone/>
             </a:pPr>
             <a:r>
-              <a:rPr lang="en-US" sz="2700" b="1" dirty="0">
+              <a:rPr lang="en-US" sz="2500" b="1" dirty="0">
                 <a:solidFill>
                   <a:srgbClr val="2E2C32"/>
                 </a:solidFill>
@@ -8205,9 +11327,9 @@
                 <a:ea typeface="Syne" pitchFamily="34" charset="-122"/>
                 <a:cs typeface="Syne" pitchFamily="34" charset="-120"/>
               </a:rPr>
-              <a:t>Compact, deeply.</a:t>
-            </a:r>
-            <a:endParaRPr lang="en-US" sz="2700" dirty="0"/>
+              <a:t>The loop is trivial. The harness is the point.</a:t>
+            </a:r>
+            <a:endParaRPr lang="en-US" sz="2500" dirty="0"/>
           </a:p>
         </p:txBody>
       </p:sp>
@@ -8227,8 +11349,8 @@
         </p:blipFill>
         <p:spPr>
           <a:xfrm>
-            <a:off x="548640" y="4718304"/>
-            <a:ext cx="237744" cy="179122"/>
+            <a:off x="548640" y="4736592"/>
+            <a:ext cx="219456" cy="165344"/>
           </a:xfrm>
           <a:prstGeom prst="rect">
             <a:avLst/>
@@ -8243,7 +11365,7 @@
         </p:nvSpPr>
         <p:spPr>
           <a:xfrm>
-            <a:off x="841248" y="4681728"/>
+            <a:off x="822960" y="4690872"/>
             <a:ext cx="1280160" cy="292608"/>
           </a:xfrm>
           <a:prstGeom prst="rect">
@@ -8296,7 +11418,7 @@
         </p:nvSpPr>
         <p:spPr>
           <a:xfrm>
-            <a:off x="8229600" y="4681728"/>
+            <a:off x="8229600" y="4690872"/>
             <a:ext cx="365760" cy="292608"/>
           </a:xfrm>
           <a:prstGeom prst="rect">
@@ -8329,34 +11451,50 @@
       </p:sp>
       <p:sp>
         <p:nvSpPr>
-          <p:cNvPr id="7" name="Text 4"/>
+          <p:cNvPr id="7" name="Shape 4"/>
           <p:cNvSpPr/>
           <p:nvPr/>
         </p:nvSpPr>
         <p:spPr>
           <a:xfrm>
             <a:off x="548640" y="1600200"/>
-            <a:ext cx="8046720" cy="2834640"/>
-          </a:xfrm>
-          <a:prstGeom prst="rect">
-            <a:avLst/>
-          </a:prstGeom>
-          <a:noFill/>
-          <a:ln/>
-        </p:spPr>
-        <p:txBody>
-          <a:bodyPr wrap="square" rtlCol="0" anchor="ctr"/>
-          <a:lstStyle/>
-          <a:p>
-            <a:pPr marL="203200" indent="-203200">
-              <a:spcAft>
-                <a:spcPts val="900"/>
-              </a:spcAft>
-              <a:buSzPct val="100000"/>
-              <a:buChar char="•"/>
-            </a:pPr>
-            <a:r>
-              <a:rPr lang="en-US" sz="1500" dirty="0">
+            <a:ext cx="91440" cy="475488"/>
+          </a:xfrm>
+          <a:prstGeom prst="rect">
+            <a:avLst/>
+          </a:prstGeom>
+          <a:solidFill>
+            <a:srgbClr val="D4C9FF"/>
+          </a:solidFill>
+          <a:ln/>
+        </p:spPr>
+      </p:sp>
+      <p:sp>
+        <p:nvSpPr>
+          <p:cNvPr id="8" name="Text 5"/>
+          <p:cNvSpPr/>
+          <p:nvPr/>
+        </p:nvSpPr>
+        <p:spPr>
+          <a:xfrm>
+            <a:off x="768096" y="1600200"/>
+            <a:ext cx="7955280" cy="475488"/>
+          </a:xfrm>
+          <a:prstGeom prst="rect">
+            <a:avLst/>
+          </a:prstGeom>
+          <a:noFill/>
+          <a:ln/>
+        </p:spPr>
+        <p:txBody>
+          <a:bodyPr wrap="square" lIns="0" tIns="0" rIns="0" bIns="0" rtlCol="0" anchor="ctr"/>
+          <a:lstStyle/>
+          <a:p>
+            <a:pPr indent="0" marL="0">
+              <a:buNone/>
+            </a:pPr>
+            <a:r>
+              <a:rPr lang="en-US" sz="1500" b="1" dirty="0">
                 <a:solidFill>
                   <a:srgbClr val="2E2C32"/>
                 </a:solidFill>
@@ -8364,20 +11502,72 @@
                 <a:ea typeface="Manrope" pitchFamily="34" charset="-122"/>
                 <a:cs typeface="Manrope" pitchFamily="34" charset="-120"/>
               </a:rPr>
-              <a:t>Over budget? Summarize the stale middle into one dense note; drop the raw turns.</a:t>
+              <a:t>Pin  </a:t>
+            </a:r>
+            <a:pPr indent="0" marL="0">
+              <a:buNone/>
+            </a:pPr>
+            <a:r>
+              <a:rPr lang="en-US" sz="1250" dirty="0">
+                <a:solidFill>
+                  <a:srgbClr val="655E74"/>
+                </a:solidFill>
+                <a:latin typeface="Manrope" pitchFamily="34" charset="0"/>
+                <a:ea typeface="Manrope" pitchFamily="34" charset="-122"/>
+                <a:cs typeface="Manrope" pitchFamily="34" charset="-120"/>
+              </a:rPr>
+              <a:t>goal + system prompt — never dropped</a:t>
             </a:r>
             <a:endParaRPr lang="en-US" sz="1500" dirty="0"/>
           </a:p>
-          <a:p>
-            <a:pPr marL="203200" indent="-203200">
-              <a:spcAft>
-                <a:spcPts val="900"/>
-              </a:spcAft>
-              <a:buSzPct val="100000"/>
-              <a:buChar char="•"/>
-            </a:pPr>
-            <a:r>
-              <a:rPr lang="en-US" sz="1500" dirty="0">
+        </p:txBody>
+      </p:sp>
+      <p:sp>
+        <p:nvSpPr>
+          <p:cNvPr id="9" name="Shape 6"/>
+          <p:cNvSpPr/>
+          <p:nvPr/>
+        </p:nvSpPr>
+        <p:spPr>
+          <a:xfrm>
+            <a:off x="548640" y="2203704"/>
+            <a:ext cx="91440" cy="475488"/>
+          </a:xfrm>
+          <a:prstGeom prst="rect">
+            <a:avLst/>
+          </a:prstGeom>
+          <a:solidFill>
+            <a:srgbClr val="D4C9FF"/>
+          </a:solidFill>
+          <a:ln/>
+        </p:spPr>
+      </p:sp>
+      <p:sp>
+        <p:nvSpPr>
+          <p:cNvPr id="10" name="Text 7"/>
+          <p:cNvSpPr/>
+          <p:nvPr/>
+        </p:nvSpPr>
+        <p:spPr>
+          <a:xfrm>
+            <a:off x="768096" y="2203704"/>
+            <a:ext cx="7955280" cy="475488"/>
+          </a:xfrm>
+          <a:prstGeom prst="rect">
+            <a:avLst/>
+          </a:prstGeom>
+          <a:noFill/>
+          <a:ln/>
+        </p:spPr>
+        <p:txBody>
+          <a:bodyPr wrap="square" lIns="0" tIns="0" rIns="0" bIns="0" rtlCol="0" anchor="ctr"/>
+          <a:lstStyle/>
+          <a:p>
+            <a:pPr indent="0" marL="0">
+              <a:buNone/>
+            </a:pPr>
+            <a:r>
+              <a:rPr lang="en-US" sz="1500" b="1" dirty="0">
                 <a:solidFill>
                   <a:srgbClr val="2E2C32"/>
                 </a:solidFill>
@@ -8385,20 +11575,86 @@
                 <a:ea typeface="Manrope" pitchFamily="34" charset="-122"/>
                 <a:cs typeface="Manrope" pitchFamily="34" charset="-120"/>
               </a:rPr>
-              <a:t>Why the middle? It's the low-attention zone anyway (lost-in-the-middle).</a:t>
+              <a:t>Truncate  </a:t>
+            </a:r>
+            <a:pPr indent="0" marL="0">
+              <a:buNone/>
+            </a:pPr>
+            <a:r>
+              <a:rPr lang="en-US" sz="1250" dirty="0">
+                <a:solidFill>
+                  <a:srgbClr val="655E74"/>
+                </a:solidFill>
+                <a:latin typeface="Manrope" pitchFamily="34" charset="0"/>
+                <a:ea typeface="Manrope" pitchFamily="34" charset="-122"/>
+                <a:cs typeface="Manrope" pitchFamily="34" charset="-120"/>
+              </a:rPr>
+              <a:t>cap oversized tool outputs before they enter</a:t>
             </a:r>
             <a:endParaRPr lang="en-US" sz="1500" dirty="0"/>
           </a:p>
-          <a:p>
-            <a:pPr marL="203200" indent="-203200">
-              <a:spcAft>
-                <a:spcPts val="900"/>
-              </a:spcAft>
-              <a:buSzPct val="100000"/>
-              <a:buChar char="•"/>
-            </a:pPr>
-            <a:r>
-              <a:rPr lang="en-US" sz="1300" dirty="0">
+        </p:txBody>
+      </p:sp>
+      <p:sp>
+        <p:nvSpPr>
+          <p:cNvPr id="11" name="Shape 8"/>
+          <p:cNvSpPr/>
+          <p:nvPr/>
+        </p:nvSpPr>
+        <p:spPr>
+          <a:xfrm>
+            <a:off x="548640" y="2807208"/>
+            <a:ext cx="91440" cy="475488"/>
+          </a:xfrm>
+          <a:prstGeom prst="rect">
+            <a:avLst/>
+          </a:prstGeom>
+          <a:solidFill>
+            <a:srgbClr val="9378FF"/>
+          </a:solidFill>
+          <a:ln/>
+        </p:spPr>
+      </p:sp>
+      <p:sp>
+        <p:nvSpPr>
+          <p:cNvPr id="12" name="Text 9"/>
+          <p:cNvSpPr/>
+          <p:nvPr/>
+        </p:nvSpPr>
+        <p:spPr>
+          <a:xfrm>
+            <a:off x="768096" y="2807208"/>
+            <a:ext cx="7955280" cy="475488"/>
+          </a:xfrm>
+          <a:prstGeom prst="rect">
+            <a:avLst/>
+          </a:prstGeom>
+          <a:noFill/>
+          <a:ln/>
+        </p:spPr>
+        <p:txBody>
+          <a:bodyPr wrap="square" lIns="0" tIns="0" rIns="0" bIns="0" rtlCol="0" anchor="ctr"/>
+          <a:lstStyle/>
+          <a:p>
+            <a:pPr indent="0" marL="0">
+              <a:buNone/>
+            </a:pPr>
+            <a:r>
+              <a:rPr lang="en-US" sz="1500" b="1" dirty="0">
+                <a:solidFill>
+                  <a:srgbClr val="9378FF"/>
+                </a:solidFill>
+                <a:latin typeface="Manrope" pitchFamily="34" charset="0"/>
+                <a:ea typeface="Manrope" pitchFamily="34" charset="-122"/>
+                <a:cs typeface="Manrope" pitchFamily="34" charset="-120"/>
+              </a:rPr>
+              <a:t>Compact  </a:t>
+            </a:r>
+            <a:pPr indent="0" marL="0">
+              <a:buNone/>
+            </a:pPr>
+            <a:r>
+              <a:rPr lang="en-US" sz="1250" dirty="0">
                 <a:solidFill>
                   <a:srgbClr val="655E74"/>
                 </a:solidFill>
@@ -8406,20 +11662,58 @@
                 <a:ea typeface="Manrope" pitchFamily="34" charset="-122"/>
                 <a:cs typeface="Manrope" pitchFamily="34" charset="-120"/>
               </a:rPr>
-              <a:t>The gotcha: never split a tool-call from its result — real APIs reject that transcript.</a:t>
+              <a:t>summarize the stale middle, drop the raw turns</a:t>
             </a:r>
             <a:endParaRPr lang="en-US" sz="1500" dirty="0"/>
           </a:p>
-          <a:p>
-            <a:pPr marL="203200" indent="-203200">
-              <a:spcAft>
-                <a:spcPts val="900"/>
-              </a:spcAft>
-              <a:buSzPct val="100000"/>
-              <a:buChar char="•"/>
-            </a:pPr>
-            <a:r>
-              <a:rPr lang="en-US" sz="1500" dirty="0">
+        </p:txBody>
+      </p:sp>
+      <p:sp>
+        <p:nvSpPr>
+          <p:cNvPr id="13" name="Shape 10"/>
+          <p:cNvSpPr/>
+          <p:nvPr/>
+        </p:nvSpPr>
+        <p:spPr>
+          <a:xfrm>
+            <a:off x="548640" y="3410712"/>
+            <a:ext cx="91440" cy="475488"/>
+          </a:xfrm>
+          <a:prstGeom prst="rect">
+            <a:avLst/>
+          </a:prstGeom>
+          <a:solidFill>
+            <a:srgbClr val="D4C9FF"/>
+          </a:solidFill>
+          <a:ln/>
+        </p:spPr>
+      </p:sp>
+      <p:sp>
+        <p:nvSpPr>
+          <p:cNvPr id="14" name="Text 11"/>
+          <p:cNvSpPr/>
+          <p:nvPr/>
+        </p:nvSpPr>
+        <p:spPr>
+          <a:xfrm>
+            <a:off x="768096" y="3410712"/>
+            <a:ext cx="7955280" cy="475488"/>
+          </a:xfrm>
+          <a:prstGeom prst="rect">
+            <a:avLst/>
+          </a:prstGeom>
+          <a:noFill/>
+          <a:ln/>
+        </p:spPr>
+        <p:txBody>
+          <a:bodyPr wrap="square" lIns="0" tIns="0" rIns="0" bIns="0" rtlCol="0" anchor="ctr"/>
+          <a:lstStyle/>
+          <a:p>
+            <a:pPr indent="0" marL="0">
+              <a:buNone/>
+            </a:pPr>
+            <a:r>
+              <a:rPr lang="en-US" sz="1500" b="1" dirty="0">
                 <a:solidFill>
                   <a:srgbClr val="2E2C32"/>
                 </a:solidFill>
@@ -8427,9 +11721,135 @@
                 <a:ea typeface="Manrope" pitchFamily="34" charset="-122"/>
                 <a:cs typeface="Manrope" pitchFamily="34" charset="-120"/>
               </a:rPr>
-              <a:t>Lossy on purpose — safe only because findings were externalized to disk.</a:t>
+              <a:t>Externalize  </a:t>
+            </a:r>
+            <a:pPr indent="0" marL="0">
+              <a:buNone/>
+            </a:pPr>
+            <a:r>
+              <a:rPr lang="en-US" sz="1250" dirty="0">
+                <a:solidFill>
+                  <a:srgbClr val="655E74"/>
+                </a:solidFill>
+                <a:latin typeface="Manrope" pitchFamily="34" charset="0"/>
+                <a:ea typeface="Manrope" pitchFamily="34" charset="-122"/>
+                <a:cs typeface="Manrope" pitchFamily="34" charset="-120"/>
+              </a:rPr>
+              <a:t>findings live in a file, not the window</a:t>
             </a:r>
             <a:endParaRPr lang="en-US" sz="1500" dirty="0"/>
+          </a:p>
+        </p:txBody>
+      </p:sp>
+      <p:sp>
+        <p:nvSpPr>
+          <p:cNvPr id="15" name="Shape 12"/>
+          <p:cNvSpPr/>
+          <p:nvPr/>
+        </p:nvSpPr>
+        <p:spPr>
+          <a:xfrm>
+            <a:off x="548640" y="4014216"/>
+            <a:ext cx="91440" cy="475488"/>
+          </a:xfrm>
+          <a:prstGeom prst="rect">
+            <a:avLst/>
+          </a:prstGeom>
+          <a:solidFill>
+            <a:srgbClr val="D4C9FF"/>
+          </a:solidFill>
+          <a:ln/>
+        </p:spPr>
+      </p:sp>
+      <p:sp>
+        <p:nvSpPr>
+          <p:cNvPr id="16" name="Text 13"/>
+          <p:cNvSpPr/>
+          <p:nvPr/>
+        </p:nvSpPr>
+        <p:spPr>
+          <a:xfrm>
+            <a:off x="768096" y="4014216"/>
+            <a:ext cx="7955280" cy="475488"/>
+          </a:xfrm>
+          <a:prstGeom prst="rect">
+            <a:avLst/>
+          </a:prstGeom>
+          <a:noFill/>
+          <a:ln/>
+        </p:spPr>
+        <p:txBody>
+          <a:bodyPr wrap="square" lIns="0" tIns="0" rIns="0" bIns="0" rtlCol="0" anchor="ctr"/>
+          <a:lstStyle/>
+          <a:p>
+            <a:pPr indent="0" marL="0">
+              <a:buNone/>
+            </a:pPr>
+            <a:r>
+              <a:rPr lang="en-US" sz="1500" b="1" dirty="0">
+                <a:solidFill>
+                  <a:srgbClr val="2E2C32"/>
+                </a:solidFill>
+                <a:latin typeface="Manrope" pitchFamily="34" charset="0"/>
+                <a:ea typeface="Manrope" pitchFamily="34" charset="-122"/>
+                <a:cs typeface="Manrope" pitchFamily="34" charset="-120"/>
+              </a:rPr>
+              <a:t>Cap  </a:t>
+            </a:r>
+            <a:pPr indent="0" marL="0">
+              <a:buNone/>
+            </a:pPr>
+            <a:r>
+              <a:rPr lang="en-US" sz="1250" dirty="0">
+                <a:solidFill>
+                  <a:srgbClr val="655E74"/>
+                </a:solidFill>
+                <a:latin typeface="Manrope" pitchFamily="34" charset="0"/>
+                <a:ea typeface="Manrope" pitchFamily="34" charset="-122"/>
+                <a:cs typeface="Manrope" pitchFamily="34" charset="-120"/>
+              </a:rPr>
+              <a:t>hard limits on steps / tokens / dollars</a:t>
+            </a:r>
+            <a:endParaRPr lang="en-US" sz="1500" dirty="0"/>
+          </a:p>
+        </p:txBody>
+      </p:sp>
+      <p:sp>
+        <p:nvSpPr>
+          <p:cNvPr id="17" name="Text 14"/>
+          <p:cNvSpPr/>
+          <p:nvPr/>
+        </p:nvSpPr>
+        <p:spPr>
+          <a:xfrm>
+            <a:off x="548640" y="4572000"/>
+            <a:ext cx="8046720" cy="274320"/>
+          </a:xfrm>
+          <a:prstGeom prst="rect">
+            <a:avLst/>
+          </a:prstGeom>
+          <a:noFill/>
+          <a:ln/>
+        </p:spPr>
+        <p:txBody>
+          <a:bodyPr wrap="square" lIns="0" tIns="0" rIns="0" bIns="0" rtlCol="0" anchor="ctr"/>
+          <a:lstStyle/>
+          <a:p>
+            <a:pPr indent="0" marL="0">
+              <a:buNone/>
+            </a:pPr>
+            <a:r>
+              <a:rPr lang="en-US" sz="1200" i="1" dirty="0">
+                <a:solidFill>
+                  <a:srgbClr val="655E74"/>
+                </a:solidFill>
+                <a:latin typeface="Manrope" pitchFamily="34" charset="0"/>
+                <a:ea typeface="Manrope" pitchFamily="34" charset="-122"/>
+                <a:cs typeface="Manrope" pitchFamily="34" charset="-120"/>
+              </a:rPr>
+              <a:t>The model is a commodity you rent. These five moves are the part you build.</a:t>
+            </a:r>
+            <a:endParaRPr lang="en-US" sz="1200" dirty="0"/>
           </a:p>
         </p:txBody>
       </p:sp>
@@ -8444,6 +11864,338 @@
 <file path=ppt/slides/slide8.xml><?xml version="1.0" encoding="utf-8"?>
 <p:sld xmlns:a="http://schemas.openxmlformats.org/drawingml/2006/main" xmlns:r="http://schemas.openxmlformats.org/officeDocument/2006/relationships" xmlns:p="http://schemas.openxmlformats.org/presentationml/2006/main">
   <p:cSld name="Slide 8">
+    <p:bg>
+      <p:bgPr>
+        <a:solidFill>
+          <a:srgbClr val="FAFAFE"/>
+        </a:solidFill>
+      </p:bgPr>
+    </p:bg>
+    <p:spTree>
+      <p:nvGrpSpPr>
+        <p:cNvPr id="1" name=""/>
+        <p:cNvGrpSpPr/>
+        <p:nvPr/>
+      </p:nvGrpSpPr>
+      <p:grpSpPr>
+        <a:xfrm>
+          <a:off x="0" y="0"/>
+          <a:ext cx="0" cy="0"/>
+          <a:chOff x="0" y="0"/>
+          <a:chExt cx="0" cy="0"/>
+        </a:xfrm>
+      </p:grpSpPr>
+      <p:sp>
+        <p:nvSpPr>
+          <p:cNvPr id="2" name="Text 0"/>
+          <p:cNvSpPr/>
+          <p:nvPr/>
+        </p:nvSpPr>
+        <p:spPr>
+          <a:xfrm>
+            <a:off x="548640" y="365760"/>
+            <a:ext cx="8046720" cy="274320"/>
+          </a:xfrm>
+          <a:prstGeom prst="rect">
+            <a:avLst/>
+          </a:prstGeom>
+          <a:noFill/>
+          <a:ln/>
+        </p:spPr>
+        <p:txBody>
+          <a:bodyPr wrap="square" lIns="0" tIns="0" rIns="0" bIns="0" rtlCol="0" anchor="ctr"/>
+          <a:lstStyle/>
+          <a:p>
+            <a:pPr indent="0" marL="0">
+              <a:buNone/>
+            </a:pPr>
+            <a:r>
+              <a:rPr lang="en-US" sz="1100" b="1" spc="300" kern="0" dirty="0">
+                <a:solidFill>
+                  <a:srgbClr val="9378FF"/>
+                </a:solidFill>
+                <a:latin typeface="Syne" pitchFamily="34" charset="0"/>
+                <a:ea typeface="Syne" pitchFamily="34" charset="-122"/>
+                <a:cs typeface="Syne" pitchFamily="34" charset="-120"/>
+              </a:rPr>
+              <a:t>THE HEART</a:t>
+            </a:r>
+            <a:endParaRPr lang="en-US" sz="1100" dirty="0"/>
+          </a:p>
+        </p:txBody>
+      </p:sp>
+      <p:sp>
+        <p:nvSpPr>
+          <p:cNvPr id="3" name="Text 1"/>
+          <p:cNvSpPr/>
+          <p:nvPr/>
+        </p:nvSpPr>
+        <p:spPr>
+          <a:xfrm>
+            <a:off x="548640" y="640080"/>
+            <a:ext cx="8046720" cy="868680"/>
+          </a:xfrm>
+          <a:prstGeom prst="rect">
+            <a:avLst/>
+          </a:prstGeom>
+          <a:noFill/>
+          <a:ln/>
+        </p:spPr>
+        <p:txBody>
+          <a:bodyPr wrap="square" lIns="0" tIns="0" rIns="0" bIns="0" rtlCol="0" anchor="t"/>
+          <a:lstStyle/>
+          <a:p>
+            <a:pPr indent="0" marL="0">
+              <a:buNone/>
+            </a:pPr>
+            <a:r>
+              <a:rPr lang="en-US" sz="2400" b="1" dirty="0">
+                <a:solidFill>
+                  <a:srgbClr val="2E2C32"/>
+                </a:solidFill>
+                <a:latin typeface="Syne" pitchFamily="34" charset="0"/>
+                <a:ea typeface="Syne" pitchFamily="34" charset="-122"/>
+                <a:cs typeface="Syne" pitchFamily="34" charset="-120"/>
+              </a:rPr>
+              <a:t>Compact: summarize the middle, drop the raw turns.</a:t>
+            </a:r>
+            <a:endParaRPr lang="en-US" sz="2400" dirty="0"/>
+          </a:p>
+        </p:txBody>
+      </p:sp>
+      <p:pic>
+        <p:nvPicPr>
+          <p:cNvPr id="4" name="Image 0" descr="preencoded.png">    </p:cNvPr>
+          <p:cNvPicPr>
+            <a:picLocks noChangeAspect="1"/>
+          </p:cNvPicPr>
+          <p:nvPr/>
+        </p:nvPicPr>
+        <p:blipFill>
+          <a:blip r:embed="rId1"/>
+          <a:stretch>
+            <a:fillRect/>
+          </a:stretch>
+        </p:blipFill>
+        <p:spPr>
+          <a:xfrm>
+            <a:off x="548640" y="4736592"/>
+            <a:ext cx="219456" cy="165344"/>
+          </a:xfrm>
+          <a:prstGeom prst="rect">
+            <a:avLst/>
+          </a:prstGeom>
+        </p:spPr>
+      </p:pic>
+      <p:sp>
+        <p:nvSpPr>
+          <p:cNvPr id="5" name="Text 2"/>
+          <p:cNvSpPr/>
+          <p:nvPr/>
+        </p:nvSpPr>
+        <p:spPr>
+          <a:xfrm>
+            <a:off x="822960" y="4690872"/>
+            <a:ext cx="1280160" cy="292608"/>
+          </a:xfrm>
+          <a:prstGeom prst="rect">
+            <a:avLst/>
+          </a:prstGeom>
+          <a:noFill/>
+          <a:ln/>
+        </p:spPr>
+        <p:txBody>
+          <a:bodyPr wrap="square" lIns="0" tIns="0" rIns="0" bIns="0" rtlCol="0" anchor="ctr"/>
+          <a:lstStyle/>
+          <a:p>
+            <a:pPr indent="0" marL="0">
+              <a:buNone/>
+            </a:pPr>
+            <a:r>
+              <a:rPr lang="en-US" sz="1100" b="1" dirty="0">
+                <a:solidFill>
+                  <a:srgbClr val="2E2C32"/>
+                </a:solidFill>
+                <a:latin typeface="Syne" pitchFamily="34" charset="0"/>
+                <a:ea typeface="Syne" pitchFamily="34" charset="-122"/>
+                <a:cs typeface="Syne" pitchFamily="34" charset="-120"/>
+              </a:rPr>
+              <a:t>Founsi</a:t>
+            </a:r>
+            <a:pPr indent="0" marL="0">
+              <a:buNone/>
+            </a:pPr>
+            <a:r>
+              <a:rPr lang="en-US" sz="1100" b="1" dirty="0">
+                <a:solidFill>
+                  <a:srgbClr val="9378FF"/>
+                </a:solidFill>
+                <a:latin typeface="Syne" pitchFamily="34" charset="0"/>
+                <a:ea typeface="Syne" pitchFamily="34" charset="-122"/>
+                <a:cs typeface="Syne" pitchFamily="34" charset="-120"/>
+              </a:rPr>
+              <a:t>.</a:t>
+            </a:r>
+            <a:endParaRPr lang="en-US" sz="1100" dirty="0"/>
+          </a:p>
+        </p:txBody>
+      </p:sp>
+      <p:sp>
+        <p:nvSpPr>
+          <p:cNvPr id="6" name="Text 3"/>
+          <p:cNvSpPr/>
+          <p:nvPr/>
+        </p:nvSpPr>
+        <p:spPr>
+          <a:xfrm>
+            <a:off x="8229600" y="4690872"/>
+            <a:ext cx="365760" cy="292608"/>
+          </a:xfrm>
+          <a:prstGeom prst="rect">
+            <a:avLst/>
+          </a:prstGeom>
+          <a:noFill/>
+          <a:ln/>
+        </p:spPr>
+        <p:txBody>
+          <a:bodyPr wrap="square" lIns="0" tIns="0" rIns="0" bIns="0" rtlCol="0" anchor="ctr"/>
+          <a:lstStyle/>
+          <a:p>
+            <a:pPr algn="r" indent="0" marL="0">
+              <a:buNone/>
+            </a:pPr>
+            <a:r>
+              <a:rPr lang="en-US" sz="900" dirty="0">
+                <a:solidFill>
+                  <a:srgbClr val="7E7A8A"/>
+                </a:solidFill>
+                <a:latin typeface="Manrope" pitchFamily="34" charset="0"/>
+                <a:ea typeface="Manrope" pitchFamily="34" charset="-122"/>
+                <a:cs typeface="Manrope" pitchFamily="34" charset="-120"/>
+              </a:rPr>
+              <a:t>8</a:t>
+            </a:r>
+            <a:endParaRPr lang="en-US" sz="900" dirty="0"/>
+          </a:p>
+        </p:txBody>
+      </p:sp>
+      <p:sp>
+        <p:nvSpPr>
+          <p:cNvPr id="7" name="Text 4"/>
+          <p:cNvSpPr/>
+          <p:nvPr/>
+        </p:nvSpPr>
+        <p:spPr>
+          <a:xfrm>
+            <a:off x="548640" y="1645920"/>
+            <a:ext cx="8046720" cy="2834640"/>
+          </a:xfrm>
+          <a:prstGeom prst="rect">
+            <a:avLst/>
+          </a:prstGeom>
+          <a:noFill/>
+          <a:ln/>
+        </p:spPr>
+        <p:txBody>
+          <a:bodyPr wrap="square" rtlCol="0" anchor="ctr"/>
+          <a:lstStyle/>
+          <a:p>
+            <a:pPr marL="203200" indent="-203200">
+              <a:spcAft>
+                <a:spcPts val="800"/>
+              </a:spcAft>
+              <a:buSzPct val="100000"/>
+              <a:buChar char="•"/>
+            </a:pPr>
+            <a:r>
+              <a:rPr lang="en-US" sz="1500" dirty="0">
+                <a:solidFill>
+                  <a:srgbClr val="2E2C32"/>
+                </a:solidFill>
+                <a:latin typeface="Manrope" pitchFamily="34" charset="0"/>
+                <a:ea typeface="Manrope" pitchFamily="34" charset="-122"/>
+                <a:cs typeface="Manrope" pitchFamily="34" charset="-120"/>
+              </a:rPr>
+              <a:t>Over budget? Replace the stale middle with one dense summary; throw the raw turns away.</a:t>
+            </a:r>
+            <a:endParaRPr lang="en-US" sz="1500" dirty="0"/>
+          </a:p>
+          <a:p>
+            <a:pPr marL="203200" indent="-203200">
+              <a:spcAft>
+                <a:spcPts val="800"/>
+              </a:spcAft>
+              <a:buSzPct val="100000"/>
+              <a:buChar char="•"/>
+            </a:pPr>
+            <a:r>
+              <a:rPr lang="en-US" sz="1500" dirty="0">
+                <a:solidFill>
+                  <a:srgbClr val="2E2C32"/>
+                </a:solidFill>
+                <a:latin typeface="Manrope" pitchFamily="34" charset="0"/>
+                <a:ea typeface="Manrope" pitchFamily="34" charset="-122"/>
+                <a:cs typeface="Manrope" pitchFamily="34" charset="-120"/>
+              </a:rPr>
+              <a:t>Why the middle? It's the low-attention zone anyway — lost in the middle.</a:t>
+            </a:r>
+            <a:endParaRPr lang="en-US" sz="1500" dirty="0"/>
+          </a:p>
+          <a:p>
+            <a:pPr marL="203200" indent="-203200">
+              <a:spcAft>
+                <a:spcPts val="800"/>
+              </a:spcAft>
+              <a:buSzPct val="100000"/>
+              <a:buChar char="•"/>
+            </a:pPr>
+            <a:r>
+              <a:rPr lang="en-US" sz="1300" dirty="0">
+                <a:solidFill>
+                  <a:srgbClr val="655E74"/>
+                </a:solidFill>
+                <a:latin typeface="Manrope" pitchFamily="34" charset="0"/>
+                <a:ea typeface="Manrope" pitchFamily="34" charset="-122"/>
+                <a:cs typeface="Manrope" pitchFamily="34" charset="-120"/>
+              </a:rPr>
+              <a:t>The gotcha: never split a tool-call from its result — real APIs reject that transcript.</a:t>
+            </a:r>
+            <a:endParaRPr lang="en-US" sz="1500" dirty="0"/>
+          </a:p>
+          <a:p>
+            <a:pPr marL="203200" indent="-203200">
+              <a:spcAft>
+                <a:spcPts val="800"/>
+              </a:spcAft>
+              <a:buSzPct val="100000"/>
+              <a:buChar char="•"/>
+            </a:pPr>
+            <a:r>
+              <a:rPr lang="en-US" sz="1500" dirty="0">
+                <a:solidFill>
+                  <a:srgbClr val="2E2C32"/>
+                </a:solidFill>
+                <a:latin typeface="Manrope" pitchFamily="34" charset="0"/>
+                <a:ea typeface="Manrope" pitchFamily="34" charset="-122"/>
+                <a:cs typeface="Manrope" pitchFamily="34" charset="-120"/>
+              </a:rPr>
+              <a:t>Lossy on purpose — safe only because findings were externalized to disk.</a:t>
+            </a:r>
+            <a:endParaRPr lang="en-US" sz="1500" dirty="0"/>
+          </a:p>
+        </p:txBody>
+      </p:sp>
+    </p:spTree>
+  </p:cSld>
+  <p:clrMapOvr>
+    <a:masterClrMapping/>
+  </p:clrMapOvr>
+</p:sld>
+</file>
+
+<file path=ppt/slides/slide9.xml><?xml version="1.0" encoding="utf-8"?>
+<p:sld xmlns:a="http://schemas.openxmlformats.org/drawingml/2006/main" xmlns:r="http://schemas.openxmlformats.org/officeDocument/2006/relationships" xmlns:p="http://schemas.openxmlformats.org/presentationml/2006/main">
+  <p:cSld name="Slide 9">
     <p:bg>
       <p:bgPr>
         <a:solidFill>
@@ -8473,7 +12225,7 @@
         </p:nvSpPr>
         <p:spPr>
           <a:xfrm>
-            <a:off x="548640" y="1828800"/>
+            <a:off x="548640" y="1783080"/>
             <a:ext cx="8229600" cy="822960"/>
           </a:xfrm>
           <a:prstGeom prst="rect">
@@ -8512,7 +12264,7 @@
         </p:nvSpPr>
         <p:spPr>
           <a:xfrm>
-            <a:off x="548640" y="2743200"/>
+            <a:off x="548640" y="2697480"/>
             <a:ext cx="7863840" cy="548640"/>
           </a:xfrm>
           <a:prstGeom prst="rect">
@@ -8537,7 +12289,7 @@
                 <a:ea typeface="Manrope" pitchFamily="34" charset="-122"/>
                 <a:cs typeface="Manrope" pitchFamily="34" charset="-120"/>
               </a:rPr>
-              <a:t>Watch the context bar grow, cross the threshold, ⚙ COMPACT, snap back — and keep going.</a:t>
+              <a:t>Watch the context bar grow, cross the threshold, COMPACT, snap back — and keep going.</a:t>
             </a:r>
             <a:endParaRPr lang="en-US" sz="1500" dirty="0"/>
           </a:p>
@@ -8551,7 +12303,7 @@
         </p:nvSpPr>
         <p:spPr>
           <a:xfrm>
-            <a:off x="548640" y="3383280"/>
+            <a:off x="548640" y="3337560"/>
             <a:ext cx="8229600" cy="365760"/>
           </a:xfrm>
           <a:prstGeom prst="rect">
@@ -8576,7 +12328,7 @@
                 <a:ea typeface="Courier New" pitchFamily="34" charset="-122"/>
                 <a:cs typeface="Courier New" pitchFamily="34" charset="-120"/>
               </a:rPr>
-              <a:t>python run.py  ·  cat run/notes.md</a:t>
+              <a:t>python run.py     ·     cat run/notes.md</a:t>
             </a:r>
             <a:endParaRPr lang="en-US" sz="1400" dirty="0"/>
           </a:p>
@@ -8598,8 +12350,8 @@
         </p:blipFill>
         <p:spPr>
           <a:xfrm>
-            <a:off x="548640" y="4718304"/>
-            <a:ext cx="237744" cy="179122"/>
+            <a:off x="548640" y="4736592"/>
+            <a:ext cx="219456" cy="165344"/>
           </a:xfrm>
           <a:prstGeom prst="rect">
             <a:avLst/>
@@ -8614,7 +12366,7 @@
         </p:nvSpPr>
         <p:spPr>
           <a:xfrm>
-            <a:off x="841248" y="4681728"/>
+            <a:off x="822960" y="4690872"/>
             <a:ext cx="1280160" cy="292608"/>
           </a:xfrm>
           <a:prstGeom prst="rect">
@@ -8633,7 +12385,7 @@
             <a:r>
               <a:rPr lang="en-US" sz="1100" b="1" dirty="0">
                 <a:solidFill>
-                  <a:srgbClr val="2E2C32"/>
+                  <a:srgbClr val="FFFFFF"/>
                 </a:solidFill>
                 <a:latin typeface="Syne" pitchFamily="34" charset="0"/>
                 <a:ea typeface="Syne" pitchFamily="34" charset="-122"/>
@@ -8667,7 +12419,7 @@
         </p:nvSpPr>
         <p:spPr>
           <a:xfrm>
-            <a:off x="8229600" y="4681728"/>
+            <a:off x="8229600" y="4690872"/>
             <a:ext cx="365760" cy="292608"/>
           </a:xfrm>
           <a:prstGeom prst="rect">
@@ -8692,368 +12444,12 @@
                 <a:ea typeface="Manrope" pitchFamily="34" charset="-122"/>
                 <a:cs typeface="Manrope" pitchFamily="34" charset="-120"/>
               </a:rPr>
-              <a:t>8</a:t>
+              <a:t>9</a:t>
             </a:r>
             <a:endParaRPr lang="en-US" sz="900" dirty="0"/>
           </a:p>
         </p:txBody>
       </p:sp>
-    </p:spTree>
-  </p:cSld>
-  <p:clrMapOvr>
-    <a:masterClrMapping/>
-  </p:clrMapOvr>
-</p:sld>
-</file>
-
-<file path=ppt/slides/slide9.xml><?xml version="1.0" encoding="utf-8"?>
-<p:sld xmlns:a="http://schemas.openxmlformats.org/drawingml/2006/main" xmlns:r="http://schemas.openxmlformats.org/officeDocument/2006/relationships" xmlns:p="http://schemas.openxmlformats.org/presentationml/2006/main">
-  <p:cSld name="Slide 9">
-    <p:bg>
-      <p:bgPr>
-        <a:solidFill>
-          <a:srgbClr val="FAFAFE"/>
-        </a:solidFill>
-      </p:bgPr>
-    </p:bg>
-    <p:spTree>
-      <p:nvGrpSpPr>
-        <p:cNvPr id="1" name=""/>
-        <p:cNvGrpSpPr/>
-        <p:nvPr/>
-      </p:nvGrpSpPr>
-      <p:grpSpPr>
-        <a:xfrm>
-          <a:off x="0" y="0"/>
-          <a:ext cx="0" cy="0"/>
-          <a:chOff x="0" y="0"/>
-          <a:chExt cx="0" cy="0"/>
-        </a:xfrm>
-      </p:grpSpPr>
-      <p:sp>
-        <p:nvSpPr>
-          <p:cNvPr id="2" name="Text 0"/>
-          <p:cNvSpPr/>
-          <p:nvPr/>
-        </p:nvSpPr>
-        <p:spPr>
-          <a:xfrm>
-            <a:off x="548640" y="365760"/>
-            <a:ext cx="8046720" cy="274320"/>
-          </a:xfrm>
-          <a:prstGeom prst="rect">
-            <a:avLst/>
-          </a:prstGeom>
-          <a:noFill/>
-          <a:ln/>
-        </p:spPr>
-        <p:txBody>
-          <a:bodyPr wrap="square" lIns="0" tIns="0" rIns="0" bIns="0" rtlCol="0" anchor="ctr"/>
-          <a:lstStyle/>
-          <a:p>
-            <a:pPr indent="0" marL="0">
-              <a:buNone/>
-            </a:pPr>
-            <a:r>
-              <a:rPr lang="en-US" sz="1100" b="1" spc="300" kern="0" dirty="0">
-                <a:solidFill>
-                  <a:srgbClr val="9378FF"/>
-                </a:solidFill>
-                <a:latin typeface="Syne" pitchFamily="34" charset="0"/>
-                <a:ea typeface="Syne" pitchFamily="34" charset="-122"/>
-                <a:cs typeface="Syne" pitchFamily="34" charset="-120"/>
-              </a:rPr>
-              <a:t>ZERO TO ONE</a:t>
-            </a:r>
-            <a:endParaRPr lang="en-US" sz="1100" dirty="0"/>
-          </a:p>
-        </p:txBody>
-      </p:sp>
-      <p:sp>
-        <p:nvSpPr>
-          <p:cNvPr id="3" name="Text 1"/>
-          <p:cNvSpPr/>
-          <p:nvPr/>
-        </p:nvSpPr>
-        <p:spPr>
-          <a:xfrm>
-            <a:off x="548640" y="640080"/>
-            <a:ext cx="8046720" cy="868680"/>
-          </a:xfrm>
-          <a:prstGeom prst="rect">
-            <a:avLst/>
-          </a:prstGeom>
-          <a:noFill/>
-          <a:ln/>
-        </p:spPr>
-        <p:txBody>
-          <a:bodyPr wrap="square" lIns="0" tIns="0" rIns="0" bIns="0" rtlCol="0" anchor="t"/>
-          <a:lstStyle/>
-          <a:p>
-            <a:pPr indent="0" marL="0">
-              <a:buNone/>
-            </a:pPr>
-            <a:r>
-              <a:rPr lang="en-US" sz="2500" b="1" dirty="0">
-                <a:solidFill>
-                  <a:srgbClr val="2E2C32"/>
-                </a:solidFill>
-                <a:latin typeface="Syne" pitchFamily="34" charset="0"/>
-                <a:ea typeface="Syne" pitchFamily="34" charset="-122"/>
-                <a:cs typeface="Syne" pitchFamily="34" charset="-120"/>
-              </a:rPr>
-              <a:t>Which way of forgetting loses least?</a:t>
-            </a:r>
-            <a:endParaRPr lang="en-US" sz="2500" dirty="0"/>
-          </a:p>
-        </p:txBody>
-      </p:sp>
-      <p:pic>
-        <p:nvPicPr>
-          <p:cNvPr id="4" name="Image 0" descr="preencoded.png">    </p:cNvPr>
-          <p:cNvPicPr>
-            <a:picLocks noChangeAspect="1"/>
-          </p:cNvPicPr>
-          <p:nvPr/>
-        </p:nvPicPr>
-        <p:blipFill>
-          <a:blip r:embed="rId1"/>
-          <a:stretch>
-            <a:fillRect/>
-          </a:stretch>
-        </p:blipFill>
-        <p:spPr>
-          <a:xfrm>
-            <a:off x="548640" y="4718304"/>
-            <a:ext cx="237744" cy="179122"/>
-          </a:xfrm>
-          <a:prstGeom prst="rect">
-            <a:avLst/>
-          </a:prstGeom>
-        </p:spPr>
-      </p:pic>
-      <p:sp>
-        <p:nvSpPr>
-          <p:cNvPr id="5" name="Text 2"/>
-          <p:cNvSpPr/>
-          <p:nvPr/>
-        </p:nvSpPr>
-        <p:spPr>
-          <a:xfrm>
-            <a:off x="841248" y="4681728"/>
-            <a:ext cx="1280160" cy="292608"/>
-          </a:xfrm>
-          <a:prstGeom prst="rect">
-            <a:avLst/>
-          </a:prstGeom>
-          <a:noFill/>
-          <a:ln/>
-        </p:spPr>
-        <p:txBody>
-          <a:bodyPr wrap="square" lIns="0" tIns="0" rIns="0" bIns="0" rtlCol="0" anchor="ctr"/>
-          <a:lstStyle/>
-          <a:p>
-            <a:pPr indent="0" marL="0">
-              <a:buNone/>
-            </a:pPr>
-            <a:r>
-              <a:rPr lang="en-US" sz="1100" b="1" dirty="0">
-                <a:solidFill>
-                  <a:srgbClr val="2E2C32"/>
-                </a:solidFill>
-                <a:latin typeface="Syne" pitchFamily="34" charset="0"/>
-                <a:ea typeface="Syne" pitchFamily="34" charset="-122"/>
-                <a:cs typeface="Syne" pitchFamily="34" charset="-120"/>
-              </a:rPr>
-              <a:t>Founsi</a:t>
-            </a:r>
-            <a:pPr indent="0" marL="0">
-              <a:buNone/>
-            </a:pPr>
-            <a:r>
-              <a:rPr lang="en-US" sz="1100" b="1" dirty="0">
-                <a:solidFill>
-                  <a:srgbClr val="9378FF"/>
-                </a:solidFill>
-                <a:latin typeface="Syne" pitchFamily="34" charset="0"/>
-                <a:ea typeface="Syne" pitchFamily="34" charset="-122"/>
-                <a:cs typeface="Syne" pitchFamily="34" charset="-120"/>
-              </a:rPr>
-              <a:t>.</a:t>
-            </a:r>
-            <a:endParaRPr lang="en-US" sz="1100" dirty="0"/>
-          </a:p>
-        </p:txBody>
-      </p:sp>
-      <p:sp>
-        <p:nvSpPr>
-          <p:cNvPr id="6" name="Text 3"/>
-          <p:cNvSpPr/>
-          <p:nvPr/>
-        </p:nvSpPr>
-        <p:spPr>
-          <a:xfrm>
-            <a:off x="8229600" y="4681728"/>
-            <a:ext cx="365760" cy="292608"/>
-          </a:xfrm>
-          <a:prstGeom prst="rect">
-            <a:avLst/>
-          </a:prstGeom>
-          <a:noFill/>
-          <a:ln/>
-        </p:spPr>
-        <p:txBody>
-          <a:bodyPr wrap="square" lIns="0" tIns="0" rIns="0" bIns="0" rtlCol="0" anchor="ctr"/>
-          <a:lstStyle/>
-          <a:p>
-            <a:pPr algn="r" indent="0" marL="0">
-              <a:buNone/>
-            </a:pPr>
-            <a:r>
-              <a:rPr lang="en-US" sz="900" dirty="0">
-                <a:solidFill>
-                  <a:srgbClr val="7E7A8A"/>
-                </a:solidFill>
-                <a:latin typeface="Manrope" pitchFamily="34" charset="0"/>
-                <a:ea typeface="Manrope" pitchFamily="34" charset="-122"/>
-                <a:cs typeface="Manrope" pitchFamily="34" charset="-120"/>
-              </a:rPr>
-              <a:t>9</a:t>
-            </a:r>
-            <a:endParaRPr lang="en-US" sz="900" dirty="0"/>
-          </a:p>
-        </p:txBody>
-      </p:sp>
-      <p:sp>
-        <p:nvSpPr>
-          <p:cNvPr id="7" name="Text 4"/>
-          <p:cNvSpPr/>
-          <p:nvPr/>
-        </p:nvSpPr>
-        <p:spPr>
-          <a:xfrm>
-            <a:off x="548640" y="1554480"/>
-            <a:ext cx="3566160" cy="2834640"/>
-          </a:xfrm>
-          <a:prstGeom prst="rect">
-            <a:avLst/>
-          </a:prstGeom>
-          <a:noFill/>
-          <a:ln/>
-        </p:spPr>
-        <p:txBody>
-          <a:bodyPr wrap="square" rtlCol="0" anchor="ctr"/>
-          <a:lstStyle/>
-          <a:p>
-            <a:pPr marL="203200" indent="-203200">
-              <a:spcAft>
-                <a:spcPts val="900"/>
-              </a:spcAft>
-              <a:buSzPct val="100000"/>
-              <a:buChar char="•"/>
-            </a:pPr>
-            <a:r>
-              <a:rPr lang="en-US" sz="1500" dirty="0">
-                <a:solidFill>
-                  <a:srgbClr val="2E2C32"/>
-                </a:solidFill>
-                <a:latin typeface="Manrope" pitchFamily="34" charset="0"/>
-                <a:ea typeface="Manrope" pitchFamily="34" charset="-122"/>
-                <a:cs typeface="Manrope" pitchFamily="34" charset="-120"/>
-              </a:rPr>
-              <a:t>Compaction is lossy — so which policy preserves the most facts per token?</a:t>
-            </a:r>
-            <a:endParaRPr lang="en-US" sz="1500" dirty="0"/>
-          </a:p>
-          <a:p>
-            <a:pPr marL="203200" indent="-203200">
-              <a:spcAft>
-                <a:spcPts val="900"/>
-              </a:spcAft>
-              <a:buSzPct val="100000"/>
-              <a:buChar char="•"/>
-            </a:pPr>
-            <a:r>
-              <a:rPr lang="en-US" sz="1500" dirty="0">
-                <a:solidFill>
-                  <a:srgbClr val="2E2C32"/>
-                </a:solidFill>
-                <a:latin typeface="Manrope" pitchFamily="34" charset="0"/>
-                <a:ea typeface="Manrope" pitchFamily="34" charset="-122"/>
-                <a:cs typeface="Manrope" pitchFamily="34" charset="-120"/>
-              </a:rPr>
-              <a:t>Truncate · recency · importance · semantic.</a:t>
-            </a:r>
-            <a:endParaRPr lang="en-US" sz="1500" dirty="0"/>
-          </a:p>
-          <a:p>
-            <a:pPr marL="203200" indent="-203200">
-              <a:spcAft>
-                <a:spcPts val="900"/>
-              </a:spcAft>
-              <a:buSzPct val="100000"/>
-              <a:buChar char="•"/>
-            </a:pPr>
-            <a:r>
-              <a:rPr lang="en-US" sz="1300" dirty="0">
-                <a:solidFill>
-                  <a:srgbClr val="655E74"/>
-                </a:solidFill>
-                <a:latin typeface="Manrope" pitchFamily="34" charset="0"/>
-                <a:ea typeface="Manrope" pitchFamily="34" charset="-122"/>
-                <a:cs typeface="Manrope" pitchFamily="34" charset="-120"/>
-              </a:rPr>
-              <a:t>I plant checkable facts and count how many survive each policy.</a:t>
-            </a:r>
-            <a:endParaRPr lang="en-US" sz="1500" dirty="0"/>
-          </a:p>
-          <a:p>
-            <a:pPr marL="203200" indent="-203200">
-              <a:spcAft>
-                <a:spcPts val="900"/>
-              </a:spcAft>
-              <a:buSzPct val="100000"/>
-              <a:buChar char="•"/>
-            </a:pPr>
-            <a:r>
-              <a:rPr lang="en-US" sz="1500" dirty="0">
-                <a:solidFill>
-                  <a:srgbClr val="2E2C32"/>
-                </a:solidFill>
-                <a:latin typeface="Manrope" pitchFamily="34" charset="0"/>
-                <a:ea typeface="Manrope" pitchFamily="34" charset="-122"/>
-                <a:cs typeface="Manrope" pitchFamily="34" charset="-120"/>
-              </a:rPr>
-              <a:t>Early result, right →</a:t>
-            </a:r>
-            <a:endParaRPr lang="en-US" sz="1500" dirty="0"/>
-          </a:p>
-        </p:txBody>
-      </p:sp>
-      <p:pic>
-        <p:nvPicPr>
-          <p:cNvPr id="8" name="Image 1" descr="/Users/kanishk/Desktop/agent-harness/.claude/worktrees/sleepy-sinoussi-00c73b/presentation/figures/EXP-001_pareto_v1.png">    </p:cNvPr>
-          <p:cNvPicPr>
-            <a:picLocks noChangeAspect="1"/>
-          </p:cNvPicPr>
-          <p:nvPr/>
-        </p:nvPicPr>
-        <p:blipFill>
-          <a:blip r:embed="rId2"/>
-          <a:stretch>
-            <a:fillRect/>
-          </a:stretch>
-        </p:blipFill>
-        <p:spPr>
-          <a:xfrm>
-            <a:off x="4160520" y="1325880"/>
-            <a:ext cx="4572000" cy="3099816"/>
-          </a:xfrm>
-          <a:prstGeom prst="rect">
-            <a:avLst/>
-          </a:prstGeom>
-        </p:spPr>
-      </p:pic>
     </p:spTree>
   </p:cSld>
   <p:clrMapOvr>

--- a/presentation/founsi-context-engineering.pptx
+++ b/presentation/founsi-context-engineering.pptx
@@ -9182,8 +9182,8 @@
         </p:blipFill>
         <p:spPr>
           <a:xfrm>
-            <a:off x="1097280" y="2011680"/>
-            <a:ext cx="1371600" cy="1371600"/>
+            <a:off x="868680" y="2103120"/>
+            <a:ext cx="1143000" cy="1143000"/>
           </a:xfrm>
           <a:prstGeom prst="rect">
             <a:avLst/>
@@ -9198,8 +9198,8 @@
         </p:nvSpPr>
         <p:spPr>
           <a:xfrm>
-            <a:off x="822960" y="3429000"/>
-            <a:ext cx="1920240" cy="274320"/>
+            <a:off x="594360" y="3291840"/>
+            <a:ext cx="1691640" cy="274320"/>
           </a:xfrm>
           <a:prstGeom prst="rect">
             <a:avLst/>
@@ -9245,8 +9245,8 @@
         </p:blipFill>
         <p:spPr>
           <a:xfrm>
-            <a:off x="3886200" y="2011680"/>
-            <a:ext cx="1371600" cy="1371600"/>
+            <a:off x="2971800" y="2103120"/>
+            <a:ext cx="1143000" cy="1143000"/>
           </a:xfrm>
           <a:prstGeom prst="rect">
             <a:avLst/>
@@ -9261,8 +9261,8 @@
         </p:nvSpPr>
         <p:spPr>
           <a:xfrm>
-            <a:off x="3611880" y="3429000"/>
-            <a:ext cx="1920240" cy="274320"/>
+            <a:off x="2697480" y="3291840"/>
+            <a:ext cx="1691640" cy="274320"/>
           </a:xfrm>
           <a:prstGeom prst="rect">
             <a:avLst/>
@@ -9308,8 +9308,8 @@
         </p:blipFill>
         <p:spPr>
           <a:xfrm>
-            <a:off x="6675120" y="2011680"/>
-            <a:ext cx="1371600" cy="1371600"/>
+            <a:off x="5074920" y="2103120"/>
+            <a:ext cx="1143000" cy="1143000"/>
           </a:xfrm>
           <a:prstGeom prst="rect">
             <a:avLst/>
@@ -9324,8 +9324,8 @@
         </p:nvSpPr>
         <p:spPr>
           <a:xfrm>
-            <a:off x="6400800" y="3429000"/>
-            <a:ext cx="1920240" cy="274320"/>
+            <a:off x="4800600" y="3291840"/>
+            <a:ext cx="1691640" cy="274320"/>
           </a:xfrm>
           <a:prstGeom prst="rect">
             <a:avLst/>
@@ -9350,45 +9350,6 @@
                 <a:cs typeface="Manrope" pitchFamily="34" charset="-120"/>
               </a:rPr>
               <a:t>X · @above_almighty</a:t>
-            </a:r>
-            <a:endParaRPr lang="en-US" sz="1100" dirty="0"/>
-          </a:p>
-        </p:txBody>
-      </p:sp>
-      <p:sp>
-        <p:nvSpPr>
-          <p:cNvPr id="10" name="Text 5"/>
-          <p:cNvSpPr/>
-          <p:nvPr/>
-        </p:nvSpPr>
-        <p:spPr>
-          <a:xfrm>
-            <a:off x="548640" y="4160520"/>
-            <a:ext cx="8229600" cy="274320"/>
-          </a:xfrm>
-          <a:prstGeom prst="rect">
-            <a:avLst/>
-          </a:prstGeom>
-          <a:noFill/>
-          <a:ln/>
-        </p:spPr>
-        <p:txBody>
-          <a:bodyPr wrap="square" lIns="0" tIns="0" rIns="0" bIns="0" rtlCol="0" anchor="ctr"/>
-          <a:lstStyle/>
-          <a:p>
-            <a:pPr algn="ctr" indent="0" marL="0">
-              <a:buNone/>
-            </a:pPr>
-            <a:r>
-              <a:rPr lang="en-US" sz="1100" i="1" dirty="0">
-                <a:solidFill>
-                  <a:srgbClr val="7E7A8A"/>
-                </a:solidFill>
-                <a:latin typeface="Manrope" pitchFamily="34" charset="0"/>
-                <a:ea typeface="Manrope" pitchFamily="34" charset="-122"/>
-                <a:cs typeface="Manrope" pitchFamily="34" charset="-120"/>
-              </a:rPr>
-              <a:t>LinkedIn QR — add your URL (placeholder)</a:t>
             </a:r>
             <a:endParaRPr lang="en-US" sz="1100" dirty="0"/>
           </a:p>
@@ -9396,7 +9357,7 @@
       </p:sp>
       <p:pic>
         <p:nvPicPr>
-          <p:cNvPr id="11" name="Image 3" descr="preencoded.png">    </p:cNvPr>
+          <p:cNvPr id="10" name="Image 3" descr="/Users/kanishk/Desktop/agent-harness/.claude/worktrees/sleepy-sinoussi-00c73b/presentation/assets/qr/qr_linkedin.png">    </p:cNvPr>
           <p:cNvPicPr>
             <a:picLocks noChangeAspect="1"/>
           </p:cNvPicPr>
@@ -9410,6 +9371,69 @@
         </p:blipFill>
         <p:spPr>
           <a:xfrm>
+            <a:off x="7178040" y="2103120"/>
+            <a:ext cx="1143000" cy="1143000"/>
+          </a:xfrm>
+          <a:prstGeom prst="rect">
+            <a:avLst/>
+          </a:prstGeom>
+        </p:spPr>
+      </p:pic>
+      <p:sp>
+        <p:nvSpPr>
+          <p:cNvPr id="11" name="Text 5"/>
+          <p:cNvSpPr/>
+          <p:nvPr/>
+        </p:nvSpPr>
+        <p:spPr>
+          <a:xfrm>
+            <a:off x="6903720" y="3291840"/>
+            <a:ext cx="1691640" cy="274320"/>
+          </a:xfrm>
+          <a:prstGeom prst="rect">
+            <a:avLst/>
+          </a:prstGeom>
+          <a:noFill/>
+          <a:ln/>
+        </p:spPr>
+        <p:txBody>
+          <a:bodyPr wrap="square" lIns="0" tIns="0" rIns="0" bIns="0" rtlCol="0" anchor="ctr"/>
+          <a:lstStyle/>
+          <a:p>
+            <a:pPr algn="ctr" indent="0" marL="0">
+              <a:buNone/>
+            </a:pPr>
+            <a:r>
+              <a:rPr lang="en-US" sz="1100" b="1" dirty="0">
+                <a:solidFill>
+                  <a:srgbClr val="2E2C32"/>
+                </a:solidFill>
+                <a:latin typeface="Manrope" pitchFamily="34" charset="0"/>
+                <a:ea typeface="Manrope" pitchFamily="34" charset="-122"/>
+                <a:cs typeface="Manrope" pitchFamily="34" charset="-120"/>
+              </a:rPr>
+              <a:t>LinkedIn</a:t>
+            </a:r>
+            <a:endParaRPr lang="en-US" sz="1100" dirty="0"/>
+          </a:p>
+        </p:txBody>
+      </p:sp>
+      <p:pic>
+        <p:nvPicPr>
+          <p:cNvPr id="12" name="Image 4" descr="preencoded.png">    </p:cNvPr>
+          <p:cNvPicPr>
+            <a:picLocks noChangeAspect="1"/>
+          </p:cNvPicPr>
+          <p:nvPr/>
+        </p:nvPicPr>
+        <p:blipFill>
+          <a:blip r:embed="rId5"/>
+          <a:stretch>
+            <a:fillRect/>
+          </a:stretch>
+        </p:blipFill>
+        <p:spPr>
+          <a:xfrm>
             <a:off x="548640" y="4736592"/>
             <a:ext cx="219456" cy="165344"/>
           </a:xfrm>
@@ -9420,7 +9444,7 @@
       </p:pic>
       <p:sp>
         <p:nvSpPr>
-          <p:cNvPr id="12" name="Text 6"/>
+          <p:cNvPr id="13" name="Text 6"/>
           <p:cNvSpPr/>
           <p:nvPr/>
         </p:nvSpPr>
@@ -9473,7 +9497,7 @@
       </p:sp>
       <p:sp>
         <p:nvSpPr>
-          <p:cNvPr id="13" name="Text 7"/>
+          <p:cNvPr id="14" name="Text 7"/>
           <p:cNvSpPr/>
           <p:nvPr/>
         </p:nvSpPr>

--- a/presentation/founsi-context-engineering.pptx
+++ b/presentation/founsi-context-engineering.pptx
@@ -8026,7 +8026,7 @@
                 <a:ea typeface="Syne" pitchFamily="34" charset="-122"/>
                 <a:cs typeface="Syne" pitchFamily="34" charset="-120"/>
               </a:rPr>
-              <a:t>EXP-002 · LENGTH-DEGRADATION (IN PROGRESS)</a:t>
+              <a:t>EXP-002 · LENGTH-DEGRADATION</a:t>
             </a:r>
             <a:endParaRPr lang="en-US" sz="1100" dirty="0"/>
           </a:p>
@@ -8057,7 +8057,7 @@
               <a:buNone/>
             </a:pPr>
             <a:r>
-              <a:rPr lang="en-US" sz="2400" b="1" dirty="0">
+              <a:rPr lang="en-US" sz="2500" b="1" dirty="0">
                 <a:solidFill>
                   <a:srgbClr val="2E2C32"/>
                 </a:solidFill>
@@ -8065,9 +8065,9 @@
                 <a:ea typeface="Syne" pitchFamily="34" charset="-122"/>
                 <a:cs typeface="Syne" pitchFamily="34" charset="-120"/>
               </a:rPr>
-              <a:t>Does compaction beat raw context?</a:t>
-            </a:r>
-            <a:endParaRPr lang="en-US" sz="2400" dirty="0"/>
+              <a:t>Does compaction beat raw context? Yes.</a:t>
+            </a:r>
+            <a:endParaRPr lang="en-US" sz="2500" dirty="0"/>
           </a:p>
         </p:txBody>
       </p:sp>
@@ -8187,94 +8187,40 @@
           </a:p>
         </p:txBody>
       </p:sp>
-      <p:sp>
-        <p:nvSpPr>
-          <p:cNvPr id="7" name="Text 4"/>
-          <p:cNvSpPr/>
-          <p:nvPr/>
-        </p:nvSpPr>
-        <p:spPr>
-          <a:xfrm>
-            <a:off x="548640" y="1371600"/>
-            <a:ext cx="8046720" cy="274320"/>
-          </a:xfrm>
-          <a:prstGeom prst="rect">
-            <a:avLst/>
-          </a:prstGeom>
-          <a:noFill/>
-          <a:ln/>
-        </p:spPr>
-        <p:txBody>
-          <a:bodyPr wrap="square" lIns="0" tIns="0" rIns="0" bIns="0" rtlCol="0" anchor="ctr"/>
-          <a:lstStyle/>
-          <a:p>
-            <a:pPr indent="0" marL="0">
-              <a:buNone/>
-            </a:pPr>
-            <a:r>
-              <a:rPr lang="en-US" sz="1300" b="1" dirty="0">
-                <a:solidFill>
-                  <a:srgbClr val="9378FF"/>
-                </a:solidFill>
-                <a:latin typeface="Manrope" pitchFamily="34" charset="0"/>
-                <a:ea typeface="Manrope" pitchFamily="34" charset="-122"/>
-                <a:cs typeface="Manrope" pitchFamily="34" charset="-120"/>
-              </a:rPr>
-              <a:t>Hypothesis</a:t>
-            </a:r>
-            <a:endParaRPr lang="en-US" sz="1300" dirty="0"/>
-          </a:p>
-        </p:txBody>
-      </p:sp>
-      <p:sp>
-        <p:nvSpPr>
-          <p:cNvPr id="8" name="Text 5"/>
-          <p:cNvSpPr/>
-          <p:nvPr/>
-        </p:nvSpPr>
-        <p:spPr>
-          <a:xfrm>
-            <a:off x="548640" y="1645920"/>
-            <a:ext cx="8046720" cy="685800"/>
-          </a:xfrm>
-          <a:prstGeom prst="rect">
-            <a:avLst/>
-          </a:prstGeom>
-          <a:noFill/>
-          <a:ln/>
-        </p:spPr>
-        <p:txBody>
-          <a:bodyPr wrap="square" lIns="0" tIns="0" rIns="0" bIns="0" rtlCol="0" anchor="ctr"/>
-          <a:lstStyle/>
-          <a:p>
-            <a:pPr indent="0" marL="0">
-              <a:buNone/>
-            </a:pPr>
-            <a:r>
-              <a:rPr lang="en-US" sz="1300" dirty="0">
-                <a:solidFill>
-                  <a:srgbClr val="2E2C32"/>
-                </a:solidFill>
-                <a:latin typeface="Manrope" pitchFamily="34" charset="0"/>
-                <a:ea typeface="Manrope" pitchFamily="34" charset="-122"/>
-                <a:cs typeface="Manrope" pitchFamily="34" charset="-120"/>
-              </a:rPr>
-              <a:t>As raw context grows, the no-compaction baseline's recall degrades (lost-in-the-middle); fixed-budget compaction holds recall higher at long lengths — the crossover is where compaction becomes net-positive.</a:t>
-            </a:r>
-            <a:endParaRPr lang="en-US" sz="1300" dirty="0"/>
-          </a:p>
-        </p:txBody>
-      </p:sp>
-      <p:sp>
-        <p:nvSpPr>
-          <p:cNvPr id="9" name="Text 6"/>
-          <p:cNvSpPr/>
-          <p:nvPr/>
-        </p:nvSpPr>
-        <p:spPr>
-          <a:xfrm>
-            <a:off x="548640" y="2468880"/>
-            <a:ext cx="8046720" cy="2834640"/>
+      <p:pic>
+        <p:nvPicPr>
+          <p:cNvPr id="7" name="Image 1" descr="/Users/kanishk/Desktop/agent-harness/.claude/worktrees/sleepy-sinoussi-00c73b/presentation/figures/EXP-002_recall_vs_length_v1.png">    </p:cNvPr>
+          <p:cNvPicPr>
+            <a:picLocks noChangeAspect="1"/>
+          </p:cNvPicPr>
+          <p:nvPr/>
+        </p:nvPicPr>
+        <p:blipFill>
+          <a:blip r:embed="rId2"/>
+          <a:stretch>
+            <a:fillRect/>
+          </a:stretch>
+        </p:blipFill>
+        <p:spPr>
+          <a:xfrm>
+            <a:off x="640080" y="1371600"/>
+            <a:ext cx="4846320" cy="3328416"/>
+          </a:xfrm>
+          <a:prstGeom prst="rect">
+            <a:avLst/>
+          </a:prstGeom>
+        </p:spPr>
+      </p:pic>
+      <p:sp>
+        <p:nvSpPr>
+          <p:cNvPr id="8" name="Text 4"/>
+          <p:cNvSpPr/>
+          <p:nvPr/>
+        </p:nvSpPr>
+        <p:spPr>
+          <a:xfrm>
+            <a:off x="5669280" y="1554480"/>
+            <a:ext cx="3017520" cy="2834640"/>
           </a:xfrm>
           <a:prstGeom prst="rect">
             <a:avLst/>
@@ -8294,7 +8240,7 @@
               <a:buChar char="•"/>
             </a:pPr>
             <a:r>
-              <a:rPr lang="en-US" sz="1300" dirty="0">
+              <a:rPr lang="en-US" sz="1250" dirty="0">
                 <a:solidFill>
                   <a:srgbClr val="2E2C32"/>
                 </a:solidFill>
@@ -8302,9 +8248,9 @@
                 <a:ea typeface="Manrope" pitchFamily="34" charset="-122"/>
                 <a:cs typeface="Manrope" pitchFamily="34" charset="-120"/>
               </a:rPr>
-              <a:t>Design: fast 8b, fixed budget (2000), run-lengths {8, 16, 32, 48} (~3k-21k tokens), 3 seeds.</a:t>
-            </a:r>
-            <a:endParaRPr lang="en-US" sz="1300" dirty="0"/>
+              <a:t>No-compaction baseline collapses with length: 0.62 down to 0.12 by 32 sources.</a:t>
+            </a:r>
+            <a:endParaRPr lang="en-US" sz="1250" dirty="0"/>
           </a:p>
           <a:p>
             <a:pPr marL="203200" indent="-203200">
@@ -8315,7 +8261,7 @@
               <a:buChar char="•"/>
             </a:pPr>
             <a:r>
-              <a:rPr lang="en-US" sz="1300" dirty="0">
+              <a:rPr lang="en-US" sz="1250" dirty="0">
                 <a:solidFill>
                   <a:srgbClr val="2E2C32"/>
                 </a:solidFill>
@@ -8323,9 +8269,9 @@
                 <a:ea typeface="Manrope" pitchFamily="34" charset="-122"/>
                 <a:cs typeface="Manrope" pitchFamily="34" charset="-120"/>
               </a:rPr>
-              <a:t>Expectation: baseline recall drops with length; recency stays flatter; they cross.</a:t>
-            </a:r>
-            <a:endParaRPr lang="en-US" sz="1300" dirty="0"/>
+              <a:t>Summary compaction (recency, semantic) holds flat near 0.58.</a:t>
+            </a:r>
+            <a:endParaRPr lang="en-US" sz="1250" dirty="0"/>
           </a:p>
           <a:p>
             <a:pPr marL="203200" indent="-203200">
@@ -8336,7 +8282,7 @@
               <a:buChar char="•"/>
             </a:pPr>
             <a:r>
-              <a:rPr lang="en-US" sz="1100" dirty="0">
+              <a:rPr lang="en-US" sz="1050" dirty="0">
                 <a:solidFill>
                   <a:srgbClr val="655E74"/>
                 </a:solidFill>
@@ -8344,9 +8290,30 @@
                 <a:ea typeface="Manrope" pitchFamily="34" charset="-122"/>
                 <a:cs typeface="Manrope" pitchFamily="34" charset="-120"/>
               </a:rPr>
-              <a:t>Success = a measured crossover point — compaction as recall-positive, not just survival.</a:t>
-            </a:r>
-            <a:endParaRPr lang="en-US" sz="1300" dirty="0"/>
+              <a:t>Crossover around 16 sources: compaction goes from tied to decisively better.</a:t>
+            </a:r>
+            <a:endParaRPr lang="en-US" sz="1250" dirty="0"/>
+          </a:p>
+          <a:p>
+            <a:pPr marL="203200" indent="-203200">
+              <a:spcAft>
+                <a:spcPts val="800"/>
+              </a:spcAft>
+              <a:buSzPct val="100000"/>
+              <a:buChar char="•"/>
+            </a:pPr>
+            <a:r>
+              <a:rPr lang="en-US" sz="1250" dirty="0">
+                <a:solidFill>
+                  <a:srgbClr val="2E2C32"/>
+                </a:solidFill>
+                <a:latin typeface="Manrope" pitchFamily="34" charset="0"/>
+                <a:ea typeface="Manrope" pitchFamily="34" charset="-122"/>
+                <a:cs typeface="Manrope" pitchFamily="34" charset="-120"/>
+              </a:rPr>
+              <a:t>Truncate is the floor (0.08). 8b dev; the effect is the lost-in-the-middle escape.</a:t>
+            </a:r>
+            <a:endParaRPr lang="en-US" sz="1250" dirty="0"/>
           </a:p>
         </p:txBody>
       </p:sp>

--- a/presentation/founsi-context-engineering.pptx
+++ b/presentation/founsi-context-engineering.pptx
@@ -30,9 +30,11 @@
     <p:sldId id="278" r:id="rId24"/>
     <p:sldId id="279" r:id="rId25"/>
     <p:sldId id="280" r:id="rId26"/>
+    <p:sldId id="281" r:id="rId27"/>
+    <p:sldId id="282" r:id="rId28"/>
   </p:sldIdLst>
   <p:notesMasterIdLst>
-    <p:notesMasterId r:id="rId27"/>
+    <p:notesMasterId r:id="rId29"/>
   </p:notesMasterIdLst>
   <p:sldSz cx="9144000" cy="5143500"/>
   <p:notesSz cx="5143500" cy="9144000"/>
@@ -2046,6 +2048,182 @@
             <a:fld id="{F7021451-1387-4CA6-816F-3879F97B5CBC}" type="slidenum">
               <a:rPr lang="en-US"/>
               <a:t>25</a:t>
+            </a:fld>
+            <a:endParaRPr lang="en-US"/>
+          </a:p>
+        </p:txBody>
+      </p:sp>
+    </p:spTree>
+    <p:extLst>
+      <p:ext uri="{BB962C8B-B14F-4D97-AF65-F5344CB8AC3E}">
+        <p14:creationId xmlns:p14="http://schemas.microsoft.com/office/powerpoint/2010/main" val="1024086991"/>
+      </p:ext>
+    </p:extLst>
+  </p:cSld>
+  <p:clrMapOvr>
+    <a:masterClrMapping/>
+  </p:clrMapOvr>
+</p:notes>
+</file>
+
+<file path=ppt/notesSlides/notesSlide26.xml><?xml version="1.0" encoding="utf-8"?>
+<p:notes xmlns:a="http://schemas.openxmlformats.org/drawingml/2006/main" xmlns:r="http://schemas.openxmlformats.org/officeDocument/2006/relationships" xmlns:p="http://schemas.openxmlformats.org/presentationml/2006/main">
+  <p:cSld>
+    <p:spTree>
+      <p:nvGrpSpPr>
+        <p:cNvPr id="1" name=""/>
+        <p:cNvGrpSpPr/>
+        <p:nvPr/>
+      </p:nvGrpSpPr>
+      <p:grpSpPr>
+        <a:xfrm>
+          <a:off x="0" y="0"/>
+          <a:ext cx="0" cy="0"/>
+          <a:chOff x="0" y="0"/>
+          <a:chExt cx="0" cy="0"/>
+        </a:xfrm>
+      </p:grpSpPr>
+      <p:sp>
+        <p:nvSpPr>
+          <p:cNvPr id="2" name="Slide Image Placeholder 1"/>
+          <p:cNvSpPr>
+            <a:spLocks noGrp="1" noRot="1" noChangeAspect="1"/>
+          </p:cNvSpPr>
+          <p:nvPr>
+            <p:ph type="sldImg"/>
+          </p:nvPr>
+        </p:nvSpPr>
+        <p:spPr/>
+      </p:sp>
+      <p:sp>
+        <p:nvSpPr>
+          <p:cNvPr id="3" name="Notes Placeholder 2"/>
+          <p:cNvSpPr>
+            <a:spLocks noGrp="1"/>
+          </p:cNvSpPr>
+          <p:nvPr>
+            <p:ph type="body" idx="1"/>
+          </p:nvPr>
+        </p:nvSpPr>
+        <p:spPr/>
+        <p:txBody>
+          <a:bodyPr/>
+          <a:lstStyle/>
+          <a:p>
+            <a:r>
+              <a:rPr lang="en-US" dirty="0"/>
+              <a:t/>
+            </a:r>
+            <a:endParaRPr lang="en-US" dirty="0"/>
+          </a:p>
+        </p:txBody>
+      </p:sp>
+      <p:sp>
+        <p:nvSpPr>
+          <p:cNvPr id="4" name="Slide Number Placeholder 3"/>
+          <p:cNvSpPr>
+            <a:spLocks noGrp="1"/>
+          </p:cNvSpPr>
+          <p:nvPr>
+            <p:ph type="sldNum" sz="quarter" idx="10"/>
+          </p:nvPr>
+        </p:nvSpPr>
+        <p:spPr/>
+        <p:txBody>
+          <a:bodyPr/>
+          <a:lstStyle/>
+          <a:p>
+            <a:fld id="{F7021451-1387-4CA6-816F-3879F97B5CBC}" type="slidenum">
+              <a:rPr lang="en-US"/>
+              <a:t>26</a:t>
+            </a:fld>
+            <a:endParaRPr lang="en-US"/>
+          </a:p>
+        </p:txBody>
+      </p:sp>
+    </p:spTree>
+    <p:extLst>
+      <p:ext uri="{BB962C8B-B14F-4D97-AF65-F5344CB8AC3E}">
+        <p14:creationId xmlns:p14="http://schemas.microsoft.com/office/powerpoint/2010/main" val="1024086991"/>
+      </p:ext>
+    </p:extLst>
+  </p:cSld>
+  <p:clrMapOvr>
+    <a:masterClrMapping/>
+  </p:clrMapOvr>
+</p:notes>
+</file>
+
+<file path=ppt/notesSlides/notesSlide27.xml><?xml version="1.0" encoding="utf-8"?>
+<p:notes xmlns:a="http://schemas.openxmlformats.org/drawingml/2006/main" xmlns:r="http://schemas.openxmlformats.org/officeDocument/2006/relationships" xmlns:p="http://schemas.openxmlformats.org/presentationml/2006/main">
+  <p:cSld>
+    <p:spTree>
+      <p:nvGrpSpPr>
+        <p:cNvPr id="1" name=""/>
+        <p:cNvGrpSpPr/>
+        <p:nvPr/>
+      </p:nvGrpSpPr>
+      <p:grpSpPr>
+        <a:xfrm>
+          <a:off x="0" y="0"/>
+          <a:ext cx="0" cy="0"/>
+          <a:chOff x="0" y="0"/>
+          <a:chExt cx="0" cy="0"/>
+        </a:xfrm>
+      </p:grpSpPr>
+      <p:sp>
+        <p:nvSpPr>
+          <p:cNvPr id="2" name="Slide Image Placeholder 1"/>
+          <p:cNvSpPr>
+            <a:spLocks noGrp="1" noRot="1" noChangeAspect="1"/>
+          </p:cNvSpPr>
+          <p:nvPr>
+            <p:ph type="sldImg"/>
+          </p:nvPr>
+        </p:nvSpPr>
+        <p:spPr/>
+      </p:sp>
+      <p:sp>
+        <p:nvSpPr>
+          <p:cNvPr id="3" name="Notes Placeholder 2"/>
+          <p:cNvSpPr>
+            <a:spLocks noGrp="1"/>
+          </p:cNvSpPr>
+          <p:nvPr>
+            <p:ph type="body" idx="1"/>
+          </p:nvPr>
+        </p:nvSpPr>
+        <p:spPr/>
+        <p:txBody>
+          <a:bodyPr/>
+          <a:lstStyle/>
+          <a:p>
+            <a:r>
+              <a:rPr lang="en-US" dirty="0"/>
+              <a:t/>
+            </a:r>
+            <a:endParaRPr lang="en-US" dirty="0"/>
+          </a:p>
+        </p:txBody>
+      </p:sp>
+      <p:sp>
+        <p:nvSpPr>
+          <p:cNvPr id="4" name="Slide Number Placeholder 3"/>
+          <p:cNvSpPr>
+            <a:spLocks noGrp="1"/>
+          </p:cNvSpPr>
+          <p:nvPr>
+            <p:ph type="sldNum" sz="quarter" idx="10"/>
+          </p:nvPr>
+        </p:nvSpPr>
+        <p:spPr/>
+        <p:txBody>
+          <a:bodyPr/>
+          <a:lstStyle/>
+          <a:p>
+            <a:fld id="{F7021451-1387-4CA6-816F-3879F97B5CBC}" type="slidenum">
+              <a:rPr lang="en-US"/>
+              <a:t>27</a:t>
             </a:fld>
             <a:endParaRPr lang="en-US"/>
           </a:p>
@@ -8382,7 +8560,7 @@
                 <a:ea typeface="Syne" pitchFamily="34" charset="-122"/>
                 <a:cs typeface="Syne" pitchFamily="34" charset="-120"/>
               </a:rPr>
-              <a:t>WHERE THIS GOES</a:t>
+              <a:t>EXP-003A · APPLIED FRAMES</a:t>
             </a:r>
             <a:endParaRPr lang="en-US" sz="1100" dirty="0"/>
           </a:p>
@@ -8413,7 +8591,7 @@
               <a:buNone/>
             </a:pPr>
             <a:r>
-              <a:rPr lang="en-US" sz="2700" b="1" dirty="0">
+              <a:rPr lang="en-US" sz="2300" b="1" dirty="0">
                 <a:solidFill>
                   <a:srgbClr val="2E2C32"/>
                 </a:solidFill>
@@ -8421,9 +8599,9 @@
                 <a:ea typeface="Syne" pitchFamily="34" charset="-122"/>
                 <a:cs typeface="Syne" pitchFamily="34" charset="-120"/>
               </a:rPr>
-              <a:t>Roadmap</a:t>
-            </a:r>
-            <a:endParaRPr lang="en-US" sz="2700" dirty="0"/>
+              <a:t>On a real task, the metric flips the result</a:t>
+            </a:r>
+            <a:endParaRPr lang="en-US" sz="2300" dirty="0"/>
           </a:p>
         </p:txBody>
       </p:sp>
@@ -8543,16 +8721,40 @@
           </a:p>
         </p:txBody>
       </p:sp>
-      <p:sp>
-        <p:nvSpPr>
-          <p:cNvPr id="7" name="Text 4"/>
-          <p:cNvSpPr/>
-          <p:nvPr/>
-        </p:nvSpPr>
-        <p:spPr>
-          <a:xfrm>
-            <a:off x="548640" y="1645920"/>
-            <a:ext cx="8046720" cy="2834640"/>
+      <p:pic>
+        <p:nvPicPr>
+          <p:cNvPr id="7" name="Image 1" descr="/Users/kanishk/Desktop/agent-harness/.claude/worktrees/sleepy-sinoussi-00c73b/presentation/figures/EXP-003a_pareto_v1.png">    </p:cNvPr>
+          <p:cNvPicPr>
+            <a:picLocks noChangeAspect="1"/>
+          </p:cNvPicPr>
+          <p:nvPr/>
+        </p:nvPicPr>
+        <p:blipFill>
+          <a:blip r:embed="rId2"/>
+          <a:stretch>
+            <a:fillRect/>
+          </a:stretch>
+        </p:blipFill>
+        <p:spPr>
+          <a:xfrm>
+            <a:off x="640080" y="1371600"/>
+            <a:ext cx="4846320" cy="3282696"/>
+          </a:xfrm>
+          <a:prstGeom prst="rect">
+            <a:avLst/>
+          </a:prstGeom>
+        </p:spPr>
+      </p:pic>
+      <p:sp>
+        <p:nvSpPr>
+          <p:cNvPr id="8" name="Text 4"/>
+          <p:cNvSpPr/>
+          <p:nvPr/>
+        </p:nvSpPr>
+        <p:spPr>
+          <a:xfrm>
+            <a:off x="5669280" y="1554480"/>
+            <a:ext cx="3017520" cy="2834640"/>
           </a:xfrm>
           <a:prstGeom prst="rect">
             <a:avLst/>
@@ -8572,7 +8774,7 @@
               <a:buChar char="•"/>
             </a:pPr>
             <a:r>
-              <a:rPr lang="en-US" sz="1350" dirty="0">
+              <a:rPr lang="en-US" sz="1250" dirty="0">
                 <a:solidFill>
                   <a:srgbClr val="2E2C32"/>
                 </a:solidFill>
@@ -8580,9 +8782,9 @@
                 <a:ea typeface="Manrope" pitchFamily="34" charset="-122"/>
                 <a:cs typeface="Manrope" pitchFamily="34" charset="-120"/>
               </a:rPr>
-              <a:t>EXP-002 — length degradation (running) · EXP-003 — 70b confirmation, the 128k ceiling.</a:t>
-            </a:r>
-            <a:endParaRPr lang="en-US" sz="1350" dirty="0"/>
+              <a:t>A real research agent answers FRAMES multi-hop questions under each policy.</a:t>
+            </a:r>
+            <a:endParaRPr lang="en-US" sz="1250" dirty="0"/>
           </a:p>
           <a:p>
             <a:pPr marL="203200" indent="-203200">
@@ -8593,7 +8795,7 @@
               <a:buChar char="•"/>
             </a:pPr>
             <a:r>
-              <a:rPr lang="en-US" sz="1350" dirty="0">
+              <a:rPr lang="en-US" sz="1250" dirty="0">
                 <a:solidFill>
                   <a:srgbClr val="2E2C32"/>
                 </a:solidFill>
@@ -8601,9 +8803,9 @@
                 <a:ea typeface="Manrope" pitchFamily="34" charset="-122"/>
                 <a:cs typeface="Manrope" pitchFamily="34" charset="-120"/>
               </a:rPr>
-              <a:t>Lost-in-the-middle: recall by needle depth (data already logged).</a:t>
-            </a:r>
-            <a:endParaRPr lang="en-US" sz="1350" dirty="0"/>
+              <a:t>Substring scoring made the reversible-hybrid look worst, at 0.21.</a:t>
+            </a:r>
+            <a:endParaRPr lang="en-US" sz="1250" dirty="0"/>
           </a:p>
           <a:p>
             <a:pPr marL="203200" indent="-203200">
@@ -8614,17 +8816,17 @@
               <a:buChar char="•"/>
             </a:pPr>
             <a:r>
-              <a:rPr lang="en-US" sz="1350" dirty="0">
-                <a:solidFill>
-                  <a:srgbClr val="2E2C32"/>
+              <a:rPr lang="en-US" sz="1050" dirty="0">
+                <a:solidFill>
+                  <a:srgbClr val="655E74"/>
                 </a:solidFill>
                 <a:latin typeface="Manrope" pitchFamily="34" charset="0"/>
                 <a:ea typeface="Manrope" pitchFamily="34" charset="-122"/>
                 <a:cs typeface="Manrope" pitchFamily="34" charset="-120"/>
               </a:rPr>
-              <a:t>Real eval datasets (RULER / LongBench / BABILong) via HF datasets.</a:t>
-            </a:r>
-            <a:endParaRPr lang="en-US" sz="1350" dirty="0"/>
+              <a:t>The LLM judge, which credits paraphrase, flipped it to best, at 0.62.</a:t>
+            </a:r>
+            <a:endParaRPr lang="en-US" sz="1250" dirty="0"/>
           </a:p>
           <a:p>
             <a:pPr marL="203200" indent="-203200">
@@ -8635,7 +8837,7 @@
               <a:buChar char="•"/>
             </a:pPr>
             <a:r>
-              <a:rPr lang="en-US" sz="1350" dirty="0">
+              <a:rPr lang="en-US" sz="1250" dirty="0">
                 <a:solidFill>
                   <a:srgbClr val="2E2C32"/>
                 </a:solidFill>
@@ -8643,30 +8845,9 @@
                 <a:ea typeface="Manrope" pitchFamily="34" charset="-122"/>
                 <a:cs typeface="Manrope" pitchFamily="34" charset="-120"/>
               </a:rPr>
-              <a:t>LangChain summary-memory as a baseline arm to beat.</a:t>
-            </a:r>
-            <a:endParaRPr lang="en-US" sz="1350" dirty="0"/>
-          </a:p>
-          <a:p>
-            <a:pPr marL="203200" indent="-203200">
-              <a:spcAft>
-                <a:spcPts val="800"/>
-              </a:spcAft>
-              <a:buSzPct val="100000"/>
-              <a:buChar char="•"/>
-            </a:pPr>
-            <a:r>
-              <a:rPr lang="en-US" sz="1350" dirty="0">
-                <a:solidFill>
-                  <a:srgbClr val="2E2C32"/>
-                </a:solidFill>
-                <a:latin typeface="Manrope" pitchFamily="34" charset="0"/>
-                <a:ea typeface="Manrope" pitchFamily="34" charset="-122"/>
-                <a:cs typeface="Manrope" pitchFamily="34" charset="-120"/>
-              </a:rPr>
-              <a:t>Mode B — the live agent loop. Then the paper.</a:t>
-            </a:r>
-            <a:endParaRPr lang="en-US" sz="1350" dirty="0"/>
+              <a:t>At low pressure all four cluster near 0.6: compaction barely fires (~1 event).</a:t>
+            </a:r>
+            <a:endParaRPr lang="en-US" sz="1250" dirty="0"/>
           </a:p>
         </p:txBody>
       </p:sp>
@@ -8735,7 +8916,7 @@
                 <a:ea typeface="Syne" pitchFamily="34" charset="-122"/>
                 <a:cs typeface="Syne" pitchFamily="34" charset="-120"/>
               </a:rPr>
-              <a:t>REFERENCES</a:t>
+              <a:t>EXP-003B · THE COMPACTION BAKE-OFF</a:t>
             </a:r>
             <a:endParaRPr lang="en-US" sz="1100" dirty="0"/>
           </a:p>
@@ -8766,7 +8947,7 @@
               <a:buNone/>
             </a:pPr>
             <a:r>
-              <a:rPr lang="en-US" sz="2600" b="1" dirty="0">
+              <a:rPr lang="en-US" sz="2400" b="1" dirty="0">
                 <a:solidFill>
                   <a:srgbClr val="2E2C32"/>
                 </a:solidFill>
@@ -8774,9 +8955,9 @@
                 <a:ea typeface="Syne" pitchFamily="34" charset="-122"/>
                 <a:cs typeface="Syne" pitchFamily="34" charset="-120"/>
               </a:rPr>
-              <a:t>The literature this stands on</a:t>
-            </a:r>
-            <a:endParaRPr lang="en-US" sz="2600" dirty="0"/>
+              <a:t>Under pressure, the policies separate</a:t>
+            </a:r>
+            <a:endParaRPr lang="en-US" sz="2400" dirty="0"/>
           </a:p>
         </p:txBody>
       </p:sp>
@@ -8896,16 +9077,40 @@
           </a:p>
         </p:txBody>
       </p:sp>
-      <p:sp>
-        <p:nvSpPr>
-          <p:cNvPr id="7" name="Text 4"/>
-          <p:cNvSpPr/>
-          <p:nvPr/>
-        </p:nvSpPr>
-        <p:spPr>
-          <a:xfrm>
-            <a:off x="548640" y="1645920"/>
-            <a:ext cx="8046720" cy="2834640"/>
+      <p:pic>
+        <p:nvPicPr>
+          <p:cNvPr id="7" name="Image 1" descr="/Users/kanishk/Desktop/agent-harness/.claude/worktrees/sleepy-sinoussi-00c73b/presentation/figures/EXP-003b_pareto_v1.png">    </p:cNvPr>
+          <p:cNvPicPr>
+            <a:picLocks noChangeAspect="1"/>
+          </p:cNvPicPr>
+          <p:nvPr/>
+        </p:nvPicPr>
+        <p:blipFill>
+          <a:blip r:embed="rId2"/>
+          <a:stretch>
+            <a:fillRect/>
+          </a:stretch>
+        </p:blipFill>
+        <p:spPr>
+          <a:xfrm>
+            <a:off x="640080" y="1371600"/>
+            <a:ext cx="4846320" cy="3291840"/>
+          </a:xfrm>
+          <a:prstGeom prst="rect">
+            <a:avLst/>
+          </a:prstGeom>
+        </p:spPr>
+      </p:pic>
+      <p:sp>
+        <p:nvSpPr>
+          <p:cNvPr id="8" name="Text 4"/>
+          <p:cNvSpPr/>
+          <p:nvPr/>
+        </p:nvSpPr>
+        <p:spPr>
+          <a:xfrm>
+            <a:off x="5669280" y="1554480"/>
+            <a:ext cx="3017520" cy="2834640"/>
           </a:xfrm>
           <a:prstGeom prst="rect">
             <a:avLst/>
@@ -8925,17 +9130,17 @@
               <a:buChar char="•"/>
             </a:pPr>
             <a:r>
-              <a:rPr lang="en-US" sz="1300" dirty="0">
-                <a:solidFill>
-                  <a:srgbClr val="655E74"/>
+              <a:rPr lang="en-US" sz="1200" dirty="0">
+                <a:solidFill>
+                  <a:srgbClr val="2E2C32"/>
                 </a:solidFill>
                 <a:latin typeface="Manrope" pitchFamily="34" charset="0"/>
                 <a:ea typeface="Manrope" pitchFamily="34" charset="-122"/>
                 <a:cs typeface="Manrope" pitchFamily="34" charset="-120"/>
               </a:rPr>
-              <a:t>Lost in the Middle — Liu et al., arXiv:2307.03172.</a:t>
-            </a:r>
-            <a:endParaRPr lang="en-US" sz="1300" dirty="0"/>
+              <a:t>7 arms, 30 questions, high pressure (9 to 18 compactions each), judged.</a:t>
+            </a:r>
+            <a:endParaRPr lang="en-US" sz="1200" dirty="0"/>
           </a:p>
           <a:p>
             <a:pPr marL="203200" indent="-203200">
@@ -8946,17 +9151,17 @@
               <a:buChar char="•"/>
             </a:pPr>
             <a:r>
-              <a:rPr lang="en-US" sz="1300" dirty="0">
-                <a:solidFill>
-                  <a:srgbClr val="655E74"/>
+              <a:rPr lang="en-US" sz="1200" dirty="0">
+                <a:solidFill>
+                  <a:srgbClr val="2E2C32"/>
                 </a:solidFill>
                 <a:latin typeface="Manrope" pitchFamily="34" charset="0"/>
                 <a:ea typeface="Manrope" pitchFamily="34" charset="-122"/>
                 <a:cs typeface="Manrope" pitchFamily="34" charset="-120"/>
               </a:rPr>
-              <a:t>RULER — Hsieh et al., 2404.06654 · HELMET — Yen et al., 2410.02694.</a:t>
-            </a:r>
-            <a:endParaRPr lang="en-US" sz="1300" dirty="0"/>
+              <a:t>recency, the shipped default, is dominated by truncation: same accuracy, 7x cost.</a:t>
+            </a:r>
+            <a:endParaRPr lang="en-US" sz="1200" dirty="0"/>
           </a:p>
           <a:p>
             <a:pPr marL="203200" indent="-203200">
@@ -8967,17 +9172,17 @@
               <a:buChar char="•"/>
             </a:pPr>
             <a:r>
-              <a:rPr lang="en-US" sz="1300" dirty="0">
-                <a:solidFill>
-                  <a:srgbClr val="655E74"/>
+              <a:rPr lang="en-US" sz="1200" dirty="0">
+                <a:solidFill>
+                  <a:srgbClr val="2E2C32"/>
                 </a:solidFill>
                 <a:latin typeface="Manrope" pitchFamily="34" charset="0"/>
                 <a:ea typeface="Manrope" pitchFamily="34" charset="-122"/>
                 <a:cs typeface="Manrope" pitchFamily="34" charset="-120"/>
               </a:rPr>
-              <a:t>MemGPT — Packer et al., 2310.08560 · LLMLingua — Jiang et al., 2310.05736.</a:t>
-            </a:r>
-            <a:endParaRPr lang="en-US" sz="1300" dirty="0"/>
+              <a:t>sub-agent isolation scores 0.50 at 5x the cost. Isolation is expensive here.</a:t>
+            </a:r>
+            <a:endParaRPr lang="en-US" sz="1200" dirty="0"/>
           </a:p>
           <a:p>
             <a:pPr marL="203200" indent="-203200">
@@ -8988,7 +9193,7 @@
               <a:buChar char="•"/>
             </a:pPr>
             <a:r>
-              <a:rPr lang="en-US" sz="1300" dirty="0">
+              <a:rPr lang="en-US" sz="1000" dirty="0">
                 <a:solidFill>
                   <a:srgbClr val="655E74"/>
                 </a:solidFill>
@@ -8996,30 +9201,9 @@
                 <a:ea typeface="Manrope" pitchFamily="34" charset="-122"/>
                 <a:cs typeface="Manrope" pitchFamily="34" charset="-120"/>
               </a:rPr>
-              <a:t>Judging LLM-as-a-Judge — Zheng et al., 2306.05685.</a:t>
-            </a:r>
-            <a:endParaRPr lang="en-US" sz="1300" dirty="0"/>
-          </a:p>
-          <a:p>
-            <a:pPr marL="203200" indent="-203200">
-              <a:spcAft>
-                <a:spcPts val="800"/>
-              </a:spcAft>
-              <a:buSzPct val="100000"/>
-              <a:buChar char="•"/>
-            </a:pPr>
-            <a:r>
-              <a:rPr lang="en-US" sz="1300" dirty="0">
-                <a:solidFill>
-                  <a:srgbClr val="655E74"/>
-                </a:solidFill>
-                <a:latin typeface="Manrope" pitchFamily="34" charset="0"/>
-                <a:ea typeface="Manrope" pitchFamily="34" charset="-122"/>
-                <a:cs typeface="Manrope" pitchFamily="34" charset="-120"/>
-              </a:rPr>
-              <a:t>Effective context engineering for AI agents — Anthropic, 2025.</a:t>
-            </a:r>
-            <a:endParaRPr lang="en-US" sz="1300" dirty="0"/>
+              <a:t>semantic 0.57 and importance 0.50 lead; reversible-hybrid is on the frontier at 0.47.</a:t>
+            </a:r>
+            <a:endParaRPr lang="en-US" sz="1200" dirty="0"/>
           </a:p>
         </p:txBody>
       </p:sp>
@@ -9034,6 +9218,691 @@
 <file path=ppt/slides/slide25.xml><?xml version="1.0" encoding="utf-8"?>
 <p:sld xmlns:a="http://schemas.openxmlformats.org/drawingml/2006/main" xmlns:r="http://schemas.openxmlformats.org/officeDocument/2006/relationships" xmlns:p="http://schemas.openxmlformats.org/presentationml/2006/main">
   <p:cSld name="Slide 25">
+    <p:bg>
+      <p:bgPr>
+        <a:solidFill>
+          <a:srgbClr val="FAFAFE"/>
+        </a:solidFill>
+      </p:bgPr>
+    </p:bg>
+    <p:spTree>
+      <p:nvGrpSpPr>
+        <p:cNvPr id="1" name=""/>
+        <p:cNvGrpSpPr/>
+        <p:nvPr/>
+      </p:nvGrpSpPr>
+      <p:grpSpPr>
+        <a:xfrm>
+          <a:off x="0" y="0"/>
+          <a:ext cx="0" cy="0"/>
+          <a:chOff x="0" y="0"/>
+          <a:chExt cx="0" cy="0"/>
+        </a:xfrm>
+      </p:grpSpPr>
+      <p:sp>
+        <p:nvSpPr>
+          <p:cNvPr id="2" name="Text 0"/>
+          <p:cNvSpPr/>
+          <p:nvPr/>
+        </p:nvSpPr>
+        <p:spPr>
+          <a:xfrm>
+            <a:off x="548640" y="365760"/>
+            <a:ext cx="8046720" cy="274320"/>
+          </a:xfrm>
+          <a:prstGeom prst="rect">
+            <a:avLst/>
+          </a:prstGeom>
+          <a:noFill/>
+          <a:ln/>
+        </p:spPr>
+        <p:txBody>
+          <a:bodyPr wrap="square" lIns="0" tIns="0" rIns="0" bIns="0" rtlCol="0" anchor="ctr"/>
+          <a:lstStyle/>
+          <a:p>
+            <a:pPr indent="0" marL="0">
+              <a:buNone/>
+            </a:pPr>
+            <a:r>
+              <a:rPr lang="en-US" sz="1100" b="1" spc="300" kern="0" dirty="0">
+                <a:solidFill>
+                  <a:srgbClr val="9378FF"/>
+                </a:solidFill>
+                <a:latin typeface="Syne" pitchFamily="34" charset="0"/>
+                <a:ea typeface="Syne" pitchFamily="34" charset="-122"/>
+                <a:cs typeface="Syne" pitchFamily="34" charset="-120"/>
+              </a:rPr>
+              <a:t>WHERE THIS GOES</a:t>
+            </a:r>
+            <a:endParaRPr lang="en-US" sz="1100" dirty="0"/>
+          </a:p>
+        </p:txBody>
+      </p:sp>
+      <p:sp>
+        <p:nvSpPr>
+          <p:cNvPr id="3" name="Text 1"/>
+          <p:cNvSpPr/>
+          <p:nvPr/>
+        </p:nvSpPr>
+        <p:spPr>
+          <a:xfrm>
+            <a:off x="548640" y="640080"/>
+            <a:ext cx="8046720" cy="868680"/>
+          </a:xfrm>
+          <a:prstGeom prst="rect">
+            <a:avLst/>
+          </a:prstGeom>
+          <a:noFill/>
+          <a:ln/>
+        </p:spPr>
+        <p:txBody>
+          <a:bodyPr wrap="square" lIns="0" tIns="0" rIns="0" bIns="0" rtlCol="0" anchor="t"/>
+          <a:lstStyle/>
+          <a:p>
+            <a:pPr indent="0" marL="0">
+              <a:buNone/>
+            </a:pPr>
+            <a:r>
+              <a:rPr lang="en-US" sz="2500" b="1" dirty="0">
+                <a:solidFill>
+                  <a:srgbClr val="2E2C32"/>
+                </a:solidFill>
+                <a:latin typeface="Syne" pitchFamily="34" charset="0"/>
+                <a:ea typeface="Syne" pitchFamily="34" charset="-122"/>
+                <a:cs typeface="Syne" pitchFamily="34" charset="-120"/>
+              </a:rPr>
+              <a:t>Roadmap</a:t>
+            </a:r>
+            <a:endParaRPr lang="en-US" sz="2500" dirty="0"/>
+          </a:p>
+        </p:txBody>
+      </p:sp>
+      <p:pic>
+        <p:nvPicPr>
+          <p:cNvPr id="4" name="Image 0" descr="preencoded.png">    </p:cNvPr>
+          <p:cNvPicPr>
+            <a:picLocks noChangeAspect="1"/>
+          </p:cNvPicPr>
+          <p:nvPr/>
+        </p:nvPicPr>
+        <p:blipFill>
+          <a:blip r:embed="rId1"/>
+          <a:stretch>
+            <a:fillRect/>
+          </a:stretch>
+        </p:blipFill>
+        <p:spPr>
+          <a:xfrm>
+            <a:off x="548640" y="4736592"/>
+            <a:ext cx="219456" cy="165344"/>
+          </a:xfrm>
+          <a:prstGeom prst="rect">
+            <a:avLst/>
+          </a:prstGeom>
+        </p:spPr>
+      </p:pic>
+      <p:sp>
+        <p:nvSpPr>
+          <p:cNvPr id="5" name="Text 2"/>
+          <p:cNvSpPr/>
+          <p:nvPr/>
+        </p:nvSpPr>
+        <p:spPr>
+          <a:xfrm>
+            <a:off x="822960" y="4690872"/>
+            <a:ext cx="1280160" cy="292608"/>
+          </a:xfrm>
+          <a:prstGeom prst="rect">
+            <a:avLst/>
+          </a:prstGeom>
+          <a:noFill/>
+          <a:ln/>
+        </p:spPr>
+        <p:txBody>
+          <a:bodyPr wrap="square" lIns="0" tIns="0" rIns="0" bIns="0" rtlCol="0" anchor="ctr"/>
+          <a:lstStyle/>
+          <a:p>
+            <a:pPr indent="0" marL="0">
+              <a:buNone/>
+            </a:pPr>
+            <a:r>
+              <a:rPr lang="en-US" sz="1100" b="1" dirty="0">
+                <a:solidFill>
+                  <a:srgbClr val="2E2C32"/>
+                </a:solidFill>
+                <a:latin typeface="Syne" pitchFamily="34" charset="0"/>
+                <a:ea typeface="Syne" pitchFamily="34" charset="-122"/>
+                <a:cs typeface="Syne" pitchFamily="34" charset="-120"/>
+              </a:rPr>
+              <a:t>Founsi</a:t>
+            </a:r>
+            <a:pPr indent="0" marL="0">
+              <a:buNone/>
+            </a:pPr>
+            <a:r>
+              <a:rPr lang="en-US" sz="1100" b="1" dirty="0">
+                <a:solidFill>
+                  <a:srgbClr val="9378FF"/>
+                </a:solidFill>
+                <a:latin typeface="Syne" pitchFamily="34" charset="0"/>
+                <a:ea typeface="Syne" pitchFamily="34" charset="-122"/>
+                <a:cs typeface="Syne" pitchFamily="34" charset="-120"/>
+              </a:rPr>
+              <a:t>.</a:t>
+            </a:r>
+            <a:endParaRPr lang="en-US" sz="1100" dirty="0"/>
+          </a:p>
+        </p:txBody>
+      </p:sp>
+      <p:sp>
+        <p:nvSpPr>
+          <p:cNvPr id="6" name="Text 3"/>
+          <p:cNvSpPr/>
+          <p:nvPr/>
+        </p:nvSpPr>
+        <p:spPr>
+          <a:xfrm>
+            <a:off x="8229600" y="4690872"/>
+            <a:ext cx="365760" cy="292608"/>
+          </a:xfrm>
+          <a:prstGeom prst="rect">
+            <a:avLst/>
+          </a:prstGeom>
+          <a:noFill/>
+          <a:ln/>
+        </p:spPr>
+        <p:txBody>
+          <a:bodyPr wrap="square" lIns="0" tIns="0" rIns="0" bIns="0" rtlCol="0" anchor="ctr"/>
+          <a:lstStyle/>
+          <a:p>
+            <a:pPr algn="r" indent="0" marL="0">
+              <a:buNone/>
+            </a:pPr>
+            <a:r>
+              <a:rPr lang="en-US" sz="900" dirty="0">
+                <a:solidFill>
+                  <a:srgbClr val="7E7A8A"/>
+                </a:solidFill>
+                <a:latin typeface="Manrope" pitchFamily="34" charset="0"/>
+                <a:ea typeface="Manrope" pitchFamily="34" charset="-122"/>
+                <a:cs typeface="Manrope" pitchFamily="34" charset="-120"/>
+              </a:rPr>
+              <a:t>25</a:t>
+            </a:r>
+            <a:endParaRPr lang="en-US" sz="900" dirty="0"/>
+          </a:p>
+        </p:txBody>
+      </p:sp>
+      <p:sp>
+        <p:nvSpPr>
+          <p:cNvPr id="7" name="Text 4"/>
+          <p:cNvSpPr/>
+          <p:nvPr/>
+        </p:nvSpPr>
+        <p:spPr>
+          <a:xfrm>
+            <a:off x="548640" y="1645920"/>
+            <a:ext cx="8046720" cy="2834640"/>
+          </a:xfrm>
+          <a:prstGeom prst="rect">
+            <a:avLst/>
+          </a:prstGeom>
+          <a:noFill/>
+          <a:ln/>
+        </p:spPr>
+        <p:txBody>
+          <a:bodyPr wrap="square" rtlCol="0" anchor="ctr"/>
+          <a:lstStyle/>
+          <a:p>
+            <a:pPr marL="203200" indent="-203200">
+              <a:spcAft>
+                <a:spcPts val="800"/>
+              </a:spcAft>
+              <a:buSzPct val="100000"/>
+              <a:buChar char="•"/>
+            </a:pPr>
+            <a:r>
+              <a:rPr lang="en-US" sz="1350" dirty="0">
+                <a:solidFill>
+                  <a:srgbClr val="2E2C32"/>
+                </a:solidFill>
+                <a:latin typeface="Manrope" pitchFamily="34" charset="0"/>
+                <a:ea typeface="Manrope" pitchFamily="34" charset="-122"/>
+                <a:cs typeface="Manrope" pitchFamily="34" charset="-120"/>
+              </a:rPr>
+              <a:t>EXP-003c: the 70b model and the reasoning model (the model-dependence map).</a:t>
+            </a:r>
+            <a:endParaRPr lang="en-US" sz="1350" dirty="0"/>
+          </a:p>
+          <a:p>
+            <a:pPr marL="203200" indent="-203200">
+              <a:spcAft>
+                <a:spcPts val="800"/>
+              </a:spcAft>
+              <a:buSzPct val="100000"/>
+              <a:buChar char="•"/>
+            </a:pPr>
+            <a:r>
+              <a:rPr lang="en-US" sz="1350" dirty="0">
+                <a:solidFill>
+                  <a:srgbClr val="2E2C32"/>
+                </a:solidFill>
+                <a:latin typeface="Manrope" pitchFamily="34" charset="0"/>
+                <a:ea typeface="Manrope" pitchFamily="34" charset="-122"/>
+                <a:cs typeface="Manrope" pitchFamily="34" charset="-120"/>
+              </a:rPr>
+              <a:t>EXP-004: LoCoMo conversational memory, the second domain.</a:t>
+            </a:r>
+            <a:endParaRPr lang="en-US" sz="1350" dirty="0"/>
+          </a:p>
+          <a:p>
+            <a:pPr marL="203200" indent="-203200">
+              <a:spcAft>
+                <a:spcPts val="800"/>
+              </a:spcAft>
+              <a:buSzPct val="100000"/>
+              <a:buChar char="•"/>
+            </a:pPr>
+            <a:r>
+              <a:rPr lang="en-US" sz="1350" dirty="0">
+                <a:solidFill>
+                  <a:srgbClr val="2E2C32"/>
+                </a:solidFill>
+                <a:latin typeface="Manrope" pitchFamily="34" charset="0"/>
+                <a:ea typeface="Manrope" pitchFamily="34" charset="-122"/>
+                <a:cs typeface="Manrope" pitchFamily="34" charset="-120"/>
+              </a:rPr>
+              <a:t>Larger N and tighter error bars on the arms that separate.</a:t>
+            </a:r>
+            <a:endParaRPr lang="en-US" sz="1350" dirty="0"/>
+          </a:p>
+          <a:p>
+            <a:pPr marL="203200" indent="-203200">
+              <a:spcAft>
+                <a:spcPts val="800"/>
+              </a:spcAft>
+              <a:buSzPct val="100000"/>
+              <a:buChar char="•"/>
+            </a:pPr>
+            <a:r>
+              <a:rPr lang="en-US" sz="1350" dirty="0">
+                <a:solidFill>
+                  <a:srgbClr val="2E2C32"/>
+                </a:solidFill>
+                <a:latin typeface="Manrope" pitchFamily="34" charset="0"/>
+                <a:ea typeface="Manrope" pitchFamily="34" charset="-122"/>
+                <a:cs typeface="Manrope" pitchFamily="34" charset="-120"/>
+              </a:rPr>
+              <a:t>LangChain summary-memory as a baseline arm; then the paper.</a:t>
+            </a:r>
+            <a:endParaRPr lang="en-US" sz="1350" dirty="0"/>
+          </a:p>
+        </p:txBody>
+      </p:sp>
+    </p:spTree>
+  </p:cSld>
+  <p:clrMapOvr>
+    <a:masterClrMapping/>
+  </p:clrMapOvr>
+</p:sld>
+</file>
+
+<file path=ppt/slides/slide26.xml><?xml version="1.0" encoding="utf-8"?>
+<p:sld xmlns:a="http://schemas.openxmlformats.org/drawingml/2006/main" xmlns:r="http://schemas.openxmlformats.org/officeDocument/2006/relationships" xmlns:p="http://schemas.openxmlformats.org/presentationml/2006/main">
+  <p:cSld name="Slide 26">
+    <p:bg>
+      <p:bgPr>
+        <a:solidFill>
+          <a:srgbClr val="FAFAFE"/>
+        </a:solidFill>
+      </p:bgPr>
+    </p:bg>
+    <p:spTree>
+      <p:nvGrpSpPr>
+        <p:cNvPr id="1" name=""/>
+        <p:cNvGrpSpPr/>
+        <p:nvPr/>
+      </p:nvGrpSpPr>
+      <p:grpSpPr>
+        <a:xfrm>
+          <a:off x="0" y="0"/>
+          <a:ext cx="0" cy="0"/>
+          <a:chOff x="0" y="0"/>
+          <a:chExt cx="0" cy="0"/>
+        </a:xfrm>
+      </p:grpSpPr>
+      <p:sp>
+        <p:nvSpPr>
+          <p:cNvPr id="2" name="Text 0"/>
+          <p:cNvSpPr/>
+          <p:nvPr/>
+        </p:nvSpPr>
+        <p:spPr>
+          <a:xfrm>
+            <a:off x="548640" y="365760"/>
+            <a:ext cx="8046720" cy="274320"/>
+          </a:xfrm>
+          <a:prstGeom prst="rect">
+            <a:avLst/>
+          </a:prstGeom>
+          <a:noFill/>
+          <a:ln/>
+        </p:spPr>
+        <p:txBody>
+          <a:bodyPr wrap="square" lIns="0" tIns="0" rIns="0" bIns="0" rtlCol="0" anchor="ctr"/>
+          <a:lstStyle/>
+          <a:p>
+            <a:pPr indent="0" marL="0">
+              <a:buNone/>
+            </a:pPr>
+            <a:r>
+              <a:rPr lang="en-US" sz="1100" b="1" spc="300" kern="0" dirty="0">
+                <a:solidFill>
+                  <a:srgbClr val="9378FF"/>
+                </a:solidFill>
+                <a:latin typeface="Syne" pitchFamily="34" charset="0"/>
+                <a:ea typeface="Syne" pitchFamily="34" charset="-122"/>
+                <a:cs typeface="Syne" pitchFamily="34" charset="-120"/>
+              </a:rPr>
+              <a:t>REFERENCES</a:t>
+            </a:r>
+            <a:endParaRPr lang="en-US" sz="1100" dirty="0"/>
+          </a:p>
+        </p:txBody>
+      </p:sp>
+      <p:sp>
+        <p:nvSpPr>
+          <p:cNvPr id="3" name="Text 1"/>
+          <p:cNvSpPr/>
+          <p:nvPr/>
+        </p:nvSpPr>
+        <p:spPr>
+          <a:xfrm>
+            <a:off x="548640" y="640080"/>
+            <a:ext cx="8046720" cy="868680"/>
+          </a:xfrm>
+          <a:prstGeom prst="rect">
+            <a:avLst/>
+          </a:prstGeom>
+          <a:noFill/>
+          <a:ln/>
+        </p:spPr>
+        <p:txBody>
+          <a:bodyPr wrap="square" lIns="0" tIns="0" rIns="0" bIns="0" rtlCol="0" anchor="t"/>
+          <a:lstStyle/>
+          <a:p>
+            <a:pPr indent="0" marL="0">
+              <a:buNone/>
+            </a:pPr>
+            <a:r>
+              <a:rPr lang="en-US" sz="2600" b="1" dirty="0">
+                <a:solidFill>
+                  <a:srgbClr val="2E2C32"/>
+                </a:solidFill>
+                <a:latin typeface="Syne" pitchFamily="34" charset="0"/>
+                <a:ea typeface="Syne" pitchFamily="34" charset="-122"/>
+                <a:cs typeface="Syne" pitchFamily="34" charset="-120"/>
+              </a:rPr>
+              <a:t>The literature this stands on</a:t>
+            </a:r>
+            <a:endParaRPr lang="en-US" sz="2600" dirty="0"/>
+          </a:p>
+        </p:txBody>
+      </p:sp>
+      <p:pic>
+        <p:nvPicPr>
+          <p:cNvPr id="4" name="Image 0" descr="preencoded.png">    </p:cNvPr>
+          <p:cNvPicPr>
+            <a:picLocks noChangeAspect="1"/>
+          </p:cNvPicPr>
+          <p:nvPr/>
+        </p:nvPicPr>
+        <p:blipFill>
+          <a:blip r:embed="rId1"/>
+          <a:stretch>
+            <a:fillRect/>
+          </a:stretch>
+        </p:blipFill>
+        <p:spPr>
+          <a:xfrm>
+            <a:off x="548640" y="4736592"/>
+            <a:ext cx="219456" cy="165344"/>
+          </a:xfrm>
+          <a:prstGeom prst="rect">
+            <a:avLst/>
+          </a:prstGeom>
+        </p:spPr>
+      </p:pic>
+      <p:sp>
+        <p:nvSpPr>
+          <p:cNvPr id="5" name="Text 2"/>
+          <p:cNvSpPr/>
+          <p:nvPr/>
+        </p:nvSpPr>
+        <p:spPr>
+          <a:xfrm>
+            <a:off x="822960" y="4690872"/>
+            <a:ext cx="1280160" cy="292608"/>
+          </a:xfrm>
+          <a:prstGeom prst="rect">
+            <a:avLst/>
+          </a:prstGeom>
+          <a:noFill/>
+          <a:ln/>
+        </p:spPr>
+        <p:txBody>
+          <a:bodyPr wrap="square" lIns="0" tIns="0" rIns="0" bIns="0" rtlCol="0" anchor="ctr"/>
+          <a:lstStyle/>
+          <a:p>
+            <a:pPr indent="0" marL="0">
+              <a:buNone/>
+            </a:pPr>
+            <a:r>
+              <a:rPr lang="en-US" sz="1100" b="1" dirty="0">
+                <a:solidFill>
+                  <a:srgbClr val="2E2C32"/>
+                </a:solidFill>
+                <a:latin typeface="Syne" pitchFamily="34" charset="0"/>
+                <a:ea typeface="Syne" pitchFamily="34" charset="-122"/>
+                <a:cs typeface="Syne" pitchFamily="34" charset="-120"/>
+              </a:rPr>
+              <a:t>Founsi</a:t>
+            </a:r>
+            <a:pPr indent="0" marL="0">
+              <a:buNone/>
+            </a:pPr>
+            <a:r>
+              <a:rPr lang="en-US" sz="1100" b="1" dirty="0">
+                <a:solidFill>
+                  <a:srgbClr val="9378FF"/>
+                </a:solidFill>
+                <a:latin typeface="Syne" pitchFamily="34" charset="0"/>
+                <a:ea typeface="Syne" pitchFamily="34" charset="-122"/>
+                <a:cs typeface="Syne" pitchFamily="34" charset="-120"/>
+              </a:rPr>
+              <a:t>.</a:t>
+            </a:r>
+            <a:endParaRPr lang="en-US" sz="1100" dirty="0"/>
+          </a:p>
+        </p:txBody>
+      </p:sp>
+      <p:sp>
+        <p:nvSpPr>
+          <p:cNvPr id="6" name="Text 3"/>
+          <p:cNvSpPr/>
+          <p:nvPr/>
+        </p:nvSpPr>
+        <p:spPr>
+          <a:xfrm>
+            <a:off x="8229600" y="4690872"/>
+            <a:ext cx="365760" cy="292608"/>
+          </a:xfrm>
+          <a:prstGeom prst="rect">
+            <a:avLst/>
+          </a:prstGeom>
+          <a:noFill/>
+          <a:ln/>
+        </p:spPr>
+        <p:txBody>
+          <a:bodyPr wrap="square" lIns="0" tIns="0" rIns="0" bIns="0" rtlCol="0" anchor="ctr"/>
+          <a:lstStyle/>
+          <a:p>
+            <a:pPr algn="r" indent="0" marL="0">
+              <a:buNone/>
+            </a:pPr>
+            <a:r>
+              <a:rPr lang="en-US" sz="900" dirty="0">
+                <a:solidFill>
+                  <a:srgbClr val="7E7A8A"/>
+                </a:solidFill>
+                <a:latin typeface="Manrope" pitchFamily="34" charset="0"/>
+                <a:ea typeface="Manrope" pitchFamily="34" charset="-122"/>
+                <a:cs typeface="Manrope" pitchFamily="34" charset="-120"/>
+              </a:rPr>
+              <a:t>26</a:t>
+            </a:r>
+            <a:endParaRPr lang="en-US" sz="900" dirty="0"/>
+          </a:p>
+        </p:txBody>
+      </p:sp>
+      <p:sp>
+        <p:nvSpPr>
+          <p:cNvPr id="7" name="Text 4"/>
+          <p:cNvSpPr/>
+          <p:nvPr/>
+        </p:nvSpPr>
+        <p:spPr>
+          <a:xfrm>
+            <a:off x="548640" y="1645920"/>
+            <a:ext cx="8046720" cy="2834640"/>
+          </a:xfrm>
+          <a:prstGeom prst="rect">
+            <a:avLst/>
+          </a:prstGeom>
+          <a:noFill/>
+          <a:ln/>
+        </p:spPr>
+        <p:txBody>
+          <a:bodyPr wrap="square" rtlCol="0" anchor="ctr"/>
+          <a:lstStyle/>
+          <a:p>
+            <a:pPr marL="203200" indent="-203200">
+              <a:spcAft>
+                <a:spcPts val="800"/>
+              </a:spcAft>
+              <a:buSzPct val="100000"/>
+              <a:buChar char="•"/>
+            </a:pPr>
+            <a:r>
+              <a:rPr lang="en-US" sz="1300" dirty="0">
+                <a:solidFill>
+                  <a:srgbClr val="655E74"/>
+                </a:solidFill>
+                <a:latin typeface="Manrope" pitchFamily="34" charset="0"/>
+                <a:ea typeface="Manrope" pitchFamily="34" charset="-122"/>
+                <a:cs typeface="Manrope" pitchFamily="34" charset="-120"/>
+              </a:rPr>
+              <a:t>Lost in the Middle, Liu et al., arXiv:2307.03172.</a:t>
+            </a:r>
+            <a:endParaRPr lang="en-US" sz="1300" dirty="0"/>
+          </a:p>
+          <a:p>
+            <a:pPr marL="203200" indent="-203200">
+              <a:spcAft>
+                <a:spcPts val="800"/>
+              </a:spcAft>
+              <a:buSzPct val="100000"/>
+              <a:buChar char="•"/>
+            </a:pPr>
+            <a:r>
+              <a:rPr lang="en-US" sz="1300" dirty="0">
+                <a:solidFill>
+                  <a:srgbClr val="655E74"/>
+                </a:solidFill>
+                <a:latin typeface="Manrope" pitchFamily="34" charset="0"/>
+                <a:ea typeface="Manrope" pitchFamily="34" charset="-122"/>
+                <a:cs typeface="Manrope" pitchFamily="34" charset="-120"/>
+              </a:rPr>
+              <a:t>RULER 2404.06654 · HELMET 2410.02694 · NoLiMa 2502.05167.</a:t>
+            </a:r>
+            <a:endParaRPr lang="en-US" sz="1300" dirty="0"/>
+          </a:p>
+          <a:p>
+            <a:pPr marL="203200" indent="-203200">
+              <a:spcAft>
+                <a:spcPts val="800"/>
+              </a:spcAft>
+              <a:buSzPct val="100000"/>
+              <a:buChar char="•"/>
+            </a:pPr>
+            <a:r>
+              <a:rPr lang="en-US" sz="1300" dirty="0">
+                <a:solidFill>
+                  <a:srgbClr val="655E74"/>
+                </a:solidFill>
+                <a:latin typeface="Manrope" pitchFamily="34" charset="0"/>
+                <a:ea typeface="Manrope" pitchFamily="34" charset="-122"/>
+                <a:cs typeface="Manrope" pitchFamily="34" charset="-120"/>
+              </a:rPr>
+              <a:t>MemGPT 2310.08560 · Mem0 2504.19413 · ACON 2510.00615.</a:t>
+            </a:r>
+            <a:endParaRPr lang="en-US" sz="1300" dirty="0"/>
+          </a:p>
+          <a:p>
+            <a:pPr marL="203200" indent="-203200">
+              <a:spcAft>
+                <a:spcPts val="800"/>
+              </a:spcAft>
+              <a:buSzPct val="100000"/>
+              <a:buChar char="•"/>
+            </a:pPr>
+            <a:r>
+              <a:rPr lang="en-US" sz="1300" dirty="0">
+                <a:solidFill>
+                  <a:srgbClr val="655E74"/>
+                </a:solidFill>
+                <a:latin typeface="Manrope" pitchFamily="34" charset="0"/>
+                <a:ea typeface="Manrope" pitchFamily="34" charset="-122"/>
+                <a:cs typeface="Manrope" pitchFamily="34" charset="-120"/>
+              </a:rPr>
+              <a:t>Judging LLM-as-a-Judge, Zheng et al., 2306.05685.</a:t>
+            </a:r>
+            <a:endParaRPr lang="en-US" sz="1300" dirty="0"/>
+          </a:p>
+          <a:p>
+            <a:pPr marL="203200" indent="-203200">
+              <a:spcAft>
+                <a:spcPts val="800"/>
+              </a:spcAft>
+              <a:buSzPct val="100000"/>
+              <a:buChar char="•"/>
+            </a:pPr>
+            <a:r>
+              <a:rPr lang="en-US" sz="1300" dirty="0">
+                <a:solidFill>
+                  <a:srgbClr val="655E74"/>
+                </a:solidFill>
+                <a:latin typeface="Manrope" pitchFamily="34" charset="0"/>
+                <a:ea typeface="Manrope" pitchFamily="34" charset="-122"/>
+                <a:cs typeface="Manrope" pitchFamily="34" charset="-120"/>
+              </a:rPr>
+              <a:t>FRAMES 2409.12941 · LoCoMo 2402.17753.</a:t>
+            </a:r>
+            <a:endParaRPr lang="en-US" sz="1300" dirty="0"/>
+          </a:p>
+        </p:txBody>
+      </p:sp>
+    </p:spTree>
+  </p:cSld>
+  <p:clrMapOvr>
+    <a:masterClrMapping/>
+  </p:clrMapOvr>
+</p:sld>
+</file>
+
+<file path=ppt/slides/slide27.xml><?xml version="1.0" encoding="utf-8"?>
+<p:sld xmlns:a="http://schemas.openxmlformats.org/drawingml/2006/main" xmlns:r="http://schemas.openxmlformats.org/officeDocument/2006/relationships" xmlns:p="http://schemas.openxmlformats.org/presentationml/2006/main">
+  <p:cSld name="Slide 27">
     <p:bg>
       <p:bgPr>
         <a:solidFill>
@@ -9495,7 +10364,7 @@
                 <a:ea typeface="Manrope" pitchFamily="34" charset="-122"/>
                 <a:cs typeface="Manrope" pitchFamily="34" charset="-120"/>
               </a:rPr>
-              <a:t>25</a:t>
+              <a:t>27</a:t>
             </a:r>
             <a:endParaRPr lang="en-US" sz="900" dirty="0"/>
           </a:p>

--- a/presentation/founsi-context-engineering.pptx
+++ b/presentation/founsi-context-engineering.pptx
@@ -32,9 +32,10 @@
     <p:sldId id="280" r:id="rId26"/>
     <p:sldId id="281" r:id="rId27"/>
     <p:sldId id="282" r:id="rId28"/>
+    <p:sldId id="283" r:id="rId29"/>
   </p:sldIdLst>
   <p:notesMasterIdLst>
-    <p:notesMasterId r:id="rId29"/>
+    <p:notesMasterId r:id="rId30"/>
   </p:notesMasterIdLst>
   <p:sldSz cx="9144000" cy="5143500"/>
   <p:notesSz cx="5143500" cy="9144000"/>
@@ -2224,6 +2225,94 @@
             <a:fld id="{F7021451-1387-4CA6-816F-3879F97B5CBC}" type="slidenum">
               <a:rPr lang="en-US"/>
               <a:t>27</a:t>
+            </a:fld>
+            <a:endParaRPr lang="en-US"/>
+          </a:p>
+        </p:txBody>
+      </p:sp>
+    </p:spTree>
+    <p:extLst>
+      <p:ext uri="{BB962C8B-B14F-4D97-AF65-F5344CB8AC3E}">
+        <p14:creationId xmlns:p14="http://schemas.microsoft.com/office/powerpoint/2010/main" val="1024086991"/>
+      </p:ext>
+    </p:extLst>
+  </p:cSld>
+  <p:clrMapOvr>
+    <a:masterClrMapping/>
+  </p:clrMapOvr>
+</p:notes>
+</file>
+
+<file path=ppt/notesSlides/notesSlide28.xml><?xml version="1.0" encoding="utf-8"?>
+<p:notes xmlns:a="http://schemas.openxmlformats.org/drawingml/2006/main" xmlns:r="http://schemas.openxmlformats.org/officeDocument/2006/relationships" xmlns:p="http://schemas.openxmlformats.org/presentationml/2006/main">
+  <p:cSld>
+    <p:spTree>
+      <p:nvGrpSpPr>
+        <p:cNvPr id="1" name=""/>
+        <p:cNvGrpSpPr/>
+        <p:nvPr/>
+      </p:nvGrpSpPr>
+      <p:grpSpPr>
+        <a:xfrm>
+          <a:off x="0" y="0"/>
+          <a:ext cx="0" cy="0"/>
+          <a:chOff x="0" y="0"/>
+          <a:chExt cx="0" cy="0"/>
+        </a:xfrm>
+      </p:grpSpPr>
+      <p:sp>
+        <p:nvSpPr>
+          <p:cNvPr id="2" name="Slide Image Placeholder 1"/>
+          <p:cNvSpPr>
+            <a:spLocks noGrp="1" noRot="1" noChangeAspect="1"/>
+          </p:cNvSpPr>
+          <p:nvPr>
+            <p:ph type="sldImg"/>
+          </p:nvPr>
+        </p:nvSpPr>
+        <p:spPr/>
+      </p:sp>
+      <p:sp>
+        <p:nvSpPr>
+          <p:cNvPr id="3" name="Notes Placeholder 2"/>
+          <p:cNvSpPr>
+            <a:spLocks noGrp="1"/>
+          </p:cNvSpPr>
+          <p:nvPr>
+            <p:ph type="body" idx="1"/>
+          </p:nvPr>
+        </p:nvSpPr>
+        <p:spPr/>
+        <p:txBody>
+          <a:bodyPr/>
+          <a:lstStyle/>
+          <a:p>
+            <a:r>
+              <a:rPr lang="en-US" dirty="0"/>
+              <a:t/>
+            </a:r>
+            <a:endParaRPr lang="en-US" dirty="0"/>
+          </a:p>
+        </p:txBody>
+      </p:sp>
+      <p:sp>
+        <p:nvSpPr>
+          <p:cNvPr id="4" name="Slide Number Placeholder 3"/>
+          <p:cNvSpPr>
+            <a:spLocks noGrp="1"/>
+          </p:cNvSpPr>
+          <p:nvPr>
+            <p:ph type="sldNum" sz="quarter" idx="10"/>
+          </p:nvPr>
+        </p:nvSpPr>
+        <p:spPr/>
+        <p:txBody>
+          <a:bodyPr/>
+          <a:lstStyle/>
+          <a:p>
+            <a:fld id="{F7021451-1387-4CA6-816F-3879F97B5CBC}" type="slidenum">
+              <a:rPr lang="en-US"/>
+              <a:t>28</a:t>
             </a:fld>
             <a:endParaRPr lang="en-US"/>
           </a:p>
@@ -9272,7 +9361,7 @@
                 <a:ea typeface="Syne" pitchFamily="34" charset="-122"/>
                 <a:cs typeface="Syne" pitchFamily="34" charset="-120"/>
               </a:rPr>
-              <a:t>WHERE THIS GOES</a:t>
+              <a:t>EXP-003C · THE MODEL AXIS</a:t>
             </a:r>
             <a:endParaRPr lang="en-US" sz="1100" dirty="0"/>
           </a:p>
@@ -9311,7 +9400,7 @@
                 <a:ea typeface="Syne" pitchFamily="34" charset="-122"/>
                 <a:cs typeface="Syne" pitchFamily="34" charset="-120"/>
               </a:rPr>
-              <a:t>Roadmap</a:t>
+              <a:t>Stronger models widen the smart-vs-blind gap</a:t>
             </a:r>
             <a:endParaRPr lang="en-US" sz="2500" dirty="0"/>
           </a:p>
@@ -9433,16 +9522,40 @@
           </a:p>
         </p:txBody>
       </p:sp>
-      <p:sp>
-        <p:nvSpPr>
-          <p:cNvPr id="7" name="Text 4"/>
-          <p:cNvSpPr/>
-          <p:nvPr/>
-        </p:nvSpPr>
-        <p:spPr>
-          <a:xfrm>
-            <a:off x="548640" y="1645920"/>
-            <a:ext cx="8046720" cy="2834640"/>
+      <p:pic>
+        <p:nvPicPr>
+          <p:cNvPr id="7" name="Image 1" descr="/Users/kanishk/Desktop/agent-harness/.claude/worktrees/sleepy-sinoussi-00c73b/presentation/figures/EXP-003c_modelaxis_v1.png">    </p:cNvPr>
+          <p:cNvPicPr>
+            <a:picLocks noChangeAspect="1"/>
+          </p:cNvPicPr>
+          <p:nvPr/>
+        </p:nvPicPr>
+        <p:blipFill>
+          <a:blip r:embed="rId2"/>
+          <a:stretch>
+            <a:fillRect/>
+          </a:stretch>
+        </p:blipFill>
+        <p:spPr>
+          <a:xfrm>
+            <a:off x="640080" y="1371600"/>
+            <a:ext cx="4846320" cy="3200400"/>
+          </a:xfrm>
+          <a:prstGeom prst="rect">
+            <a:avLst/>
+          </a:prstGeom>
+        </p:spPr>
+      </p:pic>
+      <p:sp>
+        <p:nvSpPr>
+          <p:cNvPr id="8" name="Text 4"/>
+          <p:cNvSpPr/>
+          <p:nvPr/>
+        </p:nvSpPr>
+        <p:spPr>
+          <a:xfrm>
+            <a:off x="5669280" y="1554480"/>
+            <a:ext cx="3017520" cy="2834640"/>
           </a:xfrm>
           <a:prstGeom prst="rect">
             <a:avLst/>
@@ -9462,7 +9575,7 @@
               <a:buChar char="•"/>
             </a:pPr>
             <a:r>
-              <a:rPr lang="en-US" sz="1350" dirty="0">
+              <a:rPr lang="en-US" sz="1200" dirty="0">
                 <a:solidFill>
                   <a:srgbClr val="2E2C32"/>
                 </a:solidFill>
@@ -9470,9 +9583,9 @@
                 <a:ea typeface="Manrope" pitchFamily="34" charset="-122"/>
                 <a:cs typeface="Manrope" pitchFamily="34" charset="-120"/>
               </a:rPr>
-              <a:t>EXP-003c: the 70b model and the reasoning model (the model-dependence map).</a:t>
-            </a:r>
-            <a:endParaRPr lang="en-US" sz="1350" dirty="0"/>
+              <a:t>5 arms across 3 agent models: 8B, 70B, and a reasoning model. Judge held at 70B.</a:t>
+            </a:r>
+            <a:endParaRPr lang="en-US" sz="1200" dirty="0"/>
           </a:p>
           <a:p>
             <a:pPr marL="203200" indent="-203200">
@@ -9483,7 +9596,7 @@
               <a:buChar char="•"/>
             </a:pPr>
             <a:r>
-              <a:rPr lang="en-US" sz="1350" dirty="0">
+              <a:rPr lang="en-US" sz="1200" dirty="0">
                 <a:solidFill>
                   <a:srgbClr val="2E2C32"/>
                 </a:solidFill>
@@ -9491,9 +9604,9 @@
                 <a:ea typeface="Manrope" pitchFamily="34" charset="-122"/>
                 <a:cs typeface="Manrope" pitchFamily="34" charset="-120"/>
               </a:rPr>
-              <a:t>EXP-004: LoCoMo conversational memory, the second domain.</a:t>
-            </a:r>
-            <a:endParaRPr lang="en-US" sz="1350" dirty="0"/>
+              <a:t>Blind truncation never improves: 0.37, 0.27, 0.40 — a better model can't recover dropped context.</a:t>
+            </a:r>
+            <a:endParaRPr lang="en-US" sz="1200" dirty="0"/>
           </a:p>
           <a:p>
             <a:pPr marL="203200" indent="-203200">
@@ -9504,7 +9617,7 @@
               <a:buChar char="•"/>
             </a:pPr>
             <a:r>
-              <a:rPr lang="en-US" sz="1350" dirty="0">
+              <a:rPr lang="en-US" sz="1200" dirty="0">
                 <a:solidFill>
                   <a:srgbClr val="2E2C32"/>
                 </a:solidFill>
@@ -9512,9 +9625,9 @@
                 <a:ea typeface="Manrope" pitchFamily="34" charset="-122"/>
                 <a:cs typeface="Manrope" pitchFamily="34" charset="-120"/>
               </a:rPr>
-              <a:t>Larger N and tighter error bars on the arms that separate.</a:t>
-            </a:r>
-            <a:endParaRPr lang="en-US" sz="1350" dirty="0"/>
+              <a:t>Every structure or retrieval arm climbs; the gap to truncation grows from ~0.2 to ~0.3.</a:t>
+            </a:r>
+            <a:endParaRPr lang="en-US" sz="1200" dirty="0"/>
           </a:p>
           <a:p>
             <a:pPr marL="203200" indent="-203200">
@@ -9525,17 +9638,17 @@
               <a:buChar char="•"/>
             </a:pPr>
             <a:r>
-              <a:rPr lang="en-US" sz="1350" dirty="0">
-                <a:solidFill>
-                  <a:srgbClr val="2E2C32"/>
-                </a:solidFill>
-                <a:latin typeface="Manrope" pitchFamily="34" charset="0"/>
-                <a:ea typeface="Manrope" pitchFamily="34" charset="-122"/>
-                <a:cs typeface="Manrope" pitchFamily="34" charset="-120"/>
-              </a:rPr>
-              <a:t>LangChain summary-memory as a baseline arm; then the paper.</a:t>
-            </a:r>
-            <a:endParaRPr lang="en-US" sz="1350" dirty="0"/>
+              <a:rPr lang="en-US" sz="1000" dirty="0">
+                <a:solidFill>
+                  <a:srgbClr val="655E74"/>
+                </a:solidFill>
+                <a:latin typeface="Manrope" pitchFamily="34" charset="0"/>
+                <a:ea typeface="Manrope" pitchFamily="34" charset="-122"/>
+                <a:cs typeface="Manrope" pitchFamily="34" charset="-120"/>
+              </a:rPr>
+              <a:t>On the reasoning model, importance and our reversible-hybrid lead at 0.70.</a:t>
+            </a:r>
+            <a:endParaRPr lang="en-US" sz="1200" dirty="0"/>
           </a:p>
         </p:txBody>
       </p:sp>
@@ -9604,7 +9717,7 @@
                 <a:ea typeface="Syne" pitchFamily="34" charset="-122"/>
                 <a:cs typeface="Syne" pitchFamily="34" charset="-120"/>
               </a:rPr>
-              <a:t>REFERENCES</a:t>
+              <a:t>WHERE THIS GOES</a:t>
             </a:r>
             <a:endParaRPr lang="en-US" sz="1100" dirty="0"/>
           </a:p>
@@ -9643,7 +9756,7 @@
                 <a:ea typeface="Syne" pitchFamily="34" charset="-122"/>
                 <a:cs typeface="Syne" pitchFamily="34" charset="-120"/>
               </a:rPr>
-              <a:t>The literature this stands on</a:t>
+              <a:t>Roadmap</a:t>
             </a:r>
             <a:endParaRPr lang="en-US" sz="2600" dirty="0"/>
           </a:p>
@@ -9794,17 +9907,17 @@
               <a:buChar char="•"/>
             </a:pPr>
             <a:r>
-              <a:rPr lang="en-US" sz="1300" dirty="0">
-                <a:solidFill>
-                  <a:srgbClr val="655E74"/>
-                </a:solidFill>
-                <a:latin typeface="Manrope" pitchFamily="34" charset="0"/>
-                <a:ea typeface="Manrope" pitchFamily="34" charset="-122"/>
-                <a:cs typeface="Manrope" pitchFamily="34" charset="-120"/>
-              </a:rPr>
-              <a:t>Lost in the Middle, Liu et al., arXiv:2307.03172.</a:t>
-            </a:r>
-            <a:endParaRPr lang="en-US" sz="1300" dirty="0"/>
+              <a:rPr lang="en-US" sz="1350" dirty="0">
+                <a:solidFill>
+                  <a:srgbClr val="2E2C32"/>
+                </a:solidFill>
+                <a:latin typeface="Manrope" pitchFamily="34" charset="0"/>
+                <a:ea typeface="Manrope" pitchFamily="34" charset="-122"/>
+                <a:cs typeface="Manrope" pitchFamily="34" charset="-120"/>
+              </a:rPr>
+              <a:t>EXP-003c done: the model axis shows the smart-vs-blind gap widens with capability.</a:t>
+            </a:r>
+            <a:endParaRPr lang="en-US" sz="1350" dirty="0"/>
           </a:p>
           <a:p>
             <a:pPr marL="203200" indent="-203200">
@@ -9815,17 +9928,17 @@
               <a:buChar char="•"/>
             </a:pPr>
             <a:r>
-              <a:rPr lang="en-US" sz="1300" dirty="0">
-                <a:solidFill>
-                  <a:srgbClr val="655E74"/>
-                </a:solidFill>
-                <a:latin typeface="Manrope" pitchFamily="34" charset="0"/>
-                <a:ea typeface="Manrope" pitchFamily="34" charset="-122"/>
-                <a:cs typeface="Manrope" pitchFamily="34" charset="-120"/>
-              </a:rPr>
-              <a:t>RULER 2404.06654 · HELMET 2410.02694 · NoLiMa 2502.05167.</a:t>
-            </a:r>
-            <a:endParaRPr lang="en-US" sz="1300" dirty="0"/>
+              <a:rPr lang="en-US" sz="1350" dirty="0">
+                <a:solidFill>
+                  <a:srgbClr val="2E2C32"/>
+                </a:solidFill>
+                <a:latin typeface="Manrope" pitchFamily="34" charset="0"/>
+                <a:ea typeface="Manrope" pitchFamily="34" charset="-122"/>
+                <a:cs typeface="Manrope" pitchFamily="34" charset="-120"/>
+              </a:rPr>
+              <a:t>EXP-004: LoCoMo conversational memory, the second domain.</a:t>
+            </a:r>
+            <a:endParaRPr lang="en-US" sz="1350" dirty="0"/>
           </a:p>
           <a:p>
             <a:pPr marL="203200" indent="-203200">
@@ -9836,17 +9949,17 @@
               <a:buChar char="•"/>
             </a:pPr>
             <a:r>
-              <a:rPr lang="en-US" sz="1300" dirty="0">
-                <a:solidFill>
-                  <a:srgbClr val="655E74"/>
-                </a:solidFill>
-                <a:latin typeface="Manrope" pitchFamily="34" charset="0"/>
-                <a:ea typeface="Manrope" pitchFamily="34" charset="-122"/>
-                <a:cs typeface="Manrope" pitchFamily="34" charset="-120"/>
-              </a:rPr>
-              <a:t>MemGPT 2310.08560 · Mem0 2504.19413 · ACON 2510.00615.</a:t>
-            </a:r>
-            <a:endParaRPr lang="en-US" sz="1300" dirty="0"/>
+              <a:rPr lang="en-US" sz="1350" dirty="0">
+                <a:solidFill>
+                  <a:srgbClr val="2E2C32"/>
+                </a:solidFill>
+                <a:latin typeface="Manrope" pitchFamily="34" charset="0"/>
+                <a:ea typeface="Manrope" pitchFamily="34" charset="-122"/>
+                <a:cs typeface="Manrope" pitchFamily="34" charset="-120"/>
+              </a:rPr>
+              <a:t>Hold the summarizer constant across tiers; larger N for tighter error bars.</a:t>
+            </a:r>
+            <a:endParaRPr lang="en-US" sz="1350" dirty="0"/>
           </a:p>
           <a:p>
             <a:pPr marL="203200" indent="-203200">
@@ -9857,38 +9970,17 @@
               <a:buChar char="•"/>
             </a:pPr>
             <a:r>
-              <a:rPr lang="en-US" sz="1300" dirty="0">
-                <a:solidFill>
-                  <a:srgbClr val="655E74"/>
-                </a:solidFill>
-                <a:latin typeface="Manrope" pitchFamily="34" charset="0"/>
-                <a:ea typeface="Manrope" pitchFamily="34" charset="-122"/>
-                <a:cs typeface="Manrope" pitchFamily="34" charset="-120"/>
-              </a:rPr>
-              <a:t>Judging LLM-as-a-Judge, Zheng et al., 2306.05685.</a:t>
-            </a:r>
-            <a:endParaRPr lang="en-US" sz="1300" dirty="0"/>
-          </a:p>
-          <a:p>
-            <a:pPr marL="203200" indent="-203200">
-              <a:spcAft>
-                <a:spcPts val="800"/>
-              </a:spcAft>
-              <a:buSzPct val="100000"/>
-              <a:buChar char="•"/>
-            </a:pPr>
-            <a:r>
-              <a:rPr lang="en-US" sz="1300" dirty="0">
-                <a:solidFill>
-                  <a:srgbClr val="655E74"/>
-                </a:solidFill>
-                <a:latin typeface="Manrope" pitchFamily="34" charset="0"/>
-                <a:ea typeface="Manrope" pitchFamily="34" charset="-122"/>
-                <a:cs typeface="Manrope" pitchFamily="34" charset="-120"/>
-              </a:rPr>
-              <a:t>FRAMES 2409.12941 · LoCoMo 2402.17753.</a:t>
-            </a:r>
-            <a:endParaRPr lang="en-US" sz="1300" dirty="0"/>
+              <a:rPr lang="en-US" sz="1350" dirty="0">
+                <a:solidFill>
+                  <a:srgbClr val="2E2C32"/>
+                </a:solidFill>
+                <a:latin typeface="Manrope" pitchFamily="34" charset="0"/>
+                <a:ea typeface="Manrope" pitchFamily="34" charset="-122"/>
+                <a:cs typeface="Manrope" pitchFamily="34" charset="-120"/>
+              </a:rPr>
+              <a:t>LangChain summary-memory as a baseline arm; then the paper.</a:t>
+            </a:r>
+            <a:endParaRPr lang="en-US" sz="1350" dirty="0"/>
           </a:p>
         </p:txBody>
       </p:sp>
@@ -9903,6 +9995,359 @@
 <file path=ppt/slides/slide27.xml><?xml version="1.0" encoding="utf-8"?>
 <p:sld xmlns:a="http://schemas.openxmlformats.org/drawingml/2006/main" xmlns:r="http://schemas.openxmlformats.org/officeDocument/2006/relationships" xmlns:p="http://schemas.openxmlformats.org/presentationml/2006/main">
   <p:cSld name="Slide 27">
+    <p:bg>
+      <p:bgPr>
+        <a:solidFill>
+          <a:srgbClr val="FAFAFE"/>
+        </a:solidFill>
+      </p:bgPr>
+    </p:bg>
+    <p:spTree>
+      <p:nvGrpSpPr>
+        <p:cNvPr id="1" name=""/>
+        <p:cNvGrpSpPr/>
+        <p:nvPr/>
+      </p:nvGrpSpPr>
+      <p:grpSpPr>
+        <a:xfrm>
+          <a:off x="0" y="0"/>
+          <a:ext cx="0" cy="0"/>
+          <a:chOff x="0" y="0"/>
+          <a:chExt cx="0" cy="0"/>
+        </a:xfrm>
+      </p:grpSpPr>
+      <p:sp>
+        <p:nvSpPr>
+          <p:cNvPr id="2" name="Text 0"/>
+          <p:cNvSpPr/>
+          <p:nvPr/>
+        </p:nvSpPr>
+        <p:spPr>
+          <a:xfrm>
+            <a:off x="548640" y="365760"/>
+            <a:ext cx="8046720" cy="274320"/>
+          </a:xfrm>
+          <a:prstGeom prst="rect">
+            <a:avLst/>
+          </a:prstGeom>
+          <a:noFill/>
+          <a:ln/>
+        </p:spPr>
+        <p:txBody>
+          <a:bodyPr wrap="square" lIns="0" tIns="0" rIns="0" bIns="0" rtlCol="0" anchor="ctr"/>
+          <a:lstStyle/>
+          <a:p>
+            <a:pPr indent="0" marL="0">
+              <a:buNone/>
+            </a:pPr>
+            <a:r>
+              <a:rPr lang="en-US" sz="1100" b="1" spc="300" kern="0" dirty="0">
+                <a:solidFill>
+                  <a:srgbClr val="9378FF"/>
+                </a:solidFill>
+                <a:latin typeface="Syne" pitchFamily="34" charset="0"/>
+                <a:ea typeface="Syne" pitchFamily="34" charset="-122"/>
+                <a:cs typeface="Syne" pitchFamily="34" charset="-120"/>
+              </a:rPr>
+              <a:t>REFERENCES</a:t>
+            </a:r>
+            <a:endParaRPr lang="en-US" sz="1100" dirty="0"/>
+          </a:p>
+        </p:txBody>
+      </p:sp>
+      <p:sp>
+        <p:nvSpPr>
+          <p:cNvPr id="3" name="Text 1"/>
+          <p:cNvSpPr/>
+          <p:nvPr/>
+        </p:nvSpPr>
+        <p:spPr>
+          <a:xfrm>
+            <a:off x="548640" y="640080"/>
+            <a:ext cx="8046720" cy="868680"/>
+          </a:xfrm>
+          <a:prstGeom prst="rect">
+            <a:avLst/>
+          </a:prstGeom>
+          <a:noFill/>
+          <a:ln/>
+        </p:spPr>
+        <p:txBody>
+          <a:bodyPr wrap="square" lIns="0" tIns="0" rIns="0" bIns="0" rtlCol="0" anchor="t"/>
+          <a:lstStyle/>
+          <a:p>
+            <a:pPr indent="0" marL="0">
+              <a:buNone/>
+            </a:pPr>
+            <a:r>
+              <a:rPr lang="en-US" sz="2700" b="1" dirty="0">
+                <a:solidFill>
+                  <a:srgbClr val="2E2C32"/>
+                </a:solidFill>
+                <a:latin typeface="Syne" pitchFamily="34" charset="0"/>
+                <a:ea typeface="Syne" pitchFamily="34" charset="-122"/>
+                <a:cs typeface="Syne" pitchFamily="34" charset="-120"/>
+              </a:rPr>
+              <a:t>The literature this stands on</a:t>
+            </a:r>
+            <a:endParaRPr lang="en-US" sz="2700" dirty="0"/>
+          </a:p>
+        </p:txBody>
+      </p:sp>
+      <p:pic>
+        <p:nvPicPr>
+          <p:cNvPr id="4" name="Image 0" descr="preencoded.png">    </p:cNvPr>
+          <p:cNvPicPr>
+            <a:picLocks noChangeAspect="1"/>
+          </p:cNvPicPr>
+          <p:nvPr/>
+        </p:nvPicPr>
+        <p:blipFill>
+          <a:blip r:embed="rId1"/>
+          <a:stretch>
+            <a:fillRect/>
+          </a:stretch>
+        </p:blipFill>
+        <p:spPr>
+          <a:xfrm>
+            <a:off x="548640" y="4736592"/>
+            <a:ext cx="219456" cy="165344"/>
+          </a:xfrm>
+          <a:prstGeom prst="rect">
+            <a:avLst/>
+          </a:prstGeom>
+        </p:spPr>
+      </p:pic>
+      <p:sp>
+        <p:nvSpPr>
+          <p:cNvPr id="5" name="Text 2"/>
+          <p:cNvSpPr/>
+          <p:nvPr/>
+        </p:nvSpPr>
+        <p:spPr>
+          <a:xfrm>
+            <a:off x="822960" y="4690872"/>
+            <a:ext cx="1280160" cy="292608"/>
+          </a:xfrm>
+          <a:prstGeom prst="rect">
+            <a:avLst/>
+          </a:prstGeom>
+          <a:noFill/>
+          <a:ln/>
+        </p:spPr>
+        <p:txBody>
+          <a:bodyPr wrap="square" lIns="0" tIns="0" rIns="0" bIns="0" rtlCol="0" anchor="ctr"/>
+          <a:lstStyle/>
+          <a:p>
+            <a:pPr indent="0" marL="0">
+              <a:buNone/>
+            </a:pPr>
+            <a:r>
+              <a:rPr lang="en-US" sz="1100" b="1" dirty="0">
+                <a:solidFill>
+                  <a:srgbClr val="2E2C32"/>
+                </a:solidFill>
+                <a:latin typeface="Syne" pitchFamily="34" charset="0"/>
+                <a:ea typeface="Syne" pitchFamily="34" charset="-122"/>
+                <a:cs typeface="Syne" pitchFamily="34" charset="-120"/>
+              </a:rPr>
+              <a:t>Founsi</a:t>
+            </a:r>
+            <a:pPr indent="0" marL="0">
+              <a:buNone/>
+            </a:pPr>
+            <a:r>
+              <a:rPr lang="en-US" sz="1100" b="1" dirty="0">
+                <a:solidFill>
+                  <a:srgbClr val="9378FF"/>
+                </a:solidFill>
+                <a:latin typeface="Syne" pitchFamily="34" charset="0"/>
+                <a:ea typeface="Syne" pitchFamily="34" charset="-122"/>
+                <a:cs typeface="Syne" pitchFamily="34" charset="-120"/>
+              </a:rPr>
+              <a:t>.</a:t>
+            </a:r>
+            <a:endParaRPr lang="en-US" sz="1100" dirty="0"/>
+          </a:p>
+        </p:txBody>
+      </p:sp>
+      <p:sp>
+        <p:nvSpPr>
+          <p:cNvPr id="6" name="Text 3"/>
+          <p:cNvSpPr/>
+          <p:nvPr/>
+        </p:nvSpPr>
+        <p:spPr>
+          <a:xfrm>
+            <a:off x="8229600" y="4690872"/>
+            <a:ext cx="365760" cy="292608"/>
+          </a:xfrm>
+          <a:prstGeom prst="rect">
+            <a:avLst/>
+          </a:prstGeom>
+          <a:noFill/>
+          <a:ln/>
+        </p:spPr>
+        <p:txBody>
+          <a:bodyPr wrap="square" lIns="0" tIns="0" rIns="0" bIns="0" rtlCol="0" anchor="ctr"/>
+          <a:lstStyle/>
+          <a:p>
+            <a:pPr algn="r" indent="0" marL="0">
+              <a:buNone/>
+            </a:pPr>
+            <a:r>
+              <a:rPr lang="en-US" sz="900" dirty="0">
+                <a:solidFill>
+                  <a:srgbClr val="7E7A8A"/>
+                </a:solidFill>
+                <a:latin typeface="Manrope" pitchFamily="34" charset="0"/>
+                <a:ea typeface="Manrope" pitchFamily="34" charset="-122"/>
+                <a:cs typeface="Manrope" pitchFamily="34" charset="-120"/>
+              </a:rPr>
+              <a:t>27</a:t>
+            </a:r>
+            <a:endParaRPr lang="en-US" sz="900" dirty="0"/>
+          </a:p>
+        </p:txBody>
+      </p:sp>
+      <p:sp>
+        <p:nvSpPr>
+          <p:cNvPr id="7" name="Text 4"/>
+          <p:cNvSpPr/>
+          <p:nvPr/>
+        </p:nvSpPr>
+        <p:spPr>
+          <a:xfrm>
+            <a:off x="548640" y="1645920"/>
+            <a:ext cx="8046720" cy="2834640"/>
+          </a:xfrm>
+          <a:prstGeom prst="rect">
+            <a:avLst/>
+          </a:prstGeom>
+          <a:noFill/>
+          <a:ln/>
+        </p:spPr>
+        <p:txBody>
+          <a:bodyPr wrap="square" rtlCol="0" anchor="ctr"/>
+          <a:lstStyle/>
+          <a:p>
+            <a:pPr marL="203200" indent="-203200">
+              <a:spcAft>
+                <a:spcPts val="800"/>
+              </a:spcAft>
+              <a:buSzPct val="100000"/>
+              <a:buChar char="•"/>
+            </a:pPr>
+            <a:r>
+              <a:rPr lang="en-US" sz="1300" dirty="0">
+                <a:solidFill>
+                  <a:srgbClr val="655E74"/>
+                </a:solidFill>
+                <a:latin typeface="Manrope" pitchFamily="34" charset="0"/>
+                <a:ea typeface="Manrope" pitchFamily="34" charset="-122"/>
+                <a:cs typeface="Manrope" pitchFamily="34" charset="-120"/>
+              </a:rPr>
+              <a:t>Lost in the Middle, Liu et al., arXiv:2307.03172.</a:t>
+            </a:r>
+            <a:endParaRPr lang="en-US" sz="1300" dirty="0"/>
+          </a:p>
+          <a:p>
+            <a:pPr marL="203200" indent="-203200">
+              <a:spcAft>
+                <a:spcPts val="800"/>
+              </a:spcAft>
+              <a:buSzPct val="100000"/>
+              <a:buChar char="•"/>
+            </a:pPr>
+            <a:r>
+              <a:rPr lang="en-US" sz="1300" dirty="0">
+                <a:solidFill>
+                  <a:srgbClr val="655E74"/>
+                </a:solidFill>
+                <a:latin typeface="Manrope" pitchFamily="34" charset="0"/>
+                <a:ea typeface="Manrope" pitchFamily="34" charset="-122"/>
+                <a:cs typeface="Manrope" pitchFamily="34" charset="-120"/>
+              </a:rPr>
+              <a:t>RULER 2404.06654 · HELMET 2410.02694 · NoLiMa 2502.05167.</a:t>
+            </a:r>
+            <a:endParaRPr lang="en-US" sz="1300" dirty="0"/>
+          </a:p>
+          <a:p>
+            <a:pPr marL="203200" indent="-203200">
+              <a:spcAft>
+                <a:spcPts val="800"/>
+              </a:spcAft>
+              <a:buSzPct val="100000"/>
+              <a:buChar char="•"/>
+            </a:pPr>
+            <a:r>
+              <a:rPr lang="en-US" sz="1300" dirty="0">
+                <a:solidFill>
+                  <a:srgbClr val="655E74"/>
+                </a:solidFill>
+                <a:latin typeface="Manrope" pitchFamily="34" charset="0"/>
+                <a:ea typeface="Manrope" pitchFamily="34" charset="-122"/>
+                <a:cs typeface="Manrope" pitchFamily="34" charset="-120"/>
+              </a:rPr>
+              <a:t>MemGPT 2310.08560 · Mem0 2504.19413 · ACON 2510.00615.</a:t>
+            </a:r>
+            <a:endParaRPr lang="en-US" sz="1300" dirty="0"/>
+          </a:p>
+          <a:p>
+            <a:pPr marL="203200" indent="-203200">
+              <a:spcAft>
+                <a:spcPts val="800"/>
+              </a:spcAft>
+              <a:buSzPct val="100000"/>
+              <a:buChar char="•"/>
+            </a:pPr>
+            <a:r>
+              <a:rPr lang="en-US" sz="1300" dirty="0">
+                <a:solidFill>
+                  <a:srgbClr val="655E74"/>
+                </a:solidFill>
+                <a:latin typeface="Manrope" pitchFamily="34" charset="0"/>
+                <a:ea typeface="Manrope" pitchFamily="34" charset="-122"/>
+                <a:cs typeface="Manrope" pitchFamily="34" charset="-120"/>
+              </a:rPr>
+              <a:t>Judging LLM-as-a-Judge, Zheng et al., 2306.05685.</a:t>
+            </a:r>
+            <a:endParaRPr lang="en-US" sz="1300" dirty="0"/>
+          </a:p>
+          <a:p>
+            <a:pPr marL="203200" indent="-203200">
+              <a:spcAft>
+                <a:spcPts val="800"/>
+              </a:spcAft>
+              <a:buSzPct val="100000"/>
+              <a:buChar char="•"/>
+            </a:pPr>
+            <a:r>
+              <a:rPr lang="en-US" sz="1300" dirty="0">
+                <a:solidFill>
+                  <a:srgbClr val="655E74"/>
+                </a:solidFill>
+                <a:latin typeface="Manrope" pitchFamily="34" charset="0"/>
+                <a:ea typeface="Manrope" pitchFamily="34" charset="-122"/>
+                <a:cs typeface="Manrope" pitchFamily="34" charset="-120"/>
+              </a:rPr>
+              <a:t>FRAMES 2409.12941 · LoCoMo 2402.17753.</a:t>
+            </a:r>
+            <a:endParaRPr lang="en-US" sz="1300" dirty="0"/>
+          </a:p>
+        </p:txBody>
+      </p:sp>
+    </p:spTree>
+  </p:cSld>
+  <p:clrMapOvr>
+    <a:masterClrMapping/>
+  </p:clrMapOvr>
+</p:sld>
+</file>
+
+<file path=ppt/slides/slide28.xml><?xml version="1.0" encoding="utf-8"?>
+<p:sld xmlns:a="http://schemas.openxmlformats.org/drawingml/2006/main" xmlns:r="http://schemas.openxmlformats.org/officeDocument/2006/relationships" xmlns:p="http://schemas.openxmlformats.org/presentationml/2006/main">
+  <p:cSld name="Slide 28">
     <p:bg>
       <p:bgPr>
         <a:solidFill>
@@ -10364,7 +10809,7 @@
                 <a:ea typeface="Manrope" pitchFamily="34" charset="-122"/>
                 <a:cs typeface="Manrope" pitchFamily="34" charset="-120"/>
               </a:rPr>
-              <a:t>27</a:t>
+              <a:t>28</a:t>
             </a:r>
             <a:endParaRPr lang="en-US" sz="900" dirty="0"/>
           </a:p>

--- a/presentation/founsi-context-engineering.pptx
+++ b/presentation/founsi-context-engineering.pptx
@@ -33,9 +33,10 @@
     <p:sldId id="281" r:id="rId27"/>
     <p:sldId id="282" r:id="rId28"/>
     <p:sldId id="283" r:id="rId29"/>
+    <p:sldId id="284" r:id="rId30"/>
   </p:sldIdLst>
   <p:notesMasterIdLst>
-    <p:notesMasterId r:id="rId30"/>
+    <p:notesMasterId r:id="rId31"/>
   </p:notesMasterIdLst>
   <p:sldSz cx="9144000" cy="5143500"/>
   <p:notesSz cx="5143500" cy="9144000"/>
@@ -2313,6 +2314,94 @@
             <a:fld id="{F7021451-1387-4CA6-816F-3879F97B5CBC}" type="slidenum">
               <a:rPr lang="en-US"/>
               <a:t>28</a:t>
+            </a:fld>
+            <a:endParaRPr lang="en-US"/>
+          </a:p>
+        </p:txBody>
+      </p:sp>
+    </p:spTree>
+    <p:extLst>
+      <p:ext uri="{BB962C8B-B14F-4D97-AF65-F5344CB8AC3E}">
+        <p14:creationId xmlns:p14="http://schemas.microsoft.com/office/powerpoint/2010/main" val="1024086991"/>
+      </p:ext>
+    </p:extLst>
+  </p:cSld>
+  <p:clrMapOvr>
+    <a:masterClrMapping/>
+  </p:clrMapOvr>
+</p:notes>
+</file>
+
+<file path=ppt/notesSlides/notesSlide29.xml><?xml version="1.0" encoding="utf-8"?>
+<p:notes xmlns:a="http://schemas.openxmlformats.org/drawingml/2006/main" xmlns:r="http://schemas.openxmlformats.org/officeDocument/2006/relationships" xmlns:p="http://schemas.openxmlformats.org/presentationml/2006/main">
+  <p:cSld>
+    <p:spTree>
+      <p:nvGrpSpPr>
+        <p:cNvPr id="1" name=""/>
+        <p:cNvGrpSpPr/>
+        <p:nvPr/>
+      </p:nvGrpSpPr>
+      <p:grpSpPr>
+        <a:xfrm>
+          <a:off x="0" y="0"/>
+          <a:ext cx="0" cy="0"/>
+          <a:chOff x="0" y="0"/>
+          <a:chExt cx="0" cy="0"/>
+        </a:xfrm>
+      </p:grpSpPr>
+      <p:sp>
+        <p:nvSpPr>
+          <p:cNvPr id="2" name="Slide Image Placeholder 1"/>
+          <p:cNvSpPr>
+            <a:spLocks noGrp="1" noRot="1" noChangeAspect="1"/>
+          </p:cNvSpPr>
+          <p:nvPr>
+            <p:ph type="sldImg"/>
+          </p:nvPr>
+        </p:nvSpPr>
+        <p:spPr/>
+      </p:sp>
+      <p:sp>
+        <p:nvSpPr>
+          <p:cNvPr id="3" name="Notes Placeholder 2"/>
+          <p:cNvSpPr>
+            <a:spLocks noGrp="1"/>
+          </p:cNvSpPr>
+          <p:nvPr>
+            <p:ph type="body" idx="1"/>
+          </p:nvPr>
+        </p:nvSpPr>
+        <p:spPr/>
+        <p:txBody>
+          <a:bodyPr/>
+          <a:lstStyle/>
+          <a:p>
+            <a:r>
+              <a:rPr lang="en-US" dirty="0"/>
+              <a:t/>
+            </a:r>
+            <a:endParaRPr lang="en-US" dirty="0"/>
+          </a:p>
+        </p:txBody>
+      </p:sp>
+      <p:sp>
+        <p:nvSpPr>
+          <p:cNvPr id="4" name="Slide Number Placeholder 3"/>
+          <p:cNvSpPr>
+            <a:spLocks noGrp="1"/>
+          </p:cNvSpPr>
+          <p:nvPr>
+            <p:ph type="sldNum" sz="quarter" idx="10"/>
+          </p:nvPr>
+        </p:nvSpPr>
+        <p:spPr/>
+        <p:txBody>
+          <a:bodyPr/>
+          <a:lstStyle/>
+          <a:p>
+            <a:fld id="{F7021451-1387-4CA6-816F-3879F97B5CBC}" type="slidenum">
+              <a:rPr lang="en-US"/>
+              <a:t>29</a:t>
             </a:fld>
             <a:endParaRPr lang="en-US"/>
           </a:p>
@@ -9717,7 +9806,7 @@
                 <a:ea typeface="Syne" pitchFamily="34" charset="-122"/>
                 <a:cs typeface="Syne" pitchFamily="34" charset="-120"/>
               </a:rPr>
-              <a:t>WHERE THIS GOES</a:t>
+              <a:t>EXP-004 · CROSS-DOMAIN TRANSFER</a:t>
             </a:r>
             <a:endParaRPr lang="en-US" sz="1100" dirty="0"/>
           </a:p>
@@ -9756,7 +9845,7 @@
                 <a:ea typeface="Syne" pitchFamily="34" charset="-122"/>
                 <a:cs typeface="Syne" pitchFamily="34" charset="-120"/>
               </a:rPr>
-              <a:t>Roadmap</a:t>
+              <a:t>The ranking inverts — but the hybrid wins both</a:t>
             </a:r>
             <a:endParaRPr lang="en-US" sz="2600" dirty="0"/>
           </a:p>
@@ -9878,16 +9967,40 @@
           </a:p>
         </p:txBody>
       </p:sp>
-      <p:sp>
-        <p:nvSpPr>
-          <p:cNvPr id="7" name="Text 4"/>
-          <p:cNvSpPr/>
-          <p:nvPr/>
-        </p:nvSpPr>
-        <p:spPr>
-          <a:xfrm>
-            <a:off x="548640" y="1645920"/>
-            <a:ext cx="8046720" cy="2834640"/>
+      <p:pic>
+        <p:nvPicPr>
+          <p:cNvPr id="7" name="Image 1" descr="/Users/kanishk/Desktop/agent-harness/.claude/worktrees/sleepy-sinoussi-00c73b/presentation/figures/EXP-004_transfer_v1.png">    </p:cNvPr>
+          <p:cNvPicPr>
+            <a:picLocks noChangeAspect="1"/>
+          </p:cNvPicPr>
+          <p:nvPr/>
+        </p:nvPicPr>
+        <p:blipFill>
+          <a:blip r:embed="rId2"/>
+          <a:stretch>
+            <a:fillRect/>
+          </a:stretch>
+        </p:blipFill>
+        <p:spPr>
+          <a:xfrm>
+            <a:off x="640080" y="1371600"/>
+            <a:ext cx="4846320" cy="3291840"/>
+          </a:xfrm>
+          <a:prstGeom prst="rect">
+            <a:avLst/>
+          </a:prstGeom>
+        </p:spPr>
+      </p:pic>
+      <p:sp>
+        <p:nvSpPr>
+          <p:cNvPr id="8" name="Text 4"/>
+          <p:cNvSpPr/>
+          <p:nvPr/>
+        </p:nvSpPr>
+        <p:spPr>
+          <a:xfrm>
+            <a:off x="5669280" y="1554480"/>
+            <a:ext cx="3017520" cy="2834640"/>
           </a:xfrm>
           <a:prstGeom prst="rect">
             <a:avLst/>
@@ -9907,7 +10020,7 @@
               <a:buChar char="•"/>
             </a:pPr>
             <a:r>
-              <a:rPr lang="en-US" sz="1350" dirty="0">
+              <a:rPr lang="en-US" sz="1200" dirty="0">
                 <a:solidFill>
                   <a:srgbClr val="2E2C32"/>
                 </a:solidFill>
@@ -9915,9 +10028,9 @@
                 <a:ea typeface="Manrope" pitchFamily="34" charset="-122"/>
                 <a:cs typeface="Manrope" pitchFamily="34" charset="-120"/>
               </a:rPr>
-              <a:t>EXP-003c done: the model axis shows the smart-vs-blind gap widens with capability.</a:t>
-            </a:r>
-            <a:endParaRPr lang="en-US" sz="1350" dirty="0"/>
+              <a:t>Same 5 arms on LoCoMo (conversational memory) vs FRAMES (multi-hop factual).</a:t>
+            </a:r>
+            <a:endParaRPr lang="en-US" sz="1200" dirty="0"/>
           </a:p>
           <a:p>
             <a:pPr marL="203200" indent="-203200">
@@ -9928,7 +10041,7 @@
               <a:buChar char="•"/>
             </a:pPr>
             <a:r>
-              <a:rPr lang="en-US" sz="1350" dirty="0">
+              <a:rPr lang="en-US" sz="1200" dirty="0">
                 <a:solidFill>
                   <a:srgbClr val="2E2C32"/>
                 </a:solidFill>
@@ -9936,9 +10049,9 @@
                 <a:ea typeface="Manrope" pitchFamily="34" charset="-122"/>
                 <a:cs typeface="Manrope" pitchFamily="34" charset="-120"/>
               </a:rPr>
-              <a:t>EXP-004: LoCoMo conversational memory, the second domain.</a:t>
-            </a:r>
-            <a:endParaRPr lang="en-US" sz="1350" dirty="0"/>
+              <a:t>Ranking inverts: on LoCoMo retrieval wins (externalize 0.55), pure summary loses (semantic 0.27).</a:t>
+            </a:r>
+            <a:endParaRPr lang="en-US" sz="1200" dirty="0"/>
           </a:p>
           <a:p>
             <a:pPr marL="203200" indent="-203200">
@@ -9949,7 +10062,7 @@
               <a:buChar char="•"/>
             </a:pPr>
             <a:r>
-              <a:rPr lang="en-US" sz="1350" dirty="0">
+              <a:rPr lang="en-US" sz="1200" dirty="0">
                 <a:solidFill>
                   <a:srgbClr val="2E2C32"/>
                 </a:solidFill>
@@ -9957,9 +10070,9 @@
                 <a:ea typeface="Manrope" pitchFamily="34" charset="-122"/>
                 <a:cs typeface="Manrope" pitchFamily="34" charset="-120"/>
               </a:rPr>
-              <a:t>Hold the summarizer constant across tiers; larger N for tighter error bars.</a:t>
-            </a:r>
-            <a:endParaRPr lang="en-US" sz="1350" dirty="0"/>
+              <a:t>Specific scattered facts survive a retrievable copy; they get smoothed away in a summary.</a:t>
+            </a:r>
+            <a:endParaRPr lang="en-US" sz="1200" dirty="0"/>
           </a:p>
           <a:p>
             <a:pPr marL="203200" indent="-203200">
@@ -9970,17 +10083,17 @@
               <a:buChar char="•"/>
             </a:pPr>
             <a:r>
-              <a:rPr lang="en-US" sz="1350" dirty="0">
-                <a:solidFill>
-                  <a:srgbClr val="2E2C32"/>
-                </a:solidFill>
-                <a:latin typeface="Manrope" pitchFamily="34" charset="0"/>
-                <a:ea typeface="Manrope" pitchFamily="34" charset="-122"/>
-                <a:cs typeface="Manrope" pitchFamily="34" charset="-120"/>
-              </a:rPr>
-              <a:t>LangChain summary-memory as a baseline arm; then the paper.</a:t>
-            </a:r>
-            <a:endParaRPr lang="en-US" sz="1350" dirty="0"/>
+              <a:rPr lang="en-US" sz="1000" dirty="0">
+                <a:solidFill>
+                  <a:srgbClr val="655E74"/>
+                </a:solidFill>
+                <a:latin typeface="Manrope" pitchFamily="34" charset="0"/>
+                <a:ea typeface="Manrope" pitchFamily="34" charset="-122"/>
+                <a:cs typeface="Manrope" pitchFamily="34" charset="-120"/>
+              </a:rPr>
+              <a:t>reversible-hybrid is top group in BOTH domains (0.47 / 0.54) — it keeps both.</a:t>
+            </a:r>
+            <a:endParaRPr lang="en-US" sz="1200" dirty="0"/>
           </a:p>
         </p:txBody>
       </p:sp>
@@ -10049,7 +10162,7 @@
                 <a:ea typeface="Syne" pitchFamily="34" charset="-122"/>
                 <a:cs typeface="Syne" pitchFamily="34" charset="-120"/>
               </a:rPr>
-              <a:t>REFERENCES</a:t>
+              <a:t>WHERE THIS GOES</a:t>
             </a:r>
             <a:endParaRPr lang="en-US" sz="1100" dirty="0"/>
           </a:p>
@@ -10088,7 +10201,7 @@
                 <a:ea typeface="Syne" pitchFamily="34" charset="-122"/>
                 <a:cs typeface="Syne" pitchFamily="34" charset="-120"/>
               </a:rPr>
-              <a:t>The literature this stands on</a:t>
+              <a:t>Roadmap</a:t>
             </a:r>
             <a:endParaRPr lang="en-US" sz="2700" dirty="0"/>
           </a:p>
@@ -10239,17 +10352,17 @@
               <a:buChar char="•"/>
             </a:pPr>
             <a:r>
-              <a:rPr lang="en-US" sz="1300" dirty="0">
-                <a:solidFill>
-                  <a:srgbClr val="655E74"/>
-                </a:solidFill>
-                <a:latin typeface="Manrope" pitchFamily="34" charset="0"/>
-                <a:ea typeface="Manrope" pitchFamily="34" charset="-122"/>
-                <a:cs typeface="Manrope" pitchFamily="34" charset="-120"/>
-              </a:rPr>
-              <a:t>Lost in the Middle, Liu et al., arXiv:2307.03172.</a:t>
-            </a:r>
-            <a:endParaRPr lang="en-US" sz="1300" dirty="0"/>
+              <a:rPr lang="en-US" sz="1350" dirty="0">
+                <a:solidFill>
+                  <a:srgbClr val="2E2C32"/>
+                </a:solidFill>
+                <a:latin typeface="Manrope" pitchFamily="34" charset="0"/>
+                <a:ea typeface="Manrope" pitchFamily="34" charset="-122"/>
+                <a:cs typeface="Manrope" pitchFamily="34" charset="-120"/>
+              </a:rPr>
+              <a:t>EXP-003c + 004 done: the gap widens with capability, and the hybrid transfers across domains.</a:t>
+            </a:r>
+            <a:endParaRPr lang="en-US" sz="1350" dirty="0"/>
           </a:p>
           <a:p>
             <a:pPr marL="203200" indent="-203200">
@@ -10260,17 +10373,17 @@
               <a:buChar char="•"/>
             </a:pPr>
             <a:r>
-              <a:rPr lang="en-US" sz="1300" dirty="0">
-                <a:solidFill>
-                  <a:srgbClr val="655E74"/>
-                </a:solidFill>
-                <a:latin typeface="Manrope" pitchFamily="34" charset="0"/>
-                <a:ea typeface="Manrope" pitchFamily="34" charset="-122"/>
-                <a:cs typeface="Manrope" pitchFamily="34" charset="-120"/>
-              </a:rPr>
-              <a:t>RULER 2404.06654 · HELMET 2410.02694 · NoLiMa 2502.05167.</a:t>
-            </a:r>
-            <a:endParaRPr lang="en-US" sz="1300" dirty="0"/>
+              <a:rPr lang="en-US" sz="1350" dirty="0">
+                <a:solidFill>
+                  <a:srgbClr val="2E2C32"/>
+                </a:solidFill>
+                <a:latin typeface="Manrope" pitchFamily="34" charset="0"/>
+                <a:ea typeface="Manrope" pitchFamily="34" charset="-122"/>
+                <a:cs typeface="Manrope" pitchFamily="34" charset="-120"/>
+              </a:rPr>
+              <a:t>70b and reasoning tiers on LoCoMo; summarizer held constant across tiers.</a:t>
+            </a:r>
+            <a:endParaRPr lang="en-US" sz="1350" dirty="0"/>
           </a:p>
           <a:p>
             <a:pPr marL="203200" indent="-203200">
@@ -10281,17 +10394,17 @@
               <a:buChar char="•"/>
             </a:pPr>
             <a:r>
-              <a:rPr lang="en-US" sz="1300" dirty="0">
-                <a:solidFill>
-                  <a:srgbClr val="655E74"/>
-                </a:solidFill>
-                <a:latin typeface="Manrope" pitchFamily="34" charset="0"/>
-                <a:ea typeface="Manrope" pitchFamily="34" charset="-122"/>
-                <a:cs typeface="Manrope" pitchFamily="34" charset="-120"/>
-              </a:rPr>
-              <a:t>MemGPT 2310.08560 · Mem0 2504.19413 · ACON 2510.00615.</a:t>
-            </a:r>
-            <a:endParaRPr lang="en-US" sz="1300" dirty="0"/>
+              <a:rPr lang="en-US" sz="1350" dirty="0">
+                <a:solidFill>
+                  <a:srgbClr val="2E2C32"/>
+                </a:solidFill>
+                <a:latin typeface="Manrope" pitchFamily="34" charset="0"/>
+                <a:ea typeface="Manrope" pitchFamily="34" charset="-122"/>
+                <a:cs typeface="Manrope" pitchFamily="34" charset="-120"/>
+              </a:rPr>
+              <a:t>Larger N for tighter error bars; LangChain summary-memory as a baseline arm.</a:t>
+            </a:r>
+            <a:endParaRPr lang="en-US" sz="1350" dirty="0"/>
           </a:p>
           <a:p>
             <a:pPr marL="203200" indent="-203200">
@@ -10302,38 +10415,17 @@
               <a:buChar char="•"/>
             </a:pPr>
             <a:r>
-              <a:rPr lang="en-US" sz="1300" dirty="0">
-                <a:solidFill>
-                  <a:srgbClr val="655E74"/>
-                </a:solidFill>
-                <a:latin typeface="Manrope" pitchFamily="34" charset="0"/>
-                <a:ea typeface="Manrope" pitchFamily="34" charset="-122"/>
-                <a:cs typeface="Manrope" pitchFamily="34" charset="-120"/>
-              </a:rPr>
-              <a:t>Judging LLM-as-a-Judge, Zheng et al., 2306.05685.</a:t>
-            </a:r>
-            <a:endParaRPr lang="en-US" sz="1300" dirty="0"/>
-          </a:p>
-          <a:p>
-            <a:pPr marL="203200" indent="-203200">
-              <a:spcAft>
-                <a:spcPts val="800"/>
-              </a:spcAft>
-              <a:buSzPct val="100000"/>
-              <a:buChar char="•"/>
-            </a:pPr>
-            <a:r>
-              <a:rPr lang="en-US" sz="1300" dirty="0">
-                <a:solidFill>
-                  <a:srgbClr val="655E74"/>
-                </a:solidFill>
-                <a:latin typeface="Manrope" pitchFamily="34" charset="0"/>
-                <a:ea typeface="Manrope" pitchFamily="34" charset="-122"/>
-                <a:cs typeface="Manrope" pitchFamily="34" charset="-120"/>
-              </a:rPr>
-              <a:t>FRAMES 2409.12941 · LoCoMo 2402.17753.</a:t>
-            </a:r>
-            <a:endParaRPr lang="en-US" sz="1300" dirty="0"/>
+              <a:rPr lang="en-US" sz="1350" dirty="0">
+                <a:solidFill>
+                  <a:srgbClr val="2E2C32"/>
+                </a:solidFill>
+                <a:latin typeface="Manrope" pitchFamily="34" charset="0"/>
+                <a:ea typeface="Manrope" pitchFamily="34" charset="-122"/>
+                <a:cs typeface="Manrope" pitchFamily="34" charset="-120"/>
+              </a:rPr>
+              <a:t>Then the paper.</a:t>
+            </a:r>
+            <a:endParaRPr lang="en-US" sz="1350" dirty="0"/>
           </a:p>
         </p:txBody>
       </p:sp>
@@ -10348,6 +10440,359 @@
 <file path=ppt/slides/slide28.xml><?xml version="1.0" encoding="utf-8"?>
 <p:sld xmlns:a="http://schemas.openxmlformats.org/drawingml/2006/main" xmlns:r="http://schemas.openxmlformats.org/officeDocument/2006/relationships" xmlns:p="http://schemas.openxmlformats.org/presentationml/2006/main">
   <p:cSld name="Slide 28">
+    <p:bg>
+      <p:bgPr>
+        <a:solidFill>
+          <a:srgbClr val="FAFAFE"/>
+        </a:solidFill>
+      </p:bgPr>
+    </p:bg>
+    <p:spTree>
+      <p:nvGrpSpPr>
+        <p:cNvPr id="1" name=""/>
+        <p:cNvGrpSpPr/>
+        <p:nvPr/>
+      </p:nvGrpSpPr>
+      <p:grpSpPr>
+        <a:xfrm>
+          <a:off x="0" y="0"/>
+          <a:ext cx="0" cy="0"/>
+          <a:chOff x="0" y="0"/>
+          <a:chExt cx="0" cy="0"/>
+        </a:xfrm>
+      </p:grpSpPr>
+      <p:sp>
+        <p:nvSpPr>
+          <p:cNvPr id="2" name="Text 0"/>
+          <p:cNvSpPr/>
+          <p:nvPr/>
+        </p:nvSpPr>
+        <p:spPr>
+          <a:xfrm>
+            <a:off x="548640" y="365760"/>
+            <a:ext cx="8046720" cy="274320"/>
+          </a:xfrm>
+          <a:prstGeom prst="rect">
+            <a:avLst/>
+          </a:prstGeom>
+          <a:noFill/>
+          <a:ln/>
+        </p:spPr>
+        <p:txBody>
+          <a:bodyPr wrap="square" lIns="0" tIns="0" rIns="0" bIns="0" rtlCol="0" anchor="ctr"/>
+          <a:lstStyle/>
+          <a:p>
+            <a:pPr indent="0" marL="0">
+              <a:buNone/>
+            </a:pPr>
+            <a:r>
+              <a:rPr lang="en-US" sz="1100" b="1" spc="300" kern="0" dirty="0">
+                <a:solidFill>
+                  <a:srgbClr val="9378FF"/>
+                </a:solidFill>
+                <a:latin typeface="Syne" pitchFamily="34" charset="0"/>
+                <a:ea typeface="Syne" pitchFamily="34" charset="-122"/>
+                <a:cs typeface="Syne" pitchFamily="34" charset="-120"/>
+              </a:rPr>
+              <a:t>REFERENCES</a:t>
+            </a:r>
+            <a:endParaRPr lang="en-US" sz="1100" dirty="0"/>
+          </a:p>
+        </p:txBody>
+      </p:sp>
+      <p:sp>
+        <p:nvSpPr>
+          <p:cNvPr id="3" name="Text 1"/>
+          <p:cNvSpPr/>
+          <p:nvPr/>
+        </p:nvSpPr>
+        <p:spPr>
+          <a:xfrm>
+            <a:off x="548640" y="640080"/>
+            <a:ext cx="8046720" cy="868680"/>
+          </a:xfrm>
+          <a:prstGeom prst="rect">
+            <a:avLst/>
+          </a:prstGeom>
+          <a:noFill/>
+          <a:ln/>
+        </p:spPr>
+        <p:txBody>
+          <a:bodyPr wrap="square" lIns="0" tIns="0" rIns="0" bIns="0" rtlCol="0" anchor="t"/>
+          <a:lstStyle/>
+          <a:p>
+            <a:pPr indent="0" marL="0">
+              <a:buNone/>
+            </a:pPr>
+            <a:r>
+              <a:rPr lang="en-US" sz="2800" b="1" dirty="0">
+                <a:solidFill>
+                  <a:srgbClr val="2E2C32"/>
+                </a:solidFill>
+                <a:latin typeface="Syne" pitchFamily="34" charset="0"/>
+                <a:ea typeface="Syne" pitchFamily="34" charset="-122"/>
+                <a:cs typeface="Syne" pitchFamily="34" charset="-120"/>
+              </a:rPr>
+              <a:t>The literature this stands on</a:t>
+            </a:r>
+            <a:endParaRPr lang="en-US" sz="2800" dirty="0"/>
+          </a:p>
+        </p:txBody>
+      </p:sp>
+      <p:pic>
+        <p:nvPicPr>
+          <p:cNvPr id="4" name="Image 0" descr="preencoded.png">    </p:cNvPr>
+          <p:cNvPicPr>
+            <a:picLocks noChangeAspect="1"/>
+          </p:cNvPicPr>
+          <p:nvPr/>
+        </p:nvPicPr>
+        <p:blipFill>
+          <a:blip r:embed="rId1"/>
+          <a:stretch>
+            <a:fillRect/>
+          </a:stretch>
+        </p:blipFill>
+        <p:spPr>
+          <a:xfrm>
+            <a:off x="548640" y="4736592"/>
+            <a:ext cx="219456" cy="165344"/>
+          </a:xfrm>
+          <a:prstGeom prst="rect">
+            <a:avLst/>
+          </a:prstGeom>
+        </p:spPr>
+      </p:pic>
+      <p:sp>
+        <p:nvSpPr>
+          <p:cNvPr id="5" name="Text 2"/>
+          <p:cNvSpPr/>
+          <p:nvPr/>
+        </p:nvSpPr>
+        <p:spPr>
+          <a:xfrm>
+            <a:off x="822960" y="4690872"/>
+            <a:ext cx="1280160" cy="292608"/>
+          </a:xfrm>
+          <a:prstGeom prst="rect">
+            <a:avLst/>
+          </a:prstGeom>
+          <a:noFill/>
+          <a:ln/>
+        </p:spPr>
+        <p:txBody>
+          <a:bodyPr wrap="square" lIns="0" tIns="0" rIns="0" bIns="0" rtlCol="0" anchor="ctr"/>
+          <a:lstStyle/>
+          <a:p>
+            <a:pPr indent="0" marL="0">
+              <a:buNone/>
+            </a:pPr>
+            <a:r>
+              <a:rPr lang="en-US" sz="1100" b="1" dirty="0">
+                <a:solidFill>
+                  <a:srgbClr val="2E2C32"/>
+                </a:solidFill>
+                <a:latin typeface="Syne" pitchFamily="34" charset="0"/>
+                <a:ea typeface="Syne" pitchFamily="34" charset="-122"/>
+                <a:cs typeface="Syne" pitchFamily="34" charset="-120"/>
+              </a:rPr>
+              <a:t>Founsi</a:t>
+            </a:r>
+            <a:pPr indent="0" marL="0">
+              <a:buNone/>
+            </a:pPr>
+            <a:r>
+              <a:rPr lang="en-US" sz="1100" b="1" dirty="0">
+                <a:solidFill>
+                  <a:srgbClr val="9378FF"/>
+                </a:solidFill>
+                <a:latin typeface="Syne" pitchFamily="34" charset="0"/>
+                <a:ea typeface="Syne" pitchFamily="34" charset="-122"/>
+                <a:cs typeface="Syne" pitchFamily="34" charset="-120"/>
+              </a:rPr>
+              <a:t>.</a:t>
+            </a:r>
+            <a:endParaRPr lang="en-US" sz="1100" dirty="0"/>
+          </a:p>
+        </p:txBody>
+      </p:sp>
+      <p:sp>
+        <p:nvSpPr>
+          <p:cNvPr id="6" name="Text 3"/>
+          <p:cNvSpPr/>
+          <p:nvPr/>
+        </p:nvSpPr>
+        <p:spPr>
+          <a:xfrm>
+            <a:off x="8229600" y="4690872"/>
+            <a:ext cx="365760" cy="292608"/>
+          </a:xfrm>
+          <a:prstGeom prst="rect">
+            <a:avLst/>
+          </a:prstGeom>
+          <a:noFill/>
+          <a:ln/>
+        </p:spPr>
+        <p:txBody>
+          <a:bodyPr wrap="square" lIns="0" tIns="0" rIns="0" bIns="0" rtlCol="0" anchor="ctr"/>
+          <a:lstStyle/>
+          <a:p>
+            <a:pPr algn="r" indent="0" marL="0">
+              <a:buNone/>
+            </a:pPr>
+            <a:r>
+              <a:rPr lang="en-US" sz="900" dirty="0">
+                <a:solidFill>
+                  <a:srgbClr val="7E7A8A"/>
+                </a:solidFill>
+                <a:latin typeface="Manrope" pitchFamily="34" charset="0"/>
+                <a:ea typeface="Manrope" pitchFamily="34" charset="-122"/>
+                <a:cs typeface="Manrope" pitchFamily="34" charset="-120"/>
+              </a:rPr>
+              <a:t>28</a:t>
+            </a:r>
+            <a:endParaRPr lang="en-US" sz="900" dirty="0"/>
+          </a:p>
+        </p:txBody>
+      </p:sp>
+      <p:sp>
+        <p:nvSpPr>
+          <p:cNvPr id="7" name="Text 4"/>
+          <p:cNvSpPr/>
+          <p:nvPr/>
+        </p:nvSpPr>
+        <p:spPr>
+          <a:xfrm>
+            <a:off x="548640" y="1645920"/>
+            <a:ext cx="8046720" cy="2834640"/>
+          </a:xfrm>
+          <a:prstGeom prst="rect">
+            <a:avLst/>
+          </a:prstGeom>
+          <a:noFill/>
+          <a:ln/>
+        </p:spPr>
+        <p:txBody>
+          <a:bodyPr wrap="square" rtlCol="0" anchor="ctr"/>
+          <a:lstStyle/>
+          <a:p>
+            <a:pPr marL="203200" indent="-203200">
+              <a:spcAft>
+                <a:spcPts val="800"/>
+              </a:spcAft>
+              <a:buSzPct val="100000"/>
+              <a:buChar char="•"/>
+            </a:pPr>
+            <a:r>
+              <a:rPr lang="en-US" sz="1300" dirty="0">
+                <a:solidFill>
+                  <a:srgbClr val="655E74"/>
+                </a:solidFill>
+                <a:latin typeface="Manrope" pitchFamily="34" charset="0"/>
+                <a:ea typeface="Manrope" pitchFamily="34" charset="-122"/>
+                <a:cs typeface="Manrope" pitchFamily="34" charset="-120"/>
+              </a:rPr>
+              <a:t>Lost in the Middle, Liu et al., arXiv:2307.03172.</a:t>
+            </a:r>
+            <a:endParaRPr lang="en-US" sz="1300" dirty="0"/>
+          </a:p>
+          <a:p>
+            <a:pPr marL="203200" indent="-203200">
+              <a:spcAft>
+                <a:spcPts val="800"/>
+              </a:spcAft>
+              <a:buSzPct val="100000"/>
+              <a:buChar char="•"/>
+            </a:pPr>
+            <a:r>
+              <a:rPr lang="en-US" sz="1300" dirty="0">
+                <a:solidFill>
+                  <a:srgbClr val="655E74"/>
+                </a:solidFill>
+                <a:latin typeface="Manrope" pitchFamily="34" charset="0"/>
+                <a:ea typeface="Manrope" pitchFamily="34" charset="-122"/>
+                <a:cs typeface="Manrope" pitchFamily="34" charset="-120"/>
+              </a:rPr>
+              <a:t>RULER 2404.06654 · HELMET 2410.02694 · NoLiMa 2502.05167.</a:t>
+            </a:r>
+            <a:endParaRPr lang="en-US" sz="1300" dirty="0"/>
+          </a:p>
+          <a:p>
+            <a:pPr marL="203200" indent="-203200">
+              <a:spcAft>
+                <a:spcPts val="800"/>
+              </a:spcAft>
+              <a:buSzPct val="100000"/>
+              <a:buChar char="•"/>
+            </a:pPr>
+            <a:r>
+              <a:rPr lang="en-US" sz="1300" dirty="0">
+                <a:solidFill>
+                  <a:srgbClr val="655E74"/>
+                </a:solidFill>
+                <a:latin typeface="Manrope" pitchFamily="34" charset="0"/>
+                <a:ea typeface="Manrope" pitchFamily="34" charset="-122"/>
+                <a:cs typeface="Manrope" pitchFamily="34" charset="-120"/>
+              </a:rPr>
+              <a:t>MemGPT 2310.08560 · Mem0 2504.19413 · ACON 2510.00615.</a:t>
+            </a:r>
+            <a:endParaRPr lang="en-US" sz="1300" dirty="0"/>
+          </a:p>
+          <a:p>
+            <a:pPr marL="203200" indent="-203200">
+              <a:spcAft>
+                <a:spcPts val="800"/>
+              </a:spcAft>
+              <a:buSzPct val="100000"/>
+              <a:buChar char="•"/>
+            </a:pPr>
+            <a:r>
+              <a:rPr lang="en-US" sz="1300" dirty="0">
+                <a:solidFill>
+                  <a:srgbClr val="655E74"/>
+                </a:solidFill>
+                <a:latin typeface="Manrope" pitchFamily="34" charset="0"/>
+                <a:ea typeface="Manrope" pitchFamily="34" charset="-122"/>
+                <a:cs typeface="Manrope" pitchFamily="34" charset="-120"/>
+              </a:rPr>
+              <a:t>Judging LLM-as-a-Judge, Zheng et al., 2306.05685.</a:t>
+            </a:r>
+            <a:endParaRPr lang="en-US" sz="1300" dirty="0"/>
+          </a:p>
+          <a:p>
+            <a:pPr marL="203200" indent="-203200">
+              <a:spcAft>
+                <a:spcPts val="800"/>
+              </a:spcAft>
+              <a:buSzPct val="100000"/>
+              <a:buChar char="•"/>
+            </a:pPr>
+            <a:r>
+              <a:rPr lang="en-US" sz="1300" dirty="0">
+                <a:solidFill>
+                  <a:srgbClr val="655E74"/>
+                </a:solidFill>
+                <a:latin typeface="Manrope" pitchFamily="34" charset="0"/>
+                <a:ea typeface="Manrope" pitchFamily="34" charset="-122"/>
+                <a:cs typeface="Manrope" pitchFamily="34" charset="-120"/>
+              </a:rPr>
+              <a:t>FRAMES 2409.12941 · LoCoMo 2402.17753.</a:t>
+            </a:r>
+            <a:endParaRPr lang="en-US" sz="1300" dirty="0"/>
+          </a:p>
+        </p:txBody>
+      </p:sp>
+    </p:spTree>
+  </p:cSld>
+  <p:clrMapOvr>
+    <a:masterClrMapping/>
+  </p:clrMapOvr>
+</p:sld>
+</file>
+
+<file path=ppt/slides/slide29.xml><?xml version="1.0" encoding="utf-8"?>
+<p:sld xmlns:a="http://schemas.openxmlformats.org/drawingml/2006/main" xmlns:r="http://schemas.openxmlformats.org/officeDocument/2006/relationships" xmlns:p="http://schemas.openxmlformats.org/presentationml/2006/main">
+  <p:cSld name="Slide 29">
     <p:bg>
       <p:bgPr>
         <a:solidFill>
@@ -10809,7 +11254,7 @@
                 <a:ea typeface="Manrope" pitchFamily="34" charset="-122"/>
                 <a:cs typeface="Manrope" pitchFamily="34" charset="-120"/>
               </a:rPr>
-              <a:t>28</a:t>
+              <a:t>29</a:t>
             </a:r>
             <a:endParaRPr lang="en-US" sz="900" dirty="0"/>
           </a:p>

--- a/presentation/founsi-context-engineering.pptx
+++ b/presentation/founsi-context-engineering.pptx
@@ -8467,7 +8467,7 @@
                 <a:ea typeface="Courier New" pitchFamily="34" charset="-122"/>
                 <a:cs typeface="Courier New" pitchFamily="34" charset="-120"/>
               </a:rPr>
-              <a:t>git clone github.com/patelkanishk1995/agent-harness &amp;&amp; python run.py</a:t>
+              <a:t>git clone github.com/kanishkpatel1995/agent-harness &amp;&amp; python run.py</a:t>
             </a:r>
             <a:pPr indent="0" marL="0">
               <a:buNone/>
